--- a/figures/Figure4_case3.pptx
+++ b/figures/Figure4_case3.pptx
@@ -1,26 +1,26 @@
 
 <file path=ppt/presentation.xml><?xml version="1.0" encoding="utf-8"?>
-<p:presentation xmlns:a="http://schemas.openxmlformats.org/drawingml/2006/main" xmlns:r="http://schemas.openxmlformats.org/officeDocument/2006/relationships" xmlns:mc="http://schemas.openxmlformats.org/markup-compatibility/2006" xmlns:mv="urn:schemas-microsoft-com:mac:vml" xmlns:p="http://schemas.openxmlformats.org/presentationml/2006/main" xmlns:c="http://schemas.openxmlformats.org/drawingml/2006/chart" xmlns:dgm="http://schemas.openxmlformats.org/drawingml/2006/diagram" xmlns:o="urn:schemas-microsoft-com:office:office" xmlns:v="urn:schemas-microsoft-com:vml" xmlns:pvml="urn:schemas-microsoft-com:office:powerpoint" xmlns:com="http://schemas.openxmlformats.org/drawingml/2006/compatibility" xmlns:p14="http://schemas.microsoft.com/office/powerpoint/2010/main" xmlns:p15="http://schemas.microsoft.com/office/powerpoint/2012/main" xmlns:ahyp="http://schemas.microsoft.com/office/drawing/2018/hyperlinkcolor" autoCompressPictures="0" embedTrueTypeFonts="1" strictFirstAndLastChars="0" saveSubsetFonts="1">
+<p:presentation xmlns:a="http://schemas.openxmlformats.org/drawingml/2006/main" xmlns:r="http://schemas.openxmlformats.org/officeDocument/2006/relationships" xmlns:p="http://schemas.openxmlformats.org/presentationml/2006/main" strictFirstAndLastChars="0" embedTrueTypeFonts="1" saveSubsetFonts="1" autoCompressPictures="0">
   <p:sldMasterIdLst>
-    <p:sldMasterId id="2147483648" r:id="rId3"/>
+    <p:sldMasterId id="2147483648" r:id="rId1"/>
   </p:sldMasterIdLst>
   <p:notesMasterIdLst>
-    <p:notesMasterId r:id="rId4"/>
+    <p:notesMasterId r:id="rId3"/>
   </p:notesMasterIdLst>
   <p:sldIdLst>
-    <p:sldId id="256" r:id="rId5"/>
+    <p:sldId id="256" r:id="rId2"/>
   </p:sldIdLst>
-  <p:sldSz cy="7019925" cx="16559200"/>
+  <p:sldSz cx="16559213" cy="7019925"/>
   <p:notesSz cx="6858000" cy="9144000"/>
   <p:embeddedFontLst>
     <p:embeddedFont>
-      <p:font typeface="Play"/>
-      <p:regular r:id="rId6"/>
-      <p:bold r:id="rId7"/>
+      <p:font typeface="Play" pitchFamily="2" charset="0"/>
+      <p:regular r:id="rId4"/>
+      <p:bold r:id="rId5"/>
     </p:embeddedFont>
   </p:embeddedFontLst>
   <p:defaultTextStyle>
-    <a:defPPr lvl="0" marR="0" rtl="0" algn="l">
+    <a:defPPr marR="0" lvl="0" algn="l" rtl="0">
       <a:lnSpc>
         <a:spcPct val="100000"/>
       </a:lnSpc>
@@ -31,7 +31,7 @@
         <a:spcPts val="0"/>
       </a:spcAft>
     </a:defPPr>
-    <a:lvl1pPr lvl="0" marR="0" rtl="0" algn="l">
+    <a:lvl1pPr marR="0" lvl="0" algn="l" rtl="0">
       <a:lnSpc>
         <a:spcPct val="100000"/>
       </a:lnSpc>
@@ -45,7 +45,7 @@
         <a:srgbClr val="000000"/>
       </a:buClr>
       <a:buFont typeface="Arial"/>
-      <a:defRPr b="0" i="0" sz="1400" u="none" cap="none" strike="noStrike">
+      <a:defRPr sz="1400" b="0" i="0" u="none" strike="noStrike" cap="none">
         <a:solidFill>
           <a:srgbClr val="000000"/>
         </a:solidFill>
@@ -55,7 +55,7 @@
         <a:sym typeface="Arial"/>
       </a:defRPr>
     </a:lvl1pPr>
-    <a:lvl2pPr lvl="1" marR="0" rtl="0" algn="l">
+    <a:lvl2pPr marR="0" lvl="1" algn="l" rtl="0">
       <a:lnSpc>
         <a:spcPct val="100000"/>
       </a:lnSpc>
@@ -69,7 +69,7 @@
         <a:srgbClr val="000000"/>
       </a:buClr>
       <a:buFont typeface="Arial"/>
-      <a:defRPr b="0" i="0" sz="1400" u="none" cap="none" strike="noStrike">
+      <a:defRPr sz="1400" b="0" i="0" u="none" strike="noStrike" cap="none">
         <a:solidFill>
           <a:srgbClr val="000000"/>
         </a:solidFill>
@@ -79,7 +79,7 @@
         <a:sym typeface="Arial"/>
       </a:defRPr>
     </a:lvl2pPr>
-    <a:lvl3pPr lvl="2" marR="0" rtl="0" algn="l">
+    <a:lvl3pPr marR="0" lvl="2" algn="l" rtl="0">
       <a:lnSpc>
         <a:spcPct val="100000"/>
       </a:lnSpc>
@@ -93,7 +93,7 @@
         <a:srgbClr val="000000"/>
       </a:buClr>
       <a:buFont typeface="Arial"/>
-      <a:defRPr b="0" i="0" sz="1400" u="none" cap="none" strike="noStrike">
+      <a:defRPr sz="1400" b="0" i="0" u="none" strike="noStrike" cap="none">
         <a:solidFill>
           <a:srgbClr val="000000"/>
         </a:solidFill>
@@ -103,7 +103,7 @@
         <a:sym typeface="Arial"/>
       </a:defRPr>
     </a:lvl3pPr>
-    <a:lvl4pPr lvl="3" marR="0" rtl="0" algn="l">
+    <a:lvl4pPr marR="0" lvl="3" algn="l" rtl="0">
       <a:lnSpc>
         <a:spcPct val="100000"/>
       </a:lnSpc>
@@ -117,7 +117,7 @@
         <a:srgbClr val="000000"/>
       </a:buClr>
       <a:buFont typeface="Arial"/>
-      <a:defRPr b="0" i="0" sz="1400" u="none" cap="none" strike="noStrike">
+      <a:defRPr sz="1400" b="0" i="0" u="none" strike="noStrike" cap="none">
         <a:solidFill>
           <a:srgbClr val="000000"/>
         </a:solidFill>
@@ -127,7 +127,7 @@
         <a:sym typeface="Arial"/>
       </a:defRPr>
     </a:lvl4pPr>
-    <a:lvl5pPr lvl="4" marR="0" rtl="0" algn="l">
+    <a:lvl5pPr marR="0" lvl="4" algn="l" rtl="0">
       <a:lnSpc>
         <a:spcPct val="100000"/>
       </a:lnSpc>
@@ -141,7 +141,7 @@
         <a:srgbClr val="000000"/>
       </a:buClr>
       <a:buFont typeface="Arial"/>
-      <a:defRPr b="0" i="0" sz="1400" u="none" cap="none" strike="noStrike">
+      <a:defRPr sz="1400" b="0" i="0" u="none" strike="noStrike" cap="none">
         <a:solidFill>
           <a:srgbClr val="000000"/>
         </a:solidFill>
@@ -151,7 +151,7 @@
         <a:sym typeface="Arial"/>
       </a:defRPr>
     </a:lvl5pPr>
-    <a:lvl6pPr lvl="5" marR="0" rtl="0" algn="l">
+    <a:lvl6pPr marR="0" lvl="5" algn="l" rtl="0">
       <a:lnSpc>
         <a:spcPct val="100000"/>
       </a:lnSpc>
@@ -165,7 +165,7 @@
         <a:srgbClr val="000000"/>
       </a:buClr>
       <a:buFont typeface="Arial"/>
-      <a:defRPr b="0" i="0" sz="1400" u="none" cap="none" strike="noStrike">
+      <a:defRPr sz="1400" b="0" i="0" u="none" strike="noStrike" cap="none">
         <a:solidFill>
           <a:srgbClr val="000000"/>
         </a:solidFill>
@@ -175,7 +175,7 @@
         <a:sym typeface="Arial"/>
       </a:defRPr>
     </a:lvl6pPr>
-    <a:lvl7pPr lvl="6" marR="0" rtl="0" algn="l">
+    <a:lvl7pPr marR="0" lvl="6" algn="l" rtl="0">
       <a:lnSpc>
         <a:spcPct val="100000"/>
       </a:lnSpc>
@@ -189,7 +189,7 @@
         <a:srgbClr val="000000"/>
       </a:buClr>
       <a:buFont typeface="Arial"/>
-      <a:defRPr b="0" i="0" sz="1400" u="none" cap="none" strike="noStrike">
+      <a:defRPr sz="1400" b="0" i="0" u="none" strike="noStrike" cap="none">
         <a:solidFill>
           <a:srgbClr val="000000"/>
         </a:solidFill>
@@ -199,7 +199,7 @@
         <a:sym typeface="Arial"/>
       </a:defRPr>
     </a:lvl7pPr>
-    <a:lvl8pPr lvl="7" marR="0" rtl="0" algn="l">
+    <a:lvl8pPr marR="0" lvl="7" algn="l" rtl="0">
       <a:lnSpc>
         <a:spcPct val="100000"/>
       </a:lnSpc>
@@ -213,7 +213,7 @@
         <a:srgbClr val="000000"/>
       </a:buClr>
       <a:buFont typeface="Arial"/>
-      <a:defRPr b="0" i="0" sz="1400" u="none" cap="none" strike="noStrike">
+      <a:defRPr sz="1400" b="0" i="0" u="none" strike="noStrike" cap="none">
         <a:solidFill>
           <a:srgbClr val="000000"/>
         </a:solidFill>
@@ -223,7 +223,7 @@
         <a:sym typeface="Arial"/>
       </a:defRPr>
     </a:lvl8pPr>
-    <a:lvl9pPr lvl="8" marR="0" rtl="0" algn="l">
+    <a:lvl9pPr marR="0" lvl="8" algn="l" rtl="0">
       <a:lnSpc>
         <a:spcPct val="100000"/>
       </a:lnSpc>
@@ -237,7 +237,7 @@
         <a:srgbClr val="000000"/>
       </a:buClr>
       <a:buFont typeface="Arial"/>
-      <a:defRPr b="0" i="0" sz="1400" u="none" cap="none" strike="noStrike">
+      <a:defRPr sz="1400" b="0" i="0" u="none" strike="noStrike" cap="none">
         <a:solidFill>
           <a:srgbClr val="000000"/>
         </a:solidFill>
@@ -249,26 +249,30 @@
     </a:lvl9pPr>
   </p:defaultTextStyle>
   <p:extLst>
+    <p:ext uri="{EFAFB233-063F-42B5-8137-9DF3F51BA10A}">
+      <p15:sldGuideLst xmlns:p15="http://schemas.microsoft.com/office/powerpoint/2012/main"/>
+    </p:ext>
     <p:ext uri="GoogleSlidesCustomDataVersion2">
-      <go:slidesCustomData xmlns:go="http://customooxmlschemas.google.com/" r:id="rId8" roundtripDataSignature="AMtx7mi553m8NdOJu3RJVRvvSDH2Dnf3KQ=="/>
+      <go:slidesCustomData xmlns:go="http://customooxmlschemas.google.com/" xmlns:ahyp="http://schemas.microsoft.com/office/drawing/2018/hyperlinkcolor" xmlns:p15="http://schemas.microsoft.com/office/powerpoint/2012/main" xmlns:p14="http://schemas.microsoft.com/office/powerpoint/2010/main" xmlns:com="http://schemas.openxmlformats.org/drawingml/2006/compatibility" xmlns:pvml="urn:schemas-microsoft-com:office:powerpoint" xmlns:v="urn:schemas-microsoft-com:vml" xmlns:o="urn:schemas-microsoft-com:office:office" xmlns:dgm="http://schemas.openxmlformats.org/drawingml/2006/diagram" xmlns:c="http://schemas.openxmlformats.org/drawingml/2006/chart" xmlns:mv="urn:schemas-microsoft-com:mac:vml" xmlns:mc="http://schemas.openxmlformats.org/markup-compatibility/2006" xmlns="" r:id="rId8" roundtripDataSignature="AMtx7mi553m8NdOJu3RJVRvvSDH2Dnf3KQ=="/>
     </p:ext>
   </p:extLst>
 </p:presentation>
 </file>
 
 <file path=ppt/notesMasters/notesMaster1.xml><?xml version="1.0" encoding="utf-8"?>
-<p:notesMaster xmlns:a="http://schemas.openxmlformats.org/drawingml/2006/main" xmlns:r="http://schemas.openxmlformats.org/officeDocument/2006/relationships" xmlns:mc="http://schemas.openxmlformats.org/markup-compatibility/2006" xmlns:mv="urn:schemas-microsoft-com:mac:vml" xmlns:p="http://schemas.openxmlformats.org/presentationml/2006/main" xmlns:c="http://schemas.openxmlformats.org/drawingml/2006/chart" xmlns:dgm="http://schemas.openxmlformats.org/drawingml/2006/diagram" xmlns:o="urn:schemas-microsoft-com:office:office" xmlns:v="urn:schemas-microsoft-com:vml" xmlns:pvml="urn:schemas-microsoft-com:office:powerpoint" xmlns:com="http://schemas.openxmlformats.org/drawingml/2006/compatibility" xmlns:p14="http://schemas.microsoft.com/office/powerpoint/2010/main" xmlns:p15="http://schemas.microsoft.com/office/powerpoint/2012/main" xmlns:ahyp="http://schemas.microsoft.com/office/drawing/2018/hyperlinkcolor">
+<p:notesMaster xmlns:a="http://schemas.openxmlformats.org/drawingml/2006/main" xmlns:r="http://schemas.openxmlformats.org/officeDocument/2006/relationships" xmlns:p="http://schemas.openxmlformats.org/presentationml/2006/main">
   <p:cSld>
     <p:bg>
       <p:bgPr>
         <a:solidFill>
           <a:schemeClr val="lt1"/>
         </a:solidFill>
+        <a:effectLst/>
       </p:bgPr>
     </p:bg>
     <p:spTree>
       <p:nvGrpSpPr>
-        <p:cNvPr id="2" name="Shape 2"/>
+        <p:cNvPr id="1" name="Shape 2"/>
         <p:cNvGrpSpPr/>
         <p:nvPr/>
       </p:nvGrpSpPr>
@@ -283,9 +287,11 @@
       <p:sp>
         <p:nvSpPr>
           <p:cNvPr id="3" name="Google Shape;3;n"/>
-          <p:cNvSpPr txBox="1"/>
+          <p:cNvSpPr txBox="1">
+            <a:spLocks noGrp="1"/>
+          </p:cNvSpPr>
           <p:nvPr>
-            <p:ph idx="2" type="hdr"/>
+            <p:ph type="hdr" idx="2"/>
           </p:nvPr>
         </p:nvSpPr>
         <p:spPr>
@@ -302,20 +308,20 @@
           </a:ln>
         </p:spPr>
         <p:txBody>
-          <a:bodyPr anchorCtr="0" anchor="t" bIns="45700" lIns="91425" spcFirstLastPara="1" rIns="91425" wrap="square" tIns="45700">
+          <a:bodyPr spcFirstLastPara="1" wrap="square" lIns="91425" tIns="45700" rIns="91425" bIns="45700" anchor="t" anchorCtr="0">
             <a:noAutofit/>
           </a:bodyPr>
           <a:lstStyle>
-            <a:lvl1pPr lvl="0" marR="0" rtl="0" algn="l">
-              <a:spcBef>
-                <a:spcPts val="0"/>
-              </a:spcBef>
-              <a:spcAft>
-                <a:spcPts val="0"/>
-              </a:spcAft>
-              <a:buSzPts val="1400"/>
-              <a:buNone/>
-              <a:defRPr b="0" i="0" sz="1200" u="none" cap="none" strike="noStrike">
+            <a:lvl1pPr marR="0" lvl="0" algn="l" rtl="0">
+              <a:spcBef>
+                <a:spcPts val="0"/>
+              </a:spcBef>
+              <a:spcAft>
+                <a:spcPts val="0"/>
+              </a:spcAft>
+              <a:buSzPts val="1400"/>
+              <a:buNone/>
+              <a:defRPr sz="1200" b="0" i="0" u="none" strike="noStrike" cap="none">
                 <a:solidFill>
                   <a:schemeClr val="dk1"/>
                 </a:solidFill>
@@ -325,16 +331,16 @@
                 <a:sym typeface="Arial"/>
               </a:defRPr>
             </a:lvl1pPr>
-            <a:lvl2pPr lvl="1" marR="0" rtl="0" algn="l">
-              <a:spcBef>
-                <a:spcPts val="0"/>
-              </a:spcBef>
-              <a:spcAft>
-                <a:spcPts val="0"/>
-              </a:spcAft>
-              <a:buSzPts val="1400"/>
-              <a:buNone/>
-              <a:defRPr b="0" i="0" sz="1800" u="none" cap="none" strike="noStrike">
+            <a:lvl2pPr marR="0" lvl="1" algn="l" rtl="0">
+              <a:spcBef>
+                <a:spcPts val="0"/>
+              </a:spcBef>
+              <a:spcAft>
+                <a:spcPts val="0"/>
+              </a:spcAft>
+              <a:buSzPts val="1400"/>
+              <a:buNone/>
+              <a:defRPr sz="1800" b="0" i="0" u="none" strike="noStrike" cap="none">
                 <a:solidFill>
                   <a:schemeClr val="dk1"/>
                 </a:solidFill>
@@ -344,16 +350,16 @@
                 <a:sym typeface="Arial"/>
               </a:defRPr>
             </a:lvl2pPr>
-            <a:lvl3pPr lvl="2" marR="0" rtl="0" algn="l">
-              <a:spcBef>
-                <a:spcPts val="0"/>
-              </a:spcBef>
-              <a:spcAft>
-                <a:spcPts val="0"/>
-              </a:spcAft>
-              <a:buSzPts val="1400"/>
-              <a:buNone/>
-              <a:defRPr b="0" i="0" sz="1800" u="none" cap="none" strike="noStrike">
+            <a:lvl3pPr marR="0" lvl="2" algn="l" rtl="0">
+              <a:spcBef>
+                <a:spcPts val="0"/>
+              </a:spcBef>
+              <a:spcAft>
+                <a:spcPts val="0"/>
+              </a:spcAft>
+              <a:buSzPts val="1400"/>
+              <a:buNone/>
+              <a:defRPr sz="1800" b="0" i="0" u="none" strike="noStrike" cap="none">
                 <a:solidFill>
                   <a:schemeClr val="dk1"/>
                 </a:solidFill>
@@ -363,16 +369,16 @@
                 <a:sym typeface="Arial"/>
               </a:defRPr>
             </a:lvl3pPr>
-            <a:lvl4pPr lvl="3" marR="0" rtl="0" algn="l">
-              <a:spcBef>
-                <a:spcPts val="0"/>
-              </a:spcBef>
-              <a:spcAft>
-                <a:spcPts val="0"/>
-              </a:spcAft>
-              <a:buSzPts val="1400"/>
-              <a:buNone/>
-              <a:defRPr b="0" i="0" sz="1800" u="none" cap="none" strike="noStrike">
+            <a:lvl4pPr marR="0" lvl="3" algn="l" rtl="0">
+              <a:spcBef>
+                <a:spcPts val="0"/>
+              </a:spcBef>
+              <a:spcAft>
+                <a:spcPts val="0"/>
+              </a:spcAft>
+              <a:buSzPts val="1400"/>
+              <a:buNone/>
+              <a:defRPr sz="1800" b="0" i="0" u="none" strike="noStrike" cap="none">
                 <a:solidFill>
                   <a:schemeClr val="dk1"/>
                 </a:solidFill>
@@ -382,16 +388,16 @@
                 <a:sym typeface="Arial"/>
               </a:defRPr>
             </a:lvl4pPr>
-            <a:lvl5pPr lvl="4" marR="0" rtl="0" algn="l">
-              <a:spcBef>
-                <a:spcPts val="0"/>
-              </a:spcBef>
-              <a:spcAft>
-                <a:spcPts val="0"/>
-              </a:spcAft>
-              <a:buSzPts val="1400"/>
-              <a:buNone/>
-              <a:defRPr b="0" i="0" sz="1800" u="none" cap="none" strike="noStrike">
+            <a:lvl5pPr marR="0" lvl="4" algn="l" rtl="0">
+              <a:spcBef>
+                <a:spcPts val="0"/>
+              </a:spcBef>
+              <a:spcAft>
+                <a:spcPts val="0"/>
+              </a:spcAft>
+              <a:buSzPts val="1400"/>
+              <a:buNone/>
+              <a:defRPr sz="1800" b="0" i="0" u="none" strike="noStrike" cap="none">
                 <a:solidFill>
                   <a:schemeClr val="dk1"/>
                 </a:solidFill>
@@ -401,16 +407,16 @@
                 <a:sym typeface="Arial"/>
               </a:defRPr>
             </a:lvl5pPr>
-            <a:lvl6pPr lvl="5" marR="0" rtl="0" algn="l">
-              <a:spcBef>
-                <a:spcPts val="0"/>
-              </a:spcBef>
-              <a:spcAft>
-                <a:spcPts val="0"/>
-              </a:spcAft>
-              <a:buSzPts val="1400"/>
-              <a:buNone/>
-              <a:defRPr b="0" i="0" sz="1800" u="none" cap="none" strike="noStrike">
+            <a:lvl6pPr marR="0" lvl="5" algn="l" rtl="0">
+              <a:spcBef>
+                <a:spcPts val="0"/>
+              </a:spcBef>
+              <a:spcAft>
+                <a:spcPts val="0"/>
+              </a:spcAft>
+              <a:buSzPts val="1400"/>
+              <a:buNone/>
+              <a:defRPr sz="1800" b="0" i="0" u="none" strike="noStrike" cap="none">
                 <a:solidFill>
                   <a:schemeClr val="dk1"/>
                 </a:solidFill>
@@ -420,16 +426,16 @@
                 <a:sym typeface="Arial"/>
               </a:defRPr>
             </a:lvl6pPr>
-            <a:lvl7pPr lvl="6" marR="0" rtl="0" algn="l">
-              <a:spcBef>
-                <a:spcPts val="0"/>
-              </a:spcBef>
-              <a:spcAft>
-                <a:spcPts val="0"/>
-              </a:spcAft>
-              <a:buSzPts val="1400"/>
-              <a:buNone/>
-              <a:defRPr b="0" i="0" sz="1800" u="none" cap="none" strike="noStrike">
+            <a:lvl7pPr marR="0" lvl="6" algn="l" rtl="0">
+              <a:spcBef>
+                <a:spcPts val="0"/>
+              </a:spcBef>
+              <a:spcAft>
+                <a:spcPts val="0"/>
+              </a:spcAft>
+              <a:buSzPts val="1400"/>
+              <a:buNone/>
+              <a:defRPr sz="1800" b="0" i="0" u="none" strike="noStrike" cap="none">
                 <a:solidFill>
                   <a:schemeClr val="dk1"/>
                 </a:solidFill>
@@ -439,16 +445,16 @@
                 <a:sym typeface="Arial"/>
               </a:defRPr>
             </a:lvl7pPr>
-            <a:lvl8pPr lvl="7" marR="0" rtl="0" algn="l">
-              <a:spcBef>
-                <a:spcPts val="0"/>
-              </a:spcBef>
-              <a:spcAft>
-                <a:spcPts val="0"/>
-              </a:spcAft>
-              <a:buSzPts val="1400"/>
-              <a:buNone/>
-              <a:defRPr b="0" i="0" sz="1800" u="none" cap="none" strike="noStrike">
+            <a:lvl8pPr marR="0" lvl="7" algn="l" rtl="0">
+              <a:spcBef>
+                <a:spcPts val="0"/>
+              </a:spcBef>
+              <a:spcAft>
+                <a:spcPts val="0"/>
+              </a:spcAft>
+              <a:buSzPts val="1400"/>
+              <a:buNone/>
+              <a:defRPr sz="1800" b="0" i="0" u="none" strike="noStrike" cap="none">
                 <a:solidFill>
                   <a:schemeClr val="dk1"/>
                 </a:solidFill>
@@ -458,16 +464,16 @@
                 <a:sym typeface="Arial"/>
               </a:defRPr>
             </a:lvl8pPr>
-            <a:lvl9pPr lvl="8" marR="0" rtl="0" algn="l">
-              <a:spcBef>
-                <a:spcPts val="0"/>
-              </a:spcBef>
-              <a:spcAft>
-                <a:spcPts val="0"/>
-              </a:spcAft>
-              <a:buSzPts val="1400"/>
-              <a:buNone/>
-              <a:defRPr b="0" i="0" sz="1800" u="none" cap="none" strike="noStrike">
+            <a:lvl9pPr marR="0" lvl="8" algn="l" rtl="0">
+              <a:spcBef>
+                <a:spcPts val="0"/>
+              </a:spcBef>
+              <a:spcAft>
+                <a:spcPts val="0"/>
+              </a:spcAft>
+              <a:buSzPts val="1400"/>
+              <a:buNone/>
+              <a:defRPr sz="1800" b="0" i="0" u="none" strike="noStrike" cap="none">
                 <a:solidFill>
                   <a:schemeClr val="dk1"/>
                 </a:solidFill>
@@ -478,15 +484,19 @@
               </a:defRPr>
             </a:lvl9pPr>
           </a:lstStyle>
-          <a:p/>
+          <a:p>
+            <a:endParaRPr/>
+          </a:p>
         </p:txBody>
       </p:sp>
       <p:sp>
         <p:nvSpPr>
           <p:cNvPr id="4" name="Google Shape;4;n"/>
-          <p:cNvSpPr txBox="1"/>
+          <p:cNvSpPr txBox="1">
+            <a:spLocks noGrp="1"/>
+          </p:cNvSpPr>
           <p:nvPr>
-            <p:ph idx="10" type="dt"/>
+            <p:ph type="dt" idx="10"/>
           </p:nvPr>
         </p:nvSpPr>
         <p:spPr>
@@ -503,20 +513,20 @@
           </a:ln>
         </p:spPr>
         <p:txBody>
-          <a:bodyPr anchorCtr="0" anchor="t" bIns="45700" lIns="91425" spcFirstLastPara="1" rIns="91425" wrap="square" tIns="45700">
+          <a:bodyPr spcFirstLastPara="1" wrap="square" lIns="91425" tIns="45700" rIns="91425" bIns="45700" anchor="t" anchorCtr="0">
             <a:noAutofit/>
           </a:bodyPr>
           <a:lstStyle>
-            <a:lvl1pPr lvl="0" marR="0" rtl="0" algn="r">
-              <a:spcBef>
-                <a:spcPts val="0"/>
-              </a:spcBef>
-              <a:spcAft>
-                <a:spcPts val="0"/>
-              </a:spcAft>
-              <a:buSzPts val="1400"/>
-              <a:buNone/>
-              <a:defRPr b="0" i="0" sz="1200" u="none" cap="none" strike="noStrike">
+            <a:lvl1pPr marR="0" lvl="0" algn="r" rtl="0">
+              <a:spcBef>
+                <a:spcPts val="0"/>
+              </a:spcBef>
+              <a:spcAft>
+                <a:spcPts val="0"/>
+              </a:spcAft>
+              <a:buSzPts val="1400"/>
+              <a:buNone/>
+              <a:defRPr sz="1200" b="0" i="0" u="none" strike="noStrike" cap="none">
                 <a:solidFill>
                   <a:schemeClr val="dk1"/>
                 </a:solidFill>
@@ -526,16 +536,16 @@
                 <a:sym typeface="Arial"/>
               </a:defRPr>
             </a:lvl1pPr>
-            <a:lvl2pPr lvl="1" marR="0" rtl="0" algn="l">
-              <a:spcBef>
-                <a:spcPts val="0"/>
-              </a:spcBef>
-              <a:spcAft>
-                <a:spcPts val="0"/>
-              </a:spcAft>
-              <a:buSzPts val="1400"/>
-              <a:buNone/>
-              <a:defRPr b="0" i="0" sz="1800" u="none" cap="none" strike="noStrike">
+            <a:lvl2pPr marR="0" lvl="1" algn="l" rtl="0">
+              <a:spcBef>
+                <a:spcPts val="0"/>
+              </a:spcBef>
+              <a:spcAft>
+                <a:spcPts val="0"/>
+              </a:spcAft>
+              <a:buSzPts val="1400"/>
+              <a:buNone/>
+              <a:defRPr sz="1800" b="0" i="0" u="none" strike="noStrike" cap="none">
                 <a:solidFill>
                   <a:schemeClr val="dk1"/>
                 </a:solidFill>
@@ -545,16 +555,16 @@
                 <a:sym typeface="Arial"/>
               </a:defRPr>
             </a:lvl2pPr>
-            <a:lvl3pPr lvl="2" marR="0" rtl="0" algn="l">
-              <a:spcBef>
-                <a:spcPts val="0"/>
-              </a:spcBef>
-              <a:spcAft>
-                <a:spcPts val="0"/>
-              </a:spcAft>
-              <a:buSzPts val="1400"/>
-              <a:buNone/>
-              <a:defRPr b="0" i="0" sz="1800" u="none" cap="none" strike="noStrike">
+            <a:lvl3pPr marR="0" lvl="2" algn="l" rtl="0">
+              <a:spcBef>
+                <a:spcPts val="0"/>
+              </a:spcBef>
+              <a:spcAft>
+                <a:spcPts val="0"/>
+              </a:spcAft>
+              <a:buSzPts val="1400"/>
+              <a:buNone/>
+              <a:defRPr sz="1800" b="0" i="0" u="none" strike="noStrike" cap="none">
                 <a:solidFill>
                   <a:schemeClr val="dk1"/>
                 </a:solidFill>
@@ -564,16 +574,16 @@
                 <a:sym typeface="Arial"/>
               </a:defRPr>
             </a:lvl3pPr>
-            <a:lvl4pPr lvl="3" marR="0" rtl="0" algn="l">
-              <a:spcBef>
-                <a:spcPts val="0"/>
-              </a:spcBef>
-              <a:spcAft>
-                <a:spcPts val="0"/>
-              </a:spcAft>
-              <a:buSzPts val="1400"/>
-              <a:buNone/>
-              <a:defRPr b="0" i="0" sz="1800" u="none" cap="none" strike="noStrike">
+            <a:lvl4pPr marR="0" lvl="3" algn="l" rtl="0">
+              <a:spcBef>
+                <a:spcPts val="0"/>
+              </a:spcBef>
+              <a:spcAft>
+                <a:spcPts val="0"/>
+              </a:spcAft>
+              <a:buSzPts val="1400"/>
+              <a:buNone/>
+              <a:defRPr sz="1800" b="0" i="0" u="none" strike="noStrike" cap="none">
                 <a:solidFill>
                   <a:schemeClr val="dk1"/>
                 </a:solidFill>
@@ -583,16 +593,16 @@
                 <a:sym typeface="Arial"/>
               </a:defRPr>
             </a:lvl4pPr>
-            <a:lvl5pPr lvl="4" marR="0" rtl="0" algn="l">
-              <a:spcBef>
-                <a:spcPts val="0"/>
-              </a:spcBef>
-              <a:spcAft>
-                <a:spcPts val="0"/>
-              </a:spcAft>
-              <a:buSzPts val="1400"/>
-              <a:buNone/>
-              <a:defRPr b="0" i="0" sz="1800" u="none" cap="none" strike="noStrike">
+            <a:lvl5pPr marR="0" lvl="4" algn="l" rtl="0">
+              <a:spcBef>
+                <a:spcPts val="0"/>
+              </a:spcBef>
+              <a:spcAft>
+                <a:spcPts val="0"/>
+              </a:spcAft>
+              <a:buSzPts val="1400"/>
+              <a:buNone/>
+              <a:defRPr sz="1800" b="0" i="0" u="none" strike="noStrike" cap="none">
                 <a:solidFill>
                   <a:schemeClr val="dk1"/>
                 </a:solidFill>
@@ -602,16 +612,16 @@
                 <a:sym typeface="Arial"/>
               </a:defRPr>
             </a:lvl5pPr>
-            <a:lvl6pPr lvl="5" marR="0" rtl="0" algn="l">
-              <a:spcBef>
-                <a:spcPts val="0"/>
-              </a:spcBef>
-              <a:spcAft>
-                <a:spcPts val="0"/>
-              </a:spcAft>
-              <a:buSzPts val="1400"/>
-              <a:buNone/>
-              <a:defRPr b="0" i="0" sz="1800" u="none" cap="none" strike="noStrike">
+            <a:lvl6pPr marR="0" lvl="5" algn="l" rtl="0">
+              <a:spcBef>
+                <a:spcPts val="0"/>
+              </a:spcBef>
+              <a:spcAft>
+                <a:spcPts val="0"/>
+              </a:spcAft>
+              <a:buSzPts val="1400"/>
+              <a:buNone/>
+              <a:defRPr sz="1800" b="0" i="0" u="none" strike="noStrike" cap="none">
                 <a:solidFill>
                   <a:schemeClr val="dk1"/>
                 </a:solidFill>
@@ -621,16 +631,16 @@
                 <a:sym typeface="Arial"/>
               </a:defRPr>
             </a:lvl6pPr>
-            <a:lvl7pPr lvl="6" marR="0" rtl="0" algn="l">
-              <a:spcBef>
-                <a:spcPts val="0"/>
-              </a:spcBef>
-              <a:spcAft>
-                <a:spcPts val="0"/>
-              </a:spcAft>
-              <a:buSzPts val="1400"/>
-              <a:buNone/>
-              <a:defRPr b="0" i="0" sz="1800" u="none" cap="none" strike="noStrike">
+            <a:lvl7pPr marR="0" lvl="6" algn="l" rtl="0">
+              <a:spcBef>
+                <a:spcPts val="0"/>
+              </a:spcBef>
+              <a:spcAft>
+                <a:spcPts val="0"/>
+              </a:spcAft>
+              <a:buSzPts val="1400"/>
+              <a:buNone/>
+              <a:defRPr sz="1800" b="0" i="0" u="none" strike="noStrike" cap="none">
                 <a:solidFill>
                   <a:schemeClr val="dk1"/>
                 </a:solidFill>
@@ -640,16 +650,16 @@
                 <a:sym typeface="Arial"/>
               </a:defRPr>
             </a:lvl7pPr>
-            <a:lvl8pPr lvl="7" marR="0" rtl="0" algn="l">
-              <a:spcBef>
-                <a:spcPts val="0"/>
-              </a:spcBef>
-              <a:spcAft>
-                <a:spcPts val="0"/>
-              </a:spcAft>
-              <a:buSzPts val="1400"/>
-              <a:buNone/>
-              <a:defRPr b="0" i="0" sz="1800" u="none" cap="none" strike="noStrike">
+            <a:lvl8pPr marR="0" lvl="7" algn="l" rtl="0">
+              <a:spcBef>
+                <a:spcPts val="0"/>
+              </a:spcBef>
+              <a:spcAft>
+                <a:spcPts val="0"/>
+              </a:spcAft>
+              <a:buSzPts val="1400"/>
+              <a:buNone/>
+              <a:defRPr sz="1800" b="0" i="0" u="none" strike="noStrike" cap="none">
                 <a:solidFill>
                   <a:schemeClr val="dk1"/>
                 </a:solidFill>
@@ -659,16 +669,16 @@
                 <a:sym typeface="Arial"/>
               </a:defRPr>
             </a:lvl8pPr>
-            <a:lvl9pPr lvl="8" marR="0" rtl="0" algn="l">
-              <a:spcBef>
-                <a:spcPts val="0"/>
-              </a:spcBef>
-              <a:spcAft>
-                <a:spcPts val="0"/>
-              </a:spcAft>
-              <a:buSzPts val="1400"/>
-              <a:buNone/>
-              <a:defRPr b="0" i="0" sz="1800" u="none" cap="none" strike="noStrike">
+            <a:lvl9pPr marR="0" lvl="8" algn="l" rtl="0">
+              <a:spcBef>
+                <a:spcPts val="0"/>
+              </a:spcBef>
+              <a:spcAft>
+                <a:spcPts val="0"/>
+              </a:spcAft>
+              <a:buSzPts val="1400"/>
+              <a:buNone/>
+              <a:defRPr sz="1800" b="0" i="0" u="none" strike="noStrike" cap="none">
                 <a:solidFill>
                   <a:schemeClr val="dk1"/>
                 </a:solidFill>
@@ -679,15 +689,19 @@
               </a:defRPr>
             </a:lvl9pPr>
           </a:lstStyle>
-          <a:p/>
+          <a:p>
+            <a:endParaRPr/>
+          </a:p>
         </p:txBody>
       </p:sp>
       <p:sp>
         <p:nvSpPr>
           <p:cNvPr id="5" name="Google Shape;5;n"/>
-          <p:cNvSpPr/>
+          <p:cNvSpPr>
+            <a:spLocks noGrp="1" noRot="1" noChangeAspect="1"/>
+          </p:cNvSpPr>
           <p:nvPr>
-            <p:ph idx="3" type="sldImg"/>
+            <p:ph type="sldImg" idx="3"/>
           </p:nvPr>
         </p:nvSpPr>
         <p:spPr>
@@ -696,9 +710,13 @@
             <a:ext cx="7277100" cy="3086100"/>
           </a:xfrm>
           <a:custGeom>
-            <a:rect b="b" l="l" r="r" t="t"/>
+            <a:avLst/>
+            <a:gdLst/>
+            <a:ahLst/>
+            <a:cxnLst/>
+            <a:rect l="l" t="t" r="r" b="b"/>
             <a:pathLst>
-              <a:path extrusionOk="0" h="120000" w="120000">
+              <a:path w="120000" h="120000" extrusionOk="0">
                 <a:moveTo>
                   <a:pt x="0" y="0"/>
                 </a:moveTo>
@@ -716,23 +734,25 @@
             </a:pathLst>
           </a:custGeom>
           <a:noFill/>
-          <a:ln cap="flat" cmpd="sng" w="12700">
+          <a:ln w="12700" cap="flat" cmpd="sng">
             <a:solidFill>
               <a:srgbClr val="000000"/>
             </a:solidFill>
             <a:prstDash val="solid"/>
             <a:round/>
-            <a:headEnd len="sm" w="sm" type="none"/>
-            <a:tailEnd len="sm" w="sm" type="none"/>
+            <a:headEnd type="none" w="sm" len="sm"/>
+            <a:tailEnd type="none" w="sm" len="sm"/>
           </a:ln>
         </p:spPr>
       </p:sp>
       <p:sp>
         <p:nvSpPr>
           <p:cNvPr id="6" name="Google Shape;6;n"/>
-          <p:cNvSpPr txBox="1"/>
+          <p:cNvSpPr txBox="1">
+            <a:spLocks noGrp="1"/>
+          </p:cNvSpPr>
           <p:nvPr>
-            <p:ph idx="1" type="body"/>
+            <p:ph type="body" idx="1"/>
           </p:nvPr>
         </p:nvSpPr>
         <p:spPr>
@@ -749,20 +769,20 @@
           </a:ln>
         </p:spPr>
         <p:txBody>
-          <a:bodyPr anchorCtr="0" anchor="t" bIns="45700" lIns="91425" spcFirstLastPara="1" rIns="91425" wrap="square" tIns="45700">
+          <a:bodyPr spcFirstLastPara="1" wrap="square" lIns="91425" tIns="45700" rIns="91425" bIns="45700" anchor="t" anchorCtr="0">
             <a:noAutofit/>
           </a:bodyPr>
           <a:lstStyle>
-            <a:lvl1pPr indent="-228600" lvl="0" marL="457200" marR="0" rtl="0" algn="l">
-              <a:spcBef>
-                <a:spcPts val="0"/>
-              </a:spcBef>
-              <a:spcAft>
-                <a:spcPts val="0"/>
-              </a:spcAft>
-              <a:buSzPts val="1400"/>
-              <a:buNone/>
-              <a:defRPr b="0" i="0" sz="1200" u="none" cap="none" strike="noStrike">
+            <a:lvl1pPr marL="457200" marR="0" lvl="0" indent="-228600" algn="l" rtl="0">
+              <a:spcBef>
+                <a:spcPts val="0"/>
+              </a:spcBef>
+              <a:spcAft>
+                <a:spcPts val="0"/>
+              </a:spcAft>
+              <a:buSzPts val="1400"/>
+              <a:buNone/>
+              <a:defRPr sz="1200" b="0" i="0" u="none" strike="noStrike" cap="none">
                 <a:solidFill>
                   <a:schemeClr val="dk1"/>
                 </a:solidFill>
@@ -772,16 +792,16 @@
                 <a:sym typeface="Arial"/>
               </a:defRPr>
             </a:lvl1pPr>
-            <a:lvl2pPr indent="-228600" lvl="1" marL="914400" marR="0" rtl="0" algn="l">
-              <a:spcBef>
-                <a:spcPts val="0"/>
-              </a:spcBef>
-              <a:spcAft>
-                <a:spcPts val="0"/>
-              </a:spcAft>
-              <a:buSzPts val="1400"/>
-              <a:buNone/>
-              <a:defRPr b="0" i="0" sz="1200" u="none" cap="none" strike="noStrike">
+            <a:lvl2pPr marL="914400" marR="0" lvl="1" indent="-228600" algn="l" rtl="0">
+              <a:spcBef>
+                <a:spcPts val="0"/>
+              </a:spcBef>
+              <a:spcAft>
+                <a:spcPts val="0"/>
+              </a:spcAft>
+              <a:buSzPts val="1400"/>
+              <a:buNone/>
+              <a:defRPr sz="1200" b="0" i="0" u="none" strike="noStrike" cap="none">
                 <a:solidFill>
                   <a:schemeClr val="dk1"/>
                 </a:solidFill>
@@ -791,16 +811,16 @@
                 <a:sym typeface="Arial"/>
               </a:defRPr>
             </a:lvl2pPr>
-            <a:lvl3pPr indent="-228600" lvl="2" marL="1371600" marR="0" rtl="0" algn="l">
-              <a:spcBef>
-                <a:spcPts val="0"/>
-              </a:spcBef>
-              <a:spcAft>
-                <a:spcPts val="0"/>
-              </a:spcAft>
-              <a:buSzPts val="1400"/>
-              <a:buNone/>
-              <a:defRPr b="0" i="0" sz="1200" u="none" cap="none" strike="noStrike">
+            <a:lvl3pPr marL="1371600" marR="0" lvl="2" indent="-228600" algn="l" rtl="0">
+              <a:spcBef>
+                <a:spcPts val="0"/>
+              </a:spcBef>
+              <a:spcAft>
+                <a:spcPts val="0"/>
+              </a:spcAft>
+              <a:buSzPts val="1400"/>
+              <a:buNone/>
+              <a:defRPr sz="1200" b="0" i="0" u="none" strike="noStrike" cap="none">
                 <a:solidFill>
                   <a:schemeClr val="dk1"/>
                 </a:solidFill>
@@ -810,16 +830,16 @@
                 <a:sym typeface="Arial"/>
               </a:defRPr>
             </a:lvl3pPr>
-            <a:lvl4pPr indent="-228600" lvl="3" marL="1828800" marR="0" rtl="0" algn="l">
-              <a:spcBef>
-                <a:spcPts val="0"/>
-              </a:spcBef>
-              <a:spcAft>
-                <a:spcPts val="0"/>
-              </a:spcAft>
-              <a:buSzPts val="1400"/>
-              <a:buNone/>
-              <a:defRPr b="0" i="0" sz="1200" u="none" cap="none" strike="noStrike">
+            <a:lvl4pPr marL="1828800" marR="0" lvl="3" indent="-228600" algn="l" rtl="0">
+              <a:spcBef>
+                <a:spcPts val="0"/>
+              </a:spcBef>
+              <a:spcAft>
+                <a:spcPts val="0"/>
+              </a:spcAft>
+              <a:buSzPts val="1400"/>
+              <a:buNone/>
+              <a:defRPr sz="1200" b="0" i="0" u="none" strike="noStrike" cap="none">
                 <a:solidFill>
                   <a:schemeClr val="dk1"/>
                 </a:solidFill>
@@ -829,16 +849,16 @@
                 <a:sym typeface="Arial"/>
               </a:defRPr>
             </a:lvl4pPr>
-            <a:lvl5pPr indent="-228600" lvl="4" marL="2286000" marR="0" rtl="0" algn="l">
-              <a:spcBef>
-                <a:spcPts val="0"/>
-              </a:spcBef>
-              <a:spcAft>
-                <a:spcPts val="0"/>
-              </a:spcAft>
-              <a:buSzPts val="1400"/>
-              <a:buNone/>
-              <a:defRPr b="0" i="0" sz="1200" u="none" cap="none" strike="noStrike">
+            <a:lvl5pPr marL="2286000" marR="0" lvl="4" indent="-228600" algn="l" rtl="0">
+              <a:spcBef>
+                <a:spcPts val="0"/>
+              </a:spcBef>
+              <a:spcAft>
+                <a:spcPts val="0"/>
+              </a:spcAft>
+              <a:buSzPts val="1400"/>
+              <a:buNone/>
+              <a:defRPr sz="1200" b="0" i="0" u="none" strike="noStrike" cap="none">
                 <a:solidFill>
                   <a:schemeClr val="dk1"/>
                 </a:solidFill>
@@ -848,16 +868,16 @@
                 <a:sym typeface="Arial"/>
               </a:defRPr>
             </a:lvl5pPr>
-            <a:lvl6pPr indent="-228600" lvl="5" marL="2743200" marR="0" rtl="0" algn="l">
-              <a:spcBef>
-                <a:spcPts val="0"/>
-              </a:spcBef>
-              <a:spcAft>
-                <a:spcPts val="0"/>
-              </a:spcAft>
-              <a:buSzPts val="1400"/>
-              <a:buNone/>
-              <a:defRPr b="0" i="0" sz="1200" u="none" cap="none" strike="noStrike">
+            <a:lvl6pPr marL="2743200" marR="0" lvl="5" indent="-228600" algn="l" rtl="0">
+              <a:spcBef>
+                <a:spcPts val="0"/>
+              </a:spcBef>
+              <a:spcAft>
+                <a:spcPts val="0"/>
+              </a:spcAft>
+              <a:buSzPts val="1400"/>
+              <a:buNone/>
+              <a:defRPr sz="1200" b="0" i="0" u="none" strike="noStrike" cap="none">
                 <a:solidFill>
                   <a:schemeClr val="dk1"/>
                 </a:solidFill>
@@ -867,16 +887,16 @@
                 <a:sym typeface="Arial"/>
               </a:defRPr>
             </a:lvl6pPr>
-            <a:lvl7pPr indent="-228600" lvl="6" marL="3200400" marR="0" rtl="0" algn="l">
-              <a:spcBef>
-                <a:spcPts val="0"/>
-              </a:spcBef>
-              <a:spcAft>
-                <a:spcPts val="0"/>
-              </a:spcAft>
-              <a:buSzPts val="1400"/>
-              <a:buNone/>
-              <a:defRPr b="0" i="0" sz="1200" u="none" cap="none" strike="noStrike">
+            <a:lvl7pPr marL="3200400" marR="0" lvl="6" indent="-228600" algn="l" rtl="0">
+              <a:spcBef>
+                <a:spcPts val="0"/>
+              </a:spcBef>
+              <a:spcAft>
+                <a:spcPts val="0"/>
+              </a:spcAft>
+              <a:buSzPts val="1400"/>
+              <a:buNone/>
+              <a:defRPr sz="1200" b="0" i="0" u="none" strike="noStrike" cap="none">
                 <a:solidFill>
                   <a:schemeClr val="dk1"/>
                 </a:solidFill>
@@ -886,16 +906,16 @@
                 <a:sym typeface="Arial"/>
               </a:defRPr>
             </a:lvl7pPr>
-            <a:lvl8pPr indent="-228600" lvl="7" marL="3657600" marR="0" rtl="0" algn="l">
-              <a:spcBef>
-                <a:spcPts val="0"/>
-              </a:spcBef>
-              <a:spcAft>
-                <a:spcPts val="0"/>
-              </a:spcAft>
-              <a:buSzPts val="1400"/>
-              <a:buNone/>
-              <a:defRPr b="0" i="0" sz="1200" u="none" cap="none" strike="noStrike">
+            <a:lvl8pPr marL="3657600" marR="0" lvl="7" indent="-228600" algn="l" rtl="0">
+              <a:spcBef>
+                <a:spcPts val="0"/>
+              </a:spcBef>
+              <a:spcAft>
+                <a:spcPts val="0"/>
+              </a:spcAft>
+              <a:buSzPts val="1400"/>
+              <a:buNone/>
+              <a:defRPr sz="1200" b="0" i="0" u="none" strike="noStrike" cap="none">
                 <a:solidFill>
                   <a:schemeClr val="dk1"/>
                 </a:solidFill>
@@ -905,16 +925,16 @@
                 <a:sym typeface="Arial"/>
               </a:defRPr>
             </a:lvl8pPr>
-            <a:lvl9pPr indent="-228600" lvl="8" marL="4114800" marR="0" rtl="0" algn="l">
-              <a:spcBef>
-                <a:spcPts val="0"/>
-              </a:spcBef>
-              <a:spcAft>
-                <a:spcPts val="0"/>
-              </a:spcAft>
-              <a:buSzPts val="1400"/>
-              <a:buNone/>
-              <a:defRPr b="0" i="0" sz="1200" u="none" cap="none" strike="noStrike">
+            <a:lvl9pPr marL="4114800" marR="0" lvl="8" indent="-228600" algn="l" rtl="0">
+              <a:spcBef>
+                <a:spcPts val="0"/>
+              </a:spcBef>
+              <a:spcAft>
+                <a:spcPts val="0"/>
+              </a:spcAft>
+              <a:buSzPts val="1400"/>
+              <a:buNone/>
+              <a:defRPr sz="1200" b="0" i="0" u="none" strike="noStrike" cap="none">
                 <a:solidFill>
                   <a:schemeClr val="dk1"/>
                 </a:solidFill>
@@ -925,15 +945,19 @@
               </a:defRPr>
             </a:lvl9pPr>
           </a:lstStyle>
-          <a:p/>
+          <a:p>
+            <a:endParaRPr/>
+          </a:p>
         </p:txBody>
       </p:sp>
       <p:sp>
         <p:nvSpPr>
           <p:cNvPr id="7" name="Google Shape;7;n"/>
-          <p:cNvSpPr txBox="1"/>
+          <p:cNvSpPr txBox="1">
+            <a:spLocks noGrp="1"/>
+          </p:cNvSpPr>
           <p:nvPr>
-            <p:ph idx="11" type="ftr"/>
+            <p:ph type="ftr" idx="11"/>
           </p:nvPr>
         </p:nvSpPr>
         <p:spPr>
@@ -950,20 +974,20 @@
           </a:ln>
         </p:spPr>
         <p:txBody>
-          <a:bodyPr anchorCtr="0" anchor="b" bIns="45700" lIns="91425" spcFirstLastPara="1" rIns="91425" wrap="square" tIns="45700">
+          <a:bodyPr spcFirstLastPara="1" wrap="square" lIns="91425" tIns="45700" rIns="91425" bIns="45700" anchor="b" anchorCtr="0">
             <a:noAutofit/>
           </a:bodyPr>
           <a:lstStyle>
-            <a:lvl1pPr lvl="0" marR="0" rtl="0" algn="l">
-              <a:spcBef>
-                <a:spcPts val="0"/>
-              </a:spcBef>
-              <a:spcAft>
-                <a:spcPts val="0"/>
-              </a:spcAft>
-              <a:buSzPts val="1400"/>
-              <a:buNone/>
-              <a:defRPr b="0" i="0" sz="1200" u="none" cap="none" strike="noStrike">
+            <a:lvl1pPr marR="0" lvl="0" algn="l" rtl="0">
+              <a:spcBef>
+                <a:spcPts val="0"/>
+              </a:spcBef>
+              <a:spcAft>
+                <a:spcPts val="0"/>
+              </a:spcAft>
+              <a:buSzPts val="1400"/>
+              <a:buNone/>
+              <a:defRPr sz="1200" b="0" i="0" u="none" strike="noStrike" cap="none">
                 <a:solidFill>
                   <a:schemeClr val="dk1"/>
                 </a:solidFill>
@@ -973,16 +997,16 @@
                 <a:sym typeface="Arial"/>
               </a:defRPr>
             </a:lvl1pPr>
-            <a:lvl2pPr lvl="1" marR="0" rtl="0" algn="l">
-              <a:spcBef>
-                <a:spcPts val="0"/>
-              </a:spcBef>
-              <a:spcAft>
-                <a:spcPts val="0"/>
-              </a:spcAft>
-              <a:buSzPts val="1400"/>
-              <a:buNone/>
-              <a:defRPr b="0" i="0" sz="1800" u="none" cap="none" strike="noStrike">
+            <a:lvl2pPr marR="0" lvl="1" algn="l" rtl="0">
+              <a:spcBef>
+                <a:spcPts val="0"/>
+              </a:spcBef>
+              <a:spcAft>
+                <a:spcPts val="0"/>
+              </a:spcAft>
+              <a:buSzPts val="1400"/>
+              <a:buNone/>
+              <a:defRPr sz="1800" b="0" i="0" u="none" strike="noStrike" cap="none">
                 <a:solidFill>
                   <a:schemeClr val="dk1"/>
                 </a:solidFill>
@@ -992,16 +1016,16 @@
                 <a:sym typeface="Arial"/>
               </a:defRPr>
             </a:lvl2pPr>
-            <a:lvl3pPr lvl="2" marR="0" rtl="0" algn="l">
-              <a:spcBef>
-                <a:spcPts val="0"/>
-              </a:spcBef>
-              <a:spcAft>
-                <a:spcPts val="0"/>
-              </a:spcAft>
-              <a:buSzPts val="1400"/>
-              <a:buNone/>
-              <a:defRPr b="0" i="0" sz="1800" u="none" cap="none" strike="noStrike">
+            <a:lvl3pPr marR="0" lvl="2" algn="l" rtl="0">
+              <a:spcBef>
+                <a:spcPts val="0"/>
+              </a:spcBef>
+              <a:spcAft>
+                <a:spcPts val="0"/>
+              </a:spcAft>
+              <a:buSzPts val="1400"/>
+              <a:buNone/>
+              <a:defRPr sz="1800" b="0" i="0" u="none" strike="noStrike" cap="none">
                 <a:solidFill>
                   <a:schemeClr val="dk1"/>
                 </a:solidFill>
@@ -1011,16 +1035,16 @@
                 <a:sym typeface="Arial"/>
               </a:defRPr>
             </a:lvl3pPr>
-            <a:lvl4pPr lvl="3" marR="0" rtl="0" algn="l">
-              <a:spcBef>
-                <a:spcPts val="0"/>
-              </a:spcBef>
-              <a:spcAft>
-                <a:spcPts val="0"/>
-              </a:spcAft>
-              <a:buSzPts val="1400"/>
-              <a:buNone/>
-              <a:defRPr b="0" i="0" sz="1800" u="none" cap="none" strike="noStrike">
+            <a:lvl4pPr marR="0" lvl="3" algn="l" rtl="0">
+              <a:spcBef>
+                <a:spcPts val="0"/>
+              </a:spcBef>
+              <a:spcAft>
+                <a:spcPts val="0"/>
+              </a:spcAft>
+              <a:buSzPts val="1400"/>
+              <a:buNone/>
+              <a:defRPr sz="1800" b="0" i="0" u="none" strike="noStrike" cap="none">
                 <a:solidFill>
                   <a:schemeClr val="dk1"/>
                 </a:solidFill>
@@ -1030,16 +1054,16 @@
                 <a:sym typeface="Arial"/>
               </a:defRPr>
             </a:lvl4pPr>
-            <a:lvl5pPr lvl="4" marR="0" rtl="0" algn="l">
-              <a:spcBef>
-                <a:spcPts val="0"/>
-              </a:spcBef>
-              <a:spcAft>
-                <a:spcPts val="0"/>
-              </a:spcAft>
-              <a:buSzPts val="1400"/>
-              <a:buNone/>
-              <a:defRPr b="0" i="0" sz="1800" u="none" cap="none" strike="noStrike">
+            <a:lvl5pPr marR="0" lvl="4" algn="l" rtl="0">
+              <a:spcBef>
+                <a:spcPts val="0"/>
+              </a:spcBef>
+              <a:spcAft>
+                <a:spcPts val="0"/>
+              </a:spcAft>
+              <a:buSzPts val="1400"/>
+              <a:buNone/>
+              <a:defRPr sz="1800" b="0" i="0" u="none" strike="noStrike" cap="none">
                 <a:solidFill>
                   <a:schemeClr val="dk1"/>
                 </a:solidFill>
@@ -1049,16 +1073,16 @@
                 <a:sym typeface="Arial"/>
               </a:defRPr>
             </a:lvl5pPr>
-            <a:lvl6pPr lvl="5" marR="0" rtl="0" algn="l">
-              <a:spcBef>
-                <a:spcPts val="0"/>
-              </a:spcBef>
-              <a:spcAft>
-                <a:spcPts val="0"/>
-              </a:spcAft>
-              <a:buSzPts val="1400"/>
-              <a:buNone/>
-              <a:defRPr b="0" i="0" sz="1800" u="none" cap="none" strike="noStrike">
+            <a:lvl6pPr marR="0" lvl="5" algn="l" rtl="0">
+              <a:spcBef>
+                <a:spcPts val="0"/>
+              </a:spcBef>
+              <a:spcAft>
+                <a:spcPts val="0"/>
+              </a:spcAft>
+              <a:buSzPts val="1400"/>
+              <a:buNone/>
+              <a:defRPr sz="1800" b="0" i="0" u="none" strike="noStrike" cap="none">
                 <a:solidFill>
                   <a:schemeClr val="dk1"/>
                 </a:solidFill>
@@ -1068,16 +1092,16 @@
                 <a:sym typeface="Arial"/>
               </a:defRPr>
             </a:lvl6pPr>
-            <a:lvl7pPr lvl="6" marR="0" rtl="0" algn="l">
-              <a:spcBef>
-                <a:spcPts val="0"/>
-              </a:spcBef>
-              <a:spcAft>
-                <a:spcPts val="0"/>
-              </a:spcAft>
-              <a:buSzPts val="1400"/>
-              <a:buNone/>
-              <a:defRPr b="0" i="0" sz="1800" u="none" cap="none" strike="noStrike">
+            <a:lvl7pPr marR="0" lvl="6" algn="l" rtl="0">
+              <a:spcBef>
+                <a:spcPts val="0"/>
+              </a:spcBef>
+              <a:spcAft>
+                <a:spcPts val="0"/>
+              </a:spcAft>
+              <a:buSzPts val="1400"/>
+              <a:buNone/>
+              <a:defRPr sz="1800" b="0" i="0" u="none" strike="noStrike" cap="none">
                 <a:solidFill>
                   <a:schemeClr val="dk1"/>
                 </a:solidFill>
@@ -1087,16 +1111,16 @@
                 <a:sym typeface="Arial"/>
               </a:defRPr>
             </a:lvl7pPr>
-            <a:lvl8pPr lvl="7" marR="0" rtl="0" algn="l">
-              <a:spcBef>
-                <a:spcPts val="0"/>
-              </a:spcBef>
-              <a:spcAft>
-                <a:spcPts val="0"/>
-              </a:spcAft>
-              <a:buSzPts val="1400"/>
-              <a:buNone/>
-              <a:defRPr b="0" i="0" sz="1800" u="none" cap="none" strike="noStrike">
+            <a:lvl8pPr marR="0" lvl="7" algn="l" rtl="0">
+              <a:spcBef>
+                <a:spcPts val="0"/>
+              </a:spcBef>
+              <a:spcAft>
+                <a:spcPts val="0"/>
+              </a:spcAft>
+              <a:buSzPts val="1400"/>
+              <a:buNone/>
+              <a:defRPr sz="1800" b="0" i="0" u="none" strike="noStrike" cap="none">
                 <a:solidFill>
                   <a:schemeClr val="dk1"/>
                 </a:solidFill>
@@ -1106,16 +1130,16 @@
                 <a:sym typeface="Arial"/>
               </a:defRPr>
             </a:lvl8pPr>
-            <a:lvl9pPr lvl="8" marR="0" rtl="0" algn="l">
-              <a:spcBef>
-                <a:spcPts val="0"/>
-              </a:spcBef>
-              <a:spcAft>
-                <a:spcPts val="0"/>
-              </a:spcAft>
-              <a:buSzPts val="1400"/>
-              <a:buNone/>
-              <a:defRPr b="0" i="0" sz="1800" u="none" cap="none" strike="noStrike">
+            <a:lvl9pPr marR="0" lvl="8" algn="l" rtl="0">
+              <a:spcBef>
+                <a:spcPts val="0"/>
+              </a:spcBef>
+              <a:spcAft>
+                <a:spcPts val="0"/>
+              </a:spcAft>
+              <a:buSzPts val="1400"/>
+              <a:buNone/>
+              <a:defRPr sz="1800" b="0" i="0" u="none" strike="noStrike" cap="none">
                 <a:solidFill>
                   <a:schemeClr val="dk1"/>
                 </a:solidFill>
@@ -1126,15 +1150,19 @@
               </a:defRPr>
             </a:lvl9pPr>
           </a:lstStyle>
-          <a:p/>
+          <a:p>
+            <a:endParaRPr/>
+          </a:p>
         </p:txBody>
       </p:sp>
       <p:sp>
         <p:nvSpPr>
           <p:cNvPr id="8" name="Google Shape;8;n"/>
-          <p:cNvSpPr txBox="1"/>
+          <p:cNvSpPr txBox="1">
+            <a:spLocks noGrp="1"/>
+          </p:cNvSpPr>
           <p:nvPr>
-            <p:ph idx="12" type="sldNum"/>
+            <p:ph type="sldNum" idx="12"/>
           </p:nvPr>
         </p:nvSpPr>
         <p:spPr>
@@ -1151,12 +1179,12 @@
           </a:ln>
         </p:spPr>
         <p:txBody>
-          <a:bodyPr anchorCtr="0" anchor="b" bIns="45700" lIns="91425" spcFirstLastPara="1" rIns="91425" wrap="square" tIns="45700">
+          <a:bodyPr spcFirstLastPara="1" wrap="square" lIns="91425" tIns="45700" rIns="91425" bIns="45700" anchor="b" anchorCtr="0">
             <a:noAutofit/>
           </a:bodyPr>
           <a:lstStyle/>
           <a:p>
-            <a:pPr indent="0" lvl="0" marL="0" marR="0" rtl="0" algn="r">
+            <a:pPr marL="0" marR="0" lvl="0" indent="0" algn="r" rtl="0">
               <a:spcBef>
                 <a:spcPts val="0"/>
               </a:spcBef>
@@ -1166,7 +1194,7 @@
               <a:buNone/>
             </a:pPr>
             <a:fld id="{00000000-1234-1234-1234-123412341234}" type="slidenum">
-              <a:rPr b="0" i="0" lang="en-CA" sz="1200" u="none" cap="none" strike="noStrike">
+              <a:rPr lang="en-CA" sz="1200" b="0" i="0" u="none" strike="noStrike" cap="none">
                 <a:solidFill>
                   <a:schemeClr val="dk1"/>
                 </a:solidFill>
@@ -1177,7 +1205,7 @@
               </a:rPr>
               <a:t>‹#›</a:t>
             </a:fld>
-            <a:endParaRPr b="0" i="0" sz="1200" u="none" cap="none" strike="noStrike">
+            <a:endParaRPr sz="1200" b="0" i="0" u="none" strike="noStrike" cap="none">
               <a:solidFill>
                 <a:schemeClr val="dk1"/>
               </a:solidFill>
@@ -1191,9 +1219,9 @@
       </p:sp>
     </p:spTree>
   </p:cSld>
-  <p:clrMap accent1="accent1" accent2="accent2" accent3="accent3" accent4="accent4" accent5="accent5" accent6="accent6" bg1="lt1" bg2="dk2" tx1="dk1" tx2="lt2" folHlink="folHlink" hlink="hlink"/>
+  <p:clrMap bg1="lt1" tx1="dk1" bg2="dk2" tx2="lt2" accent1="accent1" accent2="accent2" accent3="accent3" accent4="accent4" accent5="accent5" accent6="accent6" hlink="hlink" folHlink="folHlink"/>
   <p:notesStyle>
-    <a:defPPr lvl="0" marR="0" rtl="0" algn="l">
+    <a:defPPr marR="0" lvl="0" algn="l" rtl="0">
       <a:lnSpc>
         <a:spcPct val="100000"/>
       </a:lnSpc>
@@ -1204,7 +1232,7 @@
         <a:spcPts val="0"/>
       </a:spcAft>
     </a:defPPr>
-    <a:lvl1pPr lvl="0" marR="0" rtl="0" algn="l">
+    <a:lvl1pPr marR="0" lvl="0" algn="l" rtl="0">
       <a:lnSpc>
         <a:spcPct val="100000"/>
       </a:lnSpc>
@@ -1218,7 +1246,7 @@
         <a:srgbClr val="000000"/>
       </a:buClr>
       <a:buFont typeface="Arial"/>
-      <a:defRPr b="0" i="0" sz="1400" u="none" cap="none" strike="noStrike">
+      <a:defRPr sz="1400" b="0" i="0" u="none" strike="noStrike" cap="none">
         <a:solidFill>
           <a:srgbClr val="000000"/>
         </a:solidFill>
@@ -1228,7 +1256,7 @@
         <a:sym typeface="Arial"/>
       </a:defRPr>
     </a:lvl1pPr>
-    <a:lvl2pPr lvl="1" marR="0" rtl="0" algn="l">
+    <a:lvl2pPr marR="0" lvl="1" algn="l" rtl="0">
       <a:lnSpc>
         <a:spcPct val="100000"/>
       </a:lnSpc>
@@ -1242,7 +1270,7 @@
         <a:srgbClr val="000000"/>
       </a:buClr>
       <a:buFont typeface="Arial"/>
-      <a:defRPr b="0" i="0" sz="1400" u="none" cap="none" strike="noStrike">
+      <a:defRPr sz="1400" b="0" i="0" u="none" strike="noStrike" cap="none">
         <a:solidFill>
           <a:srgbClr val="000000"/>
         </a:solidFill>
@@ -1252,7 +1280,7 @@
         <a:sym typeface="Arial"/>
       </a:defRPr>
     </a:lvl2pPr>
-    <a:lvl3pPr lvl="2" marR="0" rtl="0" algn="l">
+    <a:lvl3pPr marR="0" lvl="2" algn="l" rtl="0">
       <a:lnSpc>
         <a:spcPct val="100000"/>
       </a:lnSpc>
@@ -1266,7 +1294,7 @@
         <a:srgbClr val="000000"/>
       </a:buClr>
       <a:buFont typeface="Arial"/>
-      <a:defRPr b="0" i="0" sz="1400" u="none" cap="none" strike="noStrike">
+      <a:defRPr sz="1400" b="0" i="0" u="none" strike="noStrike" cap="none">
         <a:solidFill>
           <a:srgbClr val="000000"/>
         </a:solidFill>
@@ -1276,7 +1304,7 @@
         <a:sym typeface="Arial"/>
       </a:defRPr>
     </a:lvl3pPr>
-    <a:lvl4pPr lvl="3" marR="0" rtl="0" algn="l">
+    <a:lvl4pPr marR="0" lvl="3" algn="l" rtl="0">
       <a:lnSpc>
         <a:spcPct val="100000"/>
       </a:lnSpc>
@@ -1290,7 +1318,7 @@
         <a:srgbClr val="000000"/>
       </a:buClr>
       <a:buFont typeface="Arial"/>
-      <a:defRPr b="0" i="0" sz="1400" u="none" cap="none" strike="noStrike">
+      <a:defRPr sz="1400" b="0" i="0" u="none" strike="noStrike" cap="none">
         <a:solidFill>
           <a:srgbClr val="000000"/>
         </a:solidFill>
@@ -1300,7 +1328,7 @@
         <a:sym typeface="Arial"/>
       </a:defRPr>
     </a:lvl4pPr>
-    <a:lvl5pPr lvl="4" marR="0" rtl="0" algn="l">
+    <a:lvl5pPr marR="0" lvl="4" algn="l" rtl="0">
       <a:lnSpc>
         <a:spcPct val="100000"/>
       </a:lnSpc>
@@ -1314,7 +1342,7 @@
         <a:srgbClr val="000000"/>
       </a:buClr>
       <a:buFont typeface="Arial"/>
-      <a:defRPr b="0" i="0" sz="1400" u="none" cap="none" strike="noStrike">
+      <a:defRPr sz="1400" b="0" i="0" u="none" strike="noStrike" cap="none">
         <a:solidFill>
           <a:srgbClr val="000000"/>
         </a:solidFill>
@@ -1324,7 +1352,7 @@
         <a:sym typeface="Arial"/>
       </a:defRPr>
     </a:lvl5pPr>
-    <a:lvl6pPr lvl="5" marR="0" rtl="0" algn="l">
+    <a:lvl6pPr marR="0" lvl="5" algn="l" rtl="0">
       <a:lnSpc>
         <a:spcPct val="100000"/>
       </a:lnSpc>
@@ -1338,7 +1366,7 @@
         <a:srgbClr val="000000"/>
       </a:buClr>
       <a:buFont typeface="Arial"/>
-      <a:defRPr b="0" i="0" sz="1400" u="none" cap="none" strike="noStrike">
+      <a:defRPr sz="1400" b="0" i="0" u="none" strike="noStrike" cap="none">
         <a:solidFill>
           <a:srgbClr val="000000"/>
         </a:solidFill>
@@ -1348,7 +1376,7 @@
         <a:sym typeface="Arial"/>
       </a:defRPr>
     </a:lvl6pPr>
-    <a:lvl7pPr lvl="6" marR="0" rtl="0" algn="l">
+    <a:lvl7pPr marR="0" lvl="6" algn="l" rtl="0">
       <a:lnSpc>
         <a:spcPct val="100000"/>
       </a:lnSpc>
@@ -1362,7 +1390,7 @@
         <a:srgbClr val="000000"/>
       </a:buClr>
       <a:buFont typeface="Arial"/>
-      <a:defRPr b="0" i="0" sz="1400" u="none" cap="none" strike="noStrike">
+      <a:defRPr sz="1400" b="0" i="0" u="none" strike="noStrike" cap="none">
         <a:solidFill>
           <a:srgbClr val="000000"/>
         </a:solidFill>
@@ -1372,7 +1400,7 @@
         <a:sym typeface="Arial"/>
       </a:defRPr>
     </a:lvl7pPr>
-    <a:lvl8pPr lvl="7" marR="0" rtl="0" algn="l">
+    <a:lvl8pPr marR="0" lvl="7" algn="l" rtl="0">
       <a:lnSpc>
         <a:spcPct val="100000"/>
       </a:lnSpc>
@@ -1386,7 +1414,7 @@
         <a:srgbClr val="000000"/>
       </a:buClr>
       <a:buFont typeface="Arial"/>
-      <a:defRPr b="0" i="0" sz="1400" u="none" cap="none" strike="noStrike">
+      <a:defRPr sz="1400" b="0" i="0" u="none" strike="noStrike" cap="none">
         <a:solidFill>
           <a:srgbClr val="000000"/>
         </a:solidFill>
@@ -1396,7 +1424,7 @@
         <a:sym typeface="Arial"/>
       </a:defRPr>
     </a:lvl8pPr>
-    <a:lvl9pPr lvl="8" marR="0" rtl="0" algn="l">
+    <a:lvl9pPr marR="0" lvl="8" algn="l" rtl="0">
       <a:lnSpc>
         <a:spcPct val="100000"/>
       </a:lnSpc>
@@ -1410,7 +1438,7 @@
         <a:srgbClr val="000000"/>
       </a:buClr>
       <a:buFont typeface="Arial"/>
-      <a:defRPr b="0" i="0" sz="1400" u="none" cap="none" strike="noStrike">
+      <a:defRPr sz="1400" b="0" i="0" u="none" strike="noStrike" cap="none">
         <a:solidFill>
           <a:srgbClr val="000000"/>
         </a:solidFill>
@@ -1425,11 +1453,11 @@
 </file>
 
 <file path=ppt/notesSlides/notesSlide1.xml><?xml version="1.0" encoding="utf-8"?>
-<p:notes xmlns:a="http://schemas.openxmlformats.org/drawingml/2006/main" xmlns:r="http://schemas.openxmlformats.org/officeDocument/2006/relationships" xmlns:mc="http://schemas.openxmlformats.org/markup-compatibility/2006" xmlns:mv="urn:schemas-microsoft-com:mac:vml" xmlns:p="http://schemas.openxmlformats.org/presentationml/2006/main" xmlns:c="http://schemas.openxmlformats.org/drawingml/2006/chart" xmlns:dgm="http://schemas.openxmlformats.org/drawingml/2006/diagram" xmlns:o="urn:schemas-microsoft-com:office:office" xmlns:v="urn:schemas-microsoft-com:vml" xmlns:pvml="urn:schemas-microsoft-com:office:powerpoint" xmlns:com="http://schemas.openxmlformats.org/drawingml/2006/compatibility" xmlns:p14="http://schemas.microsoft.com/office/powerpoint/2010/main" xmlns:p15="http://schemas.microsoft.com/office/powerpoint/2012/main" xmlns:ahyp="http://schemas.microsoft.com/office/drawing/2018/hyperlinkcolor" showMasterPhAnim="0" showMasterSp="0">
+<p:notes xmlns:a="http://schemas.openxmlformats.org/drawingml/2006/main" xmlns:r="http://schemas.openxmlformats.org/officeDocument/2006/relationships" xmlns:p="http://schemas.openxmlformats.org/presentationml/2006/main" showMasterSp="0" showMasterPhAnim="0">
   <p:cSld>
     <p:spTree>
       <p:nvGrpSpPr>
-        <p:cNvPr id="84" name="Shape 84"/>
+        <p:cNvPr id="1" name="Shape 84"/>
         <p:cNvGrpSpPr/>
         <p:nvPr/>
       </p:nvGrpSpPr>
@@ -1444,9 +1472,11 @@
       <p:sp>
         <p:nvSpPr>
           <p:cNvPr id="85" name="Google Shape;85;p1:notes"/>
-          <p:cNvSpPr/>
+          <p:cNvSpPr>
+            <a:spLocks noGrp="1" noRot="1" noChangeAspect="1"/>
+          </p:cNvSpPr>
           <p:nvPr>
-            <p:ph idx="2" type="sldImg"/>
+            <p:ph type="sldImg" idx="2"/>
           </p:nvPr>
         </p:nvSpPr>
         <p:spPr>
@@ -1455,9 +1485,13 @@
             <a:ext cx="7277100" cy="3086100"/>
           </a:xfrm>
           <a:custGeom>
-            <a:rect b="b" l="l" r="r" t="t"/>
+            <a:avLst/>
+            <a:gdLst/>
+            <a:ahLst/>
+            <a:cxnLst/>
+            <a:rect l="l" t="t" r="r" b="b"/>
             <a:pathLst>
-              <a:path extrusionOk="0" h="120000" w="120000">
+              <a:path w="120000" h="120000" extrusionOk="0">
                 <a:moveTo>
                   <a:pt x="0" y="0"/>
                 </a:moveTo>
@@ -1475,23 +1509,25 @@
             </a:pathLst>
           </a:custGeom>
           <a:noFill/>
-          <a:ln cap="flat" cmpd="sng" w="12700">
+          <a:ln w="12700" cap="flat" cmpd="sng">
             <a:solidFill>
               <a:srgbClr val="000000"/>
             </a:solidFill>
             <a:prstDash val="solid"/>
             <a:round/>
-            <a:headEnd len="sm" w="sm" type="none"/>
-            <a:tailEnd len="sm" w="sm" type="none"/>
+            <a:headEnd type="none" w="sm" len="sm"/>
+            <a:tailEnd type="none" w="sm" len="sm"/>
           </a:ln>
         </p:spPr>
       </p:sp>
       <p:sp>
         <p:nvSpPr>
           <p:cNvPr id="86" name="Google Shape;86;p1:notes"/>
-          <p:cNvSpPr txBox="1"/>
+          <p:cNvSpPr txBox="1">
+            <a:spLocks noGrp="1"/>
+          </p:cNvSpPr>
           <p:nvPr>
-            <p:ph idx="1" type="body"/>
+            <p:ph type="body" idx="1"/>
           </p:nvPr>
         </p:nvSpPr>
         <p:spPr>
@@ -1508,12 +1544,12 @@
           </a:ln>
         </p:spPr>
         <p:txBody>
-          <a:bodyPr anchorCtr="0" anchor="t" bIns="45700" lIns="91425" spcFirstLastPara="1" rIns="91425" wrap="square" tIns="45700">
+          <a:bodyPr spcFirstLastPara="1" wrap="square" lIns="91425" tIns="45700" rIns="91425" bIns="45700" anchor="t" anchorCtr="0">
             <a:noAutofit/>
           </a:bodyPr>
           <a:lstStyle/>
           <a:p>
-            <a:pPr indent="0" lvl="0" marL="0" rtl="0" algn="l">
+            <a:pPr marL="0" lvl="0" indent="0" algn="l" rtl="0">
               <a:spcBef>
                 <a:spcPts val="0"/>
               </a:spcBef>
@@ -1523,7 +1559,7 @@
               <a:buNone/>
             </a:pPr>
             <a:r>
-              <a:rPr b="1" lang="en-CA" sz="1200">
+              <a:rPr lang="en-CA" sz="1200" b="1">
                 <a:solidFill>
                   <a:schemeClr val="dk1"/>
                 </a:solidFill>
@@ -1532,10 +1568,46 @@
                 <a:cs typeface="Arial"/>
                 <a:sym typeface="Arial"/>
               </a:rPr>
-              <a:t>Figure 2. Systematic evaluation of NeST-VNN model generalizability and performance.</a:t>
+              <a:t>Figure 3. </a:t>
             </a:r>
             <a:r>
-              <a:rPr lang="en-CA" sz="1200">
+              <a:rPr lang="en-CA" sz="1200" b="1" dirty="0">
+                <a:solidFill>
+                  <a:schemeClr val="dk1"/>
+                </a:solidFill>
+                <a:latin typeface="Arial"/>
+                <a:ea typeface="Arial"/>
+                <a:cs typeface="Arial"/>
+                <a:sym typeface="Arial"/>
+              </a:rPr>
+              <a:t>Systematic evaluation of </a:t>
+            </a:r>
+            <a:r>
+              <a:rPr lang="en-CA" sz="1200" b="1" dirty="0" err="1">
+                <a:solidFill>
+                  <a:schemeClr val="dk1"/>
+                </a:solidFill>
+                <a:latin typeface="Arial"/>
+                <a:ea typeface="Arial"/>
+                <a:cs typeface="Arial"/>
+                <a:sym typeface="Arial"/>
+              </a:rPr>
+              <a:t>NeST</a:t>
+            </a:r>
+            <a:r>
+              <a:rPr lang="en-CA" sz="1200" b="1" dirty="0">
+                <a:solidFill>
+                  <a:schemeClr val="dk1"/>
+                </a:solidFill>
+                <a:latin typeface="Arial"/>
+                <a:ea typeface="Arial"/>
+                <a:cs typeface="Arial"/>
+                <a:sym typeface="Arial"/>
+              </a:rPr>
+              <a:t>-VNN model generalizability and performance.</a:t>
+            </a:r>
+            <a:r>
+              <a:rPr lang="en-CA" sz="1200" dirty="0">
                 <a:solidFill>
                   <a:schemeClr val="dk1"/>
                 </a:solidFill>
@@ -1547,7 +1619,7 @@
               <a:t> </a:t>
             </a:r>
             <a:r>
-              <a:rPr b="1" lang="en-CA" sz="1200">
+              <a:rPr lang="en-CA" sz="1200" b="1" dirty="0">
                 <a:solidFill>
                   <a:schemeClr val="dk1"/>
                 </a:solidFill>
@@ -1559,7 +1631,7 @@
               <a:t>a.</a:t>
             </a:r>
             <a:r>
-              <a:rPr lang="en-CA" sz="1200">
+              <a:rPr lang="en-CA" sz="1200" dirty="0">
                 <a:solidFill>
                   <a:schemeClr val="dk1"/>
                 </a:solidFill>
@@ -1571,7 +1643,7 @@
               <a:t> Case study workflow. </a:t>
             </a:r>
             <a:r>
-              <a:rPr b="1" lang="en-CA" sz="1200">
+              <a:rPr lang="en-CA" sz="1200" b="1" dirty="0">
                 <a:solidFill>
                   <a:schemeClr val="dk1"/>
                 </a:solidFill>
@@ -1583,7 +1655,7 @@
               <a:t>b.</a:t>
             </a:r>
             <a:r>
-              <a:rPr lang="en-CA" sz="1200">
+              <a:rPr lang="en-CA" sz="1200" dirty="0">
                 <a:solidFill>
                   <a:schemeClr val="dk1"/>
                 </a:solidFill>
@@ -1592,10 +1664,34 @@
                 <a:cs typeface="Arial"/>
                 <a:sym typeface="Arial"/>
               </a:rPr>
-              <a:t> Oncoplot illustrating the mutational landscape of the University Health Network (UHN) carboplatin and McGill cisplatin datasets. </a:t>
+              <a:t> </a:t>
             </a:r>
             <a:r>
-              <a:rPr b="1" lang="en-CA" sz="1200">
+              <a:rPr lang="en-CA" sz="1200" dirty="0" err="1">
+                <a:solidFill>
+                  <a:schemeClr val="dk1"/>
+                </a:solidFill>
+                <a:latin typeface="Arial"/>
+                <a:ea typeface="Arial"/>
+                <a:cs typeface="Arial"/>
+                <a:sym typeface="Arial"/>
+              </a:rPr>
+              <a:t>Oncoplot</a:t>
+            </a:r>
+            <a:r>
+              <a:rPr lang="en-CA" sz="1200" dirty="0">
+                <a:solidFill>
+                  <a:schemeClr val="dk1"/>
+                </a:solidFill>
+                <a:latin typeface="Arial"/>
+                <a:ea typeface="Arial"/>
+                <a:cs typeface="Arial"/>
+                <a:sym typeface="Arial"/>
+              </a:rPr>
+              <a:t> illustrating the mutational landscape of the University Health Network (UHN) carboplatin and McGill cisplatin datasets. </a:t>
+            </a:r>
+            <a:r>
+              <a:rPr lang="en-CA" sz="1200" b="1" dirty="0">
                 <a:solidFill>
                   <a:schemeClr val="dk1"/>
                 </a:solidFill>
@@ -1607,7 +1703,7 @@
               <a:t>c.</a:t>
             </a:r>
             <a:r>
-              <a:rPr lang="en-CA" sz="1200">
+              <a:rPr lang="en-CA" sz="1200" dirty="0">
                 <a:solidFill>
                   <a:schemeClr val="dk1"/>
                 </a:solidFill>
@@ -1616,10 +1712,34 @@
                 <a:cs typeface="Arial"/>
                 <a:sym typeface="Arial"/>
               </a:rPr>
-              <a:t> Distribution of drug responses across both cohorts based on modified Response Evaluation Criteria in Solid Tumors (mRECIST). CR, complete response; PR, partial response; SD, stable disease; PD, progressive disease. </a:t>
+              <a:t> Distribution of drug responses across both cohorts based on modified Response Evaluation Criteria in Solid Tumors (</a:t>
             </a:r>
             <a:r>
-              <a:rPr b="1" lang="en-CA" sz="1200">
+              <a:rPr lang="en-CA" sz="1200" dirty="0" err="1">
+                <a:solidFill>
+                  <a:schemeClr val="dk1"/>
+                </a:solidFill>
+                <a:latin typeface="Arial"/>
+                <a:ea typeface="Arial"/>
+                <a:cs typeface="Arial"/>
+                <a:sym typeface="Arial"/>
+              </a:rPr>
+              <a:t>mRECIST</a:t>
+            </a:r>
+            <a:r>
+              <a:rPr lang="en-CA" sz="1200" dirty="0">
+                <a:solidFill>
+                  <a:schemeClr val="dk1"/>
+                </a:solidFill>
+                <a:latin typeface="Arial"/>
+                <a:ea typeface="Arial"/>
+                <a:cs typeface="Arial"/>
+                <a:sym typeface="Arial"/>
+              </a:rPr>
+              <a:t>). CR, complete response; PR, partial response; SD, stable disease; PD, progressive disease. </a:t>
+            </a:r>
+            <a:r>
+              <a:rPr lang="en-CA" sz="1200" b="1" dirty="0">
                 <a:solidFill>
                   <a:schemeClr val="dk1"/>
                 </a:solidFill>
@@ -1631,7 +1751,7 @@
               <a:t>d.</a:t>
             </a:r>
             <a:r>
-              <a:rPr lang="en-CA" sz="1200">
+              <a:rPr lang="en-CA" sz="1200" dirty="0">
                 <a:solidFill>
                   <a:schemeClr val="dk1"/>
                 </a:solidFill>
@@ -1640,10 +1760,34 @@
                 <a:cs typeface="Arial"/>
                 <a:sym typeface="Arial"/>
               </a:rPr>
-              <a:t> Density comparison of 718 NeST-VNN features between datasets. Statistical significance was determined using a two-sided Mann–Whitney U test. **** p &lt; 0.0001; *** p &lt; 0.001; ** p &lt; 0.01; * p &lt; 0.05; ns, not significant. </a:t>
+              <a:t> Density comparison of 718 </a:t>
             </a:r>
             <a:r>
-              <a:rPr b="1" lang="en-CA" sz="1200">
+              <a:rPr lang="en-CA" sz="1200" dirty="0" err="1">
+                <a:solidFill>
+                  <a:schemeClr val="dk1"/>
+                </a:solidFill>
+                <a:latin typeface="Arial"/>
+                <a:ea typeface="Arial"/>
+                <a:cs typeface="Arial"/>
+                <a:sym typeface="Arial"/>
+              </a:rPr>
+              <a:t>NeST</a:t>
+            </a:r>
+            <a:r>
+              <a:rPr lang="en-CA" sz="1200" dirty="0">
+                <a:solidFill>
+                  <a:schemeClr val="dk1"/>
+                </a:solidFill>
+                <a:latin typeface="Arial"/>
+                <a:ea typeface="Arial"/>
+                <a:cs typeface="Arial"/>
+                <a:sym typeface="Arial"/>
+              </a:rPr>
+              <a:t>-VNN features between datasets. Statistical significance was determined using a two-sided Mann–Whitney U test. **** p &lt; 0.0001; *** p &lt; 0.001; ** p &lt; 0.01; * p &lt; 0.05; ns, not significant. </a:t>
+            </a:r>
+            <a:r>
+              <a:rPr lang="en-CA" sz="1200" b="1" dirty="0">
                 <a:solidFill>
                   <a:schemeClr val="dk1"/>
                 </a:solidFill>
@@ -1655,7 +1799,7 @@
               <a:t>e</a:t>
             </a:r>
             <a:r>
-              <a:rPr lang="en-CA" sz="1200">
+              <a:rPr lang="en-CA" sz="1200" dirty="0">
                 <a:solidFill>
                   <a:schemeClr val="dk1"/>
                 </a:solidFill>
@@ -1667,7 +1811,7 @@
               <a:t>. Model transferability. Bar plot summarizing the mean Area Under the Receiver Operating Characteristic Curve (AUC) across fivefold cross-validation, demonstrating model robustness across institutional cohorts. </a:t>
             </a:r>
             <a:r>
-              <a:rPr b="1" lang="en-CA" sz="1200">
+              <a:rPr lang="en-CA" sz="1200" b="1" dirty="0">
                 <a:solidFill>
                   <a:schemeClr val="dk1"/>
                 </a:solidFill>
@@ -1679,7 +1823,7 @@
               <a:t>f. </a:t>
             </a:r>
             <a:r>
-              <a:rPr lang="en-CA" sz="1200">
+              <a:rPr lang="en-CA" sz="1200" dirty="0" err="1">
                 <a:solidFill>
                   <a:schemeClr val="dk1"/>
                 </a:solidFill>
@@ -1688,18 +1832,32 @@
                 <a:cs typeface="Arial"/>
                 <a:sym typeface="Arial"/>
               </a:rPr>
-              <a:t>NeST-VNN model performance. Receiver Operating Characteristic (ROC) curves and corresponding ensemble AUC values for the UHN carboplatin and McGill cisplatin validation sets. </a:t>
+              <a:t>NeST</a:t>
             </a:r>
-            <a:endParaRPr/>
+            <a:r>
+              <a:rPr lang="en-CA" sz="1200" dirty="0">
+                <a:solidFill>
+                  <a:schemeClr val="dk1"/>
+                </a:solidFill>
+                <a:latin typeface="Arial"/>
+                <a:ea typeface="Arial"/>
+                <a:cs typeface="Arial"/>
+                <a:sym typeface="Arial"/>
+              </a:rPr>
+              <a:t>-VNN model performance. Receiver Operating Characteristic (ROC) curves and corresponding ensemble AUC values for the UHN carboplatin and McGill cisplatin validation sets. </a:t>
+            </a:r>
+            <a:endParaRPr dirty="0"/>
           </a:p>
         </p:txBody>
       </p:sp>
       <p:sp>
         <p:nvSpPr>
           <p:cNvPr id="87" name="Google Shape;87;p1:notes"/>
-          <p:cNvSpPr txBox="1"/>
+          <p:cNvSpPr txBox="1">
+            <a:spLocks noGrp="1"/>
+          </p:cNvSpPr>
           <p:nvPr>
-            <p:ph idx="12" type="sldNum"/>
+            <p:ph type="sldNum" idx="12"/>
           </p:nvPr>
         </p:nvSpPr>
         <p:spPr>
@@ -1716,12 +1874,12 @@
           </a:ln>
         </p:spPr>
         <p:txBody>
-          <a:bodyPr anchorCtr="0" anchor="b" bIns="45700" lIns="91425" spcFirstLastPara="1" rIns="91425" wrap="square" tIns="45700">
+          <a:bodyPr spcFirstLastPara="1" wrap="square" lIns="91425" tIns="45700" rIns="91425" bIns="45700" anchor="b" anchorCtr="0">
             <a:noAutofit/>
           </a:bodyPr>
           <a:lstStyle/>
           <a:p>
-            <a:pPr indent="0" lvl="0" marL="0" rtl="0" algn="r">
+            <a:pPr marL="0" lvl="0" indent="0" algn="r" rtl="0">
               <a:spcBef>
                 <a:spcPts val="0"/>
               </a:spcBef>
@@ -1732,7 +1890,7 @@
             </a:pPr>
             <a:fld id="{00000000-1234-1234-1234-123412341234}" type="slidenum">
               <a:rPr lang="en-CA"/>
-              <a:t>‹#›</a:t>
+              <a:t>1</a:t>
             </a:fld>
             <a:endParaRPr/>
           </a:p>
@@ -1747,11 +1905,11 @@
 </file>
 
 <file path=ppt/slideLayouts/slideLayout1.xml><?xml version="1.0" encoding="utf-8"?>
-<p:sldLayout xmlns:a="http://schemas.openxmlformats.org/drawingml/2006/main" xmlns:r="http://schemas.openxmlformats.org/officeDocument/2006/relationships" xmlns:mc="http://schemas.openxmlformats.org/markup-compatibility/2006" xmlns:mv="urn:schemas-microsoft-com:mac:vml" xmlns:p="http://schemas.openxmlformats.org/presentationml/2006/main" xmlns:c="http://schemas.openxmlformats.org/drawingml/2006/chart" xmlns:dgm="http://schemas.openxmlformats.org/drawingml/2006/diagram" xmlns:o="urn:schemas-microsoft-com:office:office" xmlns:v="urn:schemas-microsoft-com:vml" xmlns:pvml="urn:schemas-microsoft-com:office:powerpoint" xmlns:com="http://schemas.openxmlformats.org/drawingml/2006/compatibility" xmlns:p14="http://schemas.microsoft.com/office/powerpoint/2010/main" xmlns:p15="http://schemas.microsoft.com/office/powerpoint/2012/main" xmlns:ahyp="http://schemas.microsoft.com/office/drawing/2018/hyperlinkcolor" matchingName="Title Slide" type="title">
+<p:sldLayout xmlns:a="http://schemas.openxmlformats.org/drawingml/2006/main" xmlns:r="http://schemas.openxmlformats.org/officeDocument/2006/relationships" xmlns:p="http://schemas.openxmlformats.org/presentationml/2006/main" matchingName="Title Slide" type="title">
   <p:cSld name="TITLE">
     <p:spTree>
       <p:nvGrpSpPr>
-        <p:cNvPr id="15" name="Shape 15"/>
+        <p:cNvPr id="1" name="Shape 15"/>
         <p:cNvGrpSpPr/>
         <p:nvPr/>
       </p:nvGrpSpPr>
@@ -1766,7 +1924,9 @@
       <p:sp>
         <p:nvSpPr>
           <p:cNvPr id="16" name="Google Shape;16;p3"/>
-          <p:cNvSpPr txBox="1"/>
+          <p:cNvSpPr txBox="1">
+            <a:spLocks noGrp="1"/>
+          </p:cNvSpPr>
           <p:nvPr>
             <p:ph type="ctrTitle"/>
           </p:nvPr>
@@ -1785,7 +1945,7 @@
           </a:ln>
         </p:spPr>
         <p:txBody>
-          <a:bodyPr anchorCtr="0" anchor="b" bIns="45700" lIns="91425" spcFirstLastPara="1" rIns="91425" wrap="square" tIns="45700">
+          <a:bodyPr spcFirstLastPara="1" wrap="square" lIns="91425" tIns="45700" rIns="91425" bIns="45700" anchor="b" anchorCtr="0">
             <a:normAutofit/>
           </a:bodyPr>
           <a:lstStyle>
@@ -1896,15 +2056,19 @@
               <a:defRPr/>
             </a:lvl9pPr>
           </a:lstStyle>
-          <a:p/>
+          <a:p>
+            <a:endParaRPr/>
+          </a:p>
         </p:txBody>
       </p:sp>
       <p:sp>
         <p:nvSpPr>
           <p:cNvPr id="17" name="Google Shape;17;p3"/>
-          <p:cNvSpPr txBox="1"/>
+          <p:cNvSpPr txBox="1">
+            <a:spLocks noGrp="1"/>
+          </p:cNvSpPr>
           <p:nvPr>
-            <p:ph idx="1" type="subTitle"/>
+            <p:ph type="subTitle" idx="1"/>
           </p:nvPr>
         </p:nvSpPr>
         <p:spPr>
@@ -1921,7 +2085,7 @@
           </a:ln>
         </p:spPr>
         <p:txBody>
-          <a:bodyPr anchorCtr="0" anchor="t" bIns="45700" lIns="91425" spcFirstLastPara="1" rIns="91425" wrap="square" tIns="45700">
+          <a:bodyPr spcFirstLastPara="1" wrap="square" lIns="91425" tIns="45700" rIns="91425" bIns="45700" anchor="t" anchorCtr="0">
             <a:normAutofit/>
           </a:bodyPr>
           <a:lstStyle>
@@ -2079,15 +2243,19 @@
               <a:defRPr sz="1638"/>
             </a:lvl9pPr>
           </a:lstStyle>
-          <a:p/>
+          <a:p>
+            <a:endParaRPr/>
+          </a:p>
         </p:txBody>
       </p:sp>
       <p:sp>
         <p:nvSpPr>
           <p:cNvPr id="18" name="Google Shape;18;p3"/>
-          <p:cNvSpPr txBox="1"/>
+          <p:cNvSpPr txBox="1">
+            <a:spLocks noGrp="1"/>
+          </p:cNvSpPr>
           <p:nvPr>
-            <p:ph idx="10" type="dt"/>
+            <p:ph type="dt" idx="10"/>
           </p:nvPr>
         </p:nvSpPr>
         <p:spPr>
@@ -2104,7 +2272,7 @@
           </a:ln>
         </p:spPr>
         <p:txBody>
-          <a:bodyPr anchorCtr="0" anchor="ctr" bIns="45700" lIns="91425" spcFirstLastPara="1" rIns="91425" wrap="square" tIns="45700">
+          <a:bodyPr spcFirstLastPara="1" wrap="square" lIns="91425" tIns="45700" rIns="91425" bIns="45700" anchor="ctr" anchorCtr="0">
             <a:noAutofit/>
           </a:bodyPr>
           <a:lstStyle>
@@ -2208,15 +2376,19 @@
               <a:defRPr/>
             </a:lvl9pPr>
           </a:lstStyle>
-          <a:p/>
+          <a:p>
+            <a:endParaRPr/>
+          </a:p>
         </p:txBody>
       </p:sp>
       <p:sp>
         <p:nvSpPr>
           <p:cNvPr id="19" name="Google Shape;19;p3"/>
-          <p:cNvSpPr txBox="1"/>
+          <p:cNvSpPr txBox="1">
+            <a:spLocks noGrp="1"/>
+          </p:cNvSpPr>
           <p:nvPr>
-            <p:ph idx="11" type="ftr"/>
+            <p:ph type="ftr" idx="11"/>
           </p:nvPr>
         </p:nvSpPr>
         <p:spPr>
@@ -2233,7 +2405,7 @@
           </a:ln>
         </p:spPr>
         <p:txBody>
-          <a:bodyPr anchorCtr="0" anchor="ctr" bIns="45700" lIns="91425" spcFirstLastPara="1" rIns="91425" wrap="square" tIns="45700">
+          <a:bodyPr spcFirstLastPara="1" wrap="square" lIns="91425" tIns="45700" rIns="91425" bIns="45700" anchor="ctr" anchorCtr="0">
             <a:noAutofit/>
           </a:bodyPr>
           <a:lstStyle>
@@ -2337,15 +2509,19 @@
               <a:defRPr/>
             </a:lvl9pPr>
           </a:lstStyle>
-          <a:p/>
+          <a:p>
+            <a:endParaRPr/>
+          </a:p>
         </p:txBody>
       </p:sp>
       <p:sp>
         <p:nvSpPr>
           <p:cNvPr id="20" name="Google Shape;20;p3"/>
-          <p:cNvSpPr txBox="1"/>
+          <p:cNvSpPr txBox="1">
+            <a:spLocks noGrp="1"/>
+          </p:cNvSpPr>
           <p:nvPr>
-            <p:ph idx="12" type="sldNum"/>
+            <p:ph type="sldNum" idx="12"/>
           </p:nvPr>
         </p:nvSpPr>
         <p:spPr>
@@ -2362,67 +2538,67 @@
           </a:ln>
         </p:spPr>
         <p:txBody>
-          <a:bodyPr anchorCtr="0" anchor="ctr" bIns="45700" lIns="91425" spcFirstLastPara="1" rIns="91425" wrap="square" tIns="45700">
+          <a:bodyPr spcFirstLastPara="1" wrap="square" lIns="91425" tIns="45700" rIns="91425" bIns="45700" anchor="ctr" anchorCtr="0">
             <a:noAutofit/>
           </a:bodyPr>
           <a:lstStyle>
-            <a:lvl1pPr indent="0" lvl="0" marL="0" algn="r">
+            <a:lvl1pPr marL="0" lvl="0" indent="0" algn="r">
               <a:spcBef>
                 <a:spcPts val="0"/>
               </a:spcBef>
               <a:buNone/>
               <a:defRPr/>
             </a:lvl1pPr>
-            <a:lvl2pPr indent="0" lvl="1" marL="0" algn="r">
+            <a:lvl2pPr marL="0" lvl="1" indent="0" algn="r">
               <a:spcBef>
                 <a:spcPts val="0"/>
               </a:spcBef>
               <a:buNone/>
               <a:defRPr/>
             </a:lvl2pPr>
-            <a:lvl3pPr indent="0" lvl="2" marL="0" algn="r">
+            <a:lvl3pPr marL="0" lvl="2" indent="0" algn="r">
               <a:spcBef>
                 <a:spcPts val="0"/>
               </a:spcBef>
               <a:buNone/>
               <a:defRPr/>
             </a:lvl3pPr>
-            <a:lvl4pPr indent="0" lvl="3" marL="0" algn="r">
+            <a:lvl4pPr marL="0" lvl="3" indent="0" algn="r">
               <a:spcBef>
                 <a:spcPts val="0"/>
               </a:spcBef>
               <a:buNone/>
               <a:defRPr/>
             </a:lvl4pPr>
-            <a:lvl5pPr indent="0" lvl="4" marL="0" algn="r">
+            <a:lvl5pPr marL="0" lvl="4" indent="0" algn="r">
               <a:spcBef>
                 <a:spcPts val="0"/>
               </a:spcBef>
               <a:buNone/>
               <a:defRPr/>
             </a:lvl5pPr>
-            <a:lvl6pPr indent="0" lvl="5" marL="0" algn="r">
+            <a:lvl6pPr marL="0" lvl="5" indent="0" algn="r">
               <a:spcBef>
                 <a:spcPts val="0"/>
               </a:spcBef>
               <a:buNone/>
               <a:defRPr/>
             </a:lvl6pPr>
-            <a:lvl7pPr indent="0" lvl="6" marL="0" algn="r">
+            <a:lvl7pPr marL="0" lvl="6" indent="0" algn="r">
               <a:spcBef>
                 <a:spcPts val="0"/>
               </a:spcBef>
               <a:buNone/>
               <a:defRPr/>
             </a:lvl7pPr>
-            <a:lvl8pPr indent="0" lvl="7" marL="0" algn="r">
+            <a:lvl8pPr marL="0" lvl="7" indent="0" algn="r">
               <a:spcBef>
                 <a:spcPts val="0"/>
               </a:spcBef>
               <a:buNone/>
               <a:defRPr/>
             </a:lvl8pPr>
-            <a:lvl9pPr indent="0" lvl="8" marL="0" algn="r">
+            <a:lvl9pPr marL="0" lvl="8" indent="0" algn="r">
               <a:spcBef>
                 <a:spcPts val="0"/>
               </a:spcBef>
@@ -2431,7 +2607,7 @@
             </a:lvl9pPr>
           </a:lstStyle>
           <a:p>
-            <a:pPr indent="0" lvl="0" marL="0" rtl="0" algn="r">
+            <a:pPr marL="0" lvl="0" indent="0" algn="r" rtl="0">
               <a:spcBef>
                 <a:spcPts val="0"/>
               </a:spcBef>
@@ -2457,11 +2633,11 @@
 </file>
 
 <file path=ppt/slideLayouts/slideLayout10.xml><?xml version="1.0" encoding="utf-8"?>
-<p:sldLayout xmlns:a="http://schemas.openxmlformats.org/drawingml/2006/main" xmlns:r="http://schemas.openxmlformats.org/officeDocument/2006/relationships" xmlns:mc="http://schemas.openxmlformats.org/markup-compatibility/2006" xmlns:mv="urn:schemas-microsoft-com:mac:vml" xmlns:p="http://schemas.openxmlformats.org/presentationml/2006/main" xmlns:c="http://schemas.openxmlformats.org/drawingml/2006/chart" xmlns:dgm="http://schemas.openxmlformats.org/drawingml/2006/diagram" xmlns:o="urn:schemas-microsoft-com:office:office" xmlns:v="urn:schemas-microsoft-com:vml" xmlns:pvml="urn:schemas-microsoft-com:office:powerpoint" xmlns:com="http://schemas.openxmlformats.org/drawingml/2006/compatibility" xmlns:p14="http://schemas.microsoft.com/office/powerpoint/2010/main" xmlns:p15="http://schemas.microsoft.com/office/powerpoint/2012/main" xmlns:ahyp="http://schemas.microsoft.com/office/drawing/2018/hyperlinkcolor" matchingName="Title and Vertical Text" type="vertTx">
+<p:sldLayout xmlns:a="http://schemas.openxmlformats.org/drawingml/2006/main" xmlns:r="http://schemas.openxmlformats.org/officeDocument/2006/relationships" xmlns:p="http://schemas.openxmlformats.org/presentationml/2006/main" matchingName="Title and Vertical Text" type="vertTx">
   <p:cSld name="VERTICAL_TEXT">
     <p:spTree>
       <p:nvGrpSpPr>
-        <p:cNvPr id="72" name="Shape 72"/>
+        <p:cNvPr id="1" name="Shape 72"/>
         <p:cNvGrpSpPr/>
         <p:nvPr/>
       </p:nvGrpSpPr>
@@ -2476,7 +2652,9 @@
       <p:sp>
         <p:nvSpPr>
           <p:cNvPr id="73" name="Google Shape;73;p12"/>
-          <p:cNvSpPr txBox="1"/>
+          <p:cNvSpPr txBox="1">
+            <a:spLocks noGrp="1"/>
+          </p:cNvSpPr>
           <p:nvPr>
             <p:ph type="title"/>
           </p:nvPr>
@@ -2495,7 +2673,7 @@
           </a:ln>
         </p:spPr>
         <p:txBody>
-          <a:bodyPr anchorCtr="0" anchor="ctr" bIns="45700" lIns="91425" spcFirstLastPara="1" rIns="91425" wrap="square" tIns="45700">
+          <a:bodyPr spcFirstLastPara="1" wrap="square" lIns="91425" tIns="45700" rIns="91425" bIns="45700" anchor="ctr" anchorCtr="0">
             <a:normAutofit/>
           </a:bodyPr>
           <a:lstStyle>
@@ -2605,15 +2783,19 @@
               <a:defRPr/>
             </a:lvl9pPr>
           </a:lstStyle>
-          <a:p/>
+          <a:p>
+            <a:endParaRPr/>
+          </a:p>
         </p:txBody>
       </p:sp>
       <p:sp>
         <p:nvSpPr>
           <p:cNvPr id="74" name="Google Shape;74;p12"/>
-          <p:cNvSpPr txBox="1"/>
+          <p:cNvSpPr txBox="1">
+            <a:spLocks noGrp="1"/>
+          </p:cNvSpPr>
           <p:nvPr>
-            <p:ph idx="1" type="body"/>
+            <p:ph type="body" idx="1"/>
           </p:nvPr>
         </p:nvSpPr>
         <p:spPr>
@@ -2630,11 +2812,11 @@
           </a:ln>
         </p:spPr>
         <p:txBody>
-          <a:bodyPr anchorCtr="0" anchor="t" bIns="45700" lIns="91425" spcFirstLastPara="1" rIns="91425" wrap="square" tIns="45700">
+          <a:bodyPr spcFirstLastPara="1" wrap="square" lIns="91425" tIns="45700" rIns="91425" bIns="45700" anchor="t" anchorCtr="0">
             <a:normAutofit/>
           </a:bodyPr>
           <a:lstStyle>
-            <a:lvl1pPr indent="-342900" lvl="0" marL="457200" algn="l">
+            <a:lvl1pPr marL="457200" lvl="0" indent="-342900" algn="l">
               <a:lnSpc>
                 <a:spcPct val="90000"/>
               </a:lnSpc>
@@ -2651,7 +2833,7 @@
               <a:buChar char="•"/>
               <a:defRPr/>
             </a:lvl1pPr>
-            <a:lvl2pPr indent="-342900" lvl="1" marL="914400" algn="l">
+            <a:lvl2pPr marL="914400" lvl="1" indent="-342900" algn="l">
               <a:lnSpc>
                 <a:spcPct val="90000"/>
               </a:lnSpc>
@@ -2668,7 +2850,7 @@
               <a:buChar char="•"/>
               <a:defRPr/>
             </a:lvl2pPr>
-            <a:lvl3pPr indent="-342900" lvl="2" marL="1371600" algn="l">
+            <a:lvl3pPr marL="1371600" lvl="2" indent="-342900" algn="l">
               <a:lnSpc>
                 <a:spcPct val="90000"/>
               </a:lnSpc>
@@ -2685,7 +2867,7 @@
               <a:buChar char="•"/>
               <a:defRPr/>
             </a:lvl3pPr>
-            <a:lvl4pPr indent="-342900" lvl="3" marL="1828800" algn="l">
+            <a:lvl4pPr marL="1828800" lvl="3" indent="-342900" algn="l">
               <a:lnSpc>
                 <a:spcPct val="90000"/>
               </a:lnSpc>
@@ -2702,7 +2884,7 @@
               <a:buChar char="•"/>
               <a:defRPr/>
             </a:lvl4pPr>
-            <a:lvl5pPr indent="-342900" lvl="4" marL="2286000" algn="l">
+            <a:lvl5pPr marL="2286000" lvl="4" indent="-342900" algn="l">
               <a:lnSpc>
                 <a:spcPct val="90000"/>
               </a:lnSpc>
@@ -2719,7 +2901,7 @@
               <a:buChar char="•"/>
               <a:defRPr/>
             </a:lvl5pPr>
-            <a:lvl6pPr indent="-342900" lvl="5" marL="2743200" algn="l">
+            <a:lvl6pPr marL="2743200" lvl="5" indent="-342900" algn="l">
               <a:lnSpc>
                 <a:spcPct val="90000"/>
               </a:lnSpc>
@@ -2736,7 +2918,7 @@
               <a:buChar char="•"/>
               <a:defRPr/>
             </a:lvl6pPr>
-            <a:lvl7pPr indent="-342900" lvl="6" marL="3200400" algn="l">
+            <a:lvl7pPr marL="3200400" lvl="6" indent="-342900" algn="l">
               <a:lnSpc>
                 <a:spcPct val="90000"/>
               </a:lnSpc>
@@ -2753,7 +2935,7 @@
               <a:buChar char="•"/>
               <a:defRPr/>
             </a:lvl7pPr>
-            <a:lvl8pPr indent="-342900" lvl="7" marL="3657600" algn="l">
+            <a:lvl8pPr marL="3657600" lvl="7" indent="-342900" algn="l">
               <a:lnSpc>
                 <a:spcPct val="90000"/>
               </a:lnSpc>
@@ -2770,7 +2952,7 @@
               <a:buChar char="•"/>
               <a:defRPr/>
             </a:lvl8pPr>
-            <a:lvl9pPr indent="-342900" lvl="8" marL="4114800" algn="l">
+            <a:lvl9pPr marL="4114800" lvl="8" indent="-342900" algn="l">
               <a:lnSpc>
                 <a:spcPct val="90000"/>
               </a:lnSpc>
@@ -2788,15 +2970,19 @@
               <a:defRPr/>
             </a:lvl9pPr>
           </a:lstStyle>
-          <a:p/>
+          <a:p>
+            <a:endParaRPr/>
+          </a:p>
         </p:txBody>
       </p:sp>
       <p:sp>
         <p:nvSpPr>
           <p:cNvPr id="75" name="Google Shape;75;p12"/>
-          <p:cNvSpPr txBox="1"/>
+          <p:cNvSpPr txBox="1">
+            <a:spLocks noGrp="1"/>
+          </p:cNvSpPr>
           <p:nvPr>
-            <p:ph idx="10" type="dt"/>
+            <p:ph type="dt" idx="10"/>
           </p:nvPr>
         </p:nvSpPr>
         <p:spPr>
@@ -2813,7 +2999,7 @@
           </a:ln>
         </p:spPr>
         <p:txBody>
-          <a:bodyPr anchorCtr="0" anchor="ctr" bIns="45700" lIns="91425" spcFirstLastPara="1" rIns="91425" wrap="square" tIns="45700">
+          <a:bodyPr spcFirstLastPara="1" wrap="square" lIns="91425" tIns="45700" rIns="91425" bIns="45700" anchor="ctr" anchorCtr="0">
             <a:noAutofit/>
           </a:bodyPr>
           <a:lstStyle>
@@ -2917,15 +3103,19 @@
               <a:defRPr/>
             </a:lvl9pPr>
           </a:lstStyle>
-          <a:p/>
+          <a:p>
+            <a:endParaRPr/>
+          </a:p>
         </p:txBody>
       </p:sp>
       <p:sp>
         <p:nvSpPr>
           <p:cNvPr id="76" name="Google Shape;76;p12"/>
-          <p:cNvSpPr txBox="1"/>
+          <p:cNvSpPr txBox="1">
+            <a:spLocks noGrp="1"/>
+          </p:cNvSpPr>
           <p:nvPr>
-            <p:ph idx="11" type="ftr"/>
+            <p:ph type="ftr" idx="11"/>
           </p:nvPr>
         </p:nvSpPr>
         <p:spPr>
@@ -2942,7 +3132,7 @@
           </a:ln>
         </p:spPr>
         <p:txBody>
-          <a:bodyPr anchorCtr="0" anchor="ctr" bIns="45700" lIns="91425" spcFirstLastPara="1" rIns="91425" wrap="square" tIns="45700">
+          <a:bodyPr spcFirstLastPara="1" wrap="square" lIns="91425" tIns="45700" rIns="91425" bIns="45700" anchor="ctr" anchorCtr="0">
             <a:noAutofit/>
           </a:bodyPr>
           <a:lstStyle>
@@ -3046,15 +3236,19 @@
               <a:defRPr/>
             </a:lvl9pPr>
           </a:lstStyle>
-          <a:p/>
+          <a:p>
+            <a:endParaRPr/>
+          </a:p>
         </p:txBody>
       </p:sp>
       <p:sp>
         <p:nvSpPr>
           <p:cNvPr id="77" name="Google Shape;77;p12"/>
-          <p:cNvSpPr txBox="1"/>
+          <p:cNvSpPr txBox="1">
+            <a:spLocks noGrp="1"/>
+          </p:cNvSpPr>
           <p:nvPr>
-            <p:ph idx="12" type="sldNum"/>
+            <p:ph type="sldNum" idx="12"/>
           </p:nvPr>
         </p:nvSpPr>
         <p:spPr>
@@ -3071,67 +3265,67 @@
           </a:ln>
         </p:spPr>
         <p:txBody>
-          <a:bodyPr anchorCtr="0" anchor="ctr" bIns="45700" lIns="91425" spcFirstLastPara="1" rIns="91425" wrap="square" tIns="45700">
+          <a:bodyPr spcFirstLastPara="1" wrap="square" lIns="91425" tIns="45700" rIns="91425" bIns="45700" anchor="ctr" anchorCtr="0">
             <a:noAutofit/>
           </a:bodyPr>
           <a:lstStyle>
-            <a:lvl1pPr indent="0" lvl="0" marL="0" algn="r">
+            <a:lvl1pPr marL="0" lvl="0" indent="0" algn="r">
               <a:spcBef>
                 <a:spcPts val="0"/>
               </a:spcBef>
               <a:buNone/>
               <a:defRPr/>
             </a:lvl1pPr>
-            <a:lvl2pPr indent="0" lvl="1" marL="0" algn="r">
+            <a:lvl2pPr marL="0" lvl="1" indent="0" algn="r">
               <a:spcBef>
                 <a:spcPts val="0"/>
               </a:spcBef>
               <a:buNone/>
               <a:defRPr/>
             </a:lvl2pPr>
-            <a:lvl3pPr indent="0" lvl="2" marL="0" algn="r">
+            <a:lvl3pPr marL="0" lvl="2" indent="0" algn="r">
               <a:spcBef>
                 <a:spcPts val="0"/>
               </a:spcBef>
               <a:buNone/>
               <a:defRPr/>
             </a:lvl3pPr>
-            <a:lvl4pPr indent="0" lvl="3" marL="0" algn="r">
+            <a:lvl4pPr marL="0" lvl="3" indent="0" algn="r">
               <a:spcBef>
                 <a:spcPts val="0"/>
               </a:spcBef>
               <a:buNone/>
               <a:defRPr/>
             </a:lvl4pPr>
-            <a:lvl5pPr indent="0" lvl="4" marL="0" algn="r">
+            <a:lvl5pPr marL="0" lvl="4" indent="0" algn="r">
               <a:spcBef>
                 <a:spcPts val="0"/>
               </a:spcBef>
               <a:buNone/>
               <a:defRPr/>
             </a:lvl5pPr>
-            <a:lvl6pPr indent="0" lvl="5" marL="0" algn="r">
+            <a:lvl6pPr marL="0" lvl="5" indent="0" algn="r">
               <a:spcBef>
                 <a:spcPts val="0"/>
               </a:spcBef>
               <a:buNone/>
               <a:defRPr/>
             </a:lvl6pPr>
-            <a:lvl7pPr indent="0" lvl="6" marL="0" algn="r">
+            <a:lvl7pPr marL="0" lvl="6" indent="0" algn="r">
               <a:spcBef>
                 <a:spcPts val="0"/>
               </a:spcBef>
               <a:buNone/>
               <a:defRPr/>
             </a:lvl7pPr>
-            <a:lvl8pPr indent="0" lvl="7" marL="0" algn="r">
+            <a:lvl8pPr marL="0" lvl="7" indent="0" algn="r">
               <a:spcBef>
                 <a:spcPts val="0"/>
               </a:spcBef>
               <a:buNone/>
               <a:defRPr/>
             </a:lvl8pPr>
-            <a:lvl9pPr indent="0" lvl="8" marL="0" algn="r">
+            <a:lvl9pPr marL="0" lvl="8" indent="0" algn="r">
               <a:spcBef>
                 <a:spcPts val="0"/>
               </a:spcBef>
@@ -3140,7 +3334,7 @@
             </a:lvl9pPr>
           </a:lstStyle>
           <a:p>
-            <a:pPr indent="0" lvl="0" marL="0" rtl="0" algn="r">
+            <a:pPr marL="0" lvl="0" indent="0" algn="r" rtl="0">
               <a:spcBef>
                 <a:spcPts val="0"/>
               </a:spcBef>
@@ -3166,11 +3360,11 @@
 </file>
 
 <file path=ppt/slideLayouts/slideLayout11.xml><?xml version="1.0" encoding="utf-8"?>
-<p:sldLayout xmlns:a="http://schemas.openxmlformats.org/drawingml/2006/main" xmlns:r="http://schemas.openxmlformats.org/officeDocument/2006/relationships" xmlns:mc="http://schemas.openxmlformats.org/markup-compatibility/2006" xmlns:mv="urn:schemas-microsoft-com:mac:vml" xmlns:p="http://schemas.openxmlformats.org/presentationml/2006/main" xmlns:c="http://schemas.openxmlformats.org/drawingml/2006/chart" xmlns:dgm="http://schemas.openxmlformats.org/drawingml/2006/diagram" xmlns:o="urn:schemas-microsoft-com:office:office" xmlns:v="urn:schemas-microsoft-com:vml" xmlns:pvml="urn:schemas-microsoft-com:office:powerpoint" xmlns:com="http://schemas.openxmlformats.org/drawingml/2006/compatibility" xmlns:p14="http://schemas.microsoft.com/office/powerpoint/2010/main" xmlns:p15="http://schemas.microsoft.com/office/powerpoint/2012/main" xmlns:ahyp="http://schemas.microsoft.com/office/drawing/2018/hyperlinkcolor" matchingName="Vertical Title and Text" type="vertTitleAndTx">
+<p:sldLayout xmlns:a="http://schemas.openxmlformats.org/drawingml/2006/main" xmlns:r="http://schemas.openxmlformats.org/officeDocument/2006/relationships" xmlns:p="http://schemas.openxmlformats.org/presentationml/2006/main" matchingName="Vertical Title and Text" type="vertTitleAndTx">
   <p:cSld name="VERTICAL_TITLE_AND_VERTICAL_TEXT">
     <p:spTree>
       <p:nvGrpSpPr>
-        <p:cNvPr id="78" name="Shape 78"/>
+        <p:cNvPr id="1" name="Shape 78"/>
         <p:cNvGrpSpPr/>
         <p:nvPr/>
       </p:nvGrpSpPr>
@@ -3185,7 +3379,9 @@
       <p:sp>
         <p:nvSpPr>
           <p:cNvPr id="79" name="Google Shape;79;p13"/>
-          <p:cNvSpPr txBox="1"/>
+          <p:cNvSpPr txBox="1">
+            <a:spLocks noGrp="1"/>
+          </p:cNvSpPr>
           <p:nvPr>
             <p:ph type="title"/>
           </p:nvPr>
@@ -3204,7 +3400,7 @@
           </a:ln>
         </p:spPr>
         <p:txBody>
-          <a:bodyPr anchorCtr="0" anchor="ctr" bIns="45700" lIns="91425" spcFirstLastPara="1" rIns="91425" wrap="square" tIns="45700">
+          <a:bodyPr spcFirstLastPara="1" wrap="square" lIns="91425" tIns="45700" rIns="91425" bIns="45700" anchor="ctr" anchorCtr="0">
             <a:normAutofit/>
           </a:bodyPr>
           <a:lstStyle>
@@ -3314,15 +3510,19 @@
               <a:defRPr/>
             </a:lvl9pPr>
           </a:lstStyle>
-          <a:p/>
+          <a:p>
+            <a:endParaRPr/>
+          </a:p>
         </p:txBody>
       </p:sp>
       <p:sp>
         <p:nvSpPr>
           <p:cNvPr id="80" name="Google Shape;80;p13"/>
-          <p:cNvSpPr txBox="1"/>
+          <p:cNvSpPr txBox="1">
+            <a:spLocks noGrp="1"/>
+          </p:cNvSpPr>
           <p:nvPr>
-            <p:ph idx="1" type="body"/>
+            <p:ph type="body" idx="1"/>
           </p:nvPr>
         </p:nvSpPr>
         <p:spPr>
@@ -3339,11 +3539,11 @@
           </a:ln>
         </p:spPr>
         <p:txBody>
-          <a:bodyPr anchorCtr="0" anchor="t" bIns="45700" lIns="91425" spcFirstLastPara="1" rIns="91425" wrap="square" tIns="45700">
+          <a:bodyPr spcFirstLastPara="1" wrap="square" lIns="91425" tIns="45700" rIns="91425" bIns="45700" anchor="t" anchorCtr="0">
             <a:normAutofit/>
           </a:bodyPr>
           <a:lstStyle>
-            <a:lvl1pPr indent="-342900" lvl="0" marL="457200" algn="l">
+            <a:lvl1pPr marL="457200" lvl="0" indent="-342900" algn="l">
               <a:lnSpc>
                 <a:spcPct val="90000"/>
               </a:lnSpc>
@@ -3360,7 +3560,7 @@
               <a:buChar char="•"/>
               <a:defRPr/>
             </a:lvl1pPr>
-            <a:lvl2pPr indent="-342900" lvl="1" marL="914400" algn="l">
+            <a:lvl2pPr marL="914400" lvl="1" indent="-342900" algn="l">
               <a:lnSpc>
                 <a:spcPct val="90000"/>
               </a:lnSpc>
@@ -3377,7 +3577,7 @@
               <a:buChar char="•"/>
               <a:defRPr/>
             </a:lvl2pPr>
-            <a:lvl3pPr indent="-342900" lvl="2" marL="1371600" algn="l">
+            <a:lvl3pPr marL="1371600" lvl="2" indent="-342900" algn="l">
               <a:lnSpc>
                 <a:spcPct val="90000"/>
               </a:lnSpc>
@@ -3394,7 +3594,7 @@
               <a:buChar char="•"/>
               <a:defRPr/>
             </a:lvl3pPr>
-            <a:lvl4pPr indent="-342900" lvl="3" marL="1828800" algn="l">
+            <a:lvl4pPr marL="1828800" lvl="3" indent="-342900" algn="l">
               <a:lnSpc>
                 <a:spcPct val="90000"/>
               </a:lnSpc>
@@ -3411,7 +3611,7 @@
               <a:buChar char="•"/>
               <a:defRPr/>
             </a:lvl4pPr>
-            <a:lvl5pPr indent="-342900" lvl="4" marL="2286000" algn="l">
+            <a:lvl5pPr marL="2286000" lvl="4" indent="-342900" algn="l">
               <a:lnSpc>
                 <a:spcPct val="90000"/>
               </a:lnSpc>
@@ -3428,7 +3628,7 @@
               <a:buChar char="•"/>
               <a:defRPr/>
             </a:lvl5pPr>
-            <a:lvl6pPr indent="-342900" lvl="5" marL="2743200" algn="l">
+            <a:lvl6pPr marL="2743200" lvl="5" indent="-342900" algn="l">
               <a:lnSpc>
                 <a:spcPct val="90000"/>
               </a:lnSpc>
@@ -3445,7 +3645,7 @@
               <a:buChar char="•"/>
               <a:defRPr/>
             </a:lvl6pPr>
-            <a:lvl7pPr indent="-342900" lvl="6" marL="3200400" algn="l">
+            <a:lvl7pPr marL="3200400" lvl="6" indent="-342900" algn="l">
               <a:lnSpc>
                 <a:spcPct val="90000"/>
               </a:lnSpc>
@@ -3462,7 +3662,7 @@
               <a:buChar char="•"/>
               <a:defRPr/>
             </a:lvl7pPr>
-            <a:lvl8pPr indent="-342900" lvl="7" marL="3657600" algn="l">
+            <a:lvl8pPr marL="3657600" lvl="7" indent="-342900" algn="l">
               <a:lnSpc>
                 <a:spcPct val="90000"/>
               </a:lnSpc>
@@ -3479,7 +3679,7 @@
               <a:buChar char="•"/>
               <a:defRPr/>
             </a:lvl8pPr>
-            <a:lvl9pPr indent="-342900" lvl="8" marL="4114800" algn="l">
+            <a:lvl9pPr marL="4114800" lvl="8" indent="-342900" algn="l">
               <a:lnSpc>
                 <a:spcPct val="90000"/>
               </a:lnSpc>
@@ -3497,15 +3697,19 @@
               <a:defRPr/>
             </a:lvl9pPr>
           </a:lstStyle>
-          <a:p/>
+          <a:p>
+            <a:endParaRPr/>
+          </a:p>
         </p:txBody>
       </p:sp>
       <p:sp>
         <p:nvSpPr>
           <p:cNvPr id="81" name="Google Shape;81;p13"/>
-          <p:cNvSpPr txBox="1"/>
+          <p:cNvSpPr txBox="1">
+            <a:spLocks noGrp="1"/>
+          </p:cNvSpPr>
           <p:nvPr>
-            <p:ph idx="10" type="dt"/>
+            <p:ph type="dt" idx="10"/>
           </p:nvPr>
         </p:nvSpPr>
         <p:spPr>
@@ -3522,7 +3726,7 @@
           </a:ln>
         </p:spPr>
         <p:txBody>
-          <a:bodyPr anchorCtr="0" anchor="ctr" bIns="45700" lIns="91425" spcFirstLastPara="1" rIns="91425" wrap="square" tIns="45700">
+          <a:bodyPr spcFirstLastPara="1" wrap="square" lIns="91425" tIns="45700" rIns="91425" bIns="45700" anchor="ctr" anchorCtr="0">
             <a:noAutofit/>
           </a:bodyPr>
           <a:lstStyle>
@@ -3626,15 +3830,19 @@
               <a:defRPr/>
             </a:lvl9pPr>
           </a:lstStyle>
-          <a:p/>
+          <a:p>
+            <a:endParaRPr/>
+          </a:p>
         </p:txBody>
       </p:sp>
       <p:sp>
         <p:nvSpPr>
           <p:cNvPr id="82" name="Google Shape;82;p13"/>
-          <p:cNvSpPr txBox="1"/>
+          <p:cNvSpPr txBox="1">
+            <a:spLocks noGrp="1"/>
+          </p:cNvSpPr>
           <p:nvPr>
-            <p:ph idx="11" type="ftr"/>
+            <p:ph type="ftr" idx="11"/>
           </p:nvPr>
         </p:nvSpPr>
         <p:spPr>
@@ -3651,7 +3859,7 @@
           </a:ln>
         </p:spPr>
         <p:txBody>
-          <a:bodyPr anchorCtr="0" anchor="ctr" bIns="45700" lIns="91425" spcFirstLastPara="1" rIns="91425" wrap="square" tIns="45700">
+          <a:bodyPr spcFirstLastPara="1" wrap="square" lIns="91425" tIns="45700" rIns="91425" bIns="45700" anchor="ctr" anchorCtr="0">
             <a:noAutofit/>
           </a:bodyPr>
           <a:lstStyle>
@@ -3755,15 +3963,19 @@
               <a:defRPr/>
             </a:lvl9pPr>
           </a:lstStyle>
-          <a:p/>
+          <a:p>
+            <a:endParaRPr/>
+          </a:p>
         </p:txBody>
       </p:sp>
       <p:sp>
         <p:nvSpPr>
           <p:cNvPr id="83" name="Google Shape;83;p13"/>
-          <p:cNvSpPr txBox="1"/>
+          <p:cNvSpPr txBox="1">
+            <a:spLocks noGrp="1"/>
+          </p:cNvSpPr>
           <p:nvPr>
-            <p:ph idx="12" type="sldNum"/>
+            <p:ph type="sldNum" idx="12"/>
           </p:nvPr>
         </p:nvSpPr>
         <p:spPr>
@@ -3780,67 +3992,67 @@
           </a:ln>
         </p:spPr>
         <p:txBody>
-          <a:bodyPr anchorCtr="0" anchor="ctr" bIns="45700" lIns="91425" spcFirstLastPara="1" rIns="91425" wrap="square" tIns="45700">
+          <a:bodyPr spcFirstLastPara="1" wrap="square" lIns="91425" tIns="45700" rIns="91425" bIns="45700" anchor="ctr" anchorCtr="0">
             <a:noAutofit/>
           </a:bodyPr>
           <a:lstStyle>
-            <a:lvl1pPr indent="0" lvl="0" marL="0" algn="r">
+            <a:lvl1pPr marL="0" lvl="0" indent="0" algn="r">
               <a:spcBef>
                 <a:spcPts val="0"/>
               </a:spcBef>
               <a:buNone/>
               <a:defRPr/>
             </a:lvl1pPr>
-            <a:lvl2pPr indent="0" lvl="1" marL="0" algn="r">
+            <a:lvl2pPr marL="0" lvl="1" indent="0" algn="r">
               <a:spcBef>
                 <a:spcPts val="0"/>
               </a:spcBef>
               <a:buNone/>
               <a:defRPr/>
             </a:lvl2pPr>
-            <a:lvl3pPr indent="0" lvl="2" marL="0" algn="r">
+            <a:lvl3pPr marL="0" lvl="2" indent="0" algn="r">
               <a:spcBef>
                 <a:spcPts val="0"/>
               </a:spcBef>
               <a:buNone/>
               <a:defRPr/>
             </a:lvl3pPr>
-            <a:lvl4pPr indent="0" lvl="3" marL="0" algn="r">
+            <a:lvl4pPr marL="0" lvl="3" indent="0" algn="r">
               <a:spcBef>
                 <a:spcPts val="0"/>
               </a:spcBef>
               <a:buNone/>
               <a:defRPr/>
             </a:lvl4pPr>
-            <a:lvl5pPr indent="0" lvl="4" marL="0" algn="r">
+            <a:lvl5pPr marL="0" lvl="4" indent="0" algn="r">
               <a:spcBef>
                 <a:spcPts val="0"/>
               </a:spcBef>
               <a:buNone/>
               <a:defRPr/>
             </a:lvl5pPr>
-            <a:lvl6pPr indent="0" lvl="5" marL="0" algn="r">
+            <a:lvl6pPr marL="0" lvl="5" indent="0" algn="r">
               <a:spcBef>
                 <a:spcPts val="0"/>
               </a:spcBef>
               <a:buNone/>
               <a:defRPr/>
             </a:lvl6pPr>
-            <a:lvl7pPr indent="0" lvl="6" marL="0" algn="r">
+            <a:lvl7pPr marL="0" lvl="6" indent="0" algn="r">
               <a:spcBef>
                 <a:spcPts val="0"/>
               </a:spcBef>
               <a:buNone/>
               <a:defRPr/>
             </a:lvl7pPr>
-            <a:lvl8pPr indent="0" lvl="7" marL="0" algn="r">
+            <a:lvl8pPr marL="0" lvl="7" indent="0" algn="r">
               <a:spcBef>
                 <a:spcPts val="0"/>
               </a:spcBef>
               <a:buNone/>
               <a:defRPr/>
             </a:lvl8pPr>
-            <a:lvl9pPr indent="0" lvl="8" marL="0" algn="r">
+            <a:lvl9pPr marL="0" lvl="8" indent="0" algn="r">
               <a:spcBef>
                 <a:spcPts val="0"/>
               </a:spcBef>
@@ -3849,7 +4061,7 @@
             </a:lvl9pPr>
           </a:lstStyle>
           <a:p>
-            <a:pPr indent="0" lvl="0" marL="0" rtl="0" algn="r">
+            <a:pPr marL="0" lvl="0" indent="0" algn="r" rtl="0">
               <a:spcBef>
                 <a:spcPts val="0"/>
               </a:spcBef>
@@ -3875,11 +4087,11 @@
 </file>
 
 <file path=ppt/slideLayouts/slideLayout2.xml><?xml version="1.0" encoding="utf-8"?>
-<p:sldLayout xmlns:a="http://schemas.openxmlformats.org/drawingml/2006/main" xmlns:r="http://schemas.openxmlformats.org/officeDocument/2006/relationships" xmlns:mc="http://schemas.openxmlformats.org/markup-compatibility/2006" xmlns:mv="urn:schemas-microsoft-com:mac:vml" xmlns:p="http://schemas.openxmlformats.org/presentationml/2006/main" xmlns:c="http://schemas.openxmlformats.org/drawingml/2006/chart" xmlns:dgm="http://schemas.openxmlformats.org/drawingml/2006/diagram" xmlns:o="urn:schemas-microsoft-com:office:office" xmlns:v="urn:schemas-microsoft-com:vml" xmlns:pvml="urn:schemas-microsoft-com:office:powerpoint" xmlns:com="http://schemas.openxmlformats.org/drawingml/2006/compatibility" xmlns:p14="http://schemas.microsoft.com/office/powerpoint/2010/main" xmlns:p15="http://schemas.microsoft.com/office/powerpoint/2012/main" xmlns:ahyp="http://schemas.microsoft.com/office/drawing/2018/hyperlinkcolor" matchingName="Title and Content" type="obj">
+<p:sldLayout xmlns:a="http://schemas.openxmlformats.org/drawingml/2006/main" xmlns:r="http://schemas.openxmlformats.org/officeDocument/2006/relationships" xmlns:p="http://schemas.openxmlformats.org/presentationml/2006/main" matchingName="Title and Content" type="obj">
   <p:cSld name="OBJECT">
     <p:spTree>
       <p:nvGrpSpPr>
-        <p:cNvPr id="21" name="Shape 21"/>
+        <p:cNvPr id="1" name="Shape 21"/>
         <p:cNvGrpSpPr/>
         <p:nvPr/>
       </p:nvGrpSpPr>
@@ -3894,7 +4106,9 @@
       <p:sp>
         <p:nvSpPr>
           <p:cNvPr id="22" name="Google Shape;22;p4"/>
-          <p:cNvSpPr txBox="1"/>
+          <p:cNvSpPr txBox="1">
+            <a:spLocks noGrp="1"/>
+          </p:cNvSpPr>
           <p:nvPr>
             <p:ph type="title"/>
           </p:nvPr>
@@ -3913,7 +4127,7 @@
           </a:ln>
         </p:spPr>
         <p:txBody>
-          <a:bodyPr anchorCtr="0" anchor="ctr" bIns="45700" lIns="91425" spcFirstLastPara="1" rIns="91425" wrap="square" tIns="45700">
+          <a:bodyPr spcFirstLastPara="1" wrap="square" lIns="91425" tIns="45700" rIns="91425" bIns="45700" anchor="ctr" anchorCtr="0">
             <a:normAutofit/>
           </a:bodyPr>
           <a:lstStyle>
@@ -4023,15 +4237,19 @@
               <a:defRPr/>
             </a:lvl9pPr>
           </a:lstStyle>
-          <a:p/>
+          <a:p>
+            <a:endParaRPr/>
+          </a:p>
         </p:txBody>
       </p:sp>
       <p:sp>
         <p:nvSpPr>
           <p:cNvPr id="23" name="Google Shape;23;p4"/>
-          <p:cNvSpPr txBox="1"/>
+          <p:cNvSpPr txBox="1">
+            <a:spLocks noGrp="1"/>
+          </p:cNvSpPr>
           <p:nvPr>
-            <p:ph idx="1" type="body"/>
+            <p:ph type="body" idx="1"/>
           </p:nvPr>
         </p:nvSpPr>
         <p:spPr>
@@ -4048,11 +4266,11 @@
           </a:ln>
         </p:spPr>
         <p:txBody>
-          <a:bodyPr anchorCtr="0" anchor="t" bIns="45700" lIns="91425" spcFirstLastPara="1" rIns="91425" wrap="square" tIns="45700">
+          <a:bodyPr spcFirstLastPara="1" wrap="square" lIns="91425" tIns="45700" rIns="91425" bIns="45700" anchor="t" anchorCtr="0">
             <a:normAutofit/>
           </a:bodyPr>
           <a:lstStyle>
-            <a:lvl1pPr indent="-342900" lvl="0" marL="457200" algn="l">
+            <a:lvl1pPr marL="457200" lvl="0" indent="-342900" algn="l">
               <a:lnSpc>
                 <a:spcPct val="90000"/>
               </a:lnSpc>
@@ -4069,7 +4287,7 @@
               <a:buChar char="•"/>
               <a:defRPr/>
             </a:lvl1pPr>
-            <a:lvl2pPr indent="-342900" lvl="1" marL="914400" algn="l">
+            <a:lvl2pPr marL="914400" lvl="1" indent="-342900" algn="l">
               <a:lnSpc>
                 <a:spcPct val="90000"/>
               </a:lnSpc>
@@ -4086,7 +4304,7 @@
               <a:buChar char="•"/>
               <a:defRPr/>
             </a:lvl2pPr>
-            <a:lvl3pPr indent="-342900" lvl="2" marL="1371600" algn="l">
+            <a:lvl3pPr marL="1371600" lvl="2" indent="-342900" algn="l">
               <a:lnSpc>
                 <a:spcPct val="90000"/>
               </a:lnSpc>
@@ -4103,7 +4321,7 @@
               <a:buChar char="•"/>
               <a:defRPr/>
             </a:lvl3pPr>
-            <a:lvl4pPr indent="-342900" lvl="3" marL="1828800" algn="l">
+            <a:lvl4pPr marL="1828800" lvl="3" indent="-342900" algn="l">
               <a:lnSpc>
                 <a:spcPct val="90000"/>
               </a:lnSpc>
@@ -4120,7 +4338,7 @@
               <a:buChar char="•"/>
               <a:defRPr/>
             </a:lvl4pPr>
-            <a:lvl5pPr indent="-342900" lvl="4" marL="2286000" algn="l">
+            <a:lvl5pPr marL="2286000" lvl="4" indent="-342900" algn="l">
               <a:lnSpc>
                 <a:spcPct val="90000"/>
               </a:lnSpc>
@@ -4137,7 +4355,7 @@
               <a:buChar char="•"/>
               <a:defRPr/>
             </a:lvl5pPr>
-            <a:lvl6pPr indent="-342900" lvl="5" marL="2743200" algn="l">
+            <a:lvl6pPr marL="2743200" lvl="5" indent="-342900" algn="l">
               <a:lnSpc>
                 <a:spcPct val="90000"/>
               </a:lnSpc>
@@ -4154,7 +4372,7 @@
               <a:buChar char="•"/>
               <a:defRPr/>
             </a:lvl6pPr>
-            <a:lvl7pPr indent="-342900" lvl="6" marL="3200400" algn="l">
+            <a:lvl7pPr marL="3200400" lvl="6" indent="-342900" algn="l">
               <a:lnSpc>
                 <a:spcPct val="90000"/>
               </a:lnSpc>
@@ -4171,7 +4389,7 @@
               <a:buChar char="•"/>
               <a:defRPr/>
             </a:lvl7pPr>
-            <a:lvl8pPr indent="-342900" lvl="7" marL="3657600" algn="l">
+            <a:lvl8pPr marL="3657600" lvl="7" indent="-342900" algn="l">
               <a:lnSpc>
                 <a:spcPct val="90000"/>
               </a:lnSpc>
@@ -4188,7 +4406,7 @@
               <a:buChar char="•"/>
               <a:defRPr/>
             </a:lvl8pPr>
-            <a:lvl9pPr indent="-342900" lvl="8" marL="4114800" algn="l">
+            <a:lvl9pPr marL="4114800" lvl="8" indent="-342900" algn="l">
               <a:lnSpc>
                 <a:spcPct val="90000"/>
               </a:lnSpc>
@@ -4206,15 +4424,19 @@
               <a:defRPr/>
             </a:lvl9pPr>
           </a:lstStyle>
-          <a:p/>
+          <a:p>
+            <a:endParaRPr/>
+          </a:p>
         </p:txBody>
       </p:sp>
       <p:sp>
         <p:nvSpPr>
           <p:cNvPr id="24" name="Google Shape;24;p4"/>
-          <p:cNvSpPr txBox="1"/>
+          <p:cNvSpPr txBox="1">
+            <a:spLocks noGrp="1"/>
+          </p:cNvSpPr>
           <p:nvPr>
-            <p:ph idx="10" type="dt"/>
+            <p:ph type="dt" idx="10"/>
           </p:nvPr>
         </p:nvSpPr>
         <p:spPr>
@@ -4231,7 +4453,7 @@
           </a:ln>
         </p:spPr>
         <p:txBody>
-          <a:bodyPr anchorCtr="0" anchor="ctr" bIns="45700" lIns="91425" spcFirstLastPara="1" rIns="91425" wrap="square" tIns="45700">
+          <a:bodyPr spcFirstLastPara="1" wrap="square" lIns="91425" tIns="45700" rIns="91425" bIns="45700" anchor="ctr" anchorCtr="0">
             <a:noAutofit/>
           </a:bodyPr>
           <a:lstStyle>
@@ -4335,15 +4557,19 @@
               <a:defRPr/>
             </a:lvl9pPr>
           </a:lstStyle>
-          <a:p/>
+          <a:p>
+            <a:endParaRPr/>
+          </a:p>
         </p:txBody>
       </p:sp>
       <p:sp>
         <p:nvSpPr>
           <p:cNvPr id="25" name="Google Shape;25;p4"/>
-          <p:cNvSpPr txBox="1"/>
+          <p:cNvSpPr txBox="1">
+            <a:spLocks noGrp="1"/>
+          </p:cNvSpPr>
           <p:nvPr>
-            <p:ph idx="11" type="ftr"/>
+            <p:ph type="ftr" idx="11"/>
           </p:nvPr>
         </p:nvSpPr>
         <p:spPr>
@@ -4360,7 +4586,7 @@
           </a:ln>
         </p:spPr>
         <p:txBody>
-          <a:bodyPr anchorCtr="0" anchor="ctr" bIns="45700" lIns="91425" spcFirstLastPara="1" rIns="91425" wrap="square" tIns="45700">
+          <a:bodyPr spcFirstLastPara="1" wrap="square" lIns="91425" tIns="45700" rIns="91425" bIns="45700" anchor="ctr" anchorCtr="0">
             <a:noAutofit/>
           </a:bodyPr>
           <a:lstStyle>
@@ -4464,15 +4690,19 @@
               <a:defRPr/>
             </a:lvl9pPr>
           </a:lstStyle>
-          <a:p/>
+          <a:p>
+            <a:endParaRPr/>
+          </a:p>
         </p:txBody>
       </p:sp>
       <p:sp>
         <p:nvSpPr>
           <p:cNvPr id="26" name="Google Shape;26;p4"/>
-          <p:cNvSpPr txBox="1"/>
+          <p:cNvSpPr txBox="1">
+            <a:spLocks noGrp="1"/>
+          </p:cNvSpPr>
           <p:nvPr>
-            <p:ph idx="12" type="sldNum"/>
+            <p:ph type="sldNum" idx="12"/>
           </p:nvPr>
         </p:nvSpPr>
         <p:spPr>
@@ -4489,67 +4719,67 @@
           </a:ln>
         </p:spPr>
         <p:txBody>
-          <a:bodyPr anchorCtr="0" anchor="ctr" bIns="45700" lIns="91425" spcFirstLastPara="1" rIns="91425" wrap="square" tIns="45700">
+          <a:bodyPr spcFirstLastPara="1" wrap="square" lIns="91425" tIns="45700" rIns="91425" bIns="45700" anchor="ctr" anchorCtr="0">
             <a:noAutofit/>
           </a:bodyPr>
           <a:lstStyle>
-            <a:lvl1pPr indent="0" lvl="0" marL="0" algn="r">
+            <a:lvl1pPr marL="0" lvl="0" indent="0" algn="r">
               <a:spcBef>
                 <a:spcPts val="0"/>
               </a:spcBef>
               <a:buNone/>
               <a:defRPr/>
             </a:lvl1pPr>
-            <a:lvl2pPr indent="0" lvl="1" marL="0" algn="r">
+            <a:lvl2pPr marL="0" lvl="1" indent="0" algn="r">
               <a:spcBef>
                 <a:spcPts val="0"/>
               </a:spcBef>
               <a:buNone/>
               <a:defRPr/>
             </a:lvl2pPr>
-            <a:lvl3pPr indent="0" lvl="2" marL="0" algn="r">
+            <a:lvl3pPr marL="0" lvl="2" indent="0" algn="r">
               <a:spcBef>
                 <a:spcPts val="0"/>
               </a:spcBef>
               <a:buNone/>
               <a:defRPr/>
             </a:lvl3pPr>
-            <a:lvl4pPr indent="0" lvl="3" marL="0" algn="r">
+            <a:lvl4pPr marL="0" lvl="3" indent="0" algn="r">
               <a:spcBef>
                 <a:spcPts val="0"/>
               </a:spcBef>
               <a:buNone/>
               <a:defRPr/>
             </a:lvl4pPr>
-            <a:lvl5pPr indent="0" lvl="4" marL="0" algn="r">
+            <a:lvl5pPr marL="0" lvl="4" indent="0" algn="r">
               <a:spcBef>
                 <a:spcPts val="0"/>
               </a:spcBef>
               <a:buNone/>
               <a:defRPr/>
             </a:lvl5pPr>
-            <a:lvl6pPr indent="0" lvl="5" marL="0" algn="r">
+            <a:lvl6pPr marL="0" lvl="5" indent="0" algn="r">
               <a:spcBef>
                 <a:spcPts val="0"/>
               </a:spcBef>
               <a:buNone/>
               <a:defRPr/>
             </a:lvl6pPr>
-            <a:lvl7pPr indent="0" lvl="6" marL="0" algn="r">
+            <a:lvl7pPr marL="0" lvl="6" indent="0" algn="r">
               <a:spcBef>
                 <a:spcPts val="0"/>
               </a:spcBef>
               <a:buNone/>
               <a:defRPr/>
             </a:lvl7pPr>
-            <a:lvl8pPr indent="0" lvl="7" marL="0" algn="r">
+            <a:lvl8pPr marL="0" lvl="7" indent="0" algn="r">
               <a:spcBef>
                 <a:spcPts val="0"/>
               </a:spcBef>
               <a:buNone/>
               <a:defRPr/>
             </a:lvl8pPr>
-            <a:lvl9pPr indent="0" lvl="8" marL="0" algn="r">
+            <a:lvl9pPr marL="0" lvl="8" indent="0" algn="r">
               <a:spcBef>
                 <a:spcPts val="0"/>
               </a:spcBef>
@@ -4558,7 +4788,7 @@
             </a:lvl9pPr>
           </a:lstStyle>
           <a:p>
-            <a:pPr indent="0" lvl="0" marL="0" rtl="0" algn="r">
+            <a:pPr marL="0" lvl="0" indent="0" algn="r" rtl="0">
               <a:spcBef>
                 <a:spcPts val="0"/>
               </a:spcBef>
@@ -4584,11 +4814,11 @@
 </file>
 
 <file path=ppt/slideLayouts/slideLayout3.xml><?xml version="1.0" encoding="utf-8"?>
-<p:sldLayout xmlns:a="http://schemas.openxmlformats.org/drawingml/2006/main" xmlns:r="http://schemas.openxmlformats.org/officeDocument/2006/relationships" xmlns:mc="http://schemas.openxmlformats.org/markup-compatibility/2006" xmlns:mv="urn:schemas-microsoft-com:mac:vml" xmlns:p="http://schemas.openxmlformats.org/presentationml/2006/main" xmlns:c="http://schemas.openxmlformats.org/drawingml/2006/chart" xmlns:dgm="http://schemas.openxmlformats.org/drawingml/2006/diagram" xmlns:o="urn:schemas-microsoft-com:office:office" xmlns:v="urn:schemas-microsoft-com:vml" xmlns:pvml="urn:schemas-microsoft-com:office:powerpoint" xmlns:com="http://schemas.openxmlformats.org/drawingml/2006/compatibility" xmlns:p14="http://schemas.microsoft.com/office/powerpoint/2010/main" xmlns:p15="http://schemas.microsoft.com/office/powerpoint/2012/main" xmlns:ahyp="http://schemas.microsoft.com/office/drawing/2018/hyperlinkcolor" matchingName="Section Header" type="secHead">
+<p:sldLayout xmlns:a="http://schemas.openxmlformats.org/drawingml/2006/main" xmlns:r="http://schemas.openxmlformats.org/officeDocument/2006/relationships" xmlns:p="http://schemas.openxmlformats.org/presentationml/2006/main" matchingName="Section Header" type="secHead">
   <p:cSld name="SECTION_HEADER">
     <p:spTree>
       <p:nvGrpSpPr>
-        <p:cNvPr id="27" name="Shape 27"/>
+        <p:cNvPr id="1" name="Shape 27"/>
         <p:cNvGrpSpPr/>
         <p:nvPr/>
       </p:nvGrpSpPr>
@@ -4603,7 +4833,9 @@
       <p:sp>
         <p:nvSpPr>
           <p:cNvPr id="28" name="Google Shape;28;p5"/>
-          <p:cNvSpPr txBox="1"/>
+          <p:cNvSpPr txBox="1">
+            <a:spLocks noGrp="1"/>
+          </p:cNvSpPr>
           <p:nvPr>
             <p:ph type="title"/>
           </p:nvPr>
@@ -4622,7 +4854,7 @@
           </a:ln>
         </p:spPr>
         <p:txBody>
-          <a:bodyPr anchorCtr="0" anchor="b" bIns="45700" lIns="91425" spcFirstLastPara="1" rIns="91425" wrap="square" tIns="45700">
+          <a:bodyPr spcFirstLastPara="1" wrap="square" lIns="91425" tIns="45700" rIns="91425" bIns="45700" anchor="b" anchorCtr="0">
             <a:normAutofit/>
           </a:bodyPr>
           <a:lstStyle>
@@ -4733,15 +4965,19 @@
               <a:defRPr/>
             </a:lvl9pPr>
           </a:lstStyle>
-          <a:p/>
+          <a:p>
+            <a:endParaRPr/>
+          </a:p>
         </p:txBody>
       </p:sp>
       <p:sp>
         <p:nvSpPr>
           <p:cNvPr id="29" name="Google Shape;29;p5"/>
-          <p:cNvSpPr txBox="1"/>
+          <p:cNvSpPr txBox="1">
+            <a:spLocks noGrp="1"/>
+          </p:cNvSpPr>
           <p:nvPr>
-            <p:ph idx="1" type="body"/>
+            <p:ph type="body" idx="1"/>
           </p:nvPr>
         </p:nvSpPr>
         <p:spPr>
@@ -4758,11 +4994,11 @@
           </a:ln>
         </p:spPr>
         <p:txBody>
-          <a:bodyPr anchorCtr="0" anchor="t" bIns="45700" lIns="91425" spcFirstLastPara="1" rIns="91425" wrap="square" tIns="45700">
+          <a:bodyPr spcFirstLastPara="1" wrap="square" lIns="91425" tIns="45700" rIns="91425" bIns="45700" anchor="t" anchorCtr="0">
             <a:normAutofit/>
           </a:bodyPr>
           <a:lstStyle>
-            <a:lvl1pPr indent="-228600" lvl="0" marL="457200" algn="l">
+            <a:lvl1pPr marL="457200" lvl="0" indent="-228600" algn="l">
               <a:lnSpc>
                 <a:spcPct val="90000"/>
               </a:lnSpc>
@@ -4783,7 +5019,7 @@
                 </a:solidFill>
               </a:defRPr>
             </a:lvl1pPr>
-            <a:lvl2pPr indent="-228600" lvl="1" marL="914400" algn="l">
+            <a:lvl2pPr marL="914400" lvl="1" indent="-228600" algn="l">
               <a:lnSpc>
                 <a:spcPct val="90000"/>
               </a:lnSpc>
@@ -4804,7 +5040,7 @@
                 </a:solidFill>
               </a:defRPr>
             </a:lvl2pPr>
-            <a:lvl3pPr indent="-228600" lvl="2" marL="1371600" algn="l">
+            <a:lvl3pPr marL="1371600" lvl="2" indent="-228600" algn="l">
               <a:lnSpc>
                 <a:spcPct val="90000"/>
               </a:lnSpc>
@@ -4825,7 +5061,7 @@
                 </a:solidFill>
               </a:defRPr>
             </a:lvl3pPr>
-            <a:lvl4pPr indent="-228600" lvl="3" marL="1828800" algn="l">
+            <a:lvl4pPr marL="1828800" lvl="3" indent="-228600" algn="l">
               <a:lnSpc>
                 <a:spcPct val="90000"/>
               </a:lnSpc>
@@ -4846,7 +5082,7 @@
                 </a:solidFill>
               </a:defRPr>
             </a:lvl4pPr>
-            <a:lvl5pPr indent="-228600" lvl="4" marL="2286000" algn="l">
+            <a:lvl5pPr marL="2286000" lvl="4" indent="-228600" algn="l">
               <a:lnSpc>
                 <a:spcPct val="90000"/>
               </a:lnSpc>
@@ -4867,7 +5103,7 @@
                 </a:solidFill>
               </a:defRPr>
             </a:lvl5pPr>
-            <a:lvl6pPr indent="-228600" lvl="5" marL="2743200" algn="l">
+            <a:lvl6pPr marL="2743200" lvl="5" indent="-228600" algn="l">
               <a:lnSpc>
                 <a:spcPct val="90000"/>
               </a:lnSpc>
@@ -4888,7 +5124,7 @@
                 </a:solidFill>
               </a:defRPr>
             </a:lvl6pPr>
-            <a:lvl7pPr indent="-228600" lvl="6" marL="3200400" algn="l">
+            <a:lvl7pPr marL="3200400" lvl="6" indent="-228600" algn="l">
               <a:lnSpc>
                 <a:spcPct val="90000"/>
               </a:lnSpc>
@@ -4909,7 +5145,7 @@
                 </a:solidFill>
               </a:defRPr>
             </a:lvl7pPr>
-            <a:lvl8pPr indent="-228600" lvl="7" marL="3657600" algn="l">
+            <a:lvl8pPr marL="3657600" lvl="7" indent="-228600" algn="l">
               <a:lnSpc>
                 <a:spcPct val="90000"/>
               </a:lnSpc>
@@ -4930,7 +5166,7 @@
                 </a:solidFill>
               </a:defRPr>
             </a:lvl8pPr>
-            <a:lvl9pPr indent="-228600" lvl="8" marL="4114800" algn="l">
+            <a:lvl9pPr marL="4114800" lvl="8" indent="-228600" algn="l">
               <a:lnSpc>
                 <a:spcPct val="90000"/>
               </a:lnSpc>
@@ -4952,15 +5188,19 @@
               </a:defRPr>
             </a:lvl9pPr>
           </a:lstStyle>
-          <a:p/>
+          <a:p>
+            <a:endParaRPr/>
+          </a:p>
         </p:txBody>
       </p:sp>
       <p:sp>
         <p:nvSpPr>
           <p:cNvPr id="30" name="Google Shape;30;p5"/>
-          <p:cNvSpPr txBox="1"/>
+          <p:cNvSpPr txBox="1">
+            <a:spLocks noGrp="1"/>
+          </p:cNvSpPr>
           <p:nvPr>
-            <p:ph idx="10" type="dt"/>
+            <p:ph type="dt" idx="10"/>
           </p:nvPr>
         </p:nvSpPr>
         <p:spPr>
@@ -4977,7 +5217,7 @@
           </a:ln>
         </p:spPr>
         <p:txBody>
-          <a:bodyPr anchorCtr="0" anchor="ctr" bIns="45700" lIns="91425" spcFirstLastPara="1" rIns="91425" wrap="square" tIns="45700">
+          <a:bodyPr spcFirstLastPara="1" wrap="square" lIns="91425" tIns="45700" rIns="91425" bIns="45700" anchor="ctr" anchorCtr="0">
             <a:noAutofit/>
           </a:bodyPr>
           <a:lstStyle>
@@ -5081,15 +5321,19 @@
               <a:defRPr/>
             </a:lvl9pPr>
           </a:lstStyle>
-          <a:p/>
+          <a:p>
+            <a:endParaRPr/>
+          </a:p>
         </p:txBody>
       </p:sp>
       <p:sp>
         <p:nvSpPr>
           <p:cNvPr id="31" name="Google Shape;31;p5"/>
-          <p:cNvSpPr txBox="1"/>
+          <p:cNvSpPr txBox="1">
+            <a:spLocks noGrp="1"/>
+          </p:cNvSpPr>
           <p:nvPr>
-            <p:ph idx="11" type="ftr"/>
+            <p:ph type="ftr" idx="11"/>
           </p:nvPr>
         </p:nvSpPr>
         <p:spPr>
@@ -5106,7 +5350,7 @@
           </a:ln>
         </p:spPr>
         <p:txBody>
-          <a:bodyPr anchorCtr="0" anchor="ctr" bIns="45700" lIns="91425" spcFirstLastPara="1" rIns="91425" wrap="square" tIns="45700">
+          <a:bodyPr spcFirstLastPara="1" wrap="square" lIns="91425" tIns="45700" rIns="91425" bIns="45700" anchor="ctr" anchorCtr="0">
             <a:noAutofit/>
           </a:bodyPr>
           <a:lstStyle>
@@ -5210,15 +5454,19 @@
               <a:defRPr/>
             </a:lvl9pPr>
           </a:lstStyle>
-          <a:p/>
+          <a:p>
+            <a:endParaRPr/>
+          </a:p>
         </p:txBody>
       </p:sp>
       <p:sp>
         <p:nvSpPr>
           <p:cNvPr id="32" name="Google Shape;32;p5"/>
-          <p:cNvSpPr txBox="1"/>
+          <p:cNvSpPr txBox="1">
+            <a:spLocks noGrp="1"/>
+          </p:cNvSpPr>
           <p:nvPr>
-            <p:ph idx="12" type="sldNum"/>
+            <p:ph type="sldNum" idx="12"/>
           </p:nvPr>
         </p:nvSpPr>
         <p:spPr>
@@ -5235,67 +5483,67 @@
           </a:ln>
         </p:spPr>
         <p:txBody>
-          <a:bodyPr anchorCtr="0" anchor="ctr" bIns="45700" lIns="91425" spcFirstLastPara="1" rIns="91425" wrap="square" tIns="45700">
+          <a:bodyPr spcFirstLastPara="1" wrap="square" lIns="91425" tIns="45700" rIns="91425" bIns="45700" anchor="ctr" anchorCtr="0">
             <a:noAutofit/>
           </a:bodyPr>
           <a:lstStyle>
-            <a:lvl1pPr indent="0" lvl="0" marL="0" algn="r">
+            <a:lvl1pPr marL="0" lvl="0" indent="0" algn="r">
               <a:spcBef>
                 <a:spcPts val="0"/>
               </a:spcBef>
               <a:buNone/>
               <a:defRPr/>
             </a:lvl1pPr>
-            <a:lvl2pPr indent="0" lvl="1" marL="0" algn="r">
+            <a:lvl2pPr marL="0" lvl="1" indent="0" algn="r">
               <a:spcBef>
                 <a:spcPts val="0"/>
               </a:spcBef>
               <a:buNone/>
               <a:defRPr/>
             </a:lvl2pPr>
-            <a:lvl3pPr indent="0" lvl="2" marL="0" algn="r">
+            <a:lvl3pPr marL="0" lvl="2" indent="0" algn="r">
               <a:spcBef>
                 <a:spcPts val="0"/>
               </a:spcBef>
               <a:buNone/>
               <a:defRPr/>
             </a:lvl3pPr>
-            <a:lvl4pPr indent="0" lvl="3" marL="0" algn="r">
+            <a:lvl4pPr marL="0" lvl="3" indent="0" algn="r">
               <a:spcBef>
                 <a:spcPts val="0"/>
               </a:spcBef>
               <a:buNone/>
               <a:defRPr/>
             </a:lvl4pPr>
-            <a:lvl5pPr indent="0" lvl="4" marL="0" algn="r">
+            <a:lvl5pPr marL="0" lvl="4" indent="0" algn="r">
               <a:spcBef>
                 <a:spcPts val="0"/>
               </a:spcBef>
               <a:buNone/>
               <a:defRPr/>
             </a:lvl5pPr>
-            <a:lvl6pPr indent="0" lvl="5" marL="0" algn="r">
+            <a:lvl6pPr marL="0" lvl="5" indent="0" algn="r">
               <a:spcBef>
                 <a:spcPts val="0"/>
               </a:spcBef>
               <a:buNone/>
               <a:defRPr/>
             </a:lvl6pPr>
-            <a:lvl7pPr indent="0" lvl="6" marL="0" algn="r">
+            <a:lvl7pPr marL="0" lvl="6" indent="0" algn="r">
               <a:spcBef>
                 <a:spcPts val="0"/>
               </a:spcBef>
               <a:buNone/>
               <a:defRPr/>
             </a:lvl7pPr>
-            <a:lvl8pPr indent="0" lvl="7" marL="0" algn="r">
+            <a:lvl8pPr marL="0" lvl="7" indent="0" algn="r">
               <a:spcBef>
                 <a:spcPts val="0"/>
               </a:spcBef>
               <a:buNone/>
               <a:defRPr/>
             </a:lvl8pPr>
-            <a:lvl9pPr indent="0" lvl="8" marL="0" algn="r">
+            <a:lvl9pPr marL="0" lvl="8" indent="0" algn="r">
               <a:spcBef>
                 <a:spcPts val="0"/>
               </a:spcBef>
@@ -5304,7 +5552,7 @@
             </a:lvl9pPr>
           </a:lstStyle>
           <a:p>
-            <a:pPr indent="0" lvl="0" marL="0" rtl="0" algn="r">
+            <a:pPr marL="0" lvl="0" indent="0" algn="r" rtl="0">
               <a:spcBef>
                 <a:spcPts val="0"/>
               </a:spcBef>
@@ -5330,11 +5578,11 @@
 </file>
 
 <file path=ppt/slideLayouts/slideLayout4.xml><?xml version="1.0" encoding="utf-8"?>
-<p:sldLayout xmlns:a="http://schemas.openxmlformats.org/drawingml/2006/main" xmlns:r="http://schemas.openxmlformats.org/officeDocument/2006/relationships" xmlns:mc="http://schemas.openxmlformats.org/markup-compatibility/2006" xmlns:mv="urn:schemas-microsoft-com:mac:vml" xmlns:p="http://schemas.openxmlformats.org/presentationml/2006/main" xmlns:c="http://schemas.openxmlformats.org/drawingml/2006/chart" xmlns:dgm="http://schemas.openxmlformats.org/drawingml/2006/diagram" xmlns:o="urn:schemas-microsoft-com:office:office" xmlns:v="urn:schemas-microsoft-com:vml" xmlns:pvml="urn:schemas-microsoft-com:office:powerpoint" xmlns:com="http://schemas.openxmlformats.org/drawingml/2006/compatibility" xmlns:p14="http://schemas.microsoft.com/office/powerpoint/2010/main" xmlns:p15="http://schemas.microsoft.com/office/powerpoint/2012/main" xmlns:ahyp="http://schemas.microsoft.com/office/drawing/2018/hyperlinkcolor" matchingName="Two Content" type="twoObj">
+<p:sldLayout xmlns:a="http://schemas.openxmlformats.org/drawingml/2006/main" xmlns:r="http://schemas.openxmlformats.org/officeDocument/2006/relationships" xmlns:p="http://schemas.openxmlformats.org/presentationml/2006/main" matchingName="Two Content" type="twoObj">
   <p:cSld name="TWO_OBJECTS">
     <p:spTree>
       <p:nvGrpSpPr>
-        <p:cNvPr id="33" name="Shape 33"/>
+        <p:cNvPr id="1" name="Shape 33"/>
         <p:cNvGrpSpPr/>
         <p:nvPr/>
       </p:nvGrpSpPr>
@@ -5349,7 +5597,9 @@
       <p:sp>
         <p:nvSpPr>
           <p:cNvPr id="34" name="Google Shape;34;p6"/>
-          <p:cNvSpPr txBox="1"/>
+          <p:cNvSpPr txBox="1">
+            <a:spLocks noGrp="1"/>
+          </p:cNvSpPr>
           <p:nvPr>
             <p:ph type="title"/>
           </p:nvPr>
@@ -5368,7 +5618,7 @@
           </a:ln>
         </p:spPr>
         <p:txBody>
-          <a:bodyPr anchorCtr="0" anchor="ctr" bIns="45700" lIns="91425" spcFirstLastPara="1" rIns="91425" wrap="square" tIns="45700">
+          <a:bodyPr spcFirstLastPara="1" wrap="square" lIns="91425" tIns="45700" rIns="91425" bIns="45700" anchor="ctr" anchorCtr="0">
             <a:normAutofit/>
           </a:bodyPr>
           <a:lstStyle>
@@ -5478,15 +5728,19 @@
               <a:defRPr/>
             </a:lvl9pPr>
           </a:lstStyle>
-          <a:p/>
+          <a:p>
+            <a:endParaRPr/>
+          </a:p>
         </p:txBody>
       </p:sp>
       <p:sp>
         <p:nvSpPr>
           <p:cNvPr id="35" name="Google Shape;35;p6"/>
-          <p:cNvSpPr txBox="1"/>
+          <p:cNvSpPr txBox="1">
+            <a:spLocks noGrp="1"/>
+          </p:cNvSpPr>
           <p:nvPr>
-            <p:ph idx="1" type="body"/>
+            <p:ph type="body" idx="1"/>
           </p:nvPr>
         </p:nvSpPr>
         <p:spPr>
@@ -5503,11 +5757,11 @@
           </a:ln>
         </p:spPr>
         <p:txBody>
-          <a:bodyPr anchorCtr="0" anchor="t" bIns="45700" lIns="91425" spcFirstLastPara="1" rIns="91425" wrap="square" tIns="45700">
+          <a:bodyPr spcFirstLastPara="1" wrap="square" lIns="91425" tIns="45700" rIns="91425" bIns="45700" anchor="t" anchorCtr="0">
             <a:normAutofit/>
           </a:bodyPr>
           <a:lstStyle>
-            <a:lvl1pPr indent="-342900" lvl="0" marL="457200" algn="l">
+            <a:lvl1pPr marL="457200" lvl="0" indent="-342900" algn="l">
               <a:lnSpc>
                 <a:spcPct val="90000"/>
               </a:lnSpc>
@@ -5524,7 +5778,7 @@
               <a:buChar char="•"/>
               <a:defRPr/>
             </a:lvl1pPr>
-            <a:lvl2pPr indent="-342900" lvl="1" marL="914400" algn="l">
+            <a:lvl2pPr marL="914400" lvl="1" indent="-342900" algn="l">
               <a:lnSpc>
                 <a:spcPct val="90000"/>
               </a:lnSpc>
@@ -5541,7 +5795,7 @@
               <a:buChar char="•"/>
               <a:defRPr/>
             </a:lvl2pPr>
-            <a:lvl3pPr indent="-342900" lvl="2" marL="1371600" algn="l">
+            <a:lvl3pPr marL="1371600" lvl="2" indent="-342900" algn="l">
               <a:lnSpc>
                 <a:spcPct val="90000"/>
               </a:lnSpc>
@@ -5558,7 +5812,7 @@
               <a:buChar char="•"/>
               <a:defRPr/>
             </a:lvl3pPr>
-            <a:lvl4pPr indent="-342900" lvl="3" marL="1828800" algn="l">
+            <a:lvl4pPr marL="1828800" lvl="3" indent="-342900" algn="l">
               <a:lnSpc>
                 <a:spcPct val="90000"/>
               </a:lnSpc>
@@ -5575,7 +5829,7 @@
               <a:buChar char="•"/>
               <a:defRPr/>
             </a:lvl4pPr>
-            <a:lvl5pPr indent="-342900" lvl="4" marL="2286000" algn="l">
+            <a:lvl5pPr marL="2286000" lvl="4" indent="-342900" algn="l">
               <a:lnSpc>
                 <a:spcPct val="90000"/>
               </a:lnSpc>
@@ -5592,7 +5846,7 @@
               <a:buChar char="•"/>
               <a:defRPr/>
             </a:lvl5pPr>
-            <a:lvl6pPr indent="-342900" lvl="5" marL="2743200" algn="l">
+            <a:lvl6pPr marL="2743200" lvl="5" indent="-342900" algn="l">
               <a:lnSpc>
                 <a:spcPct val="90000"/>
               </a:lnSpc>
@@ -5609,7 +5863,7 @@
               <a:buChar char="•"/>
               <a:defRPr/>
             </a:lvl6pPr>
-            <a:lvl7pPr indent="-342900" lvl="6" marL="3200400" algn="l">
+            <a:lvl7pPr marL="3200400" lvl="6" indent="-342900" algn="l">
               <a:lnSpc>
                 <a:spcPct val="90000"/>
               </a:lnSpc>
@@ -5626,7 +5880,7 @@
               <a:buChar char="•"/>
               <a:defRPr/>
             </a:lvl7pPr>
-            <a:lvl8pPr indent="-342900" lvl="7" marL="3657600" algn="l">
+            <a:lvl8pPr marL="3657600" lvl="7" indent="-342900" algn="l">
               <a:lnSpc>
                 <a:spcPct val="90000"/>
               </a:lnSpc>
@@ -5643,7 +5897,7 @@
               <a:buChar char="•"/>
               <a:defRPr/>
             </a:lvl8pPr>
-            <a:lvl9pPr indent="-342900" lvl="8" marL="4114800" algn="l">
+            <a:lvl9pPr marL="4114800" lvl="8" indent="-342900" algn="l">
               <a:lnSpc>
                 <a:spcPct val="90000"/>
               </a:lnSpc>
@@ -5661,15 +5915,19 @@
               <a:defRPr/>
             </a:lvl9pPr>
           </a:lstStyle>
-          <a:p/>
+          <a:p>
+            <a:endParaRPr/>
+          </a:p>
         </p:txBody>
       </p:sp>
       <p:sp>
         <p:nvSpPr>
           <p:cNvPr id="36" name="Google Shape;36;p6"/>
-          <p:cNvSpPr txBox="1"/>
+          <p:cNvSpPr txBox="1">
+            <a:spLocks noGrp="1"/>
+          </p:cNvSpPr>
           <p:nvPr>
-            <p:ph idx="2" type="body"/>
+            <p:ph type="body" idx="2"/>
           </p:nvPr>
         </p:nvSpPr>
         <p:spPr>
@@ -5686,11 +5944,11 @@
           </a:ln>
         </p:spPr>
         <p:txBody>
-          <a:bodyPr anchorCtr="0" anchor="t" bIns="45700" lIns="91425" spcFirstLastPara="1" rIns="91425" wrap="square" tIns="45700">
+          <a:bodyPr spcFirstLastPara="1" wrap="square" lIns="91425" tIns="45700" rIns="91425" bIns="45700" anchor="t" anchorCtr="0">
             <a:normAutofit/>
           </a:bodyPr>
           <a:lstStyle>
-            <a:lvl1pPr indent="-342900" lvl="0" marL="457200" algn="l">
+            <a:lvl1pPr marL="457200" lvl="0" indent="-342900" algn="l">
               <a:lnSpc>
                 <a:spcPct val="90000"/>
               </a:lnSpc>
@@ -5707,7 +5965,7 @@
               <a:buChar char="•"/>
               <a:defRPr/>
             </a:lvl1pPr>
-            <a:lvl2pPr indent="-342900" lvl="1" marL="914400" algn="l">
+            <a:lvl2pPr marL="914400" lvl="1" indent="-342900" algn="l">
               <a:lnSpc>
                 <a:spcPct val="90000"/>
               </a:lnSpc>
@@ -5724,7 +5982,7 @@
               <a:buChar char="•"/>
               <a:defRPr/>
             </a:lvl2pPr>
-            <a:lvl3pPr indent="-342900" lvl="2" marL="1371600" algn="l">
+            <a:lvl3pPr marL="1371600" lvl="2" indent="-342900" algn="l">
               <a:lnSpc>
                 <a:spcPct val="90000"/>
               </a:lnSpc>
@@ -5741,7 +5999,7 @@
               <a:buChar char="•"/>
               <a:defRPr/>
             </a:lvl3pPr>
-            <a:lvl4pPr indent="-342900" lvl="3" marL="1828800" algn="l">
+            <a:lvl4pPr marL="1828800" lvl="3" indent="-342900" algn="l">
               <a:lnSpc>
                 <a:spcPct val="90000"/>
               </a:lnSpc>
@@ -5758,7 +6016,7 @@
               <a:buChar char="•"/>
               <a:defRPr/>
             </a:lvl4pPr>
-            <a:lvl5pPr indent="-342900" lvl="4" marL="2286000" algn="l">
+            <a:lvl5pPr marL="2286000" lvl="4" indent="-342900" algn="l">
               <a:lnSpc>
                 <a:spcPct val="90000"/>
               </a:lnSpc>
@@ -5775,7 +6033,7 @@
               <a:buChar char="•"/>
               <a:defRPr/>
             </a:lvl5pPr>
-            <a:lvl6pPr indent="-342900" lvl="5" marL="2743200" algn="l">
+            <a:lvl6pPr marL="2743200" lvl="5" indent="-342900" algn="l">
               <a:lnSpc>
                 <a:spcPct val="90000"/>
               </a:lnSpc>
@@ -5792,7 +6050,7 @@
               <a:buChar char="•"/>
               <a:defRPr/>
             </a:lvl6pPr>
-            <a:lvl7pPr indent="-342900" lvl="6" marL="3200400" algn="l">
+            <a:lvl7pPr marL="3200400" lvl="6" indent="-342900" algn="l">
               <a:lnSpc>
                 <a:spcPct val="90000"/>
               </a:lnSpc>
@@ -5809,7 +6067,7 @@
               <a:buChar char="•"/>
               <a:defRPr/>
             </a:lvl7pPr>
-            <a:lvl8pPr indent="-342900" lvl="7" marL="3657600" algn="l">
+            <a:lvl8pPr marL="3657600" lvl="7" indent="-342900" algn="l">
               <a:lnSpc>
                 <a:spcPct val="90000"/>
               </a:lnSpc>
@@ -5826,7 +6084,7 @@
               <a:buChar char="•"/>
               <a:defRPr/>
             </a:lvl8pPr>
-            <a:lvl9pPr indent="-342900" lvl="8" marL="4114800" algn="l">
+            <a:lvl9pPr marL="4114800" lvl="8" indent="-342900" algn="l">
               <a:lnSpc>
                 <a:spcPct val="90000"/>
               </a:lnSpc>
@@ -5844,15 +6102,19 @@
               <a:defRPr/>
             </a:lvl9pPr>
           </a:lstStyle>
-          <a:p/>
+          <a:p>
+            <a:endParaRPr/>
+          </a:p>
         </p:txBody>
       </p:sp>
       <p:sp>
         <p:nvSpPr>
           <p:cNvPr id="37" name="Google Shape;37;p6"/>
-          <p:cNvSpPr txBox="1"/>
+          <p:cNvSpPr txBox="1">
+            <a:spLocks noGrp="1"/>
+          </p:cNvSpPr>
           <p:nvPr>
-            <p:ph idx="10" type="dt"/>
+            <p:ph type="dt" idx="10"/>
           </p:nvPr>
         </p:nvSpPr>
         <p:spPr>
@@ -5869,7 +6131,7 @@
           </a:ln>
         </p:spPr>
         <p:txBody>
-          <a:bodyPr anchorCtr="0" anchor="ctr" bIns="45700" lIns="91425" spcFirstLastPara="1" rIns="91425" wrap="square" tIns="45700">
+          <a:bodyPr spcFirstLastPara="1" wrap="square" lIns="91425" tIns="45700" rIns="91425" bIns="45700" anchor="ctr" anchorCtr="0">
             <a:noAutofit/>
           </a:bodyPr>
           <a:lstStyle>
@@ -5973,15 +6235,19 @@
               <a:defRPr/>
             </a:lvl9pPr>
           </a:lstStyle>
-          <a:p/>
+          <a:p>
+            <a:endParaRPr/>
+          </a:p>
         </p:txBody>
       </p:sp>
       <p:sp>
         <p:nvSpPr>
           <p:cNvPr id="38" name="Google Shape;38;p6"/>
-          <p:cNvSpPr txBox="1"/>
+          <p:cNvSpPr txBox="1">
+            <a:spLocks noGrp="1"/>
+          </p:cNvSpPr>
           <p:nvPr>
-            <p:ph idx="11" type="ftr"/>
+            <p:ph type="ftr" idx="11"/>
           </p:nvPr>
         </p:nvSpPr>
         <p:spPr>
@@ -5998,7 +6264,7 @@
           </a:ln>
         </p:spPr>
         <p:txBody>
-          <a:bodyPr anchorCtr="0" anchor="ctr" bIns="45700" lIns="91425" spcFirstLastPara="1" rIns="91425" wrap="square" tIns="45700">
+          <a:bodyPr spcFirstLastPara="1" wrap="square" lIns="91425" tIns="45700" rIns="91425" bIns="45700" anchor="ctr" anchorCtr="0">
             <a:noAutofit/>
           </a:bodyPr>
           <a:lstStyle>
@@ -6102,15 +6368,19 @@
               <a:defRPr/>
             </a:lvl9pPr>
           </a:lstStyle>
-          <a:p/>
+          <a:p>
+            <a:endParaRPr/>
+          </a:p>
         </p:txBody>
       </p:sp>
       <p:sp>
         <p:nvSpPr>
           <p:cNvPr id="39" name="Google Shape;39;p6"/>
-          <p:cNvSpPr txBox="1"/>
+          <p:cNvSpPr txBox="1">
+            <a:spLocks noGrp="1"/>
+          </p:cNvSpPr>
           <p:nvPr>
-            <p:ph idx="12" type="sldNum"/>
+            <p:ph type="sldNum" idx="12"/>
           </p:nvPr>
         </p:nvSpPr>
         <p:spPr>
@@ -6127,67 +6397,67 @@
           </a:ln>
         </p:spPr>
         <p:txBody>
-          <a:bodyPr anchorCtr="0" anchor="ctr" bIns="45700" lIns="91425" spcFirstLastPara="1" rIns="91425" wrap="square" tIns="45700">
+          <a:bodyPr spcFirstLastPara="1" wrap="square" lIns="91425" tIns="45700" rIns="91425" bIns="45700" anchor="ctr" anchorCtr="0">
             <a:noAutofit/>
           </a:bodyPr>
           <a:lstStyle>
-            <a:lvl1pPr indent="0" lvl="0" marL="0" algn="r">
+            <a:lvl1pPr marL="0" lvl="0" indent="0" algn="r">
               <a:spcBef>
                 <a:spcPts val="0"/>
               </a:spcBef>
               <a:buNone/>
               <a:defRPr/>
             </a:lvl1pPr>
-            <a:lvl2pPr indent="0" lvl="1" marL="0" algn="r">
+            <a:lvl2pPr marL="0" lvl="1" indent="0" algn="r">
               <a:spcBef>
                 <a:spcPts val="0"/>
               </a:spcBef>
               <a:buNone/>
               <a:defRPr/>
             </a:lvl2pPr>
-            <a:lvl3pPr indent="0" lvl="2" marL="0" algn="r">
+            <a:lvl3pPr marL="0" lvl="2" indent="0" algn="r">
               <a:spcBef>
                 <a:spcPts val="0"/>
               </a:spcBef>
               <a:buNone/>
               <a:defRPr/>
             </a:lvl3pPr>
-            <a:lvl4pPr indent="0" lvl="3" marL="0" algn="r">
+            <a:lvl4pPr marL="0" lvl="3" indent="0" algn="r">
               <a:spcBef>
                 <a:spcPts val="0"/>
               </a:spcBef>
               <a:buNone/>
               <a:defRPr/>
             </a:lvl4pPr>
-            <a:lvl5pPr indent="0" lvl="4" marL="0" algn="r">
+            <a:lvl5pPr marL="0" lvl="4" indent="0" algn="r">
               <a:spcBef>
                 <a:spcPts val="0"/>
               </a:spcBef>
               <a:buNone/>
               <a:defRPr/>
             </a:lvl5pPr>
-            <a:lvl6pPr indent="0" lvl="5" marL="0" algn="r">
+            <a:lvl6pPr marL="0" lvl="5" indent="0" algn="r">
               <a:spcBef>
                 <a:spcPts val="0"/>
               </a:spcBef>
               <a:buNone/>
               <a:defRPr/>
             </a:lvl6pPr>
-            <a:lvl7pPr indent="0" lvl="6" marL="0" algn="r">
+            <a:lvl7pPr marL="0" lvl="6" indent="0" algn="r">
               <a:spcBef>
                 <a:spcPts val="0"/>
               </a:spcBef>
               <a:buNone/>
               <a:defRPr/>
             </a:lvl7pPr>
-            <a:lvl8pPr indent="0" lvl="7" marL="0" algn="r">
+            <a:lvl8pPr marL="0" lvl="7" indent="0" algn="r">
               <a:spcBef>
                 <a:spcPts val="0"/>
               </a:spcBef>
               <a:buNone/>
               <a:defRPr/>
             </a:lvl8pPr>
-            <a:lvl9pPr indent="0" lvl="8" marL="0" algn="r">
+            <a:lvl9pPr marL="0" lvl="8" indent="0" algn="r">
               <a:spcBef>
                 <a:spcPts val="0"/>
               </a:spcBef>
@@ -6196,7 +6466,7 @@
             </a:lvl9pPr>
           </a:lstStyle>
           <a:p>
-            <a:pPr indent="0" lvl="0" marL="0" rtl="0" algn="r">
+            <a:pPr marL="0" lvl="0" indent="0" algn="r" rtl="0">
               <a:spcBef>
                 <a:spcPts val="0"/>
               </a:spcBef>
@@ -6222,11 +6492,11 @@
 </file>
 
 <file path=ppt/slideLayouts/slideLayout5.xml><?xml version="1.0" encoding="utf-8"?>
-<p:sldLayout xmlns:a="http://schemas.openxmlformats.org/drawingml/2006/main" xmlns:r="http://schemas.openxmlformats.org/officeDocument/2006/relationships" xmlns:mc="http://schemas.openxmlformats.org/markup-compatibility/2006" xmlns:mv="urn:schemas-microsoft-com:mac:vml" xmlns:p="http://schemas.openxmlformats.org/presentationml/2006/main" xmlns:c="http://schemas.openxmlformats.org/drawingml/2006/chart" xmlns:dgm="http://schemas.openxmlformats.org/drawingml/2006/diagram" xmlns:o="urn:schemas-microsoft-com:office:office" xmlns:v="urn:schemas-microsoft-com:vml" xmlns:pvml="urn:schemas-microsoft-com:office:powerpoint" xmlns:com="http://schemas.openxmlformats.org/drawingml/2006/compatibility" xmlns:p14="http://schemas.microsoft.com/office/powerpoint/2010/main" xmlns:p15="http://schemas.microsoft.com/office/powerpoint/2012/main" xmlns:ahyp="http://schemas.microsoft.com/office/drawing/2018/hyperlinkcolor" matchingName="Comparison" type="twoTxTwoObj">
+<p:sldLayout xmlns:a="http://schemas.openxmlformats.org/drawingml/2006/main" xmlns:r="http://schemas.openxmlformats.org/officeDocument/2006/relationships" xmlns:p="http://schemas.openxmlformats.org/presentationml/2006/main" matchingName="Comparison" type="twoTxTwoObj">
   <p:cSld name="TWO_OBJECTS_WITH_TEXT">
     <p:spTree>
       <p:nvGrpSpPr>
-        <p:cNvPr id="40" name="Shape 40"/>
+        <p:cNvPr id="1" name="Shape 40"/>
         <p:cNvGrpSpPr/>
         <p:nvPr/>
       </p:nvGrpSpPr>
@@ -6241,7 +6511,9 @@
       <p:sp>
         <p:nvSpPr>
           <p:cNvPr id="41" name="Google Shape;41;p7"/>
-          <p:cNvSpPr txBox="1"/>
+          <p:cNvSpPr txBox="1">
+            <a:spLocks noGrp="1"/>
+          </p:cNvSpPr>
           <p:nvPr>
             <p:ph type="title"/>
           </p:nvPr>
@@ -6260,7 +6532,7 @@
           </a:ln>
         </p:spPr>
         <p:txBody>
-          <a:bodyPr anchorCtr="0" anchor="ctr" bIns="45700" lIns="91425" spcFirstLastPara="1" rIns="91425" wrap="square" tIns="45700">
+          <a:bodyPr spcFirstLastPara="1" wrap="square" lIns="91425" tIns="45700" rIns="91425" bIns="45700" anchor="ctr" anchorCtr="0">
             <a:normAutofit/>
           </a:bodyPr>
           <a:lstStyle>
@@ -6370,15 +6642,19 @@
               <a:defRPr/>
             </a:lvl9pPr>
           </a:lstStyle>
-          <a:p/>
+          <a:p>
+            <a:endParaRPr/>
+          </a:p>
         </p:txBody>
       </p:sp>
       <p:sp>
         <p:nvSpPr>
           <p:cNvPr id="42" name="Google Shape;42;p7"/>
-          <p:cNvSpPr txBox="1"/>
+          <p:cNvSpPr txBox="1">
+            <a:spLocks noGrp="1"/>
+          </p:cNvSpPr>
           <p:nvPr>
-            <p:ph idx="1" type="body"/>
+            <p:ph type="body" idx="1"/>
           </p:nvPr>
         </p:nvSpPr>
         <p:spPr>
@@ -6395,11 +6671,11 @@
           </a:ln>
         </p:spPr>
         <p:txBody>
-          <a:bodyPr anchorCtr="0" anchor="b" bIns="45700" lIns="91425" spcFirstLastPara="1" rIns="91425" wrap="square" tIns="45700">
+          <a:bodyPr spcFirstLastPara="1" wrap="square" lIns="91425" tIns="45700" rIns="91425" bIns="45700" anchor="b" anchorCtr="0">
             <a:normAutofit/>
           </a:bodyPr>
           <a:lstStyle>
-            <a:lvl1pPr indent="-228600" lvl="0" marL="457200" algn="l">
+            <a:lvl1pPr marL="457200" lvl="0" indent="-228600" algn="l">
               <a:lnSpc>
                 <a:spcPct val="90000"/>
               </a:lnSpc>
@@ -6414,9 +6690,9 @@
               </a:buClr>
               <a:buSzPts val="2457"/>
               <a:buNone/>
-              <a:defRPr b="1" sz="2457"/>
+              <a:defRPr sz="2457" b="1"/>
             </a:lvl1pPr>
-            <a:lvl2pPr indent="-228600" lvl="1" marL="914400" algn="l">
+            <a:lvl2pPr marL="914400" lvl="1" indent="-228600" algn="l">
               <a:lnSpc>
                 <a:spcPct val="90000"/>
               </a:lnSpc>
@@ -6431,9 +6707,9 @@
               </a:buClr>
               <a:buSzPts val="2047"/>
               <a:buNone/>
-              <a:defRPr b="1" sz="2047"/>
+              <a:defRPr sz="2047" b="1"/>
             </a:lvl2pPr>
-            <a:lvl3pPr indent="-228600" lvl="2" marL="1371600" algn="l">
+            <a:lvl3pPr marL="1371600" lvl="2" indent="-228600" algn="l">
               <a:lnSpc>
                 <a:spcPct val="90000"/>
               </a:lnSpc>
@@ -6448,9 +6724,9 @@
               </a:buClr>
               <a:buSzPts val="1842"/>
               <a:buNone/>
-              <a:defRPr b="1" sz="1842"/>
+              <a:defRPr sz="1842" b="1"/>
             </a:lvl3pPr>
-            <a:lvl4pPr indent="-228600" lvl="3" marL="1828800" algn="l">
+            <a:lvl4pPr marL="1828800" lvl="3" indent="-228600" algn="l">
               <a:lnSpc>
                 <a:spcPct val="90000"/>
               </a:lnSpc>
@@ -6465,9 +6741,9 @@
               </a:buClr>
               <a:buSzPts val="1638"/>
               <a:buNone/>
-              <a:defRPr b="1" sz="1638"/>
+              <a:defRPr sz="1638" b="1"/>
             </a:lvl4pPr>
-            <a:lvl5pPr indent="-228600" lvl="4" marL="2286000" algn="l">
+            <a:lvl5pPr marL="2286000" lvl="4" indent="-228600" algn="l">
               <a:lnSpc>
                 <a:spcPct val="90000"/>
               </a:lnSpc>
@@ -6482,9 +6758,9 @@
               </a:buClr>
               <a:buSzPts val="1638"/>
               <a:buNone/>
-              <a:defRPr b="1" sz="1638"/>
+              <a:defRPr sz="1638" b="1"/>
             </a:lvl5pPr>
-            <a:lvl6pPr indent="-228600" lvl="5" marL="2743200" algn="l">
+            <a:lvl6pPr marL="2743200" lvl="5" indent="-228600" algn="l">
               <a:lnSpc>
                 <a:spcPct val="90000"/>
               </a:lnSpc>
@@ -6499,9 +6775,9 @@
               </a:buClr>
               <a:buSzPts val="1638"/>
               <a:buNone/>
-              <a:defRPr b="1" sz="1638"/>
+              <a:defRPr sz="1638" b="1"/>
             </a:lvl6pPr>
-            <a:lvl7pPr indent="-228600" lvl="6" marL="3200400" algn="l">
+            <a:lvl7pPr marL="3200400" lvl="6" indent="-228600" algn="l">
               <a:lnSpc>
                 <a:spcPct val="90000"/>
               </a:lnSpc>
@@ -6516,9 +6792,9 @@
               </a:buClr>
               <a:buSzPts val="1638"/>
               <a:buNone/>
-              <a:defRPr b="1" sz="1638"/>
+              <a:defRPr sz="1638" b="1"/>
             </a:lvl7pPr>
-            <a:lvl8pPr indent="-228600" lvl="7" marL="3657600" algn="l">
+            <a:lvl8pPr marL="3657600" lvl="7" indent="-228600" algn="l">
               <a:lnSpc>
                 <a:spcPct val="90000"/>
               </a:lnSpc>
@@ -6533,9 +6809,9 @@
               </a:buClr>
               <a:buSzPts val="1638"/>
               <a:buNone/>
-              <a:defRPr b="1" sz="1638"/>
+              <a:defRPr sz="1638" b="1"/>
             </a:lvl8pPr>
-            <a:lvl9pPr indent="-228600" lvl="8" marL="4114800" algn="l">
+            <a:lvl9pPr marL="4114800" lvl="8" indent="-228600" algn="l">
               <a:lnSpc>
                 <a:spcPct val="90000"/>
               </a:lnSpc>
@@ -6550,18 +6826,22 @@
               </a:buClr>
               <a:buSzPts val="1638"/>
               <a:buNone/>
-              <a:defRPr b="1" sz="1638"/>
+              <a:defRPr sz="1638" b="1"/>
             </a:lvl9pPr>
           </a:lstStyle>
-          <a:p/>
+          <a:p>
+            <a:endParaRPr/>
+          </a:p>
         </p:txBody>
       </p:sp>
       <p:sp>
         <p:nvSpPr>
           <p:cNvPr id="43" name="Google Shape;43;p7"/>
-          <p:cNvSpPr txBox="1"/>
+          <p:cNvSpPr txBox="1">
+            <a:spLocks noGrp="1"/>
+          </p:cNvSpPr>
           <p:nvPr>
-            <p:ph idx="2" type="body"/>
+            <p:ph type="body" idx="2"/>
           </p:nvPr>
         </p:nvSpPr>
         <p:spPr>
@@ -6578,11 +6858,11 @@
           </a:ln>
         </p:spPr>
         <p:txBody>
-          <a:bodyPr anchorCtr="0" anchor="t" bIns="45700" lIns="91425" spcFirstLastPara="1" rIns="91425" wrap="square" tIns="45700">
+          <a:bodyPr spcFirstLastPara="1" wrap="square" lIns="91425" tIns="45700" rIns="91425" bIns="45700" anchor="t" anchorCtr="0">
             <a:normAutofit/>
           </a:bodyPr>
           <a:lstStyle>
-            <a:lvl1pPr indent="-342900" lvl="0" marL="457200" algn="l">
+            <a:lvl1pPr marL="457200" lvl="0" indent="-342900" algn="l">
               <a:lnSpc>
                 <a:spcPct val="90000"/>
               </a:lnSpc>
@@ -6599,7 +6879,7 @@
               <a:buChar char="•"/>
               <a:defRPr/>
             </a:lvl1pPr>
-            <a:lvl2pPr indent="-342900" lvl="1" marL="914400" algn="l">
+            <a:lvl2pPr marL="914400" lvl="1" indent="-342900" algn="l">
               <a:lnSpc>
                 <a:spcPct val="90000"/>
               </a:lnSpc>
@@ -6616,7 +6896,7 @@
               <a:buChar char="•"/>
               <a:defRPr/>
             </a:lvl2pPr>
-            <a:lvl3pPr indent="-342900" lvl="2" marL="1371600" algn="l">
+            <a:lvl3pPr marL="1371600" lvl="2" indent="-342900" algn="l">
               <a:lnSpc>
                 <a:spcPct val="90000"/>
               </a:lnSpc>
@@ -6633,7 +6913,7 @@
               <a:buChar char="•"/>
               <a:defRPr/>
             </a:lvl3pPr>
-            <a:lvl4pPr indent="-342900" lvl="3" marL="1828800" algn="l">
+            <a:lvl4pPr marL="1828800" lvl="3" indent="-342900" algn="l">
               <a:lnSpc>
                 <a:spcPct val="90000"/>
               </a:lnSpc>
@@ -6650,7 +6930,7 @@
               <a:buChar char="•"/>
               <a:defRPr/>
             </a:lvl4pPr>
-            <a:lvl5pPr indent="-342900" lvl="4" marL="2286000" algn="l">
+            <a:lvl5pPr marL="2286000" lvl="4" indent="-342900" algn="l">
               <a:lnSpc>
                 <a:spcPct val="90000"/>
               </a:lnSpc>
@@ -6667,7 +6947,7 @@
               <a:buChar char="•"/>
               <a:defRPr/>
             </a:lvl5pPr>
-            <a:lvl6pPr indent="-342900" lvl="5" marL="2743200" algn="l">
+            <a:lvl6pPr marL="2743200" lvl="5" indent="-342900" algn="l">
               <a:lnSpc>
                 <a:spcPct val="90000"/>
               </a:lnSpc>
@@ -6684,7 +6964,7 @@
               <a:buChar char="•"/>
               <a:defRPr/>
             </a:lvl6pPr>
-            <a:lvl7pPr indent="-342900" lvl="6" marL="3200400" algn="l">
+            <a:lvl7pPr marL="3200400" lvl="6" indent="-342900" algn="l">
               <a:lnSpc>
                 <a:spcPct val="90000"/>
               </a:lnSpc>
@@ -6701,7 +6981,7 @@
               <a:buChar char="•"/>
               <a:defRPr/>
             </a:lvl7pPr>
-            <a:lvl8pPr indent="-342900" lvl="7" marL="3657600" algn="l">
+            <a:lvl8pPr marL="3657600" lvl="7" indent="-342900" algn="l">
               <a:lnSpc>
                 <a:spcPct val="90000"/>
               </a:lnSpc>
@@ -6718,7 +6998,7 @@
               <a:buChar char="•"/>
               <a:defRPr/>
             </a:lvl8pPr>
-            <a:lvl9pPr indent="-342900" lvl="8" marL="4114800" algn="l">
+            <a:lvl9pPr marL="4114800" lvl="8" indent="-342900" algn="l">
               <a:lnSpc>
                 <a:spcPct val="90000"/>
               </a:lnSpc>
@@ -6736,15 +7016,19 @@
               <a:defRPr/>
             </a:lvl9pPr>
           </a:lstStyle>
-          <a:p/>
+          <a:p>
+            <a:endParaRPr/>
+          </a:p>
         </p:txBody>
       </p:sp>
       <p:sp>
         <p:nvSpPr>
           <p:cNvPr id="44" name="Google Shape;44;p7"/>
-          <p:cNvSpPr txBox="1"/>
+          <p:cNvSpPr txBox="1">
+            <a:spLocks noGrp="1"/>
+          </p:cNvSpPr>
           <p:nvPr>
-            <p:ph idx="3" type="body"/>
+            <p:ph type="body" idx="3"/>
           </p:nvPr>
         </p:nvSpPr>
         <p:spPr>
@@ -6761,11 +7045,11 @@
           </a:ln>
         </p:spPr>
         <p:txBody>
-          <a:bodyPr anchorCtr="0" anchor="b" bIns="45700" lIns="91425" spcFirstLastPara="1" rIns="91425" wrap="square" tIns="45700">
+          <a:bodyPr spcFirstLastPara="1" wrap="square" lIns="91425" tIns="45700" rIns="91425" bIns="45700" anchor="b" anchorCtr="0">
             <a:normAutofit/>
           </a:bodyPr>
           <a:lstStyle>
-            <a:lvl1pPr indent="-228600" lvl="0" marL="457200" algn="l">
+            <a:lvl1pPr marL="457200" lvl="0" indent="-228600" algn="l">
               <a:lnSpc>
                 <a:spcPct val="90000"/>
               </a:lnSpc>
@@ -6780,9 +7064,9 @@
               </a:buClr>
               <a:buSzPts val="2457"/>
               <a:buNone/>
-              <a:defRPr b="1" sz="2457"/>
+              <a:defRPr sz="2457" b="1"/>
             </a:lvl1pPr>
-            <a:lvl2pPr indent="-228600" lvl="1" marL="914400" algn="l">
+            <a:lvl2pPr marL="914400" lvl="1" indent="-228600" algn="l">
               <a:lnSpc>
                 <a:spcPct val="90000"/>
               </a:lnSpc>
@@ -6797,9 +7081,9 @@
               </a:buClr>
               <a:buSzPts val="2047"/>
               <a:buNone/>
-              <a:defRPr b="1" sz="2047"/>
+              <a:defRPr sz="2047" b="1"/>
             </a:lvl2pPr>
-            <a:lvl3pPr indent="-228600" lvl="2" marL="1371600" algn="l">
+            <a:lvl3pPr marL="1371600" lvl="2" indent="-228600" algn="l">
               <a:lnSpc>
                 <a:spcPct val="90000"/>
               </a:lnSpc>
@@ -6814,9 +7098,9 @@
               </a:buClr>
               <a:buSzPts val="1842"/>
               <a:buNone/>
-              <a:defRPr b="1" sz="1842"/>
+              <a:defRPr sz="1842" b="1"/>
             </a:lvl3pPr>
-            <a:lvl4pPr indent="-228600" lvl="3" marL="1828800" algn="l">
+            <a:lvl4pPr marL="1828800" lvl="3" indent="-228600" algn="l">
               <a:lnSpc>
                 <a:spcPct val="90000"/>
               </a:lnSpc>
@@ -6831,9 +7115,9 @@
               </a:buClr>
               <a:buSzPts val="1638"/>
               <a:buNone/>
-              <a:defRPr b="1" sz="1638"/>
+              <a:defRPr sz="1638" b="1"/>
             </a:lvl4pPr>
-            <a:lvl5pPr indent="-228600" lvl="4" marL="2286000" algn="l">
+            <a:lvl5pPr marL="2286000" lvl="4" indent="-228600" algn="l">
               <a:lnSpc>
                 <a:spcPct val="90000"/>
               </a:lnSpc>
@@ -6848,9 +7132,9 @@
               </a:buClr>
               <a:buSzPts val="1638"/>
               <a:buNone/>
-              <a:defRPr b="1" sz="1638"/>
+              <a:defRPr sz="1638" b="1"/>
             </a:lvl5pPr>
-            <a:lvl6pPr indent="-228600" lvl="5" marL="2743200" algn="l">
+            <a:lvl6pPr marL="2743200" lvl="5" indent="-228600" algn="l">
               <a:lnSpc>
                 <a:spcPct val="90000"/>
               </a:lnSpc>
@@ -6865,9 +7149,9 @@
               </a:buClr>
               <a:buSzPts val="1638"/>
               <a:buNone/>
-              <a:defRPr b="1" sz="1638"/>
+              <a:defRPr sz="1638" b="1"/>
             </a:lvl6pPr>
-            <a:lvl7pPr indent="-228600" lvl="6" marL="3200400" algn="l">
+            <a:lvl7pPr marL="3200400" lvl="6" indent="-228600" algn="l">
               <a:lnSpc>
                 <a:spcPct val="90000"/>
               </a:lnSpc>
@@ -6882,9 +7166,9 @@
               </a:buClr>
               <a:buSzPts val="1638"/>
               <a:buNone/>
-              <a:defRPr b="1" sz="1638"/>
+              <a:defRPr sz="1638" b="1"/>
             </a:lvl7pPr>
-            <a:lvl8pPr indent="-228600" lvl="7" marL="3657600" algn="l">
+            <a:lvl8pPr marL="3657600" lvl="7" indent="-228600" algn="l">
               <a:lnSpc>
                 <a:spcPct val="90000"/>
               </a:lnSpc>
@@ -6899,9 +7183,9 @@
               </a:buClr>
               <a:buSzPts val="1638"/>
               <a:buNone/>
-              <a:defRPr b="1" sz="1638"/>
+              <a:defRPr sz="1638" b="1"/>
             </a:lvl8pPr>
-            <a:lvl9pPr indent="-228600" lvl="8" marL="4114800" algn="l">
+            <a:lvl9pPr marL="4114800" lvl="8" indent="-228600" algn="l">
               <a:lnSpc>
                 <a:spcPct val="90000"/>
               </a:lnSpc>
@@ -6916,18 +7200,22 @@
               </a:buClr>
               <a:buSzPts val="1638"/>
               <a:buNone/>
-              <a:defRPr b="1" sz="1638"/>
+              <a:defRPr sz="1638" b="1"/>
             </a:lvl9pPr>
           </a:lstStyle>
-          <a:p/>
+          <a:p>
+            <a:endParaRPr/>
+          </a:p>
         </p:txBody>
       </p:sp>
       <p:sp>
         <p:nvSpPr>
           <p:cNvPr id="45" name="Google Shape;45;p7"/>
-          <p:cNvSpPr txBox="1"/>
+          <p:cNvSpPr txBox="1">
+            <a:spLocks noGrp="1"/>
+          </p:cNvSpPr>
           <p:nvPr>
-            <p:ph idx="4" type="body"/>
+            <p:ph type="body" idx="4"/>
           </p:nvPr>
         </p:nvSpPr>
         <p:spPr>
@@ -6944,11 +7232,11 @@
           </a:ln>
         </p:spPr>
         <p:txBody>
-          <a:bodyPr anchorCtr="0" anchor="t" bIns="45700" lIns="91425" spcFirstLastPara="1" rIns="91425" wrap="square" tIns="45700">
+          <a:bodyPr spcFirstLastPara="1" wrap="square" lIns="91425" tIns="45700" rIns="91425" bIns="45700" anchor="t" anchorCtr="0">
             <a:normAutofit/>
           </a:bodyPr>
           <a:lstStyle>
-            <a:lvl1pPr indent="-342900" lvl="0" marL="457200" algn="l">
+            <a:lvl1pPr marL="457200" lvl="0" indent="-342900" algn="l">
               <a:lnSpc>
                 <a:spcPct val="90000"/>
               </a:lnSpc>
@@ -6965,7 +7253,7 @@
               <a:buChar char="•"/>
               <a:defRPr/>
             </a:lvl1pPr>
-            <a:lvl2pPr indent="-342900" lvl="1" marL="914400" algn="l">
+            <a:lvl2pPr marL="914400" lvl="1" indent="-342900" algn="l">
               <a:lnSpc>
                 <a:spcPct val="90000"/>
               </a:lnSpc>
@@ -6982,7 +7270,7 @@
               <a:buChar char="•"/>
               <a:defRPr/>
             </a:lvl2pPr>
-            <a:lvl3pPr indent="-342900" lvl="2" marL="1371600" algn="l">
+            <a:lvl3pPr marL="1371600" lvl="2" indent="-342900" algn="l">
               <a:lnSpc>
                 <a:spcPct val="90000"/>
               </a:lnSpc>
@@ -6999,7 +7287,7 @@
               <a:buChar char="•"/>
               <a:defRPr/>
             </a:lvl3pPr>
-            <a:lvl4pPr indent="-342900" lvl="3" marL="1828800" algn="l">
+            <a:lvl4pPr marL="1828800" lvl="3" indent="-342900" algn="l">
               <a:lnSpc>
                 <a:spcPct val="90000"/>
               </a:lnSpc>
@@ -7016,7 +7304,7 @@
               <a:buChar char="•"/>
               <a:defRPr/>
             </a:lvl4pPr>
-            <a:lvl5pPr indent="-342900" lvl="4" marL="2286000" algn="l">
+            <a:lvl5pPr marL="2286000" lvl="4" indent="-342900" algn="l">
               <a:lnSpc>
                 <a:spcPct val="90000"/>
               </a:lnSpc>
@@ -7033,7 +7321,7 @@
               <a:buChar char="•"/>
               <a:defRPr/>
             </a:lvl5pPr>
-            <a:lvl6pPr indent="-342900" lvl="5" marL="2743200" algn="l">
+            <a:lvl6pPr marL="2743200" lvl="5" indent="-342900" algn="l">
               <a:lnSpc>
                 <a:spcPct val="90000"/>
               </a:lnSpc>
@@ -7050,7 +7338,7 @@
               <a:buChar char="•"/>
               <a:defRPr/>
             </a:lvl6pPr>
-            <a:lvl7pPr indent="-342900" lvl="6" marL="3200400" algn="l">
+            <a:lvl7pPr marL="3200400" lvl="6" indent="-342900" algn="l">
               <a:lnSpc>
                 <a:spcPct val="90000"/>
               </a:lnSpc>
@@ -7067,7 +7355,7 @@
               <a:buChar char="•"/>
               <a:defRPr/>
             </a:lvl7pPr>
-            <a:lvl8pPr indent="-342900" lvl="7" marL="3657600" algn="l">
+            <a:lvl8pPr marL="3657600" lvl="7" indent="-342900" algn="l">
               <a:lnSpc>
                 <a:spcPct val="90000"/>
               </a:lnSpc>
@@ -7084,7 +7372,7 @@
               <a:buChar char="•"/>
               <a:defRPr/>
             </a:lvl8pPr>
-            <a:lvl9pPr indent="-342900" lvl="8" marL="4114800" algn="l">
+            <a:lvl9pPr marL="4114800" lvl="8" indent="-342900" algn="l">
               <a:lnSpc>
                 <a:spcPct val="90000"/>
               </a:lnSpc>
@@ -7102,15 +7390,19 @@
               <a:defRPr/>
             </a:lvl9pPr>
           </a:lstStyle>
-          <a:p/>
+          <a:p>
+            <a:endParaRPr/>
+          </a:p>
         </p:txBody>
       </p:sp>
       <p:sp>
         <p:nvSpPr>
           <p:cNvPr id="46" name="Google Shape;46;p7"/>
-          <p:cNvSpPr txBox="1"/>
+          <p:cNvSpPr txBox="1">
+            <a:spLocks noGrp="1"/>
+          </p:cNvSpPr>
           <p:nvPr>
-            <p:ph idx="10" type="dt"/>
+            <p:ph type="dt" idx="10"/>
           </p:nvPr>
         </p:nvSpPr>
         <p:spPr>
@@ -7127,7 +7419,7 @@
           </a:ln>
         </p:spPr>
         <p:txBody>
-          <a:bodyPr anchorCtr="0" anchor="ctr" bIns="45700" lIns="91425" spcFirstLastPara="1" rIns="91425" wrap="square" tIns="45700">
+          <a:bodyPr spcFirstLastPara="1" wrap="square" lIns="91425" tIns="45700" rIns="91425" bIns="45700" anchor="ctr" anchorCtr="0">
             <a:noAutofit/>
           </a:bodyPr>
           <a:lstStyle>
@@ -7231,15 +7523,19 @@
               <a:defRPr/>
             </a:lvl9pPr>
           </a:lstStyle>
-          <a:p/>
+          <a:p>
+            <a:endParaRPr/>
+          </a:p>
         </p:txBody>
       </p:sp>
       <p:sp>
         <p:nvSpPr>
           <p:cNvPr id="47" name="Google Shape;47;p7"/>
-          <p:cNvSpPr txBox="1"/>
+          <p:cNvSpPr txBox="1">
+            <a:spLocks noGrp="1"/>
+          </p:cNvSpPr>
           <p:nvPr>
-            <p:ph idx="11" type="ftr"/>
+            <p:ph type="ftr" idx="11"/>
           </p:nvPr>
         </p:nvSpPr>
         <p:spPr>
@@ -7256,7 +7552,7 @@
           </a:ln>
         </p:spPr>
         <p:txBody>
-          <a:bodyPr anchorCtr="0" anchor="ctr" bIns="45700" lIns="91425" spcFirstLastPara="1" rIns="91425" wrap="square" tIns="45700">
+          <a:bodyPr spcFirstLastPara="1" wrap="square" lIns="91425" tIns="45700" rIns="91425" bIns="45700" anchor="ctr" anchorCtr="0">
             <a:noAutofit/>
           </a:bodyPr>
           <a:lstStyle>
@@ -7360,15 +7656,19 @@
               <a:defRPr/>
             </a:lvl9pPr>
           </a:lstStyle>
-          <a:p/>
+          <a:p>
+            <a:endParaRPr/>
+          </a:p>
         </p:txBody>
       </p:sp>
       <p:sp>
         <p:nvSpPr>
           <p:cNvPr id="48" name="Google Shape;48;p7"/>
-          <p:cNvSpPr txBox="1"/>
+          <p:cNvSpPr txBox="1">
+            <a:spLocks noGrp="1"/>
+          </p:cNvSpPr>
           <p:nvPr>
-            <p:ph idx="12" type="sldNum"/>
+            <p:ph type="sldNum" idx="12"/>
           </p:nvPr>
         </p:nvSpPr>
         <p:spPr>
@@ -7385,67 +7685,67 @@
           </a:ln>
         </p:spPr>
         <p:txBody>
-          <a:bodyPr anchorCtr="0" anchor="ctr" bIns="45700" lIns="91425" spcFirstLastPara="1" rIns="91425" wrap="square" tIns="45700">
+          <a:bodyPr spcFirstLastPara="1" wrap="square" lIns="91425" tIns="45700" rIns="91425" bIns="45700" anchor="ctr" anchorCtr="0">
             <a:noAutofit/>
           </a:bodyPr>
           <a:lstStyle>
-            <a:lvl1pPr indent="0" lvl="0" marL="0" algn="r">
+            <a:lvl1pPr marL="0" lvl="0" indent="0" algn="r">
               <a:spcBef>
                 <a:spcPts val="0"/>
               </a:spcBef>
               <a:buNone/>
               <a:defRPr/>
             </a:lvl1pPr>
-            <a:lvl2pPr indent="0" lvl="1" marL="0" algn="r">
+            <a:lvl2pPr marL="0" lvl="1" indent="0" algn="r">
               <a:spcBef>
                 <a:spcPts val="0"/>
               </a:spcBef>
               <a:buNone/>
               <a:defRPr/>
             </a:lvl2pPr>
-            <a:lvl3pPr indent="0" lvl="2" marL="0" algn="r">
+            <a:lvl3pPr marL="0" lvl="2" indent="0" algn="r">
               <a:spcBef>
                 <a:spcPts val="0"/>
               </a:spcBef>
               <a:buNone/>
               <a:defRPr/>
             </a:lvl3pPr>
-            <a:lvl4pPr indent="0" lvl="3" marL="0" algn="r">
+            <a:lvl4pPr marL="0" lvl="3" indent="0" algn="r">
               <a:spcBef>
                 <a:spcPts val="0"/>
               </a:spcBef>
               <a:buNone/>
               <a:defRPr/>
             </a:lvl4pPr>
-            <a:lvl5pPr indent="0" lvl="4" marL="0" algn="r">
+            <a:lvl5pPr marL="0" lvl="4" indent="0" algn="r">
               <a:spcBef>
                 <a:spcPts val="0"/>
               </a:spcBef>
               <a:buNone/>
               <a:defRPr/>
             </a:lvl5pPr>
-            <a:lvl6pPr indent="0" lvl="5" marL="0" algn="r">
+            <a:lvl6pPr marL="0" lvl="5" indent="0" algn="r">
               <a:spcBef>
                 <a:spcPts val="0"/>
               </a:spcBef>
               <a:buNone/>
               <a:defRPr/>
             </a:lvl6pPr>
-            <a:lvl7pPr indent="0" lvl="6" marL="0" algn="r">
+            <a:lvl7pPr marL="0" lvl="6" indent="0" algn="r">
               <a:spcBef>
                 <a:spcPts val="0"/>
               </a:spcBef>
               <a:buNone/>
               <a:defRPr/>
             </a:lvl7pPr>
-            <a:lvl8pPr indent="0" lvl="7" marL="0" algn="r">
+            <a:lvl8pPr marL="0" lvl="7" indent="0" algn="r">
               <a:spcBef>
                 <a:spcPts val="0"/>
               </a:spcBef>
               <a:buNone/>
               <a:defRPr/>
             </a:lvl8pPr>
-            <a:lvl9pPr indent="0" lvl="8" marL="0" algn="r">
+            <a:lvl9pPr marL="0" lvl="8" indent="0" algn="r">
               <a:spcBef>
                 <a:spcPts val="0"/>
               </a:spcBef>
@@ -7454,7 +7754,7 @@
             </a:lvl9pPr>
           </a:lstStyle>
           <a:p>
-            <a:pPr indent="0" lvl="0" marL="0" rtl="0" algn="r">
+            <a:pPr marL="0" lvl="0" indent="0" algn="r" rtl="0">
               <a:spcBef>
                 <a:spcPts val="0"/>
               </a:spcBef>
@@ -7480,11 +7780,11 @@
 </file>
 
 <file path=ppt/slideLayouts/slideLayout6.xml><?xml version="1.0" encoding="utf-8"?>
-<p:sldLayout xmlns:a="http://schemas.openxmlformats.org/drawingml/2006/main" xmlns:r="http://schemas.openxmlformats.org/officeDocument/2006/relationships" xmlns:mc="http://schemas.openxmlformats.org/markup-compatibility/2006" xmlns:mv="urn:schemas-microsoft-com:mac:vml" xmlns:p="http://schemas.openxmlformats.org/presentationml/2006/main" xmlns:c="http://schemas.openxmlformats.org/drawingml/2006/chart" xmlns:dgm="http://schemas.openxmlformats.org/drawingml/2006/diagram" xmlns:o="urn:schemas-microsoft-com:office:office" xmlns:v="urn:schemas-microsoft-com:vml" xmlns:pvml="urn:schemas-microsoft-com:office:powerpoint" xmlns:com="http://schemas.openxmlformats.org/drawingml/2006/compatibility" xmlns:p14="http://schemas.microsoft.com/office/powerpoint/2010/main" xmlns:p15="http://schemas.microsoft.com/office/powerpoint/2012/main" xmlns:ahyp="http://schemas.microsoft.com/office/drawing/2018/hyperlinkcolor" matchingName="Title Only" type="titleOnly">
+<p:sldLayout xmlns:a="http://schemas.openxmlformats.org/drawingml/2006/main" xmlns:r="http://schemas.openxmlformats.org/officeDocument/2006/relationships" xmlns:p="http://schemas.openxmlformats.org/presentationml/2006/main" matchingName="Title Only" type="titleOnly">
   <p:cSld name="TITLE_ONLY">
     <p:spTree>
       <p:nvGrpSpPr>
-        <p:cNvPr id="49" name="Shape 49"/>
+        <p:cNvPr id="1" name="Shape 49"/>
         <p:cNvGrpSpPr/>
         <p:nvPr/>
       </p:nvGrpSpPr>
@@ -7499,7 +7799,9 @@
       <p:sp>
         <p:nvSpPr>
           <p:cNvPr id="50" name="Google Shape;50;p8"/>
-          <p:cNvSpPr txBox="1"/>
+          <p:cNvSpPr txBox="1">
+            <a:spLocks noGrp="1"/>
+          </p:cNvSpPr>
           <p:nvPr>
             <p:ph type="title"/>
           </p:nvPr>
@@ -7518,7 +7820,7 @@
           </a:ln>
         </p:spPr>
         <p:txBody>
-          <a:bodyPr anchorCtr="0" anchor="ctr" bIns="45700" lIns="91425" spcFirstLastPara="1" rIns="91425" wrap="square" tIns="45700">
+          <a:bodyPr spcFirstLastPara="1" wrap="square" lIns="91425" tIns="45700" rIns="91425" bIns="45700" anchor="ctr" anchorCtr="0">
             <a:normAutofit/>
           </a:bodyPr>
           <a:lstStyle>
@@ -7628,15 +7930,19 @@
               <a:defRPr/>
             </a:lvl9pPr>
           </a:lstStyle>
-          <a:p/>
+          <a:p>
+            <a:endParaRPr/>
+          </a:p>
         </p:txBody>
       </p:sp>
       <p:sp>
         <p:nvSpPr>
           <p:cNvPr id="51" name="Google Shape;51;p8"/>
-          <p:cNvSpPr txBox="1"/>
+          <p:cNvSpPr txBox="1">
+            <a:spLocks noGrp="1"/>
+          </p:cNvSpPr>
           <p:nvPr>
-            <p:ph idx="10" type="dt"/>
+            <p:ph type="dt" idx="10"/>
           </p:nvPr>
         </p:nvSpPr>
         <p:spPr>
@@ -7653,7 +7959,7 @@
           </a:ln>
         </p:spPr>
         <p:txBody>
-          <a:bodyPr anchorCtr="0" anchor="ctr" bIns="45700" lIns="91425" spcFirstLastPara="1" rIns="91425" wrap="square" tIns="45700">
+          <a:bodyPr spcFirstLastPara="1" wrap="square" lIns="91425" tIns="45700" rIns="91425" bIns="45700" anchor="ctr" anchorCtr="0">
             <a:noAutofit/>
           </a:bodyPr>
           <a:lstStyle>
@@ -7757,15 +8063,19 @@
               <a:defRPr/>
             </a:lvl9pPr>
           </a:lstStyle>
-          <a:p/>
+          <a:p>
+            <a:endParaRPr/>
+          </a:p>
         </p:txBody>
       </p:sp>
       <p:sp>
         <p:nvSpPr>
           <p:cNvPr id="52" name="Google Shape;52;p8"/>
-          <p:cNvSpPr txBox="1"/>
+          <p:cNvSpPr txBox="1">
+            <a:spLocks noGrp="1"/>
+          </p:cNvSpPr>
           <p:nvPr>
-            <p:ph idx="11" type="ftr"/>
+            <p:ph type="ftr" idx="11"/>
           </p:nvPr>
         </p:nvSpPr>
         <p:spPr>
@@ -7782,7 +8092,7 @@
           </a:ln>
         </p:spPr>
         <p:txBody>
-          <a:bodyPr anchorCtr="0" anchor="ctr" bIns="45700" lIns="91425" spcFirstLastPara="1" rIns="91425" wrap="square" tIns="45700">
+          <a:bodyPr spcFirstLastPara="1" wrap="square" lIns="91425" tIns="45700" rIns="91425" bIns="45700" anchor="ctr" anchorCtr="0">
             <a:noAutofit/>
           </a:bodyPr>
           <a:lstStyle>
@@ -7886,15 +8196,19 @@
               <a:defRPr/>
             </a:lvl9pPr>
           </a:lstStyle>
-          <a:p/>
+          <a:p>
+            <a:endParaRPr/>
+          </a:p>
         </p:txBody>
       </p:sp>
       <p:sp>
         <p:nvSpPr>
           <p:cNvPr id="53" name="Google Shape;53;p8"/>
-          <p:cNvSpPr txBox="1"/>
+          <p:cNvSpPr txBox="1">
+            <a:spLocks noGrp="1"/>
+          </p:cNvSpPr>
           <p:nvPr>
-            <p:ph idx="12" type="sldNum"/>
+            <p:ph type="sldNum" idx="12"/>
           </p:nvPr>
         </p:nvSpPr>
         <p:spPr>
@@ -7911,67 +8225,67 @@
           </a:ln>
         </p:spPr>
         <p:txBody>
-          <a:bodyPr anchorCtr="0" anchor="ctr" bIns="45700" lIns="91425" spcFirstLastPara="1" rIns="91425" wrap="square" tIns="45700">
+          <a:bodyPr spcFirstLastPara="1" wrap="square" lIns="91425" tIns="45700" rIns="91425" bIns="45700" anchor="ctr" anchorCtr="0">
             <a:noAutofit/>
           </a:bodyPr>
           <a:lstStyle>
-            <a:lvl1pPr indent="0" lvl="0" marL="0" algn="r">
+            <a:lvl1pPr marL="0" lvl="0" indent="0" algn="r">
               <a:spcBef>
                 <a:spcPts val="0"/>
               </a:spcBef>
               <a:buNone/>
               <a:defRPr/>
             </a:lvl1pPr>
-            <a:lvl2pPr indent="0" lvl="1" marL="0" algn="r">
+            <a:lvl2pPr marL="0" lvl="1" indent="0" algn="r">
               <a:spcBef>
                 <a:spcPts val="0"/>
               </a:spcBef>
               <a:buNone/>
               <a:defRPr/>
             </a:lvl2pPr>
-            <a:lvl3pPr indent="0" lvl="2" marL="0" algn="r">
+            <a:lvl3pPr marL="0" lvl="2" indent="0" algn="r">
               <a:spcBef>
                 <a:spcPts val="0"/>
               </a:spcBef>
               <a:buNone/>
               <a:defRPr/>
             </a:lvl3pPr>
-            <a:lvl4pPr indent="0" lvl="3" marL="0" algn="r">
+            <a:lvl4pPr marL="0" lvl="3" indent="0" algn="r">
               <a:spcBef>
                 <a:spcPts val="0"/>
               </a:spcBef>
               <a:buNone/>
               <a:defRPr/>
             </a:lvl4pPr>
-            <a:lvl5pPr indent="0" lvl="4" marL="0" algn="r">
+            <a:lvl5pPr marL="0" lvl="4" indent="0" algn="r">
               <a:spcBef>
                 <a:spcPts val="0"/>
               </a:spcBef>
               <a:buNone/>
               <a:defRPr/>
             </a:lvl5pPr>
-            <a:lvl6pPr indent="0" lvl="5" marL="0" algn="r">
+            <a:lvl6pPr marL="0" lvl="5" indent="0" algn="r">
               <a:spcBef>
                 <a:spcPts val="0"/>
               </a:spcBef>
               <a:buNone/>
               <a:defRPr/>
             </a:lvl6pPr>
-            <a:lvl7pPr indent="0" lvl="6" marL="0" algn="r">
+            <a:lvl7pPr marL="0" lvl="6" indent="0" algn="r">
               <a:spcBef>
                 <a:spcPts val="0"/>
               </a:spcBef>
               <a:buNone/>
               <a:defRPr/>
             </a:lvl7pPr>
-            <a:lvl8pPr indent="0" lvl="7" marL="0" algn="r">
+            <a:lvl8pPr marL="0" lvl="7" indent="0" algn="r">
               <a:spcBef>
                 <a:spcPts val="0"/>
               </a:spcBef>
               <a:buNone/>
               <a:defRPr/>
             </a:lvl8pPr>
-            <a:lvl9pPr indent="0" lvl="8" marL="0" algn="r">
+            <a:lvl9pPr marL="0" lvl="8" indent="0" algn="r">
               <a:spcBef>
                 <a:spcPts val="0"/>
               </a:spcBef>
@@ -7980,7 +8294,7 @@
             </a:lvl9pPr>
           </a:lstStyle>
           <a:p>
-            <a:pPr indent="0" lvl="0" marL="0" rtl="0" algn="r">
+            <a:pPr marL="0" lvl="0" indent="0" algn="r" rtl="0">
               <a:spcBef>
                 <a:spcPts val="0"/>
               </a:spcBef>
@@ -8006,11 +8320,11 @@
 </file>
 
 <file path=ppt/slideLayouts/slideLayout7.xml><?xml version="1.0" encoding="utf-8"?>
-<p:sldLayout xmlns:a="http://schemas.openxmlformats.org/drawingml/2006/main" xmlns:r="http://schemas.openxmlformats.org/officeDocument/2006/relationships" xmlns:mc="http://schemas.openxmlformats.org/markup-compatibility/2006" xmlns:mv="urn:schemas-microsoft-com:mac:vml" xmlns:p="http://schemas.openxmlformats.org/presentationml/2006/main" xmlns:c="http://schemas.openxmlformats.org/drawingml/2006/chart" xmlns:dgm="http://schemas.openxmlformats.org/drawingml/2006/diagram" xmlns:o="urn:schemas-microsoft-com:office:office" xmlns:v="urn:schemas-microsoft-com:vml" xmlns:pvml="urn:schemas-microsoft-com:office:powerpoint" xmlns:com="http://schemas.openxmlformats.org/drawingml/2006/compatibility" xmlns:p14="http://schemas.microsoft.com/office/powerpoint/2010/main" xmlns:p15="http://schemas.microsoft.com/office/powerpoint/2012/main" xmlns:ahyp="http://schemas.microsoft.com/office/drawing/2018/hyperlinkcolor" matchingName="Blank" type="blank">
+<p:sldLayout xmlns:a="http://schemas.openxmlformats.org/drawingml/2006/main" xmlns:r="http://schemas.openxmlformats.org/officeDocument/2006/relationships" xmlns:p="http://schemas.openxmlformats.org/presentationml/2006/main" matchingName="Blank" type="blank">
   <p:cSld name="BLANK">
     <p:spTree>
       <p:nvGrpSpPr>
-        <p:cNvPr id="54" name="Shape 54"/>
+        <p:cNvPr id="1" name="Shape 54"/>
         <p:cNvGrpSpPr/>
         <p:nvPr/>
       </p:nvGrpSpPr>
@@ -8025,9 +8339,11 @@
       <p:sp>
         <p:nvSpPr>
           <p:cNvPr id="55" name="Google Shape;55;p9"/>
-          <p:cNvSpPr txBox="1"/>
+          <p:cNvSpPr txBox="1">
+            <a:spLocks noGrp="1"/>
+          </p:cNvSpPr>
           <p:nvPr>
-            <p:ph idx="10" type="dt"/>
+            <p:ph type="dt" idx="10"/>
           </p:nvPr>
         </p:nvSpPr>
         <p:spPr>
@@ -8044,7 +8360,7 @@
           </a:ln>
         </p:spPr>
         <p:txBody>
-          <a:bodyPr anchorCtr="0" anchor="ctr" bIns="45700" lIns="91425" spcFirstLastPara="1" rIns="91425" wrap="square" tIns="45700">
+          <a:bodyPr spcFirstLastPara="1" wrap="square" lIns="91425" tIns="45700" rIns="91425" bIns="45700" anchor="ctr" anchorCtr="0">
             <a:noAutofit/>
           </a:bodyPr>
           <a:lstStyle>
@@ -8148,15 +8464,19 @@
               <a:defRPr/>
             </a:lvl9pPr>
           </a:lstStyle>
-          <a:p/>
+          <a:p>
+            <a:endParaRPr/>
+          </a:p>
         </p:txBody>
       </p:sp>
       <p:sp>
         <p:nvSpPr>
           <p:cNvPr id="56" name="Google Shape;56;p9"/>
-          <p:cNvSpPr txBox="1"/>
+          <p:cNvSpPr txBox="1">
+            <a:spLocks noGrp="1"/>
+          </p:cNvSpPr>
           <p:nvPr>
-            <p:ph idx="11" type="ftr"/>
+            <p:ph type="ftr" idx="11"/>
           </p:nvPr>
         </p:nvSpPr>
         <p:spPr>
@@ -8173,7 +8493,7 @@
           </a:ln>
         </p:spPr>
         <p:txBody>
-          <a:bodyPr anchorCtr="0" anchor="ctr" bIns="45700" lIns="91425" spcFirstLastPara="1" rIns="91425" wrap="square" tIns="45700">
+          <a:bodyPr spcFirstLastPara="1" wrap="square" lIns="91425" tIns="45700" rIns="91425" bIns="45700" anchor="ctr" anchorCtr="0">
             <a:noAutofit/>
           </a:bodyPr>
           <a:lstStyle>
@@ -8277,15 +8597,19 @@
               <a:defRPr/>
             </a:lvl9pPr>
           </a:lstStyle>
-          <a:p/>
+          <a:p>
+            <a:endParaRPr/>
+          </a:p>
         </p:txBody>
       </p:sp>
       <p:sp>
         <p:nvSpPr>
           <p:cNvPr id="57" name="Google Shape;57;p9"/>
-          <p:cNvSpPr txBox="1"/>
+          <p:cNvSpPr txBox="1">
+            <a:spLocks noGrp="1"/>
+          </p:cNvSpPr>
           <p:nvPr>
-            <p:ph idx="12" type="sldNum"/>
+            <p:ph type="sldNum" idx="12"/>
           </p:nvPr>
         </p:nvSpPr>
         <p:spPr>
@@ -8302,67 +8626,67 @@
           </a:ln>
         </p:spPr>
         <p:txBody>
-          <a:bodyPr anchorCtr="0" anchor="ctr" bIns="45700" lIns="91425" spcFirstLastPara="1" rIns="91425" wrap="square" tIns="45700">
+          <a:bodyPr spcFirstLastPara="1" wrap="square" lIns="91425" tIns="45700" rIns="91425" bIns="45700" anchor="ctr" anchorCtr="0">
             <a:noAutofit/>
           </a:bodyPr>
           <a:lstStyle>
-            <a:lvl1pPr indent="0" lvl="0" marL="0" algn="r">
+            <a:lvl1pPr marL="0" lvl="0" indent="0" algn="r">
               <a:spcBef>
                 <a:spcPts val="0"/>
               </a:spcBef>
               <a:buNone/>
               <a:defRPr/>
             </a:lvl1pPr>
-            <a:lvl2pPr indent="0" lvl="1" marL="0" algn="r">
+            <a:lvl2pPr marL="0" lvl="1" indent="0" algn="r">
               <a:spcBef>
                 <a:spcPts val="0"/>
               </a:spcBef>
               <a:buNone/>
               <a:defRPr/>
             </a:lvl2pPr>
-            <a:lvl3pPr indent="0" lvl="2" marL="0" algn="r">
+            <a:lvl3pPr marL="0" lvl="2" indent="0" algn="r">
               <a:spcBef>
                 <a:spcPts val="0"/>
               </a:spcBef>
               <a:buNone/>
               <a:defRPr/>
             </a:lvl3pPr>
-            <a:lvl4pPr indent="0" lvl="3" marL="0" algn="r">
+            <a:lvl4pPr marL="0" lvl="3" indent="0" algn="r">
               <a:spcBef>
                 <a:spcPts val="0"/>
               </a:spcBef>
               <a:buNone/>
               <a:defRPr/>
             </a:lvl4pPr>
-            <a:lvl5pPr indent="0" lvl="4" marL="0" algn="r">
+            <a:lvl5pPr marL="0" lvl="4" indent="0" algn="r">
               <a:spcBef>
                 <a:spcPts val="0"/>
               </a:spcBef>
               <a:buNone/>
               <a:defRPr/>
             </a:lvl5pPr>
-            <a:lvl6pPr indent="0" lvl="5" marL="0" algn="r">
+            <a:lvl6pPr marL="0" lvl="5" indent="0" algn="r">
               <a:spcBef>
                 <a:spcPts val="0"/>
               </a:spcBef>
               <a:buNone/>
               <a:defRPr/>
             </a:lvl6pPr>
-            <a:lvl7pPr indent="0" lvl="6" marL="0" algn="r">
+            <a:lvl7pPr marL="0" lvl="6" indent="0" algn="r">
               <a:spcBef>
                 <a:spcPts val="0"/>
               </a:spcBef>
               <a:buNone/>
               <a:defRPr/>
             </a:lvl7pPr>
-            <a:lvl8pPr indent="0" lvl="7" marL="0" algn="r">
+            <a:lvl8pPr marL="0" lvl="7" indent="0" algn="r">
               <a:spcBef>
                 <a:spcPts val="0"/>
               </a:spcBef>
               <a:buNone/>
               <a:defRPr/>
             </a:lvl8pPr>
-            <a:lvl9pPr indent="0" lvl="8" marL="0" algn="r">
+            <a:lvl9pPr marL="0" lvl="8" indent="0" algn="r">
               <a:spcBef>
                 <a:spcPts val="0"/>
               </a:spcBef>
@@ -8371,7 +8695,7 @@
             </a:lvl9pPr>
           </a:lstStyle>
           <a:p>
-            <a:pPr indent="0" lvl="0" marL="0" rtl="0" algn="r">
+            <a:pPr marL="0" lvl="0" indent="0" algn="r" rtl="0">
               <a:spcBef>
                 <a:spcPts val="0"/>
               </a:spcBef>
@@ -8397,11 +8721,11 @@
 </file>
 
 <file path=ppt/slideLayouts/slideLayout8.xml><?xml version="1.0" encoding="utf-8"?>
-<p:sldLayout xmlns:a="http://schemas.openxmlformats.org/drawingml/2006/main" xmlns:r="http://schemas.openxmlformats.org/officeDocument/2006/relationships" xmlns:mc="http://schemas.openxmlformats.org/markup-compatibility/2006" xmlns:mv="urn:schemas-microsoft-com:mac:vml" xmlns:p="http://schemas.openxmlformats.org/presentationml/2006/main" xmlns:c="http://schemas.openxmlformats.org/drawingml/2006/chart" xmlns:dgm="http://schemas.openxmlformats.org/drawingml/2006/diagram" xmlns:o="urn:schemas-microsoft-com:office:office" xmlns:v="urn:schemas-microsoft-com:vml" xmlns:pvml="urn:schemas-microsoft-com:office:powerpoint" xmlns:com="http://schemas.openxmlformats.org/drawingml/2006/compatibility" xmlns:p14="http://schemas.microsoft.com/office/powerpoint/2010/main" xmlns:p15="http://schemas.microsoft.com/office/powerpoint/2012/main" xmlns:ahyp="http://schemas.microsoft.com/office/drawing/2018/hyperlinkcolor" matchingName="Content with Caption" type="objTx">
+<p:sldLayout xmlns:a="http://schemas.openxmlformats.org/drawingml/2006/main" xmlns:r="http://schemas.openxmlformats.org/officeDocument/2006/relationships" xmlns:p="http://schemas.openxmlformats.org/presentationml/2006/main" matchingName="Content with Caption" type="objTx">
   <p:cSld name="OBJECT_WITH_CAPTION_TEXT">
     <p:spTree>
       <p:nvGrpSpPr>
-        <p:cNvPr id="58" name="Shape 58"/>
+        <p:cNvPr id="1" name="Shape 58"/>
         <p:cNvGrpSpPr/>
         <p:nvPr/>
       </p:nvGrpSpPr>
@@ -8416,7 +8740,9 @@
       <p:sp>
         <p:nvSpPr>
           <p:cNvPr id="59" name="Google Shape;59;p10"/>
-          <p:cNvSpPr txBox="1"/>
+          <p:cNvSpPr txBox="1">
+            <a:spLocks noGrp="1"/>
+          </p:cNvSpPr>
           <p:nvPr>
             <p:ph type="title"/>
           </p:nvPr>
@@ -8435,7 +8761,7 @@
           </a:ln>
         </p:spPr>
         <p:txBody>
-          <a:bodyPr anchorCtr="0" anchor="b" bIns="45700" lIns="91425" spcFirstLastPara="1" rIns="91425" wrap="square" tIns="45700">
+          <a:bodyPr spcFirstLastPara="1" wrap="square" lIns="91425" tIns="45700" rIns="91425" bIns="45700" anchor="b" anchorCtr="0">
             <a:normAutofit/>
           </a:bodyPr>
           <a:lstStyle>
@@ -8546,15 +8872,19 @@
               <a:defRPr/>
             </a:lvl9pPr>
           </a:lstStyle>
-          <a:p/>
+          <a:p>
+            <a:endParaRPr/>
+          </a:p>
         </p:txBody>
       </p:sp>
       <p:sp>
         <p:nvSpPr>
           <p:cNvPr id="60" name="Google Shape;60;p10"/>
-          <p:cNvSpPr txBox="1"/>
+          <p:cNvSpPr txBox="1">
+            <a:spLocks noGrp="1"/>
+          </p:cNvSpPr>
           <p:nvPr>
-            <p:ph idx="1" type="body"/>
+            <p:ph type="body" idx="1"/>
           </p:nvPr>
         </p:nvSpPr>
         <p:spPr>
@@ -8571,11 +8901,11 @@
           </a:ln>
         </p:spPr>
         <p:txBody>
-          <a:bodyPr anchorCtr="0" anchor="t" bIns="45700" lIns="91425" spcFirstLastPara="1" rIns="91425" wrap="square" tIns="45700">
+          <a:bodyPr spcFirstLastPara="1" wrap="square" lIns="91425" tIns="45700" rIns="91425" bIns="45700" anchor="t" anchorCtr="0">
             <a:normAutofit/>
           </a:bodyPr>
           <a:lstStyle>
-            <a:lvl1pPr indent="-436626" lvl="0" marL="457200" algn="l">
+            <a:lvl1pPr marL="457200" lvl="0" indent="-436626" algn="l">
               <a:lnSpc>
                 <a:spcPct val="90000"/>
               </a:lnSpc>
@@ -8592,7 +8922,7 @@
               <a:buChar char="•"/>
               <a:defRPr sz="3276"/>
             </a:lvl1pPr>
-            <a:lvl2pPr indent="-410591" lvl="1" marL="914400" algn="l">
+            <a:lvl2pPr marL="914400" lvl="1" indent="-410591" algn="l">
               <a:lnSpc>
                 <a:spcPct val="90000"/>
               </a:lnSpc>
@@ -8609,7 +8939,7 @@
               <a:buChar char="•"/>
               <a:defRPr sz="2866"/>
             </a:lvl2pPr>
-            <a:lvl3pPr indent="-384620" lvl="2" marL="1371600" algn="l">
+            <a:lvl3pPr marL="1371600" lvl="2" indent="-384620" algn="l">
               <a:lnSpc>
                 <a:spcPct val="90000"/>
               </a:lnSpc>
@@ -8626,7 +8956,7 @@
               <a:buChar char="•"/>
               <a:defRPr sz="2457"/>
             </a:lvl3pPr>
-            <a:lvl4pPr indent="-358585" lvl="3" marL="1828800" algn="l">
+            <a:lvl4pPr marL="1828800" lvl="3" indent="-358585" algn="l">
               <a:lnSpc>
                 <a:spcPct val="90000"/>
               </a:lnSpc>
@@ -8643,7 +8973,7 @@
               <a:buChar char="•"/>
               <a:defRPr sz="2047"/>
             </a:lvl4pPr>
-            <a:lvl5pPr indent="-358585" lvl="4" marL="2286000" algn="l">
+            <a:lvl5pPr marL="2286000" lvl="4" indent="-358585" algn="l">
               <a:lnSpc>
                 <a:spcPct val="90000"/>
               </a:lnSpc>
@@ -8660,7 +8990,7 @@
               <a:buChar char="•"/>
               <a:defRPr sz="2047"/>
             </a:lvl5pPr>
-            <a:lvl6pPr indent="-358585" lvl="5" marL="2743200" algn="l">
+            <a:lvl6pPr marL="2743200" lvl="5" indent="-358585" algn="l">
               <a:lnSpc>
                 <a:spcPct val="90000"/>
               </a:lnSpc>
@@ -8677,7 +9007,7 @@
               <a:buChar char="•"/>
               <a:defRPr sz="2047"/>
             </a:lvl6pPr>
-            <a:lvl7pPr indent="-358585" lvl="6" marL="3200400" algn="l">
+            <a:lvl7pPr marL="3200400" lvl="6" indent="-358585" algn="l">
               <a:lnSpc>
                 <a:spcPct val="90000"/>
               </a:lnSpc>
@@ -8694,7 +9024,7 @@
               <a:buChar char="•"/>
               <a:defRPr sz="2047"/>
             </a:lvl7pPr>
-            <a:lvl8pPr indent="-358584" lvl="7" marL="3657600" algn="l">
+            <a:lvl8pPr marL="3657600" lvl="7" indent="-358584" algn="l">
               <a:lnSpc>
                 <a:spcPct val="90000"/>
               </a:lnSpc>
@@ -8711,7 +9041,7 @@
               <a:buChar char="•"/>
               <a:defRPr sz="2047"/>
             </a:lvl8pPr>
-            <a:lvl9pPr indent="-358584" lvl="8" marL="4114800" algn="l">
+            <a:lvl9pPr marL="4114800" lvl="8" indent="-358584" algn="l">
               <a:lnSpc>
                 <a:spcPct val="90000"/>
               </a:lnSpc>
@@ -8729,15 +9059,19 @@
               <a:defRPr sz="2047"/>
             </a:lvl9pPr>
           </a:lstStyle>
-          <a:p/>
+          <a:p>
+            <a:endParaRPr/>
+          </a:p>
         </p:txBody>
       </p:sp>
       <p:sp>
         <p:nvSpPr>
           <p:cNvPr id="61" name="Google Shape;61;p10"/>
-          <p:cNvSpPr txBox="1"/>
+          <p:cNvSpPr txBox="1">
+            <a:spLocks noGrp="1"/>
+          </p:cNvSpPr>
           <p:nvPr>
-            <p:ph idx="2" type="body"/>
+            <p:ph type="body" idx="2"/>
           </p:nvPr>
         </p:nvSpPr>
         <p:spPr>
@@ -8754,11 +9088,11 @@
           </a:ln>
         </p:spPr>
         <p:txBody>
-          <a:bodyPr anchorCtr="0" anchor="t" bIns="45700" lIns="91425" spcFirstLastPara="1" rIns="91425" wrap="square" tIns="45700">
+          <a:bodyPr spcFirstLastPara="1" wrap="square" lIns="91425" tIns="45700" rIns="91425" bIns="45700" anchor="t" anchorCtr="0">
             <a:normAutofit/>
           </a:bodyPr>
           <a:lstStyle>
-            <a:lvl1pPr indent="-228600" lvl="0" marL="457200" algn="l">
+            <a:lvl1pPr marL="457200" lvl="0" indent="-228600" algn="l">
               <a:lnSpc>
                 <a:spcPct val="90000"/>
               </a:lnSpc>
@@ -8775,7 +9109,7 @@
               <a:buNone/>
               <a:defRPr sz="1638"/>
             </a:lvl1pPr>
-            <a:lvl2pPr indent="-228600" lvl="1" marL="914400" algn="l">
+            <a:lvl2pPr marL="914400" lvl="1" indent="-228600" algn="l">
               <a:lnSpc>
                 <a:spcPct val="90000"/>
               </a:lnSpc>
@@ -8792,7 +9126,7 @@
               <a:buNone/>
               <a:defRPr sz="1433"/>
             </a:lvl2pPr>
-            <a:lvl3pPr indent="-228600" lvl="2" marL="1371600" algn="l">
+            <a:lvl3pPr marL="1371600" lvl="2" indent="-228600" algn="l">
               <a:lnSpc>
                 <a:spcPct val="90000"/>
               </a:lnSpc>
@@ -8809,7 +9143,7 @@
               <a:buNone/>
               <a:defRPr sz="1228"/>
             </a:lvl3pPr>
-            <a:lvl4pPr indent="-228600" lvl="3" marL="1828800" algn="l">
+            <a:lvl4pPr marL="1828800" lvl="3" indent="-228600" algn="l">
               <a:lnSpc>
                 <a:spcPct val="90000"/>
               </a:lnSpc>
@@ -8826,7 +9160,7 @@
               <a:buNone/>
               <a:defRPr sz="1024"/>
             </a:lvl4pPr>
-            <a:lvl5pPr indent="-228600" lvl="4" marL="2286000" algn="l">
+            <a:lvl5pPr marL="2286000" lvl="4" indent="-228600" algn="l">
               <a:lnSpc>
                 <a:spcPct val="90000"/>
               </a:lnSpc>
@@ -8843,7 +9177,7 @@
               <a:buNone/>
               <a:defRPr sz="1024"/>
             </a:lvl5pPr>
-            <a:lvl6pPr indent="-228600" lvl="5" marL="2743200" algn="l">
+            <a:lvl6pPr marL="2743200" lvl="5" indent="-228600" algn="l">
               <a:lnSpc>
                 <a:spcPct val="90000"/>
               </a:lnSpc>
@@ -8860,7 +9194,7 @@
               <a:buNone/>
               <a:defRPr sz="1024"/>
             </a:lvl6pPr>
-            <a:lvl7pPr indent="-228600" lvl="6" marL="3200400" algn="l">
+            <a:lvl7pPr marL="3200400" lvl="6" indent="-228600" algn="l">
               <a:lnSpc>
                 <a:spcPct val="90000"/>
               </a:lnSpc>
@@ -8877,7 +9211,7 @@
               <a:buNone/>
               <a:defRPr sz="1024"/>
             </a:lvl7pPr>
-            <a:lvl8pPr indent="-228600" lvl="7" marL="3657600" algn="l">
+            <a:lvl8pPr marL="3657600" lvl="7" indent="-228600" algn="l">
               <a:lnSpc>
                 <a:spcPct val="90000"/>
               </a:lnSpc>
@@ -8894,7 +9228,7 @@
               <a:buNone/>
               <a:defRPr sz="1024"/>
             </a:lvl8pPr>
-            <a:lvl9pPr indent="-228600" lvl="8" marL="4114800" algn="l">
+            <a:lvl9pPr marL="4114800" lvl="8" indent="-228600" algn="l">
               <a:lnSpc>
                 <a:spcPct val="90000"/>
               </a:lnSpc>
@@ -8912,15 +9246,19 @@
               <a:defRPr sz="1024"/>
             </a:lvl9pPr>
           </a:lstStyle>
-          <a:p/>
+          <a:p>
+            <a:endParaRPr/>
+          </a:p>
         </p:txBody>
       </p:sp>
       <p:sp>
         <p:nvSpPr>
           <p:cNvPr id="62" name="Google Shape;62;p10"/>
-          <p:cNvSpPr txBox="1"/>
+          <p:cNvSpPr txBox="1">
+            <a:spLocks noGrp="1"/>
+          </p:cNvSpPr>
           <p:nvPr>
-            <p:ph idx="10" type="dt"/>
+            <p:ph type="dt" idx="10"/>
           </p:nvPr>
         </p:nvSpPr>
         <p:spPr>
@@ -8937,7 +9275,7 @@
           </a:ln>
         </p:spPr>
         <p:txBody>
-          <a:bodyPr anchorCtr="0" anchor="ctr" bIns="45700" lIns="91425" spcFirstLastPara="1" rIns="91425" wrap="square" tIns="45700">
+          <a:bodyPr spcFirstLastPara="1" wrap="square" lIns="91425" tIns="45700" rIns="91425" bIns="45700" anchor="ctr" anchorCtr="0">
             <a:noAutofit/>
           </a:bodyPr>
           <a:lstStyle>
@@ -9041,15 +9379,19 @@
               <a:defRPr/>
             </a:lvl9pPr>
           </a:lstStyle>
-          <a:p/>
+          <a:p>
+            <a:endParaRPr/>
+          </a:p>
         </p:txBody>
       </p:sp>
       <p:sp>
         <p:nvSpPr>
           <p:cNvPr id="63" name="Google Shape;63;p10"/>
-          <p:cNvSpPr txBox="1"/>
+          <p:cNvSpPr txBox="1">
+            <a:spLocks noGrp="1"/>
+          </p:cNvSpPr>
           <p:nvPr>
-            <p:ph idx="11" type="ftr"/>
+            <p:ph type="ftr" idx="11"/>
           </p:nvPr>
         </p:nvSpPr>
         <p:spPr>
@@ -9066,7 +9408,7 @@
           </a:ln>
         </p:spPr>
         <p:txBody>
-          <a:bodyPr anchorCtr="0" anchor="ctr" bIns="45700" lIns="91425" spcFirstLastPara="1" rIns="91425" wrap="square" tIns="45700">
+          <a:bodyPr spcFirstLastPara="1" wrap="square" lIns="91425" tIns="45700" rIns="91425" bIns="45700" anchor="ctr" anchorCtr="0">
             <a:noAutofit/>
           </a:bodyPr>
           <a:lstStyle>
@@ -9170,15 +9512,19 @@
               <a:defRPr/>
             </a:lvl9pPr>
           </a:lstStyle>
-          <a:p/>
+          <a:p>
+            <a:endParaRPr/>
+          </a:p>
         </p:txBody>
       </p:sp>
       <p:sp>
         <p:nvSpPr>
           <p:cNvPr id="64" name="Google Shape;64;p10"/>
-          <p:cNvSpPr txBox="1"/>
+          <p:cNvSpPr txBox="1">
+            <a:spLocks noGrp="1"/>
+          </p:cNvSpPr>
           <p:nvPr>
-            <p:ph idx="12" type="sldNum"/>
+            <p:ph type="sldNum" idx="12"/>
           </p:nvPr>
         </p:nvSpPr>
         <p:spPr>
@@ -9195,67 +9541,67 @@
           </a:ln>
         </p:spPr>
         <p:txBody>
-          <a:bodyPr anchorCtr="0" anchor="ctr" bIns="45700" lIns="91425" spcFirstLastPara="1" rIns="91425" wrap="square" tIns="45700">
+          <a:bodyPr spcFirstLastPara="1" wrap="square" lIns="91425" tIns="45700" rIns="91425" bIns="45700" anchor="ctr" anchorCtr="0">
             <a:noAutofit/>
           </a:bodyPr>
           <a:lstStyle>
-            <a:lvl1pPr indent="0" lvl="0" marL="0" algn="r">
+            <a:lvl1pPr marL="0" lvl="0" indent="0" algn="r">
               <a:spcBef>
                 <a:spcPts val="0"/>
               </a:spcBef>
               <a:buNone/>
               <a:defRPr/>
             </a:lvl1pPr>
-            <a:lvl2pPr indent="0" lvl="1" marL="0" algn="r">
+            <a:lvl2pPr marL="0" lvl="1" indent="0" algn="r">
               <a:spcBef>
                 <a:spcPts val="0"/>
               </a:spcBef>
               <a:buNone/>
               <a:defRPr/>
             </a:lvl2pPr>
-            <a:lvl3pPr indent="0" lvl="2" marL="0" algn="r">
+            <a:lvl3pPr marL="0" lvl="2" indent="0" algn="r">
               <a:spcBef>
                 <a:spcPts val="0"/>
               </a:spcBef>
               <a:buNone/>
               <a:defRPr/>
             </a:lvl3pPr>
-            <a:lvl4pPr indent="0" lvl="3" marL="0" algn="r">
+            <a:lvl4pPr marL="0" lvl="3" indent="0" algn="r">
               <a:spcBef>
                 <a:spcPts val="0"/>
               </a:spcBef>
               <a:buNone/>
               <a:defRPr/>
             </a:lvl4pPr>
-            <a:lvl5pPr indent="0" lvl="4" marL="0" algn="r">
+            <a:lvl5pPr marL="0" lvl="4" indent="0" algn="r">
               <a:spcBef>
                 <a:spcPts val="0"/>
               </a:spcBef>
               <a:buNone/>
               <a:defRPr/>
             </a:lvl5pPr>
-            <a:lvl6pPr indent="0" lvl="5" marL="0" algn="r">
+            <a:lvl6pPr marL="0" lvl="5" indent="0" algn="r">
               <a:spcBef>
                 <a:spcPts val="0"/>
               </a:spcBef>
               <a:buNone/>
               <a:defRPr/>
             </a:lvl6pPr>
-            <a:lvl7pPr indent="0" lvl="6" marL="0" algn="r">
+            <a:lvl7pPr marL="0" lvl="6" indent="0" algn="r">
               <a:spcBef>
                 <a:spcPts val="0"/>
               </a:spcBef>
               <a:buNone/>
               <a:defRPr/>
             </a:lvl7pPr>
-            <a:lvl8pPr indent="0" lvl="7" marL="0" algn="r">
+            <a:lvl8pPr marL="0" lvl="7" indent="0" algn="r">
               <a:spcBef>
                 <a:spcPts val="0"/>
               </a:spcBef>
               <a:buNone/>
               <a:defRPr/>
             </a:lvl8pPr>
-            <a:lvl9pPr indent="0" lvl="8" marL="0" algn="r">
+            <a:lvl9pPr marL="0" lvl="8" indent="0" algn="r">
               <a:spcBef>
                 <a:spcPts val="0"/>
               </a:spcBef>
@@ -9264,7 +9610,7 @@
             </a:lvl9pPr>
           </a:lstStyle>
           <a:p>
-            <a:pPr indent="0" lvl="0" marL="0" rtl="0" algn="r">
+            <a:pPr marL="0" lvl="0" indent="0" algn="r" rtl="0">
               <a:spcBef>
                 <a:spcPts val="0"/>
               </a:spcBef>
@@ -9290,11 +9636,11 @@
 </file>
 
 <file path=ppt/slideLayouts/slideLayout9.xml><?xml version="1.0" encoding="utf-8"?>
-<p:sldLayout xmlns:a="http://schemas.openxmlformats.org/drawingml/2006/main" xmlns:r="http://schemas.openxmlformats.org/officeDocument/2006/relationships" xmlns:mc="http://schemas.openxmlformats.org/markup-compatibility/2006" xmlns:mv="urn:schemas-microsoft-com:mac:vml" xmlns:p="http://schemas.openxmlformats.org/presentationml/2006/main" xmlns:c="http://schemas.openxmlformats.org/drawingml/2006/chart" xmlns:dgm="http://schemas.openxmlformats.org/drawingml/2006/diagram" xmlns:o="urn:schemas-microsoft-com:office:office" xmlns:v="urn:schemas-microsoft-com:vml" xmlns:pvml="urn:schemas-microsoft-com:office:powerpoint" xmlns:com="http://schemas.openxmlformats.org/drawingml/2006/compatibility" xmlns:p14="http://schemas.microsoft.com/office/powerpoint/2010/main" xmlns:p15="http://schemas.microsoft.com/office/powerpoint/2012/main" xmlns:ahyp="http://schemas.microsoft.com/office/drawing/2018/hyperlinkcolor" matchingName="Picture with Caption" type="picTx">
+<p:sldLayout xmlns:a="http://schemas.openxmlformats.org/drawingml/2006/main" xmlns:r="http://schemas.openxmlformats.org/officeDocument/2006/relationships" xmlns:p="http://schemas.openxmlformats.org/presentationml/2006/main" matchingName="Picture with Caption" type="picTx">
   <p:cSld name="PICTURE_WITH_CAPTION_TEXT">
     <p:spTree>
       <p:nvGrpSpPr>
-        <p:cNvPr id="65" name="Shape 65"/>
+        <p:cNvPr id="1" name="Shape 65"/>
         <p:cNvGrpSpPr/>
         <p:nvPr/>
       </p:nvGrpSpPr>
@@ -9309,7 +9655,9 @@
       <p:sp>
         <p:nvSpPr>
           <p:cNvPr id="66" name="Google Shape;66;p11"/>
-          <p:cNvSpPr txBox="1"/>
+          <p:cNvSpPr txBox="1">
+            <a:spLocks noGrp="1"/>
+          </p:cNvSpPr>
           <p:nvPr>
             <p:ph type="title"/>
           </p:nvPr>
@@ -9328,7 +9676,7 @@
           </a:ln>
         </p:spPr>
         <p:txBody>
-          <a:bodyPr anchorCtr="0" anchor="b" bIns="45700" lIns="91425" spcFirstLastPara="1" rIns="91425" wrap="square" tIns="45700">
+          <a:bodyPr spcFirstLastPara="1" wrap="square" lIns="91425" tIns="45700" rIns="91425" bIns="45700" anchor="b" anchorCtr="0">
             <a:normAutofit/>
           </a:bodyPr>
           <a:lstStyle>
@@ -9439,15 +9787,19 @@
               <a:defRPr/>
             </a:lvl9pPr>
           </a:lstStyle>
-          <a:p/>
+          <a:p>
+            <a:endParaRPr/>
+          </a:p>
         </p:txBody>
       </p:sp>
       <p:sp>
         <p:nvSpPr>
           <p:cNvPr id="67" name="Google Shape;67;p11"/>
-          <p:cNvSpPr/>
+          <p:cNvSpPr>
+            <a:spLocks noGrp="1"/>
+          </p:cNvSpPr>
           <p:nvPr>
-            <p:ph idx="2" type="pic"/>
+            <p:ph type="pic" idx="2"/>
           </p:nvPr>
         </p:nvSpPr>
         <p:spPr>
@@ -9467,9 +9819,11 @@
       <p:sp>
         <p:nvSpPr>
           <p:cNvPr id="68" name="Google Shape;68;p11"/>
-          <p:cNvSpPr txBox="1"/>
+          <p:cNvSpPr txBox="1">
+            <a:spLocks noGrp="1"/>
+          </p:cNvSpPr>
           <p:nvPr>
-            <p:ph idx="1" type="body"/>
+            <p:ph type="body" idx="1"/>
           </p:nvPr>
         </p:nvSpPr>
         <p:spPr>
@@ -9486,11 +9840,11 @@
           </a:ln>
         </p:spPr>
         <p:txBody>
-          <a:bodyPr anchorCtr="0" anchor="t" bIns="45700" lIns="91425" spcFirstLastPara="1" rIns="91425" wrap="square" tIns="45700">
+          <a:bodyPr spcFirstLastPara="1" wrap="square" lIns="91425" tIns="45700" rIns="91425" bIns="45700" anchor="t" anchorCtr="0">
             <a:normAutofit/>
           </a:bodyPr>
           <a:lstStyle>
-            <a:lvl1pPr indent="-228600" lvl="0" marL="457200" algn="l">
+            <a:lvl1pPr marL="457200" lvl="0" indent="-228600" algn="l">
               <a:lnSpc>
                 <a:spcPct val="90000"/>
               </a:lnSpc>
@@ -9507,7 +9861,7 @@
               <a:buNone/>
               <a:defRPr sz="1638"/>
             </a:lvl1pPr>
-            <a:lvl2pPr indent="-228600" lvl="1" marL="914400" algn="l">
+            <a:lvl2pPr marL="914400" lvl="1" indent="-228600" algn="l">
               <a:lnSpc>
                 <a:spcPct val="90000"/>
               </a:lnSpc>
@@ -9524,7 +9878,7 @@
               <a:buNone/>
               <a:defRPr sz="1433"/>
             </a:lvl2pPr>
-            <a:lvl3pPr indent="-228600" lvl="2" marL="1371600" algn="l">
+            <a:lvl3pPr marL="1371600" lvl="2" indent="-228600" algn="l">
               <a:lnSpc>
                 <a:spcPct val="90000"/>
               </a:lnSpc>
@@ -9541,7 +9895,7 @@
               <a:buNone/>
               <a:defRPr sz="1228"/>
             </a:lvl3pPr>
-            <a:lvl4pPr indent="-228600" lvl="3" marL="1828800" algn="l">
+            <a:lvl4pPr marL="1828800" lvl="3" indent="-228600" algn="l">
               <a:lnSpc>
                 <a:spcPct val="90000"/>
               </a:lnSpc>
@@ -9558,7 +9912,7 @@
               <a:buNone/>
               <a:defRPr sz="1024"/>
             </a:lvl4pPr>
-            <a:lvl5pPr indent="-228600" lvl="4" marL="2286000" algn="l">
+            <a:lvl5pPr marL="2286000" lvl="4" indent="-228600" algn="l">
               <a:lnSpc>
                 <a:spcPct val="90000"/>
               </a:lnSpc>
@@ -9575,7 +9929,7 @@
               <a:buNone/>
               <a:defRPr sz="1024"/>
             </a:lvl5pPr>
-            <a:lvl6pPr indent="-228600" lvl="5" marL="2743200" algn="l">
+            <a:lvl6pPr marL="2743200" lvl="5" indent="-228600" algn="l">
               <a:lnSpc>
                 <a:spcPct val="90000"/>
               </a:lnSpc>
@@ -9592,7 +9946,7 @@
               <a:buNone/>
               <a:defRPr sz="1024"/>
             </a:lvl6pPr>
-            <a:lvl7pPr indent="-228600" lvl="6" marL="3200400" algn="l">
+            <a:lvl7pPr marL="3200400" lvl="6" indent="-228600" algn="l">
               <a:lnSpc>
                 <a:spcPct val="90000"/>
               </a:lnSpc>
@@ -9609,7 +9963,7 @@
               <a:buNone/>
               <a:defRPr sz="1024"/>
             </a:lvl7pPr>
-            <a:lvl8pPr indent="-228600" lvl="7" marL="3657600" algn="l">
+            <a:lvl8pPr marL="3657600" lvl="7" indent="-228600" algn="l">
               <a:lnSpc>
                 <a:spcPct val="90000"/>
               </a:lnSpc>
@@ -9626,7 +9980,7 @@
               <a:buNone/>
               <a:defRPr sz="1024"/>
             </a:lvl8pPr>
-            <a:lvl9pPr indent="-228600" lvl="8" marL="4114800" algn="l">
+            <a:lvl9pPr marL="4114800" lvl="8" indent="-228600" algn="l">
               <a:lnSpc>
                 <a:spcPct val="90000"/>
               </a:lnSpc>
@@ -9644,15 +9998,19 @@
               <a:defRPr sz="1024"/>
             </a:lvl9pPr>
           </a:lstStyle>
-          <a:p/>
+          <a:p>
+            <a:endParaRPr/>
+          </a:p>
         </p:txBody>
       </p:sp>
       <p:sp>
         <p:nvSpPr>
           <p:cNvPr id="69" name="Google Shape;69;p11"/>
-          <p:cNvSpPr txBox="1"/>
+          <p:cNvSpPr txBox="1">
+            <a:spLocks noGrp="1"/>
+          </p:cNvSpPr>
           <p:nvPr>
-            <p:ph idx="10" type="dt"/>
+            <p:ph type="dt" idx="10"/>
           </p:nvPr>
         </p:nvSpPr>
         <p:spPr>
@@ -9669,7 +10027,7 @@
           </a:ln>
         </p:spPr>
         <p:txBody>
-          <a:bodyPr anchorCtr="0" anchor="ctr" bIns="45700" lIns="91425" spcFirstLastPara="1" rIns="91425" wrap="square" tIns="45700">
+          <a:bodyPr spcFirstLastPara="1" wrap="square" lIns="91425" tIns="45700" rIns="91425" bIns="45700" anchor="ctr" anchorCtr="0">
             <a:noAutofit/>
           </a:bodyPr>
           <a:lstStyle>
@@ -9773,15 +10131,19 @@
               <a:defRPr/>
             </a:lvl9pPr>
           </a:lstStyle>
-          <a:p/>
+          <a:p>
+            <a:endParaRPr/>
+          </a:p>
         </p:txBody>
       </p:sp>
       <p:sp>
         <p:nvSpPr>
           <p:cNvPr id="70" name="Google Shape;70;p11"/>
-          <p:cNvSpPr txBox="1"/>
+          <p:cNvSpPr txBox="1">
+            <a:spLocks noGrp="1"/>
+          </p:cNvSpPr>
           <p:nvPr>
-            <p:ph idx="11" type="ftr"/>
+            <p:ph type="ftr" idx="11"/>
           </p:nvPr>
         </p:nvSpPr>
         <p:spPr>
@@ -9798,7 +10160,7 @@
           </a:ln>
         </p:spPr>
         <p:txBody>
-          <a:bodyPr anchorCtr="0" anchor="ctr" bIns="45700" lIns="91425" spcFirstLastPara="1" rIns="91425" wrap="square" tIns="45700">
+          <a:bodyPr spcFirstLastPara="1" wrap="square" lIns="91425" tIns="45700" rIns="91425" bIns="45700" anchor="ctr" anchorCtr="0">
             <a:noAutofit/>
           </a:bodyPr>
           <a:lstStyle>
@@ -9902,15 +10264,19 @@
               <a:defRPr/>
             </a:lvl9pPr>
           </a:lstStyle>
-          <a:p/>
+          <a:p>
+            <a:endParaRPr/>
+          </a:p>
         </p:txBody>
       </p:sp>
       <p:sp>
         <p:nvSpPr>
           <p:cNvPr id="71" name="Google Shape;71;p11"/>
-          <p:cNvSpPr txBox="1"/>
+          <p:cNvSpPr txBox="1">
+            <a:spLocks noGrp="1"/>
+          </p:cNvSpPr>
           <p:nvPr>
-            <p:ph idx="12" type="sldNum"/>
+            <p:ph type="sldNum" idx="12"/>
           </p:nvPr>
         </p:nvSpPr>
         <p:spPr>
@@ -9927,67 +10293,67 @@
           </a:ln>
         </p:spPr>
         <p:txBody>
-          <a:bodyPr anchorCtr="0" anchor="ctr" bIns="45700" lIns="91425" spcFirstLastPara="1" rIns="91425" wrap="square" tIns="45700">
+          <a:bodyPr spcFirstLastPara="1" wrap="square" lIns="91425" tIns="45700" rIns="91425" bIns="45700" anchor="ctr" anchorCtr="0">
             <a:noAutofit/>
           </a:bodyPr>
           <a:lstStyle>
-            <a:lvl1pPr indent="0" lvl="0" marL="0" algn="r">
+            <a:lvl1pPr marL="0" lvl="0" indent="0" algn="r">
               <a:spcBef>
                 <a:spcPts val="0"/>
               </a:spcBef>
               <a:buNone/>
               <a:defRPr/>
             </a:lvl1pPr>
-            <a:lvl2pPr indent="0" lvl="1" marL="0" algn="r">
+            <a:lvl2pPr marL="0" lvl="1" indent="0" algn="r">
               <a:spcBef>
                 <a:spcPts val="0"/>
               </a:spcBef>
               <a:buNone/>
               <a:defRPr/>
             </a:lvl2pPr>
-            <a:lvl3pPr indent="0" lvl="2" marL="0" algn="r">
+            <a:lvl3pPr marL="0" lvl="2" indent="0" algn="r">
               <a:spcBef>
                 <a:spcPts val="0"/>
               </a:spcBef>
               <a:buNone/>
               <a:defRPr/>
             </a:lvl3pPr>
-            <a:lvl4pPr indent="0" lvl="3" marL="0" algn="r">
+            <a:lvl4pPr marL="0" lvl="3" indent="0" algn="r">
               <a:spcBef>
                 <a:spcPts val="0"/>
               </a:spcBef>
               <a:buNone/>
               <a:defRPr/>
             </a:lvl4pPr>
-            <a:lvl5pPr indent="0" lvl="4" marL="0" algn="r">
+            <a:lvl5pPr marL="0" lvl="4" indent="0" algn="r">
               <a:spcBef>
                 <a:spcPts val="0"/>
               </a:spcBef>
               <a:buNone/>
               <a:defRPr/>
             </a:lvl5pPr>
-            <a:lvl6pPr indent="0" lvl="5" marL="0" algn="r">
+            <a:lvl6pPr marL="0" lvl="5" indent="0" algn="r">
               <a:spcBef>
                 <a:spcPts val="0"/>
               </a:spcBef>
               <a:buNone/>
               <a:defRPr/>
             </a:lvl6pPr>
-            <a:lvl7pPr indent="0" lvl="6" marL="0" algn="r">
+            <a:lvl7pPr marL="0" lvl="6" indent="0" algn="r">
               <a:spcBef>
                 <a:spcPts val="0"/>
               </a:spcBef>
               <a:buNone/>
               <a:defRPr/>
             </a:lvl7pPr>
-            <a:lvl8pPr indent="0" lvl="7" marL="0" algn="r">
+            <a:lvl8pPr marL="0" lvl="7" indent="0" algn="r">
               <a:spcBef>
                 <a:spcPts val="0"/>
               </a:spcBef>
               <a:buNone/>
               <a:defRPr/>
             </a:lvl8pPr>
-            <a:lvl9pPr indent="0" lvl="8" marL="0" algn="r">
+            <a:lvl9pPr marL="0" lvl="8" indent="0" algn="r">
               <a:spcBef>
                 <a:spcPts val="0"/>
               </a:spcBef>
@@ -9996,7 +10362,7 @@
             </a:lvl9pPr>
           </a:lstStyle>
           <a:p>
-            <a:pPr indent="0" lvl="0" marL="0" rtl="0" algn="r">
+            <a:pPr marL="0" lvl="0" indent="0" algn="r" rtl="0">
               <a:spcBef>
                 <a:spcPts val="0"/>
               </a:spcBef>
@@ -10022,18 +10388,19 @@
 </file>
 
 <file path=ppt/slideMasters/slideMaster1.xml><?xml version="1.0" encoding="utf-8"?>
-<p:sldMaster xmlns:a="http://schemas.openxmlformats.org/drawingml/2006/main" xmlns:r="http://schemas.openxmlformats.org/officeDocument/2006/relationships" xmlns:mc="http://schemas.openxmlformats.org/markup-compatibility/2006" xmlns:mv="urn:schemas-microsoft-com:mac:vml" xmlns:p="http://schemas.openxmlformats.org/presentationml/2006/main" xmlns:c="http://schemas.openxmlformats.org/drawingml/2006/chart" xmlns:dgm="http://schemas.openxmlformats.org/drawingml/2006/diagram" xmlns:o="urn:schemas-microsoft-com:office:office" xmlns:v="urn:schemas-microsoft-com:vml" xmlns:pvml="urn:schemas-microsoft-com:office:powerpoint" xmlns:com="http://schemas.openxmlformats.org/drawingml/2006/compatibility" xmlns:p14="http://schemas.microsoft.com/office/powerpoint/2010/main" xmlns:p15="http://schemas.microsoft.com/office/powerpoint/2012/main" xmlns:ahyp="http://schemas.microsoft.com/office/drawing/2018/hyperlinkcolor">
+<p:sldMaster xmlns:a="http://schemas.openxmlformats.org/drawingml/2006/main" xmlns:r="http://schemas.openxmlformats.org/officeDocument/2006/relationships" xmlns:p="http://schemas.openxmlformats.org/presentationml/2006/main">
   <p:cSld>
     <p:bg>
       <p:bgPr>
         <a:solidFill>
           <a:schemeClr val="lt1"/>
         </a:solidFill>
+        <a:effectLst/>
       </p:bgPr>
     </p:bg>
     <p:spTree>
       <p:nvGrpSpPr>
-        <p:cNvPr id="9" name="Shape 9"/>
+        <p:cNvPr id="1" name="Shape 9"/>
         <p:cNvGrpSpPr/>
         <p:nvPr/>
       </p:nvGrpSpPr>
@@ -10048,7 +10415,9 @@
       <p:sp>
         <p:nvSpPr>
           <p:cNvPr id="10" name="Google Shape;10;p2"/>
-          <p:cNvSpPr txBox="1"/>
+          <p:cNvSpPr txBox="1">
+            <a:spLocks noGrp="1"/>
+          </p:cNvSpPr>
           <p:nvPr>
             <p:ph type="title"/>
           </p:nvPr>
@@ -10067,11 +10436,11 @@
           </a:ln>
         </p:spPr>
         <p:txBody>
-          <a:bodyPr anchorCtr="0" anchor="ctr" bIns="45700" lIns="91425" spcFirstLastPara="1" rIns="91425" wrap="square" tIns="45700">
+          <a:bodyPr spcFirstLastPara="1" wrap="square" lIns="91425" tIns="45700" rIns="91425" bIns="45700" anchor="ctr" anchorCtr="0">
             <a:normAutofit/>
           </a:bodyPr>
           <a:lstStyle>
-            <a:lvl1pPr lvl="0" marR="0" rtl="0" algn="l">
+            <a:lvl1pPr marR="0" lvl="0" algn="l" rtl="0">
               <a:lnSpc>
                 <a:spcPct val="90000"/>
               </a:lnSpc>
@@ -10087,7 +10456,7 @@
               <a:buSzPts val="4504"/>
               <a:buFont typeface="Play"/>
               <a:buNone/>
-              <a:defRPr b="0" i="0" sz="4504" u="none" cap="none" strike="noStrike">
+              <a:defRPr sz="4504" b="0" i="0" u="none" strike="noStrike" cap="none">
                 <a:solidFill>
                   <a:schemeClr val="dk1"/>
                 </a:solidFill>
@@ -10186,15 +10555,19 @@
               <a:defRPr sz="1800"/>
             </a:lvl9pPr>
           </a:lstStyle>
-          <a:p/>
+          <a:p>
+            <a:endParaRPr/>
+          </a:p>
         </p:txBody>
       </p:sp>
       <p:sp>
         <p:nvSpPr>
           <p:cNvPr id="11" name="Google Shape;11;p2"/>
-          <p:cNvSpPr txBox="1"/>
+          <p:cNvSpPr txBox="1">
+            <a:spLocks noGrp="1"/>
+          </p:cNvSpPr>
           <p:nvPr>
-            <p:ph idx="1" type="body"/>
+            <p:ph type="body" idx="1"/>
           </p:nvPr>
         </p:nvSpPr>
         <p:spPr>
@@ -10211,11 +10584,11 @@
           </a:ln>
         </p:spPr>
         <p:txBody>
-          <a:bodyPr anchorCtr="0" anchor="t" bIns="45700" lIns="91425" spcFirstLastPara="1" rIns="91425" wrap="square" tIns="45700">
+          <a:bodyPr spcFirstLastPara="1" wrap="square" lIns="91425" tIns="45700" rIns="91425" bIns="45700" anchor="t" anchorCtr="0">
             <a:normAutofit/>
           </a:bodyPr>
           <a:lstStyle>
-            <a:lvl1pPr indent="-410591" lvl="0" marL="457200" marR="0" rtl="0" algn="l">
+            <a:lvl1pPr marL="457200" marR="0" lvl="0" indent="-410591" algn="l" rtl="0">
               <a:lnSpc>
                 <a:spcPct val="90000"/>
               </a:lnSpc>
@@ -10231,7 +10604,7 @@
               <a:buSzPts val="2866"/>
               <a:buFont typeface="Arial"/>
               <a:buChar char="•"/>
-              <a:defRPr b="0" i="0" sz="2866" u="none" cap="none" strike="noStrike">
+              <a:defRPr sz="2866" b="0" i="0" u="none" strike="noStrike" cap="none">
                 <a:solidFill>
                   <a:schemeClr val="dk1"/>
                 </a:solidFill>
@@ -10241,7 +10614,7 @@
                 <a:sym typeface="Arial"/>
               </a:defRPr>
             </a:lvl1pPr>
-            <a:lvl2pPr indent="-384620" lvl="1" marL="914400" marR="0" rtl="0" algn="l">
+            <a:lvl2pPr marL="914400" marR="0" lvl="1" indent="-384620" algn="l" rtl="0">
               <a:lnSpc>
                 <a:spcPct val="90000"/>
               </a:lnSpc>
@@ -10257,7 +10630,7 @@
               <a:buSzPts val="2457"/>
               <a:buFont typeface="Arial"/>
               <a:buChar char="•"/>
-              <a:defRPr b="0" i="0" sz="2457" u="none" cap="none" strike="noStrike">
+              <a:defRPr sz="2457" b="0" i="0" u="none" strike="noStrike" cap="none">
                 <a:solidFill>
                   <a:schemeClr val="dk1"/>
                 </a:solidFill>
@@ -10267,7 +10640,7 @@
                 <a:sym typeface="Arial"/>
               </a:defRPr>
             </a:lvl2pPr>
-            <a:lvl3pPr indent="-358585" lvl="2" marL="1371600" marR="0" rtl="0" algn="l">
+            <a:lvl3pPr marL="1371600" marR="0" lvl="2" indent="-358585" algn="l" rtl="0">
               <a:lnSpc>
                 <a:spcPct val="90000"/>
               </a:lnSpc>
@@ -10283,7 +10656,7 @@
               <a:buSzPts val="2047"/>
               <a:buFont typeface="Arial"/>
               <a:buChar char="•"/>
-              <a:defRPr b="0" i="0" sz="2047" u="none" cap="none" strike="noStrike">
+              <a:defRPr sz="2047" b="0" i="0" u="none" strike="noStrike" cap="none">
                 <a:solidFill>
                   <a:schemeClr val="dk1"/>
                 </a:solidFill>
@@ -10293,7 +10666,7 @@
                 <a:sym typeface="Arial"/>
               </a:defRPr>
             </a:lvl3pPr>
-            <a:lvl4pPr indent="-345567" lvl="3" marL="1828800" marR="0" rtl="0" algn="l">
+            <a:lvl4pPr marL="1828800" marR="0" lvl="3" indent="-345567" algn="l" rtl="0">
               <a:lnSpc>
                 <a:spcPct val="90000"/>
               </a:lnSpc>
@@ -10309,7 +10682,7 @@
               <a:buSzPts val="1842"/>
               <a:buFont typeface="Arial"/>
               <a:buChar char="•"/>
-              <a:defRPr b="0" i="0" sz="1842" u="none" cap="none" strike="noStrike">
+              <a:defRPr sz="1842" b="0" i="0" u="none" strike="noStrike" cap="none">
                 <a:solidFill>
                   <a:schemeClr val="dk1"/>
                 </a:solidFill>
@@ -10319,7 +10692,7 @@
                 <a:sym typeface="Arial"/>
               </a:defRPr>
             </a:lvl4pPr>
-            <a:lvl5pPr indent="-345567" lvl="4" marL="2286000" marR="0" rtl="0" algn="l">
+            <a:lvl5pPr marL="2286000" marR="0" lvl="4" indent="-345567" algn="l" rtl="0">
               <a:lnSpc>
                 <a:spcPct val="90000"/>
               </a:lnSpc>
@@ -10335,7 +10708,7 @@
               <a:buSzPts val="1842"/>
               <a:buFont typeface="Arial"/>
               <a:buChar char="•"/>
-              <a:defRPr b="0" i="0" sz="1842" u="none" cap="none" strike="noStrike">
+              <a:defRPr sz="1842" b="0" i="0" u="none" strike="noStrike" cap="none">
                 <a:solidFill>
                   <a:schemeClr val="dk1"/>
                 </a:solidFill>
@@ -10345,7 +10718,7 @@
                 <a:sym typeface="Arial"/>
               </a:defRPr>
             </a:lvl5pPr>
-            <a:lvl6pPr indent="-345567" lvl="5" marL="2743200" marR="0" rtl="0" algn="l">
+            <a:lvl6pPr marL="2743200" marR="0" lvl="5" indent="-345567" algn="l" rtl="0">
               <a:lnSpc>
                 <a:spcPct val="90000"/>
               </a:lnSpc>
@@ -10361,7 +10734,7 @@
               <a:buSzPts val="1842"/>
               <a:buFont typeface="Arial"/>
               <a:buChar char="•"/>
-              <a:defRPr b="0" i="0" sz="1842" u="none" cap="none" strike="noStrike">
+              <a:defRPr sz="1842" b="0" i="0" u="none" strike="noStrike" cap="none">
                 <a:solidFill>
                   <a:schemeClr val="dk1"/>
                 </a:solidFill>
@@ -10371,7 +10744,7 @@
                 <a:sym typeface="Arial"/>
               </a:defRPr>
             </a:lvl6pPr>
-            <a:lvl7pPr indent="-345567" lvl="6" marL="3200400" marR="0" rtl="0" algn="l">
+            <a:lvl7pPr marL="3200400" marR="0" lvl="6" indent="-345567" algn="l" rtl="0">
               <a:lnSpc>
                 <a:spcPct val="90000"/>
               </a:lnSpc>
@@ -10387,7 +10760,7 @@
               <a:buSzPts val="1842"/>
               <a:buFont typeface="Arial"/>
               <a:buChar char="•"/>
-              <a:defRPr b="0" i="0" sz="1842" u="none" cap="none" strike="noStrike">
+              <a:defRPr sz="1842" b="0" i="0" u="none" strike="noStrike" cap="none">
                 <a:solidFill>
                   <a:schemeClr val="dk1"/>
                 </a:solidFill>
@@ -10397,7 +10770,7 @@
                 <a:sym typeface="Arial"/>
               </a:defRPr>
             </a:lvl7pPr>
-            <a:lvl8pPr indent="-345567" lvl="7" marL="3657600" marR="0" rtl="0" algn="l">
+            <a:lvl8pPr marL="3657600" marR="0" lvl="7" indent="-345567" algn="l" rtl="0">
               <a:lnSpc>
                 <a:spcPct val="90000"/>
               </a:lnSpc>
@@ -10413,7 +10786,7 @@
               <a:buSzPts val="1842"/>
               <a:buFont typeface="Arial"/>
               <a:buChar char="•"/>
-              <a:defRPr b="0" i="0" sz="1842" u="none" cap="none" strike="noStrike">
+              <a:defRPr sz="1842" b="0" i="0" u="none" strike="noStrike" cap="none">
                 <a:solidFill>
                   <a:schemeClr val="dk1"/>
                 </a:solidFill>
@@ -10423,7 +10796,7 @@
                 <a:sym typeface="Arial"/>
               </a:defRPr>
             </a:lvl8pPr>
-            <a:lvl9pPr indent="-345567" lvl="8" marL="4114800" marR="0" rtl="0" algn="l">
+            <a:lvl9pPr marL="4114800" marR="0" lvl="8" indent="-345567" algn="l" rtl="0">
               <a:lnSpc>
                 <a:spcPct val="90000"/>
               </a:lnSpc>
@@ -10439,7 +10812,7 @@
               <a:buSzPts val="1842"/>
               <a:buFont typeface="Arial"/>
               <a:buChar char="•"/>
-              <a:defRPr b="0" i="0" sz="1842" u="none" cap="none" strike="noStrike">
+              <a:defRPr sz="1842" b="0" i="0" u="none" strike="noStrike" cap="none">
                 <a:solidFill>
                   <a:schemeClr val="dk1"/>
                 </a:solidFill>
@@ -10450,15 +10823,19 @@
               </a:defRPr>
             </a:lvl9pPr>
           </a:lstStyle>
-          <a:p/>
+          <a:p>
+            <a:endParaRPr/>
+          </a:p>
         </p:txBody>
       </p:sp>
       <p:sp>
         <p:nvSpPr>
           <p:cNvPr id="12" name="Google Shape;12;p2"/>
-          <p:cNvSpPr txBox="1"/>
+          <p:cNvSpPr txBox="1">
+            <a:spLocks noGrp="1"/>
+          </p:cNvSpPr>
           <p:nvPr>
-            <p:ph idx="10" type="dt"/>
+            <p:ph type="dt" idx="10"/>
           </p:nvPr>
         </p:nvSpPr>
         <p:spPr>
@@ -10475,20 +10852,20 @@
           </a:ln>
         </p:spPr>
         <p:txBody>
-          <a:bodyPr anchorCtr="0" anchor="ctr" bIns="45700" lIns="91425" spcFirstLastPara="1" rIns="91425" wrap="square" tIns="45700">
+          <a:bodyPr spcFirstLastPara="1" wrap="square" lIns="91425" tIns="45700" rIns="91425" bIns="45700" anchor="ctr" anchorCtr="0">
             <a:noAutofit/>
           </a:bodyPr>
           <a:lstStyle>
-            <a:lvl1pPr lvl="0" marR="0" rtl="0" algn="l">
-              <a:spcBef>
-                <a:spcPts val="0"/>
-              </a:spcBef>
-              <a:spcAft>
-                <a:spcPts val="0"/>
-              </a:spcAft>
-              <a:buSzPts val="1400"/>
-              <a:buNone/>
-              <a:defRPr b="0" i="0" sz="1228" u="none" cap="none" strike="noStrike">
+            <a:lvl1pPr marR="0" lvl="0" algn="l" rtl="0">
+              <a:spcBef>
+                <a:spcPts val="0"/>
+              </a:spcBef>
+              <a:spcAft>
+                <a:spcPts val="0"/>
+              </a:spcAft>
+              <a:buSzPts val="1400"/>
+              <a:buNone/>
+              <a:defRPr sz="1228" b="0" i="0" u="none" strike="noStrike" cap="none">
                 <a:solidFill>
                   <a:srgbClr val="757575"/>
                 </a:solidFill>
@@ -10498,16 +10875,16 @@
                 <a:sym typeface="Arial"/>
               </a:defRPr>
             </a:lvl1pPr>
-            <a:lvl2pPr lvl="1" marR="0" rtl="0" algn="l">
-              <a:spcBef>
-                <a:spcPts val="0"/>
-              </a:spcBef>
-              <a:spcAft>
-                <a:spcPts val="0"/>
-              </a:spcAft>
-              <a:buSzPts val="1400"/>
-              <a:buNone/>
-              <a:defRPr b="0" i="0" sz="1800" u="none" cap="none" strike="noStrike">
+            <a:lvl2pPr marR="0" lvl="1" algn="l" rtl="0">
+              <a:spcBef>
+                <a:spcPts val="0"/>
+              </a:spcBef>
+              <a:spcAft>
+                <a:spcPts val="0"/>
+              </a:spcAft>
+              <a:buSzPts val="1400"/>
+              <a:buNone/>
+              <a:defRPr sz="1800" b="0" i="0" u="none" strike="noStrike" cap="none">
                 <a:solidFill>
                   <a:schemeClr val="dk1"/>
                 </a:solidFill>
@@ -10517,16 +10894,16 @@
                 <a:sym typeface="Arial"/>
               </a:defRPr>
             </a:lvl2pPr>
-            <a:lvl3pPr lvl="2" marR="0" rtl="0" algn="l">
-              <a:spcBef>
-                <a:spcPts val="0"/>
-              </a:spcBef>
-              <a:spcAft>
-                <a:spcPts val="0"/>
-              </a:spcAft>
-              <a:buSzPts val="1400"/>
-              <a:buNone/>
-              <a:defRPr b="0" i="0" sz="1800" u="none" cap="none" strike="noStrike">
+            <a:lvl3pPr marR="0" lvl="2" algn="l" rtl="0">
+              <a:spcBef>
+                <a:spcPts val="0"/>
+              </a:spcBef>
+              <a:spcAft>
+                <a:spcPts val="0"/>
+              </a:spcAft>
+              <a:buSzPts val="1400"/>
+              <a:buNone/>
+              <a:defRPr sz="1800" b="0" i="0" u="none" strike="noStrike" cap="none">
                 <a:solidFill>
                   <a:schemeClr val="dk1"/>
                 </a:solidFill>
@@ -10536,16 +10913,16 @@
                 <a:sym typeface="Arial"/>
               </a:defRPr>
             </a:lvl3pPr>
-            <a:lvl4pPr lvl="3" marR="0" rtl="0" algn="l">
-              <a:spcBef>
-                <a:spcPts val="0"/>
-              </a:spcBef>
-              <a:spcAft>
-                <a:spcPts val="0"/>
-              </a:spcAft>
-              <a:buSzPts val="1400"/>
-              <a:buNone/>
-              <a:defRPr b="0" i="0" sz="1800" u="none" cap="none" strike="noStrike">
+            <a:lvl4pPr marR="0" lvl="3" algn="l" rtl="0">
+              <a:spcBef>
+                <a:spcPts val="0"/>
+              </a:spcBef>
+              <a:spcAft>
+                <a:spcPts val="0"/>
+              </a:spcAft>
+              <a:buSzPts val="1400"/>
+              <a:buNone/>
+              <a:defRPr sz="1800" b="0" i="0" u="none" strike="noStrike" cap="none">
                 <a:solidFill>
                   <a:schemeClr val="dk1"/>
                 </a:solidFill>
@@ -10555,16 +10932,16 @@
                 <a:sym typeface="Arial"/>
               </a:defRPr>
             </a:lvl4pPr>
-            <a:lvl5pPr lvl="4" marR="0" rtl="0" algn="l">
-              <a:spcBef>
-                <a:spcPts val="0"/>
-              </a:spcBef>
-              <a:spcAft>
-                <a:spcPts val="0"/>
-              </a:spcAft>
-              <a:buSzPts val="1400"/>
-              <a:buNone/>
-              <a:defRPr b="0" i="0" sz="1800" u="none" cap="none" strike="noStrike">
+            <a:lvl5pPr marR="0" lvl="4" algn="l" rtl="0">
+              <a:spcBef>
+                <a:spcPts val="0"/>
+              </a:spcBef>
+              <a:spcAft>
+                <a:spcPts val="0"/>
+              </a:spcAft>
+              <a:buSzPts val="1400"/>
+              <a:buNone/>
+              <a:defRPr sz="1800" b="0" i="0" u="none" strike="noStrike" cap="none">
                 <a:solidFill>
                   <a:schemeClr val="dk1"/>
                 </a:solidFill>
@@ -10574,16 +10951,16 @@
                 <a:sym typeface="Arial"/>
               </a:defRPr>
             </a:lvl5pPr>
-            <a:lvl6pPr lvl="5" marR="0" rtl="0" algn="l">
-              <a:spcBef>
-                <a:spcPts val="0"/>
-              </a:spcBef>
-              <a:spcAft>
-                <a:spcPts val="0"/>
-              </a:spcAft>
-              <a:buSzPts val="1400"/>
-              <a:buNone/>
-              <a:defRPr b="0" i="0" sz="1800" u="none" cap="none" strike="noStrike">
+            <a:lvl6pPr marR="0" lvl="5" algn="l" rtl="0">
+              <a:spcBef>
+                <a:spcPts val="0"/>
+              </a:spcBef>
+              <a:spcAft>
+                <a:spcPts val="0"/>
+              </a:spcAft>
+              <a:buSzPts val="1400"/>
+              <a:buNone/>
+              <a:defRPr sz="1800" b="0" i="0" u="none" strike="noStrike" cap="none">
                 <a:solidFill>
                   <a:schemeClr val="dk1"/>
                 </a:solidFill>
@@ -10593,16 +10970,16 @@
                 <a:sym typeface="Arial"/>
               </a:defRPr>
             </a:lvl6pPr>
-            <a:lvl7pPr lvl="6" marR="0" rtl="0" algn="l">
-              <a:spcBef>
-                <a:spcPts val="0"/>
-              </a:spcBef>
-              <a:spcAft>
-                <a:spcPts val="0"/>
-              </a:spcAft>
-              <a:buSzPts val="1400"/>
-              <a:buNone/>
-              <a:defRPr b="0" i="0" sz="1800" u="none" cap="none" strike="noStrike">
+            <a:lvl7pPr marR="0" lvl="6" algn="l" rtl="0">
+              <a:spcBef>
+                <a:spcPts val="0"/>
+              </a:spcBef>
+              <a:spcAft>
+                <a:spcPts val="0"/>
+              </a:spcAft>
+              <a:buSzPts val="1400"/>
+              <a:buNone/>
+              <a:defRPr sz="1800" b="0" i="0" u="none" strike="noStrike" cap="none">
                 <a:solidFill>
                   <a:schemeClr val="dk1"/>
                 </a:solidFill>
@@ -10612,16 +10989,16 @@
                 <a:sym typeface="Arial"/>
               </a:defRPr>
             </a:lvl7pPr>
-            <a:lvl8pPr lvl="7" marR="0" rtl="0" algn="l">
-              <a:spcBef>
-                <a:spcPts val="0"/>
-              </a:spcBef>
-              <a:spcAft>
-                <a:spcPts val="0"/>
-              </a:spcAft>
-              <a:buSzPts val="1400"/>
-              <a:buNone/>
-              <a:defRPr b="0" i="0" sz="1800" u="none" cap="none" strike="noStrike">
+            <a:lvl8pPr marR="0" lvl="7" algn="l" rtl="0">
+              <a:spcBef>
+                <a:spcPts val="0"/>
+              </a:spcBef>
+              <a:spcAft>
+                <a:spcPts val="0"/>
+              </a:spcAft>
+              <a:buSzPts val="1400"/>
+              <a:buNone/>
+              <a:defRPr sz="1800" b="0" i="0" u="none" strike="noStrike" cap="none">
                 <a:solidFill>
                   <a:schemeClr val="dk1"/>
                 </a:solidFill>
@@ -10631,16 +11008,16 @@
                 <a:sym typeface="Arial"/>
               </a:defRPr>
             </a:lvl8pPr>
-            <a:lvl9pPr lvl="8" marR="0" rtl="0" algn="l">
-              <a:spcBef>
-                <a:spcPts val="0"/>
-              </a:spcBef>
-              <a:spcAft>
-                <a:spcPts val="0"/>
-              </a:spcAft>
-              <a:buSzPts val="1400"/>
-              <a:buNone/>
-              <a:defRPr b="0" i="0" sz="1800" u="none" cap="none" strike="noStrike">
+            <a:lvl9pPr marR="0" lvl="8" algn="l" rtl="0">
+              <a:spcBef>
+                <a:spcPts val="0"/>
+              </a:spcBef>
+              <a:spcAft>
+                <a:spcPts val="0"/>
+              </a:spcAft>
+              <a:buSzPts val="1400"/>
+              <a:buNone/>
+              <a:defRPr sz="1800" b="0" i="0" u="none" strike="noStrike" cap="none">
                 <a:solidFill>
                   <a:schemeClr val="dk1"/>
                 </a:solidFill>
@@ -10651,15 +11028,19 @@
               </a:defRPr>
             </a:lvl9pPr>
           </a:lstStyle>
-          <a:p/>
+          <a:p>
+            <a:endParaRPr/>
+          </a:p>
         </p:txBody>
       </p:sp>
       <p:sp>
         <p:nvSpPr>
           <p:cNvPr id="13" name="Google Shape;13;p2"/>
-          <p:cNvSpPr txBox="1"/>
+          <p:cNvSpPr txBox="1">
+            <a:spLocks noGrp="1"/>
+          </p:cNvSpPr>
           <p:nvPr>
-            <p:ph idx="11" type="ftr"/>
+            <p:ph type="ftr" idx="11"/>
           </p:nvPr>
         </p:nvSpPr>
         <p:spPr>
@@ -10676,20 +11057,20 @@
           </a:ln>
         </p:spPr>
         <p:txBody>
-          <a:bodyPr anchorCtr="0" anchor="ctr" bIns="45700" lIns="91425" spcFirstLastPara="1" rIns="91425" wrap="square" tIns="45700">
+          <a:bodyPr spcFirstLastPara="1" wrap="square" lIns="91425" tIns="45700" rIns="91425" bIns="45700" anchor="ctr" anchorCtr="0">
             <a:noAutofit/>
           </a:bodyPr>
           <a:lstStyle>
-            <a:lvl1pPr lvl="0" marR="0" rtl="0" algn="ctr">
-              <a:spcBef>
-                <a:spcPts val="0"/>
-              </a:spcBef>
-              <a:spcAft>
-                <a:spcPts val="0"/>
-              </a:spcAft>
-              <a:buSzPts val="1400"/>
-              <a:buNone/>
-              <a:defRPr b="0" i="0" sz="1228" u="none" cap="none" strike="noStrike">
+            <a:lvl1pPr marR="0" lvl="0" algn="ctr" rtl="0">
+              <a:spcBef>
+                <a:spcPts val="0"/>
+              </a:spcBef>
+              <a:spcAft>
+                <a:spcPts val="0"/>
+              </a:spcAft>
+              <a:buSzPts val="1400"/>
+              <a:buNone/>
+              <a:defRPr sz="1228" b="0" i="0" u="none" strike="noStrike" cap="none">
                 <a:solidFill>
                   <a:srgbClr val="757575"/>
                 </a:solidFill>
@@ -10699,16 +11080,16 @@
                 <a:sym typeface="Arial"/>
               </a:defRPr>
             </a:lvl1pPr>
-            <a:lvl2pPr lvl="1" marR="0" rtl="0" algn="l">
-              <a:spcBef>
-                <a:spcPts val="0"/>
-              </a:spcBef>
-              <a:spcAft>
-                <a:spcPts val="0"/>
-              </a:spcAft>
-              <a:buSzPts val="1400"/>
-              <a:buNone/>
-              <a:defRPr b="0" i="0" sz="1800" u="none" cap="none" strike="noStrike">
+            <a:lvl2pPr marR="0" lvl="1" algn="l" rtl="0">
+              <a:spcBef>
+                <a:spcPts val="0"/>
+              </a:spcBef>
+              <a:spcAft>
+                <a:spcPts val="0"/>
+              </a:spcAft>
+              <a:buSzPts val="1400"/>
+              <a:buNone/>
+              <a:defRPr sz="1800" b="0" i="0" u="none" strike="noStrike" cap="none">
                 <a:solidFill>
                   <a:schemeClr val="dk1"/>
                 </a:solidFill>
@@ -10718,16 +11099,16 @@
                 <a:sym typeface="Arial"/>
               </a:defRPr>
             </a:lvl2pPr>
-            <a:lvl3pPr lvl="2" marR="0" rtl="0" algn="l">
-              <a:spcBef>
-                <a:spcPts val="0"/>
-              </a:spcBef>
-              <a:spcAft>
-                <a:spcPts val="0"/>
-              </a:spcAft>
-              <a:buSzPts val="1400"/>
-              <a:buNone/>
-              <a:defRPr b="0" i="0" sz="1800" u="none" cap="none" strike="noStrike">
+            <a:lvl3pPr marR="0" lvl="2" algn="l" rtl="0">
+              <a:spcBef>
+                <a:spcPts val="0"/>
+              </a:spcBef>
+              <a:spcAft>
+                <a:spcPts val="0"/>
+              </a:spcAft>
+              <a:buSzPts val="1400"/>
+              <a:buNone/>
+              <a:defRPr sz="1800" b="0" i="0" u="none" strike="noStrike" cap="none">
                 <a:solidFill>
                   <a:schemeClr val="dk1"/>
                 </a:solidFill>
@@ -10737,16 +11118,16 @@
                 <a:sym typeface="Arial"/>
               </a:defRPr>
             </a:lvl3pPr>
-            <a:lvl4pPr lvl="3" marR="0" rtl="0" algn="l">
-              <a:spcBef>
-                <a:spcPts val="0"/>
-              </a:spcBef>
-              <a:spcAft>
-                <a:spcPts val="0"/>
-              </a:spcAft>
-              <a:buSzPts val="1400"/>
-              <a:buNone/>
-              <a:defRPr b="0" i="0" sz="1800" u="none" cap="none" strike="noStrike">
+            <a:lvl4pPr marR="0" lvl="3" algn="l" rtl="0">
+              <a:spcBef>
+                <a:spcPts val="0"/>
+              </a:spcBef>
+              <a:spcAft>
+                <a:spcPts val="0"/>
+              </a:spcAft>
+              <a:buSzPts val="1400"/>
+              <a:buNone/>
+              <a:defRPr sz="1800" b="0" i="0" u="none" strike="noStrike" cap="none">
                 <a:solidFill>
                   <a:schemeClr val="dk1"/>
                 </a:solidFill>
@@ -10756,16 +11137,16 @@
                 <a:sym typeface="Arial"/>
               </a:defRPr>
             </a:lvl4pPr>
-            <a:lvl5pPr lvl="4" marR="0" rtl="0" algn="l">
-              <a:spcBef>
-                <a:spcPts val="0"/>
-              </a:spcBef>
-              <a:spcAft>
-                <a:spcPts val="0"/>
-              </a:spcAft>
-              <a:buSzPts val="1400"/>
-              <a:buNone/>
-              <a:defRPr b="0" i="0" sz="1800" u="none" cap="none" strike="noStrike">
+            <a:lvl5pPr marR="0" lvl="4" algn="l" rtl="0">
+              <a:spcBef>
+                <a:spcPts val="0"/>
+              </a:spcBef>
+              <a:spcAft>
+                <a:spcPts val="0"/>
+              </a:spcAft>
+              <a:buSzPts val="1400"/>
+              <a:buNone/>
+              <a:defRPr sz="1800" b="0" i="0" u="none" strike="noStrike" cap="none">
                 <a:solidFill>
                   <a:schemeClr val="dk1"/>
                 </a:solidFill>
@@ -10775,16 +11156,16 @@
                 <a:sym typeface="Arial"/>
               </a:defRPr>
             </a:lvl5pPr>
-            <a:lvl6pPr lvl="5" marR="0" rtl="0" algn="l">
-              <a:spcBef>
-                <a:spcPts val="0"/>
-              </a:spcBef>
-              <a:spcAft>
-                <a:spcPts val="0"/>
-              </a:spcAft>
-              <a:buSzPts val="1400"/>
-              <a:buNone/>
-              <a:defRPr b="0" i="0" sz="1800" u="none" cap="none" strike="noStrike">
+            <a:lvl6pPr marR="0" lvl="5" algn="l" rtl="0">
+              <a:spcBef>
+                <a:spcPts val="0"/>
+              </a:spcBef>
+              <a:spcAft>
+                <a:spcPts val="0"/>
+              </a:spcAft>
+              <a:buSzPts val="1400"/>
+              <a:buNone/>
+              <a:defRPr sz="1800" b="0" i="0" u="none" strike="noStrike" cap="none">
                 <a:solidFill>
                   <a:schemeClr val="dk1"/>
                 </a:solidFill>
@@ -10794,16 +11175,16 @@
                 <a:sym typeface="Arial"/>
               </a:defRPr>
             </a:lvl6pPr>
-            <a:lvl7pPr lvl="6" marR="0" rtl="0" algn="l">
-              <a:spcBef>
-                <a:spcPts val="0"/>
-              </a:spcBef>
-              <a:spcAft>
-                <a:spcPts val="0"/>
-              </a:spcAft>
-              <a:buSzPts val="1400"/>
-              <a:buNone/>
-              <a:defRPr b="0" i="0" sz="1800" u="none" cap="none" strike="noStrike">
+            <a:lvl7pPr marR="0" lvl="6" algn="l" rtl="0">
+              <a:spcBef>
+                <a:spcPts val="0"/>
+              </a:spcBef>
+              <a:spcAft>
+                <a:spcPts val="0"/>
+              </a:spcAft>
+              <a:buSzPts val="1400"/>
+              <a:buNone/>
+              <a:defRPr sz="1800" b="0" i="0" u="none" strike="noStrike" cap="none">
                 <a:solidFill>
                   <a:schemeClr val="dk1"/>
                 </a:solidFill>
@@ -10813,16 +11194,16 @@
                 <a:sym typeface="Arial"/>
               </a:defRPr>
             </a:lvl7pPr>
-            <a:lvl8pPr lvl="7" marR="0" rtl="0" algn="l">
-              <a:spcBef>
-                <a:spcPts val="0"/>
-              </a:spcBef>
-              <a:spcAft>
-                <a:spcPts val="0"/>
-              </a:spcAft>
-              <a:buSzPts val="1400"/>
-              <a:buNone/>
-              <a:defRPr b="0" i="0" sz="1800" u="none" cap="none" strike="noStrike">
+            <a:lvl8pPr marR="0" lvl="7" algn="l" rtl="0">
+              <a:spcBef>
+                <a:spcPts val="0"/>
+              </a:spcBef>
+              <a:spcAft>
+                <a:spcPts val="0"/>
+              </a:spcAft>
+              <a:buSzPts val="1400"/>
+              <a:buNone/>
+              <a:defRPr sz="1800" b="0" i="0" u="none" strike="noStrike" cap="none">
                 <a:solidFill>
                   <a:schemeClr val="dk1"/>
                 </a:solidFill>
@@ -10832,16 +11213,16 @@
                 <a:sym typeface="Arial"/>
               </a:defRPr>
             </a:lvl8pPr>
-            <a:lvl9pPr lvl="8" marR="0" rtl="0" algn="l">
-              <a:spcBef>
-                <a:spcPts val="0"/>
-              </a:spcBef>
-              <a:spcAft>
-                <a:spcPts val="0"/>
-              </a:spcAft>
-              <a:buSzPts val="1400"/>
-              <a:buNone/>
-              <a:defRPr b="0" i="0" sz="1800" u="none" cap="none" strike="noStrike">
+            <a:lvl9pPr marR="0" lvl="8" algn="l" rtl="0">
+              <a:spcBef>
+                <a:spcPts val="0"/>
+              </a:spcBef>
+              <a:spcAft>
+                <a:spcPts val="0"/>
+              </a:spcAft>
+              <a:buSzPts val="1400"/>
+              <a:buNone/>
+              <a:defRPr sz="1800" b="0" i="0" u="none" strike="noStrike" cap="none">
                 <a:solidFill>
                   <a:schemeClr val="dk1"/>
                 </a:solidFill>
@@ -10852,15 +11233,19 @@
               </a:defRPr>
             </a:lvl9pPr>
           </a:lstStyle>
-          <a:p/>
+          <a:p>
+            <a:endParaRPr/>
+          </a:p>
         </p:txBody>
       </p:sp>
       <p:sp>
         <p:nvSpPr>
           <p:cNvPr id="14" name="Google Shape;14;p2"/>
-          <p:cNvSpPr txBox="1"/>
+          <p:cNvSpPr txBox="1">
+            <a:spLocks noGrp="1"/>
+          </p:cNvSpPr>
           <p:nvPr>
-            <p:ph idx="12" type="sldNum"/>
+            <p:ph type="sldNum" idx="12"/>
           </p:nvPr>
         </p:nvSpPr>
         <p:spPr>
@@ -10877,16 +11262,16 @@
           </a:ln>
         </p:spPr>
         <p:txBody>
-          <a:bodyPr anchorCtr="0" anchor="ctr" bIns="45700" lIns="91425" spcFirstLastPara="1" rIns="91425" wrap="square" tIns="45700">
+          <a:bodyPr spcFirstLastPara="1" wrap="square" lIns="91425" tIns="45700" rIns="91425" bIns="45700" anchor="ctr" anchorCtr="0">
             <a:noAutofit/>
           </a:bodyPr>
           <a:lstStyle>
-            <a:lvl1pPr indent="0" lvl="0" marL="0" marR="0" rtl="0" algn="r">
-              <a:spcBef>
-                <a:spcPts val="0"/>
-              </a:spcBef>
-              <a:buNone/>
-              <a:defRPr b="0" i="0" sz="1228" u="none" cap="none" strike="noStrike">
+            <a:lvl1pPr marL="0" marR="0" lvl="0" indent="0" algn="r" rtl="0">
+              <a:spcBef>
+                <a:spcPts val="0"/>
+              </a:spcBef>
+              <a:buNone/>
+              <a:defRPr sz="1228" b="0" i="0" u="none" strike="noStrike" cap="none">
                 <a:solidFill>
                   <a:srgbClr val="757575"/>
                 </a:solidFill>
@@ -10896,12 +11281,12 @@
                 <a:sym typeface="Arial"/>
               </a:defRPr>
             </a:lvl1pPr>
-            <a:lvl2pPr indent="0" lvl="1" marL="0" marR="0" rtl="0" algn="r">
-              <a:spcBef>
-                <a:spcPts val="0"/>
-              </a:spcBef>
-              <a:buNone/>
-              <a:defRPr b="0" i="0" sz="1228" u="none" cap="none" strike="noStrike">
+            <a:lvl2pPr marL="0" marR="0" lvl="1" indent="0" algn="r" rtl="0">
+              <a:spcBef>
+                <a:spcPts val="0"/>
+              </a:spcBef>
+              <a:buNone/>
+              <a:defRPr sz="1228" b="0" i="0" u="none" strike="noStrike" cap="none">
                 <a:solidFill>
                   <a:srgbClr val="757575"/>
                 </a:solidFill>
@@ -10911,12 +11296,12 @@
                 <a:sym typeface="Arial"/>
               </a:defRPr>
             </a:lvl2pPr>
-            <a:lvl3pPr indent="0" lvl="2" marL="0" marR="0" rtl="0" algn="r">
-              <a:spcBef>
-                <a:spcPts val="0"/>
-              </a:spcBef>
-              <a:buNone/>
-              <a:defRPr b="0" i="0" sz="1228" u="none" cap="none" strike="noStrike">
+            <a:lvl3pPr marL="0" marR="0" lvl="2" indent="0" algn="r" rtl="0">
+              <a:spcBef>
+                <a:spcPts val="0"/>
+              </a:spcBef>
+              <a:buNone/>
+              <a:defRPr sz="1228" b="0" i="0" u="none" strike="noStrike" cap="none">
                 <a:solidFill>
                   <a:srgbClr val="757575"/>
                 </a:solidFill>
@@ -10926,12 +11311,12 @@
                 <a:sym typeface="Arial"/>
               </a:defRPr>
             </a:lvl3pPr>
-            <a:lvl4pPr indent="0" lvl="3" marL="0" marR="0" rtl="0" algn="r">
-              <a:spcBef>
-                <a:spcPts val="0"/>
-              </a:spcBef>
-              <a:buNone/>
-              <a:defRPr b="0" i="0" sz="1228" u="none" cap="none" strike="noStrike">
+            <a:lvl4pPr marL="0" marR="0" lvl="3" indent="0" algn="r" rtl="0">
+              <a:spcBef>
+                <a:spcPts val="0"/>
+              </a:spcBef>
+              <a:buNone/>
+              <a:defRPr sz="1228" b="0" i="0" u="none" strike="noStrike" cap="none">
                 <a:solidFill>
                   <a:srgbClr val="757575"/>
                 </a:solidFill>
@@ -10941,12 +11326,12 @@
                 <a:sym typeface="Arial"/>
               </a:defRPr>
             </a:lvl4pPr>
-            <a:lvl5pPr indent="0" lvl="4" marL="0" marR="0" rtl="0" algn="r">
-              <a:spcBef>
-                <a:spcPts val="0"/>
-              </a:spcBef>
-              <a:buNone/>
-              <a:defRPr b="0" i="0" sz="1228" u="none" cap="none" strike="noStrike">
+            <a:lvl5pPr marL="0" marR="0" lvl="4" indent="0" algn="r" rtl="0">
+              <a:spcBef>
+                <a:spcPts val="0"/>
+              </a:spcBef>
+              <a:buNone/>
+              <a:defRPr sz="1228" b="0" i="0" u="none" strike="noStrike" cap="none">
                 <a:solidFill>
                   <a:srgbClr val="757575"/>
                 </a:solidFill>
@@ -10956,12 +11341,12 @@
                 <a:sym typeface="Arial"/>
               </a:defRPr>
             </a:lvl5pPr>
-            <a:lvl6pPr indent="0" lvl="5" marL="0" marR="0" rtl="0" algn="r">
-              <a:spcBef>
-                <a:spcPts val="0"/>
-              </a:spcBef>
-              <a:buNone/>
-              <a:defRPr b="0" i="0" sz="1228" u="none" cap="none" strike="noStrike">
+            <a:lvl6pPr marL="0" marR="0" lvl="5" indent="0" algn="r" rtl="0">
+              <a:spcBef>
+                <a:spcPts val="0"/>
+              </a:spcBef>
+              <a:buNone/>
+              <a:defRPr sz="1228" b="0" i="0" u="none" strike="noStrike" cap="none">
                 <a:solidFill>
                   <a:srgbClr val="757575"/>
                 </a:solidFill>
@@ -10971,12 +11356,12 @@
                 <a:sym typeface="Arial"/>
               </a:defRPr>
             </a:lvl6pPr>
-            <a:lvl7pPr indent="0" lvl="6" marL="0" marR="0" rtl="0" algn="r">
-              <a:spcBef>
-                <a:spcPts val="0"/>
-              </a:spcBef>
-              <a:buNone/>
-              <a:defRPr b="0" i="0" sz="1228" u="none" cap="none" strike="noStrike">
+            <a:lvl7pPr marL="0" marR="0" lvl="6" indent="0" algn="r" rtl="0">
+              <a:spcBef>
+                <a:spcPts val="0"/>
+              </a:spcBef>
+              <a:buNone/>
+              <a:defRPr sz="1228" b="0" i="0" u="none" strike="noStrike" cap="none">
                 <a:solidFill>
                   <a:srgbClr val="757575"/>
                 </a:solidFill>
@@ -10986,12 +11371,12 @@
                 <a:sym typeface="Arial"/>
               </a:defRPr>
             </a:lvl7pPr>
-            <a:lvl8pPr indent="0" lvl="7" marL="0" marR="0" rtl="0" algn="r">
-              <a:spcBef>
-                <a:spcPts val="0"/>
-              </a:spcBef>
-              <a:buNone/>
-              <a:defRPr b="0" i="0" sz="1228" u="none" cap="none" strike="noStrike">
+            <a:lvl8pPr marL="0" marR="0" lvl="7" indent="0" algn="r" rtl="0">
+              <a:spcBef>
+                <a:spcPts val="0"/>
+              </a:spcBef>
+              <a:buNone/>
+              <a:defRPr sz="1228" b="0" i="0" u="none" strike="noStrike" cap="none">
                 <a:solidFill>
                   <a:srgbClr val="757575"/>
                 </a:solidFill>
@@ -11001,12 +11386,12 @@
                 <a:sym typeface="Arial"/>
               </a:defRPr>
             </a:lvl8pPr>
-            <a:lvl9pPr indent="0" lvl="8" marL="0" marR="0" rtl="0" algn="r">
-              <a:spcBef>
-                <a:spcPts val="0"/>
-              </a:spcBef>
-              <a:buNone/>
-              <a:defRPr b="0" i="0" sz="1228" u="none" cap="none" strike="noStrike">
+            <a:lvl9pPr marL="0" marR="0" lvl="8" indent="0" algn="r" rtl="0">
+              <a:spcBef>
+                <a:spcPts val="0"/>
+              </a:spcBef>
+              <a:buNone/>
+              <a:defRPr sz="1228" b="0" i="0" u="none" strike="noStrike" cap="none">
                 <a:solidFill>
                   <a:srgbClr val="757575"/>
                 </a:solidFill>
@@ -11018,7 +11403,7 @@
             </a:lvl9pPr>
           </a:lstStyle>
           <a:p>
-            <a:pPr indent="0" lvl="0" marL="0" rtl="0" algn="r">
+            <a:pPr marL="0" lvl="0" indent="0" algn="r" rtl="0">
               <a:spcBef>
                 <a:spcPts val="0"/>
               </a:spcBef>
@@ -11037,7 +11422,7 @@
       </p:sp>
     </p:spTree>
   </p:cSld>
-  <p:clrMap accent1="accent1" accent2="accent2" accent3="accent3" accent4="accent4" accent5="accent5" accent6="accent6" bg1="lt1" bg2="dk2" tx1="dk1" tx2="lt2" folHlink="folHlink" hlink="hlink"/>
+  <p:clrMap bg1="lt1" tx1="dk1" bg2="dk2" tx2="lt2" accent1="accent1" accent2="accent2" accent3="accent3" accent4="accent4" accent5="accent5" accent6="accent6" hlink="hlink" folHlink="folHlink"/>
   <p:sldLayoutIdLst>
     <p:sldLayoutId id="2147483649" r:id="rId1"/>
     <p:sldLayoutId id="2147483650" r:id="rId2"/>
@@ -11051,10 +11436,10 @@
     <p:sldLayoutId id="2147483658" r:id="rId10"/>
     <p:sldLayoutId id="2147483659" r:id="rId11"/>
   </p:sldLayoutIdLst>
-  <p:hf dt="0" ftr="0" hdr="0" sldNum="0"/>
+  <p:hf sldNum="0" hdr="0" ftr="0" dt="0"/>
   <p:txStyles>
     <p:titleStyle>
-      <a:defPPr lvl="0" marR="0" rtl="0" algn="l">
+      <a:defPPr marR="0" lvl="0" algn="l" rtl="0">
         <a:lnSpc>
           <a:spcPct val="100000"/>
         </a:lnSpc>
@@ -11065,7 +11450,7 @@
           <a:spcPts val="0"/>
         </a:spcAft>
       </a:defPPr>
-      <a:lvl1pPr lvl="0" marR="0" rtl="0" algn="l">
+      <a:lvl1pPr marR="0" lvl="0" algn="l" rtl="0">
         <a:lnSpc>
           <a:spcPct val="100000"/>
         </a:lnSpc>
@@ -11079,7 +11464,7 @@
           <a:srgbClr val="000000"/>
         </a:buClr>
         <a:buFont typeface="Arial"/>
-        <a:defRPr b="0" i="0" sz="1400" u="none" cap="none" strike="noStrike">
+        <a:defRPr sz="1400" b="0" i="0" u="none" strike="noStrike" cap="none">
           <a:solidFill>
             <a:srgbClr val="000000"/>
           </a:solidFill>
@@ -11089,7 +11474,7 @@
           <a:sym typeface="Arial"/>
         </a:defRPr>
       </a:lvl1pPr>
-      <a:lvl2pPr lvl="1" marR="0" rtl="0" algn="l">
+      <a:lvl2pPr marR="0" lvl="1" algn="l" rtl="0">
         <a:lnSpc>
           <a:spcPct val="100000"/>
         </a:lnSpc>
@@ -11103,7 +11488,7 @@
           <a:srgbClr val="000000"/>
         </a:buClr>
         <a:buFont typeface="Arial"/>
-        <a:defRPr b="0" i="0" sz="1400" u="none" cap="none" strike="noStrike">
+        <a:defRPr sz="1400" b="0" i="0" u="none" strike="noStrike" cap="none">
           <a:solidFill>
             <a:srgbClr val="000000"/>
           </a:solidFill>
@@ -11113,7 +11498,7 @@
           <a:sym typeface="Arial"/>
         </a:defRPr>
       </a:lvl2pPr>
-      <a:lvl3pPr lvl="2" marR="0" rtl="0" algn="l">
+      <a:lvl3pPr marR="0" lvl="2" algn="l" rtl="0">
         <a:lnSpc>
           <a:spcPct val="100000"/>
         </a:lnSpc>
@@ -11127,7 +11512,7 @@
           <a:srgbClr val="000000"/>
         </a:buClr>
         <a:buFont typeface="Arial"/>
-        <a:defRPr b="0" i="0" sz="1400" u="none" cap="none" strike="noStrike">
+        <a:defRPr sz="1400" b="0" i="0" u="none" strike="noStrike" cap="none">
           <a:solidFill>
             <a:srgbClr val="000000"/>
           </a:solidFill>
@@ -11137,7 +11522,7 @@
           <a:sym typeface="Arial"/>
         </a:defRPr>
       </a:lvl3pPr>
-      <a:lvl4pPr lvl="3" marR="0" rtl="0" algn="l">
+      <a:lvl4pPr marR="0" lvl="3" algn="l" rtl="0">
         <a:lnSpc>
           <a:spcPct val="100000"/>
         </a:lnSpc>
@@ -11151,7 +11536,7 @@
           <a:srgbClr val="000000"/>
         </a:buClr>
         <a:buFont typeface="Arial"/>
-        <a:defRPr b="0" i="0" sz="1400" u="none" cap="none" strike="noStrike">
+        <a:defRPr sz="1400" b="0" i="0" u="none" strike="noStrike" cap="none">
           <a:solidFill>
             <a:srgbClr val="000000"/>
           </a:solidFill>
@@ -11161,7 +11546,7 @@
           <a:sym typeface="Arial"/>
         </a:defRPr>
       </a:lvl4pPr>
-      <a:lvl5pPr lvl="4" marR="0" rtl="0" algn="l">
+      <a:lvl5pPr marR="0" lvl="4" algn="l" rtl="0">
         <a:lnSpc>
           <a:spcPct val="100000"/>
         </a:lnSpc>
@@ -11175,7 +11560,7 @@
           <a:srgbClr val="000000"/>
         </a:buClr>
         <a:buFont typeface="Arial"/>
-        <a:defRPr b="0" i="0" sz="1400" u="none" cap="none" strike="noStrike">
+        <a:defRPr sz="1400" b="0" i="0" u="none" strike="noStrike" cap="none">
           <a:solidFill>
             <a:srgbClr val="000000"/>
           </a:solidFill>
@@ -11185,7 +11570,7 @@
           <a:sym typeface="Arial"/>
         </a:defRPr>
       </a:lvl5pPr>
-      <a:lvl6pPr lvl="5" marR="0" rtl="0" algn="l">
+      <a:lvl6pPr marR="0" lvl="5" algn="l" rtl="0">
         <a:lnSpc>
           <a:spcPct val="100000"/>
         </a:lnSpc>
@@ -11199,7 +11584,7 @@
           <a:srgbClr val="000000"/>
         </a:buClr>
         <a:buFont typeface="Arial"/>
-        <a:defRPr b="0" i="0" sz="1400" u="none" cap="none" strike="noStrike">
+        <a:defRPr sz="1400" b="0" i="0" u="none" strike="noStrike" cap="none">
           <a:solidFill>
             <a:srgbClr val="000000"/>
           </a:solidFill>
@@ -11209,7 +11594,7 @@
           <a:sym typeface="Arial"/>
         </a:defRPr>
       </a:lvl6pPr>
-      <a:lvl7pPr lvl="6" marR="0" rtl="0" algn="l">
+      <a:lvl7pPr marR="0" lvl="6" algn="l" rtl="0">
         <a:lnSpc>
           <a:spcPct val="100000"/>
         </a:lnSpc>
@@ -11223,7 +11608,7 @@
           <a:srgbClr val="000000"/>
         </a:buClr>
         <a:buFont typeface="Arial"/>
-        <a:defRPr b="0" i="0" sz="1400" u="none" cap="none" strike="noStrike">
+        <a:defRPr sz="1400" b="0" i="0" u="none" strike="noStrike" cap="none">
           <a:solidFill>
             <a:srgbClr val="000000"/>
           </a:solidFill>
@@ -11233,7 +11618,7 @@
           <a:sym typeface="Arial"/>
         </a:defRPr>
       </a:lvl7pPr>
-      <a:lvl8pPr lvl="7" marR="0" rtl="0" algn="l">
+      <a:lvl8pPr marR="0" lvl="7" algn="l" rtl="0">
         <a:lnSpc>
           <a:spcPct val="100000"/>
         </a:lnSpc>
@@ -11247,7 +11632,7 @@
           <a:srgbClr val="000000"/>
         </a:buClr>
         <a:buFont typeface="Arial"/>
-        <a:defRPr b="0" i="0" sz="1400" u="none" cap="none" strike="noStrike">
+        <a:defRPr sz="1400" b="0" i="0" u="none" strike="noStrike" cap="none">
           <a:solidFill>
             <a:srgbClr val="000000"/>
           </a:solidFill>
@@ -11257,7 +11642,7 @@
           <a:sym typeface="Arial"/>
         </a:defRPr>
       </a:lvl8pPr>
-      <a:lvl9pPr lvl="8" marR="0" rtl="0" algn="l">
+      <a:lvl9pPr marR="0" lvl="8" algn="l" rtl="0">
         <a:lnSpc>
           <a:spcPct val="100000"/>
         </a:lnSpc>
@@ -11271,7 +11656,7 @@
           <a:srgbClr val="000000"/>
         </a:buClr>
         <a:buFont typeface="Arial"/>
-        <a:defRPr b="0" i="0" sz="1400" u="none" cap="none" strike="noStrike">
+        <a:defRPr sz="1400" b="0" i="0" u="none" strike="noStrike" cap="none">
           <a:solidFill>
             <a:srgbClr val="000000"/>
           </a:solidFill>
@@ -11283,7 +11668,7 @@
       </a:lvl9pPr>
     </p:titleStyle>
     <p:bodyStyle>
-      <a:defPPr lvl="0" marR="0" rtl="0" algn="l">
+      <a:defPPr marR="0" lvl="0" algn="l" rtl="0">
         <a:lnSpc>
           <a:spcPct val="100000"/>
         </a:lnSpc>
@@ -11294,7 +11679,7 @@
           <a:spcPts val="0"/>
         </a:spcAft>
       </a:defPPr>
-      <a:lvl1pPr lvl="0" marR="0" rtl="0" algn="l">
+      <a:lvl1pPr marR="0" lvl="0" algn="l" rtl="0">
         <a:lnSpc>
           <a:spcPct val="100000"/>
         </a:lnSpc>
@@ -11308,7 +11693,7 @@
           <a:srgbClr val="000000"/>
         </a:buClr>
         <a:buFont typeface="Arial"/>
-        <a:defRPr b="0" i="0" sz="1400" u="none" cap="none" strike="noStrike">
+        <a:defRPr sz="1400" b="0" i="0" u="none" strike="noStrike" cap="none">
           <a:solidFill>
             <a:srgbClr val="000000"/>
           </a:solidFill>
@@ -11318,7 +11703,7 @@
           <a:sym typeface="Arial"/>
         </a:defRPr>
       </a:lvl1pPr>
-      <a:lvl2pPr lvl="1" marR="0" rtl="0" algn="l">
+      <a:lvl2pPr marR="0" lvl="1" algn="l" rtl="0">
         <a:lnSpc>
           <a:spcPct val="100000"/>
         </a:lnSpc>
@@ -11332,7 +11717,7 @@
           <a:srgbClr val="000000"/>
         </a:buClr>
         <a:buFont typeface="Arial"/>
-        <a:defRPr b="0" i="0" sz="1400" u="none" cap="none" strike="noStrike">
+        <a:defRPr sz="1400" b="0" i="0" u="none" strike="noStrike" cap="none">
           <a:solidFill>
             <a:srgbClr val="000000"/>
           </a:solidFill>
@@ -11342,7 +11727,7 @@
           <a:sym typeface="Arial"/>
         </a:defRPr>
       </a:lvl2pPr>
-      <a:lvl3pPr lvl="2" marR="0" rtl="0" algn="l">
+      <a:lvl3pPr marR="0" lvl="2" algn="l" rtl="0">
         <a:lnSpc>
           <a:spcPct val="100000"/>
         </a:lnSpc>
@@ -11356,7 +11741,7 @@
           <a:srgbClr val="000000"/>
         </a:buClr>
         <a:buFont typeface="Arial"/>
-        <a:defRPr b="0" i="0" sz="1400" u="none" cap="none" strike="noStrike">
+        <a:defRPr sz="1400" b="0" i="0" u="none" strike="noStrike" cap="none">
           <a:solidFill>
             <a:srgbClr val="000000"/>
           </a:solidFill>
@@ -11366,7 +11751,7 @@
           <a:sym typeface="Arial"/>
         </a:defRPr>
       </a:lvl3pPr>
-      <a:lvl4pPr lvl="3" marR="0" rtl="0" algn="l">
+      <a:lvl4pPr marR="0" lvl="3" algn="l" rtl="0">
         <a:lnSpc>
           <a:spcPct val="100000"/>
         </a:lnSpc>
@@ -11380,7 +11765,7 @@
           <a:srgbClr val="000000"/>
         </a:buClr>
         <a:buFont typeface="Arial"/>
-        <a:defRPr b="0" i="0" sz="1400" u="none" cap="none" strike="noStrike">
+        <a:defRPr sz="1400" b="0" i="0" u="none" strike="noStrike" cap="none">
           <a:solidFill>
             <a:srgbClr val="000000"/>
           </a:solidFill>
@@ -11390,7 +11775,7 @@
           <a:sym typeface="Arial"/>
         </a:defRPr>
       </a:lvl4pPr>
-      <a:lvl5pPr lvl="4" marR="0" rtl="0" algn="l">
+      <a:lvl5pPr marR="0" lvl="4" algn="l" rtl="0">
         <a:lnSpc>
           <a:spcPct val="100000"/>
         </a:lnSpc>
@@ -11404,7 +11789,7 @@
           <a:srgbClr val="000000"/>
         </a:buClr>
         <a:buFont typeface="Arial"/>
-        <a:defRPr b="0" i="0" sz="1400" u="none" cap="none" strike="noStrike">
+        <a:defRPr sz="1400" b="0" i="0" u="none" strike="noStrike" cap="none">
           <a:solidFill>
             <a:srgbClr val="000000"/>
           </a:solidFill>
@@ -11414,7 +11799,7 @@
           <a:sym typeface="Arial"/>
         </a:defRPr>
       </a:lvl5pPr>
-      <a:lvl6pPr lvl="5" marR="0" rtl="0" algn="l">
+      <a:lvl6pPr marR="0" lvl="5" algn="l" rtl="0">
         <a:lnSpc>
           <a:spcPct val="100000"/>
         </a:lnSpc>
@@ -11428,7 +11813,7 @@
           <a:srgbClr val="000000"/>
         </a:buClr>
         <a:buFont typeface="Arial"/>
-        <a:defRPr b="0" i="0" sz="1400" u="none" cap="none" strike="noStrike">
+        <a:defRPr sz="1400" b="0" i="0" u="none" strike="noStrike" cap="none">
           <a:solidFill>
             <a:srgbClr val="000000"/>
           </a:solidFill>
@@ -11438,7 +11823,7 @@
           <a:sym typeface="Arial"/>
         </a:defRPr>
       </a:lvl6pPr>
-      <a:lvl7pPr lvl="6" marR="0" rtl="0" algn="l">
+      <a:lvl7pPr marR="0" lvl="6" algn="l" rtl="0">
         <a:lnSpc>
           <a:spcPct val="100000"/>
         </a:lnSpc>
@@ -11452,7 +11837,7 @@
           <a:srgbClr val="000000"/>
         </a:buClr>
         <a:buFont typeface="Arial"/>
-        <a:defRPr b="0" i="0" sz="1400" u="none" cap="none" strike="noStrike">
+        <a:defRPr sz="1400" b="0" i="0" u="none" strike="noStrike" cap="none">
           <a:solidFill>
             <a:srgbClr val="000000"/>
           </a:solidFill>
@@ -11462,7 +11847,7 @@
           <a:sym typeface="Arial"/>
         </a:defRPr>
       </a:lvl7pPr>
-      <a:lvl8pPr lvl="7" marR="0" rtl="0" algn="l">
+      <a:lvl8pPr marR="0" lvl="7" algn="l" rtl="0">
         <a:lnSpc>
           <a:spcPct val="100000"/>
         </a:lnSpc>
@@ -11476,7 +11861,7 @@
           <a:srgbClr val="000000"/>
         </a:buClr>
         <a:buFont typeface="Arial"/>
-        <a:defRPr b="0" i="0" sz="1400" u="none" cap="none" strike="noStrike">
+        <a:defRPr sz="1400" b="0" i="0" u="none" strike="noStrike" cap="none">
           <a:solidFill>
             <a:srgbClr val="000000"/>
           </a:solidFill>
@@ -11486,7 +11871,7 @@
           <a:sym typeface="Arial"/>
         </a:defRPr>
       </a:lvl8pPr>
-      <a:lvl9pPr lvl="8" marR="0" rtl="0" algn="l">
+      <a:lvl9pPr marR="0" lvl="8" algn="l" rtl="0">
         <a:lnSpc>
           <a:spcPct val="100000"/>
         </a:lnSpc>
@@ -11500,7 +11885,7 @@
           <a:srgbClr val="000000"/>
         </a:buClr>
         <a:buFont typeface="Arial"/>
-        <a:defRPr b="0" i="0" sz="1400" u="none" cap="none" strike="noStrike">
+        <a:defRPr sz="1400" b="0" i="0" u="none" strike="noStrike" cap="none">
           <a:solidFill>
             <a:srgbClr val="000000"/>
           </a:solidFill>
@@ -11512,7 +11897,7 @@
       </a:lvl9pPr>
     </p:bodyStyle>
     <p:otherStyle>
-      <a:defPPr lvl="0" marR="0" rtl="0" algn="l">
+      <a:defPPr marR="0" lvl="0" algn="l" rtl="0">
         <a:lnSpc>
           <a:spcPct val="100000"/>
         </a:lnSpc>
@@ -11523,7 +11908,7 @@
           <a:spcPts val="0"/>
         </a:spcAft>
       </a:defPPr>
-      <a:lvl1pPr lvl="0" marR="0" rtl="0" algn="l">
+      <a:lvl1pPr marR="0" lvl="0" algn="l" rtl="0">
         <a:lnSpc>
           <a:spcPct val="100000"/>
         </a:lnSpc>
@@ -11537,7 +11922,7 @@
           <a:srgbClr val="000000"/>
         </a:buClr>
         <a:buFont typeface="Arial"/>
-        <a:defRPr b="0" i="0" sz="1400" u="none" cap="none" strike="noStrike">
+        <a:defRPr sz="1400" b="0" i="0" u="none" strike="noStrike" cap="none">
           <a:solidFill>
             <a:srgbClr val="000000"/>
           </a:solidFill>
@@ -11547,7 +11932,7 @@
           <a:sym typeface="Arial"/>
         </a:defRPr>
       </a:lvl1pPr>
-      <a:lvl2pPr lvl="1" marR="0" rtl="0" algn="l">
+      <a:lvl2pPr marR="0" lvl="1" algn="l" rtl="0">
         <a:lnSpc>
           <a:spcPct val="100000"/>
         </a:lnSpc>
@@ -11561,7 +11946,7 @@
           <a:srgbClr val="000000"/>
         </a:buClr>
         <a:buFont typeface="Arial"/>
-        <a:defRPr b="0" i="0" sz="1400" u="none" cap="none" strike="noStrike">
+        <a:defRPr sz="1400" b="0" i="0" u="none" strike="noStrike" cap="none">
           <a:solidFill>
             <a:srgbClr val="000000"/>
           </a:solidFill>
@@ -11571,7 +11956,7 @@
           <a:sym typeface="Arial"/>
         </a:defRPr>
       </a:lvl2pPr>
-      <a:lvl3pPr lvl="2" marR="0" rtl="0" algn="l">
+      <a:lvl3pPr marR="0" lvl="2" algn="l" rtl="0">
         <a:lnSpc>
           <a:spcPct val="100000"/>
         </a:lnSpc>
@@ -11585,7 +11970,7 @@
           <a:srgbClr val="000000"/>
         </a:buClr>
         <a:buFont typeface="Arial"/>
-        <a:defRPr b="0" i="0" sz="1400" u="none" cap="none" strike="noStrike">
+        <a:defRPr sz="1400" b="0" i="0" u="none" strike="noStrike" cap="none">
           <a:solidFill>
             <a:srgbClr val="000000"/>
           </a:solidFill>
@@ -11595,7 +11980,7 @@
           <a:sym typeface="Arial"/>
         </a:defRPr>
       </a:lvl3pPr>
-      <a:lvl4pPr lvl="3" marR="0" rtl="0" algn="l">
+      <a:lvl4pPr marR="0" lvl="3" algn="l" rtl="0">
         <a:lnSpc>
           <a:spcPct val="100000"/>
         </a:lnSpc>
@@ -11609,7 +11994,7 @@
           <a:srgbClr val="000000"/>
         </a:buClr>
         <a:buFont typeface="Arial"/>
-        <a:defRPr b="0" i="0" sz="1400" u="none" cap="none" strike="noStrike">
+        <a:defRPr sz="1400" b="0" i="0" u="none" strike="noStrike" cap="none">
           <a:solidFill>
             <a:srgbClr val="000000"/>
           </a:solidFill>
@@ -11619,7 +12004,7 @@
           <a:sym typeface="Arial"/>
         </a:defRPr>
       </a:lvl4pPr>
-      <a:lvl5pPr lvl="4" marR="0" rtl="0" algn="l">
+      <a:lvl5pPr marR="0" lvl="4" algn="l" rtl="0">
         <a:lnSpc>
           <a:spcPct val="100000"/>
         </a:lnSpc>
@@ -11633,7 +12018,7 @@
           <a:srgbClr val="000000"/>
         </a:buClr>
         <a:buFont typeface="Arial"/>
-        <a:defRPr b="0" i="0" sz="1400" u="none" cap="none" strike="noStrike">
+        <a:defRPr sz="1400" b="0" i="0" u="none" strike="noStrike" cap="none">
           <a:solidFill>
             <a:srgbClr val="000000"/>
           </a:solidFill>
@@ -11643,7 +12028,7 @@
           <a:sym typeface="Arial"/>
         </a:defRPr>
       </a:lvl5pPr>
-      <a:lvl6pPr lvl="5" marR="0" rtl="0" algn="l">
+      <a:lvl6pPr marR="0" lvl="5" algn="l" rtl="0">
         <a:lnSpc>
           <a:spcPct val="100000"/>
         </a:lnSpc>
@@ -11657,7 +12042,7 @@
           <a:srgbClr val="000000"/>
         </a:buClr>
         <a:buFont typeface="Arial"/>
-        <a:defRPr b="0" i="0" sz="1400" u="none" cap="none" strike="noStrike">
+        <a:defRPr sz="1400" b="0" i="0" u="none" strike="noStrike" cap="none">
           <a:solidFill>
             <a:srgbClr val="000000"/>
           </a:solidFill>
@@ -11667,7 +12052,7 @@
           <a:sym typeface="Arial"/>
         </a:defRPr>
       </a:lvl6pPr>
-      <a:lvl7pPr lvl="6" marR="0" rtl="0" algn="l">
+      <a:lvl7pPr marR="0" lvl="6" algn="l" rtl="0">
         <a:lnSpc>
           <a:spcPct val="100000"/>
         </a:lnSpc>
@@ -11681,7 +12066,7 @@
           <a:srgbClr val="000000"/>
         </a:buClr>
         <a:buFont typeface="Arial"/>
-        <a:defRPr b="0" i="0" sz="1400" u="none" cap="none" strike="noStrike">
+        <a:defRPr sz="1400" b="0" i="0" u="none" strike="noStrike" cap="none">
           <a:solidFill>
             <a:srgbClr val="000000"/>
           </a:solidFill>
@@ -11691,7 +12076,7 @@
           <a:sym typeface="Arial"/>
         </a:defRPr>
       </a:lvl7pPr>
-      <a:lvl8pPr lvl="7" marR="0" rtl="0" algn="l">
+      <a:lvl8pPr marR="0" lvl="7" algn="l" rtl="0">
         <a:lnSpc>
           <a:spcPct val="100000"/>
         </a:lnSpc>
@@ -11705,7 +12090,7 @@
           <a:srgbClr val="000000"/>
         </a:buClr>
         <a:buFont typeface="Arial"/>
-        <a:defRPr b="0" i="0" sz="1400" u="none" cap="none" strike="noStrike">
+        <a:defRPr sz="1400" b="0" i="0" u="none" strike="noStrike" cap="none">
           <a:solidFill>
             <a:srgbClr val="000000"/>
           </a:solidFill>
@@ -11715,7 +12100,7 @@
           <a:sym typeface="Arial"/>
         </a:defRPr>
       </a:lvl8pPr>
-      <a:lvl9pPr lvl="8" marR="0" rtl="0" algn="l">
+      <a:lvl9pPr marR="0" lvl="8" algn="l" rtl="0">
         <a:lnSpc>
           <a:spcPct val="100000"/>
         </a:lnSpc>
@@ -11729,7 +12114,7 @@
           <a:srgbClr val="000000"/>
         </a:buClr>
         <a:buFont typeface="Arial"/>
-        <a:defRPr b="0" i="0" sz="1400" u="none" cap="none" strike="noStrike">
+        <a:defRPr sz="1400" b="0" i="0" u="none" strike="noStrike" cap="none">
           <a:solidFill>
             <a:srgbClr val="000000"/>
           </a:solidFill>
@@ -11745,11 +12130,11 @@
 </file>
 
 <file path=ppt/slides/slide1.xml><?xml version="1.0" encoding="utf-8"?>
-<p:sld xmlns:a="http://schemas.openxmlformats.org/drawingml/2006/main" xmlns:r="http://schemas.openxmlformats.org/officeDocument/2006/relationships" xmlns:mc="http://schemas.openxmlformats.org/markup-compatibility/2006" xmlns:mv="urn:schemas-microsoft-com:mac:vml" xmlns:p="http://schemas.openxmlformats.org/presentationml/2006/main" xmlns:c="http://schemas.openxmlformats.org/drawingml/2006/chart" xmlns:dgm="http://schemas.openxmlformats.org/drawingml/2006/diagram" xmlns:o="urn:schemas-microsoft-com:office:office" xmlns:v="urn:schemas-microsoft-com:vml" xmlns:pvml="urn:schemas-microsoft-com:office:powerpoint" xmlns:com="http://schemas.openxmlformats.org/drawingml/2006/compatibility" xmlns:p14="http://schemas.microsoft.com/office/powerpoint/2010/main" xmlns:p15="http://schemas.microsoft.com/office/powerpoint/2012/main" xmlns:ahyp="http://schemas.microsoft.com/office/drawing/2018/hyperlinkcolor">
+<p:sld xmlns:a="http://schemas.openxmlformats.org/drawingml/2006/main" xmlns:r="http://schemas.openxmlformats.org/officeDocument/2006/relationships" xmlns:p="http://schemas.openxmlformats.org/presentationml/2006/main">
   <p:cSld>
     <p:spTree>
       <p:nvGrpSpPr>
-        <p:cNvPr id="88" name="Shape 88"/>
+        <p:cNvPr id="1" name="Shape 88"/>
         <p:cNvGrpSpPr/>
         <p:nvPr/>
       </p:nvGrpSpPr>
@@ -11763,30 +12148,122 @@
       </p:grpSpPr>
       <p:pic>
         <p:nvPicPr>
-          <p:cNvPr id="89" name="Google Shape;89;p1" title="xevadb_case2_figure_a.png"/>
-          <p:cNvPicPr preferRelativeResize="0"/>
+          <p:cNvPr id="27" name="Picture 26">
+            <a:extLst>
+              <a:ext uri="{FF2B5EF4-FFF2-40B4-BE49-F238E27FC236}">
+                <a16:creationId xmlns:a16="http://schemas.microsoft.com/office/drawing/2014/main" id="{A70DF43B-8485-9BC8-4EEE-AF6D5E7BCA18}"/>
+              </a:ext>
+            </a:extLst>
+          </p:cNvPr>
+          <p:cNvPicPr>
+            <a:picLocks noChangeAspect="1"/>
+          </p:cNvPicPr>
           <p:nvPr/>
         </p:nvPicPr>
         <p:blipFill>
-          <a:blip r:embed="rId3">
-            <a:alphaModFix/>
-          </a:blip>
+          <a:blip r:embed="rId3"/>
           <a:stretch>
             <a:fillRect/>
           </a:stretch>
         </p:blipFill>
         <p:spPr>
           <a:xfrm>
-            <a:off x="342395" y="433470"/>
-            <a:ext cx="3155033" cy="4487158"/>
+            <a:off x="12752363" y="3505200"/>
+            <a:ext cx="3806850" cy="2960883"/>
           </a:xfrm>
           <a:prstGeom prst="rect">
             <a:avLst/>
           </a:prstGeom>
-          <a:noFill/>
-          <a:ln>
-            <a:noFill/>
-          </a:ln>
+        </p:spPr>
+      </p:pic>
+      <p:pic>
+        <p:nvPicPr>
+          <p:cNvPr id="23" name="Picture 22">
+            <a:extLst>
+              <a:ext uri="{FF2B5EF4-FFF2-40B4-BE49-F238E27FC236}">
+                <a16:creationId xmlns:a16="http://schemas.microsoft.com/office/drawing/2014/main" id="{1DDD6D5E-32E9-FEF6-50F3-3E84AD0C216D}"/>
+              </a:ext>
+            </a:extLst>
+          </p:cNvPr>
+          <p:cNvPicPr>
+            <a:picLocks noChangeAspect="1"/>
+          </p:cNvPicPr>
+          <p:nvPr/>
+        </p:nvPicPr>
+        <p:blipFill>
+          <a:blip r:embed="rId4"/>
+          <a:stretch>
+            <a:fillRect/>
+          </a:stretch>
+        </p:blipFill>
+        <p:spPr>
+          <a:xfrm>
+            <a:off x="8526167" y="3631667"/>
+            <a:ext cx="3963117" cy="3082424"/>
+          </a:xfrm>
+          <a:prstGeom prst="rect">
+            <a:avLst/>
+          </a:prstGeom>
+        </p:spPr>
+      </p:pic>
+      <p:pic>
+        <p:nvPicPr>
+          <p:cNvPr id="6" name="Picture 5">
+            <a:extLst>
+              <a:ext uri="{FF2B5EF4-FFF2-40B4-BE49-F238E27FC236}">
+                <a16:creationId xmlns:a16="http://schemas.microsoft.com/office/drawing/2014/main" id="{2C8A954B-5EF9-3F63-9A81-9D62FCF20AAA}"/>
+              </a:ext>
+            </a:extLst>
+          </p:cNvPr>
+          <p:cNvPicPr>
+            <a:picLocks noChangeAspect="1"/>
+          </p:cNvPicPr>
+          <p:nvPr/>
+        </p:nvPicPr>
+        <p:blipFill>
+          <a:blip r:embed="rId5"/>
+          <a:stretch>
+            <a:fillRect/>
+          </a:stretch>
+        </p:blipFill>
+        <p:spPr>
+          <a:xfrm>
+            <a:off x="12735500" y="108012"/>
+            <a:ext cx="3557363" cy="3049168"/>
+          </a:xfrm>
+          <a:prstGeom prst="rect">
+            <a:avLst/>
+          </a:prstGeom>
+        </p:spPr>
+      </p:pic>
+      <p:pic>
+        <p:nvPicPr>
+          <p:cNvPr id="3" name="Picture 2">
+            <a:extLst>
+              <a:ext uri="{FF2B5EF4-FFF2-40B4-BE49-F238E27FC236}">
+                <a16:creationId xmlns:a16="http://schemas.microsoft.com/office/drawing/2014/main" id="{271AFA61-7F07-6EB6-B118-17D3B1E1D37C}"/>
+              </a:ext>
+            </a:extLst>
+          </p:cNvPr>
+          <p:cNvPicPr>
+            <a:picLocks noChangeAspect="1"/>
+          </p:cNvPicPr>
+          <p:nvPr/>
+        </p:nvPicPr>
+        <p:blipFill>
+          <a:blip r:embed="rId6"/>
+          <a:stretch>
+            <a:fillRect/>
+          </a:stretch>
+        </p:blipFill>
+        <p:spPr>
+          <a:xfrm>
+            <a:off x="202849" y="105780"/>
+            <a:ext cx="3822420" cy="6363205"/>
+          </a:xfrm>
+          <a:prstGeom prst="rect">
+            <a:avLst/>
+          </a:prstGeom>
         </p:spPr>
       </p:pic>
       <p:sp>
@@ -11797,7 +12274,7 @@
         </p:nvSpPr>
         <p:spPr>
           <a:xfrm>
-            <a:off x="3881125" y="2201"/>
+            <a:off x="3881125" y="-23199"/>
             <a:ext cx="815546" cy="369332"/>
           </a:xfrm>
           <a:prstGeom prst="rect">
@@ -11809,12 +12286,12 @@
           </a:ln>
         </p:spPr>
         <p:txBody>
-          <a:bodyPr anchorCtr="0" anchor="t" bIns="45700" lIns="91425" spcFirstLastPara="1" rIns="91425" wrap="square" tIns="45700">
+          <a:bodyPr spcFirstLastPara="1" wrap="square" lIns="91425" tIns="45700" rIns="91425" bIns="45700" anchor="t" anchorCtr="0">
             <a:spAutoFit/>
           </a:bodyPr>
           <a:lstStyle/>
           <a:p>
-            <a:pPr indent="0" lvl="0" marL="0" marR="0" rtl="0" algn="l">
+            <a:pPr marL="0" marR="0" lvl="0" indent="0" algn="l" rtl="0">
               <a:spcBef>
                 <a:spcPts val="0"/>
               </a:spcBef>
@@ -11824,7 +12301,7 @@
               <a:buNone/>
             </a:pPr>
             <a:r>
-              <a:rPr b="0" i="0" lang="en-CA" sz="1800" u="none" cap="none" strike="noStrike">
+              <a:rPr lang="en-CA" sz="1800" b="0" i="0" u="none" strike="noStrike" cap="none" dirty="0">
                 <a:solidFill>
                   <a:schemeClr val="dk1"/>
                 </a:solidFill>
@@ -11833,9 +12310,9 @@
                 <a:cs typeface="Arial"/>
                 <a:sym typeface="Arial"/>
               </a:rPr>
-              <a:t>b.</a:t>
+              <a:t>b</a:t>
             </a:r>
-            <a:endParaRPr/>
+            <a:endParaRPr dirty="0"/>
           </a:p>
         </p:txBody>
       </p:sp>
@@ -11847,7 +12324,7 @@
         </p:nvSpPr>
         <p:spPr>
           <a:xfrm>
-            <a:off x="12327022" y="2201"/>
+            <a:off x="8118394" y="-25400"/>
             <a:ext cx="815546" cy="369332"/>
           </a:xfrm>
           <a:prstGeom prst="rect">
@@ -11859,12 +12336,12 @@
           </a:ln>
         </p:spPr>
         <p:txBody>
-          <a:bodyPr anchorCtr="0" anchor="t" bIns="45700" lIns="91425" spcFirstLastPara="1" rIns="91425" wrap="square" tIns="45700">
+          <a:bodyPr spcFirstLastPara="1" wrap="square" lIns="91425" tIns="45700" rIns="91425" bIns="45700" anchor="t" anchorCtr="0">
             <a:spAutoFit/>
           </a:bodyPr>
           <a:lstStyle/>
           <a:p>
-            <a:pPr indent="0" lvl="0" marL="0" marR="0" rtl="0" algn="l">
+            <a:pPr marL="0" marR="0" lvl="0" indent="0" algn="l" rtl="0">
               <a:spcBef>
                 <a:spcPts val="0"/>
               </a:spcBef>
@@ -11874,7 +12351,7 @@
               <a:buNone/>
             </a:pPr>
             <a:r>
-              <a:rPr lang="en-CA" sz="1800">
+              <a:rPr lang="en-CA" sz="1800" dirty="0">
                 <a:solidFill>
                   <a:schemeClr val="dk1"/>
                 </a:solidFill>
@@ -11883,9 +12360,9 @@
                 <a:cs typeface="Arial"/>
                 <a:sym typeface="Arial"/>
               </a:rPr>
-              <a:t>c.</a:t>
+              <a:t>c</a:t>
             </a:r>
-            <a:endParaRPr/>
+            <a:endParaRPr dirty="0"/>
           </a:p>
         </p:txBody>
       </p:sp>
@@ -11909,12 +12386,12 @@
           </a:ln>
         </p:spPr>
         <p:txBody>
-          <a:bodyPr anchorCtr="0" anchor="t" bIns="45700" lIns="91425" spcFirstLastPara="1" rIns="91425" wrap="square" tIns="45700">
+          <a:bodyPr spcFirstLastPara="1" wrap="square" lIns="91425" tIns="45700" rIns="91425" bIns="45700" anchor="t" anchorCtr="0">
             <a:spAutoFit/>
           </a:bodyPr>
           <a:lstStyle/>
           <a:p>
-            <a:pPr indent="0" lvl="0" marL="0" marR="0" rtl="0" algn="l">
+            <a:pPr marL="0" marR="0" lvl="0" indent="0" algn="l" rtl="0">
               <a:spcBef>
                 <a:spcPts val="0"/>
               </a:spcBef>
@@ -11924,7 +12401,7 @@
               <a:buNone/>
             </a:pPr>
             <a:r>
-              <a:rPr lang="en-CA" sz="1800">
+              <a:rPr lang="en-CA" sz="1800" dirty="0">
                 <a:solidFill>
                   <a:schemeClr val="dk1"/>
                 </a:solidFill>
@@ -11933,184 +12410,22 @@
                 <a:cs typeface="Arial"/>
                 <a:sym typeface="Arial"/>
               </a:rPr>
-              <a:t>a.</a:t>
+              <a:t>a</a:t>
             </a:r>
-            <a:endParaRPr/>
-          </a:p>
-        </p:txBody>
-      </p:sp>
-      <p:pic>
-        <p:nvPicPr>
-          <p:cNvPr descr="A diagram of a network&#10;&#10;AI-generated content may be incorrect." id="93" name="Google Shape;93;p1"/>
-          <p:cNvPicPr preferRelativeResize="0"/>
-          <p:nvPr/>
-        </p:nvPicPr>
-        <p:blipFill rotWithShape="1">
-          <a:blip r:embed="rId4">
-            <a:alphaModFix/>
-          </a:blip>
-          <a:srcRect b="0" l="4866" r="0" t="0"/>
-          <a:stretch/>
-        </p:blipFill>
-        <p:spPr>
-          <a:xfrm>
-            <a:off x="481267" y="5182917"/>
-            <a:ext cx="3010571" cy="1352036"/>
-          </a:xfrm>
-          <a:prstGeom prst="rect">
-            <a:avLst/>
-          </a:prstGeom>
-          <a:noFill/>
-          <a:ln>
-            <a:noFill/>
-          </a:ln>
-        </p:spPr>
-      </p:pic>
-      <p:cxnSp>
-        <p:nvCxnSpPr>
-          <p:cNvPr id="94" name="Google Shape;94;p1"/>
-          <p:cNvCxnSpPr/>
-          <p:nvPr/>
-        </p:nvCxnSpPr>
-        <p:spPr>
-          <a:xfrm rot="10800000">
-            <a:off x="162948" y="5829300"/>
-            <a:ext cx="216000" cy="0"/>
-          </a:xfrm>
-          <a:prstGeom prst="straightConnector1">
-            <a:avLst/>
-          </a:prstGeom>
-          <a:noFill/>
-          <a:ln cap="flat" cmpd="sng" w="19050">
-            <a:solidFill>
-              <a:schemeClr val="dk1"/>
-            </a:solidFill>
-            <a:prstDash val="solid"/>
-            <a:miter lim="800000"/>
-            <a:headEnd len="sm" w="sm" type="none"/>
-            <a:tailEnd len="sm" w="sm" type="none"/>
-          </a:ln>
-        </p:spPr>
-      </p:cxnSp>
-      <p:cxnSp>
-        <p:nvCxnSpPr>
-          <p:cNvPr id="95" name="Google Shape;95;p1"/>
-          <p:cNvCxnSpPr/>
-          <p:nvPr/>
-        </p:nvCxnSpPr>
-        <p:spPr>
-          <a:xfrm rot="10800000">
-            <a:off x="169617" y="3681969"/>
-            <a:ext cx="0" cy="2147331"/>
-          </a:xfrm>
-          <a:prstGeom prst="straightConnector1">
-            <a:avLst/>
-          </a:prstGeom>
-          <a:noFill/>
-          <a:ln cap="flat" cmpd="sng" w="19050">
-            <a:solidFill>
-              <a:schemeClr val="dk1"/>
-            </a:solidFill>
-            <a:prstDash val="solid"/>
-            <a:miter lim="800000"/>
-            <a:headEnd len="sm" w="sm" type="none"/>
-            <a:tailEnd len="sm" w="sm" type="none"/>
-          </a:ln>
-        </p:spPr>
-      </p:cxnSp>
-      <p:cxnSp>
-        <p:nvCxnSpPr>
-          <p:cNvPr id="96" name="Google Shape;96;p1"/>
-          <p:cNvCxnSpPr/>
-          <p:nvPr/>
-        </p:nvCxnSpPr>
-        <p:spPr>
-          <a:xfrm>
-            <a:off x="162948" y="3681969"/>
-            <a:ext cx="282088" cy="0"/>
-          </a:xfrm>
-          <a:prstGeom prst="straightConnector1">
-            <a:avLst/>
-          </a:prstGeom>
-          <a:noFill/>
-          <a:ln cap="flat" cmpd="sng" w="19050">
-            <a:solidFill>
-              <a:schemeClr val="dk1"/>
-            </a:solidFill>
-            <a:prstDash val="solid"/>
-            <a:miter lim="800000"/>
-            <a:headEnd len="sm" w="sm" type="none"/>
-            <a:tailEnd len="med" w="med" type="triangle"/>
-          </a:ln>
-        </p:spPr>
-      </p:cxnSp>
-      <p:sp>
-        <p:nvSpPr>
-          <p:cNvPr id="97" name="Google Shape;97;p1"/>
-          <p:cNvSpPr/>
-          <p:nvPr/>
-        </p:nvSpPr>
-        <p:spPr>
-          <a:xfrm>
-            <a:off x="372196" y="5163490"/>
-            <a:ext cx="3131601" cy="1404000"/>
-          </a:xfrm>
-          <a:prstGeom prst="roundRect">
-            <a:avLst>
-              <a:gd fmla="val 16667" name="adj"/>
-            </a:avLst>
-          </a:prstGeom>
-          <a:noFill/>
-          <a:ln cap="flat" cmpd="sng" w="19050">
-            <a:solidFill>
-              <a:schemeClr val="dk1"/>
-            </a:solidFill>
-            <a:prstDash val="solid"/>
-            <a:miter lim="800000"/>
-            <a:headEnd len="sm" w="sm" type="none"/>
-            <a:tailEnd len="sm" w="sm" type="none"/>
-          </a:ln>
-        </p:spPr>
-        <p:txBody>
-          <a:bodyPr anchorCtr="0" anchor="ctr" bIns="45700" lIns="91425" spcFirstLastPara="1" rIns="91425" wrap="square" tIns="45700">
-            <a:noAutofit/>
-          </a:bodyPr>
-          <a:lstStyle/>
-          <a:p>
-            <a:pPr indent="0" lvl="0" marL="0" marR="0" rtl="0" algn="ctr">
-              <a:spcBef>
-                <a:spcPts val="0"/>
-              </a:spcBef>
-              <a:spcAft>
-                <a:spcPts val="0"/>
-              </a:spcAft>
-              <a:buNone/>
-            </a:pPr>
-            <a:r>
-              <a:t/>
-            </a:r>
-            <a:endParaRPr sz="1800">
-              <a:solidFill>
-                <a:schemeClr val="lt1"/>
-              </a:solidFill>
-              <a:latin typeface="Arial"/>
-              <a:ea typeface="Arial"/>
-              <a:cs typeface="Arial"/>
-              <a:sym typeface="Arial"/>
-            </a:endParaRPr>
+            <a:endParaRPr dirty="0"/>
           </a:p>
         </p:txBody>
       </p:sp>
       <p:sp>
         <p:nvSpPr>
-          <p:cNvPr id="98" name="Google Shape;98;p1"/>
+          <p:cNvPr id="103" name="Google Shape;103;p1"/>
           <p:cNvSpPr txBox="1"/>
           <p:nvPr/>
         </p:nvSpPr>
         <p:spPr>
           <a:xfrm>
-            <a:off x="1022888" y="6584719"/>
-            <a:ext cx="1512722" cy="307777"/>
+            <a:off x="3881125" y="3306762"/>
+            <a:ext cx="815546" cy="369291"/>
           </a:xfrm>
           <a:prstGeom prst="rect">
             <a:avLst/>
@@ -12121,12 +12436,12 @@
           </a:ln>
         </p:spPr>
         <p:txBody>
-          <a:bodyPr anchorCtr="0" anchor="t" bIns="45700" lIns="91425" spcFirstLastPara="1" rIns="91425" wrap="square" tIns="45700">
+          <a:bodyPr spcFirstLastPara="1" wrap="square" lIns="91425" tIns="45700" rIns="91425" bIns="45700" anchor="t" anchorCtr="0">
             <a:spAutoFit/>
           </a:bodyPr>
           <a:lstStyle/>
           <a:p>
-            <a:pPr indent="0" lvl="0" marL="0" marR="0" rtl="0" algn="ctr">
+            <a:pPr marL="0" marR="0" lvl="0" indent="0" algn="l" rtl="0">
               <a:spcBef>
                 <a:spcPts val="0"/>
               </a:spcBef>
@@ -12136,30 +12451,32 @@
               <a:buNone/>
             </a:pPr>
             <a:r>
-              <a:rPr lang="en-CA" sz="1400">
+              <a:rPr lang="en-CA" sz="1800" dirty="0">
                 <a:solidFill>
                   <a:schemeClr val="dk1"/>
                 </a:solidFill>
-                <a:latin typeface="Arial"/>
-                <a:ea typeface="Arial"/>
-                <a:cs typeface="Arial"/>
-                <a:sym typeface="Arial"/>
               </a:rPr>
-              <a:t>NeST-VNN Model </a:t>
+              <a:t>e</a:t>
             </a:r>
-            <a:endParaRPr/>
+            <a:endParaRPr dirty="0"/>
           </a:p>
         </p:txBody>
       </p:sp>
       <p:sp>
         <p:nvSpPr>
-          <p:cNvPr id="99" name="Google Shape;99;p1"/>
+          <p:cNvPr id="18" name="Google Shape;103;p1">
+            <a:extLst>
+              <a:ext uri="{FF2B5EF4-FFF2-40B4-BE49-F238E27FC236}">
+                <a16:creationId xmlns:a16="http://schemas.microsoft.com/office/drawing/2014/main" id="{FB105252-947D-8561-6BE8-C96BDE2C57C4}"/>
+              </a:ext>
+            </a:extLst>
+          </p:cNvPr>
           <p:cNvSpPr txBox="1"/>
           <p:nvPr/>
         </p:nvSpPr>
         <p:spPr>
           <a:xfrm>
-            <a:off x="9062738" y="3933474"/>
+            <a:off x="12642246" y="-25400"/>
             <a:ext cx="815546" cy="369332"/>
           </a:xfrm>
           <a:prstGeom prst="rect">
@@ -12171,12 +12488,12 @@
           </a:ln>
         </p:spPr>
         <p:txBody>
-          <a:bodyPr anchorCtr="0" anchor="t" bIns="45700" lIns="91425" spcFirstLastPara="1" rIns="91425" wrap="square" tIns="45700">
+          <a:bodyPr spcFirstLastPara="1" wrap="square" lIns="91425" tIns="45700" rIns="91425" bIns="45700" anchor="t" anchorCtr="0">
             <a:spAutoFit/>
           </a:bodyPr>
           <a:lstStyle/>
           <a:p>
-            <a:pPr indent="0" lvl="0" marL="0" marR="0" rtl="0" algn="l">
+            <a:pPr marL="0" marR="0" lvl="0" indent="0" algn="l" rtl="0">
               <a:spcBef>
                 <a:spcPts val="0"/>
               </a:spcBef>
@@ -12186,7 +12503,7 @@
               <a:buNone/>
             </a:pPr>
             <a:r>
-              <a:rPr lang="en-CA" sz="1800">
+              <a:rPr lang="en-CA" sz="1800" dirty="0">
                 <a:solidFill>
                   <a:schemeClr val="dk1"/>
                 </a:solidFill>
@@ -12195,22 +12512,28 @@
                 <a:cs typeface="Arial"/>
                 <a:sym typeface="Arial"/>
               </a:rPr>
-              <a:t>e.</a:t>
+              <a:t>d</a:t>
             </a:r>
-            <a:endParaRPr/>
+            <a:endParaRPr dirty="0"/>
           </a:p>
         </p:txBody>
       </p:sp>
       <p:sp>
         <p:nvSpPr>
-          <p:cNvPr id="100" name="Google Shape;100;p1"/>
+          <p:cNvPr id="29" name="Google Shape;103;p1">
+            <a:extLst>
+              <a:ext uri="{FF2B5EF4-FFF2-40B4-BE49-F238E27FC236}">
+                <a16:creationId xmlns:a16="http://schemas.microsoft.com/office/drawing/2014/main" id="{3D7BE95F-26AD-45B7-BD14-4380DC64BAE6}"/>
+              </a:ext>
+            </a:extLst>
+          </p:cNvPr>
           <p:cNvSpPr txBox="1"/>
           <p:nvPr/>
         </p:nvSpPr>
         <p:spPr>
           <a:xfrm>
-            <a:off x="12430166" y="3933474"/>
-            <a:ext cx="815546" cy="369332"/>
+            <a:off x="8334294" y="3325316"/>
+            <a:ext cx="815546" cy="369291"/>
           </a:xfrm>
           <a:prstGeom prst="rect">
             <a:avLst/>
@@ -12221,12 +12544,12 @@
           </a:ln>
         </p:spPr>
         <p:txBody>
-          <a:bodyPr anchorCtr="0" anchor="t" bIns="45700" lIns="91425" spcFirstLastPara="1" rIns="91425" wrap="square" tIns="45700">
+          <a:bodyPr spcFirstLastPara="1" wrap="square" lIns="91425" tIns="45700" rIns="91425" bIns="45700" anchor="t" anchorCtr="0">
             <a:spAutoFit/>
           </a:bodyPr>
           <a:lstStyle/>
           <a:p>
-            <a:pPr indent="0" lvl="0" marL="0" marR="0" rtl="0" algn="l">
+            <a:pPr marL="0" marR="0" lvl="0" indent="0" algn="l" rtl="0">
               <a:spcBef>
                 <a:spcPts val="0"/>
               </a:spcBef>
@@ -12236,85 +12559,33 @@
               <a:buNone/>
             </a:pPr>
             <a:r>
-              <a:rPr lang="en-CA" sz="1800">
+              <a:rPr lang="en-CA" sz="1800" dirty="0">
                 <a:solidFill>
                   <a:schemeClr val="dk1"/>
                 </a:solidFill>
-                <a:latin typeface="Arial"/>
-                <a:ea typeface="Arial"/>
-                <a:cs typeface="Arial"/>
-                <a:sym typeface="Arial"/>
               </a:rPr>
-              <a:t>f.</a:t>
+              <a:t>f</a:t>
             </a:r>
-            <a:endParaRPr/>
+            <a:endParaRPr dirty="0"/>
           </a:p>
         </p:txBody>
       </p:sp>
-      <p:pic>
-        <p:nvPicPr>
-          <p:cNvPr descr="A graph of a drug response distribution&#10;&#10;AI-generated content may be incorrect." id="101" name="Google Shape;101;p1"/>
-          <p:cNvPicPr preferRelativeResize="0"/>
-          <p:nvPr/>
-        </p:nvPicPr>
-        <p:blipFill rotWithShape="1">
-          <a:blip r:embed="rId5">
-            <a:alphaModFix/>
-          </a:blip>
-          <a:srcRect b="0" l="0" r="0" t="0"/>
-          <a:stretch/>
-        </p:blipFill>
-        <p:spPr>
-          <a:xfrm>
-            <a:off x="12604036" y="371533"/>
-            <a:ext cx="3867859" cy="3094287"/>
-          </a:xfrm>
-          <a:prstGeom prst="rect">
-            <a:avLst/>
-          </a:prstGeom>
-          <a:noFill/>
-          <a:ln>
-            <a:noFill/>
-          </a:ln>
-        </p:spPr>
-      </p:pic>
-      <p:pic>
-        <p:nvPicPr>
-          <p:cNvPr descr="A graph of different colored shapes&#10;&#10;AI-generated content may be incorrect." id="102" name="Google Shape;102;p1"/>
-          <p:cNvPicPr preferRelativeResize="0"/>
-          <p:nvPr/>
-        </p:nvPicPr>
-        <p:blipFill rotWithShape="1">
-          <a:blip r:embed="rId6">
-            <a:alphaModFix/>
-          </a:blip>
-          <a:srcRect b="0" l="0" r="0" t="0"/>
-          <a:stretch/>
-        </p:blipFill>
-        <p:spPr>
-          <a:xfrm>
-            <a:off x="4103091" y="4059323"/>
-            <a:ext cx="4141761" cy="2958401"/>
-          </a:xfrm>
-          <a:prstGeom prst="rect">
-            <a:avLst/>
-          </a:prstGeom>
-          <a:noFill/>
-          <a:ln>
-            <a:noFill/>
-          </a:ln>
-        </p:spPr>
-      </p:pic>
       <p:sp>
         <p:nvSpPr>
-          <p:cNvPr id="103" name="Google Shape;103;p1"/>
+          <p:cNvPr id="30" name="Google Shape;103;p1">
+            <a:extLst>
+              <a:ext uri="{FF2B5EF4-FFF2-40B4-BE49-F238E27FC236}">
+                <a16:creationId xmlns:a16="http://schemas.microsoft.com/office/drawing/2014/main" id="{B92F98CF-3790-39D2-D70C-11CB21C5FDE8}"/>
+              </a:ext>
+            </a:extLst>
+          </p:cNvPr>
           <p:cNvSpPr txBox="1"/>
           <p:nvPr/>
         </p:nvSpPr>
         <p:spPr>
           <a:xfrm>
-            <a:off x="3881125" y="3933474"/>
-            <a:ext cx="815546" cy="369332"/>
+            <a:off x="12558167" y="3325316"/>
+            <a:ext cx="815546" cy="369291"/>
           </a:xfrm>
           <a:prstGeom prst="rect">
             <a:avLst/>
@@ -12325,12 +12596,12 @@
           </a:ln>
         </p:spPr>
         <p:txBody>
-          <a:bodyPr anchorCtr="0" anchor="t" bIns="45700" lIns="91425" spcFirstLastPara="1" rIns="91425" wrap="square" tIns="45700">
+          <a:bodyPr spcFirstLastPara="1" wrap="square" lIns="91425" tIns="45700" rIns="91425" bIns="45700" anchor="t" anchorCtr="0">
             <a:spAutoFit/>
           </a:bodyPr>
           <a:lstStyle/>
           <a:p>
-            <a:pPr indent="0" lvl="0" marL="0" marR="0" rtl="0" algn="l">
+            <a:pPr marL="0" marR="0" lvl="0" indent="0" algn="l" rtl="0">
               <a:spcBef>
                 <a:spcPts val="0"/>
               </a:spcBef>
@@ -12340,101 +12611,105 @@
               <a:buNone/>
             </a:pPr>
             <a:r>
-              <a:rPr lang="en-CA" sz="1800">
+              <a:rPr lang="en-CA" sz="1800" dirty="0">
                 <a:solidFill>
                   <a:schemeClr val="dk1"/>
                 </a:solidFill>
-                <a:latin typeface="Arial"/>
-                <a:ea typeface="Arial"/>
-                <a:cs typeface="Arial"/>
-                <a:sym typeface="Arial"/>
               </a:rPr>
-              <a:t>d.</a:t>
+              <a:t>g</a:t>
             </a:r>
-            <a:endParaRPr/>
+            <a:endParaRPr dirty="0"/>
           </a:p>
         </p:txBody>
       </p:sp>
       <p:pic>
         <p:nvPicPr>
-          <p:cNvPr id="104" name="Google Shape;104;p1"/>
-          <p:cNvPicPr preferRelativeResize="0"/>
-          <p:nvPr/>
-        </p:nvPicPr>
-        <p:blipFill rotWithShape="1">
-          <a:blip r:embed="rId7">
-            <a:alphaModFix/>
-          </a:blip>
-          <a:srcRect b="0" l="0" r="0" t="0"/>
-          <a:stretch/>
-        </p:blipFill>
-        <p:spPr>
-          <a:xfrm>
-            <a:off x="13104813" y="3939402"/>
-            <a:ext cx="3454400" cy="3048000"/>
-          </a:xfrm>
-          <a:prstGeom prst="rect">
-            <a:avLst/>
-          </a:prstGeom>
-          <a:noFill/>
-          <a:ln>
-            <a:noFill/>
-          </a:ln>
-        </p:spPr>
-      </p:pic>
-      <p:pic>
-        <p:nvPicPr>
-          <p:cNvPr descr="A graph of a number of bars&#10;&#10;AI-generated content may be incorrect." id="105" name="Google Shape;105;p1"/>
-          <p:cNvPicPr preferRelativeResize="0"/>
-          <p:nvPr/>
-        </p:nvPicPr>
-        <p:blipFill rotWithShape="1">
-          <a:blip r:embed="rId8">
-            <a:alphaModFix/>
-          </a:blip>
-          <a:srcRect b="0" l="0" r="0" t="0"/>
-          <a:stretch/>
-        </p:blipFill>
-        <p:spPr>
-          <a:xfrm>
-            <a:off x="9549067" y="4059322"/>
-            <a:ext cx="2928079" cy="2928079"/>
-          </a:xfrm>
-          <a:prstGeom prst="rect">
-            <a:avLst/>
-          </a:prstGeom>
-          <a:noFill/>
-          <a:ln>
-            <a:noFill/>
-          </a:ln>
-        </p:spPr>
-      </p:pic>
-      <p:pic>
-        <p:nvPicPr>
-          <p:cNvPr id="106" name="Google Shape;106;p1"/>
-          <p:cNvPicPr preferRelativeResize="0"/>
+          <p:cNvPr id="11" name="Picture 10">
+            <a:extLst>
+              <a:ext uri="{FF2B5EF4-FFF2-40B4-BE49-F238E27FC236}">
+                <a16:creationId xmlns:a16="http://schemas.microsoft.com/office/drawing/2014/main" id="{2E531359-6F0C-F387-C9DB-C9B5860BE8A6}"/>
+              </a:ext>
+            </a:extLst>
+          </p:cNvPr>
+          <p:cNvPicPr>
+            <a:picLocks noChangeAspect="1"/>
+          </p:cNvPicPr>
           <p:nvPr/>
         </p:nvPicPr>
         <p:blipFill>
-          <a:blip r:embed="rId9">
-            <a:alphaModFix/>
-          </a:blip>
+          <a:blip r:embed="rId7"/>
           <a:stretch>
             <a:fillRect/>
           </a:stretch>
         </p:blipFill>
         <p:spPr>
           <a:xfrm>
-            <a:off x="4216738" y="228200"/>
-            <a:ext cx="7667973" cy="3380961"/>
+            <a:off x="4264154" y="139700"/>
+            <a:ext cx="3467100" cy="2743200"/>
           </a:xfrm>
           <a:prstGeom prst="rect">
             <a:avLst/>
           </a:prstGeom>
-          <a:noFill/>
-          <a:ln>
-            <a:noFill/>
-          </a:ln>
+        </p:spPr>
+      </p:pic>
+      <p:pic>
+        <p:nvPicPr>
+          <p:cNvPr id="13" name="Picture 12">
+            <a:extLst>
+              <a:ext uri="{FF2B5EF4-FFF2-40B4-BE49-F238E27FC236}">
+                <a16:creationId xmlns:a16="http://schemas.microsoft.com/office/drawing/2014/main" id="{B061F756-AA85-3BD8-9789-F60BB8A6D7D7}"/>
+              </a:ext>
+            </a:extLst>
+          </p:cNvPr>
+          <p:cNvPicPr>
+            <a:picLocks noChangeAspect="1"/>
+          </p:cNvPicPr>
+          <p:nvPr/>
+        </p:nvPicPr>
+        <p:blipFill>
+          <a:blip r:embed="rId8"/>
+          <a:stretch>
+            <a:fillRect/>
+          </a:stretch>
+        </p:blipFill>
+        <p:spPr>
+          <a:xfrm>
+            <a:off x="8411519" y="105781"/>
+            <a:ext cx="3657600" cy="2743200"/>
+          </a:xfrm>
+          <a:prstGeom prst="rect">
+            <a:avLst/>
+          </a:prstGeom>
+        </p:spPr>
+      </p:pic>
+      <p:pic>
+        <p:nvPicPr>
+          <p:cNvPr id="25" name="Picture 24">
+            <a:extLst>
+              <a:ext uri="{FF2B5EF4-FFF2-40B4-BE49-F238E27FC236}">
+                <a16:creationId xmlns:a16="http://schemas.microsoft.com/office/drawing/2014/main" id="{F4DA522B-8BF0-8473-9980-968ECA6323D8}"/>
+              </a:ext>
+            </a:extLst>
+          </p:cNvPr>
+          <p:cNvPicPr>
+            <a:picLocks noChangeAspect="1"/>
+          </p:cNvPicPr>
+          <p:nvPr/>
+        </p:nvPicPr>
+        <p:blipFill>
+          <a:blip r:embed="rId9"/>
+          <a:stretch>
+            <a:fillRect/>
+          </a:stretch>
+        </p:blipFill>
+        <p:spPr>
+          <a:xfrm>
+            <a:off x="4156204" y="3545083"/>
+            <a:ext cx="3657600" cy="2921000"/>
+          </a:xfrm>
+          <a:prstGeom prst="rect">
+            <a:avLst/>
+          </a:prstGeom>
         </p:spPr>
       </p:pic>
     </p:spTree>
@@ -12446,7 +12721,288 @@
 </file>
 
 <file path=ppt/theme/theme1.xml><?xml version="1.0" encoding="utf-8"?>
-<a:theme xmlns:a="http://schemas.openxmlformats.org/drawingml/2006/main" xmlns:r="http://schemas.openxmlformats.org/officeDocument/2006/relationships" name="Office Theme">
+<a:theme xmlns:a="http://schemas.openxmlformats.org/drawingml/2006/main" name="Office Theme">
+  <a:themeElements>
+    <a:clrScheme name="Office Theme">
+      <a:dk1>
+        <a:srgbClr val="000000"/>
+      </a:dk1>
+      <a:lt1>
+        <a:srgbClr val="FFFFFF"/>
+      </a:lt1>
+      <a:dk2>
+        <a:srgbClr val="0E2841"/>
+      </a:dk2>
+      <a:lt2>
+        <a:srgbClr val="E8E8E8"/>
+      </a:lt2>
+      <a:accent1>
+        <a:srgbClr val="156082"/>
+      </a:accent1>
+      <a:accent2>
+        <a:srgbClr val="E97132"/>
+      </a:accent2>
+      <a:accent3>
+        <a:srgbClr val="196B24"/>
+      </a:accent3>
+      <a:accent4>
+        <a:srgbClr val="0F9ED5"/>
+      </a:accent4>
+      <a:accent5>
+        <a:srgbClr val="A02B93"/>
+      </a:accent5>
+      <a:accent6>
+        <a:srgbClr val="4EA72E"/>
+      </a:accent6>
+      <a:hlink>
+        <a:srgbClr val="467886"/>
+      </a:hlink>
+      <a:folHlink>
+        <a:srgbClr val="96607D"/>
+      </a:folHlink>
+    </a:clrScheme>
+    <a:fontScheme name="Office">
+      <a:majorFont>
+        <a:latin typeface="Arial"/>
+        <a:ea typeface=""/>
+        <a:cs typeface=""/>
+        <a:font script="Jpan" typeface="ＭＳ Ｐゴシック"/>
+        <a:font script="Hang" typeface="맑은 고딕"/>
+        <a:font script="Hans" typeface="宋体"/>
+        <a:font script="Hant" typeface="新細明體"/>
+        <a:font script="Arab" typeface="Times New Roman"/>
+        <a:font script="Hebr" typeface="Times New Roman"/>
+        <a:font script="Thai" typeface="Angsana New"/>
+        <a:font script="Ethi" typeface="Nyala"/>
+        <a:font script="Beng" typeface="Vrinda"/>
+        <a:font script="Gujr" typeface="Shruti"/>
+        <a:font script="Khmr" typeface="MoolBoran"/>
+        <a:font script="Knda" typeface="Tunga"/>
+        <a:font script="Guru" typeface="Raavi"/>
+        <a:font script="Cans" typeface="Euphemia"/>
+        <a:font script="Cher" typeface="Plantagenet Cherokee"/>
+        <a:font script="Yiii" typeface="Microsoft Yi Baiti"/>
+        <a:font script="Tibt" typeface="Microsoft Himalaya"/>
+        <a:font script="Thaa" typeface="MV Boli"/>
+        <a:font script="Deva" typeface="Mangal"/>
+        <a:font script="Telu" typeface="Gautami"/>
+        <a:font script="Taml" typeface="Latha"/>
+        <a:font script="Syrc" typeface="Estrangelo Edessa"/>
+        <a:font script="Orya" typeface="Kalinga"/>
+        <a:font script="Mlym" typeface="Kartika"/>
+        <a:font script="Laoo" typeface="DokChampa"/>
+        <a:font script="Sinh" typeface="Iskoola Pota"/>
+        <a:font script="Mong" typeface="Mongolian Baiti"/>
+        <a:font script="Viet" typeface="Times New Roman"/>
+        <a:font script="Uigh" typeface="Microsoft Uighur"/>
+        <a:font script="Geor" typeface="Sylfaen"/>
+      </a:majorFont>
+      <a:minorFont>
+        <a:latin typeface="Arial"/>
+        <a:ea typeface=""/>
+        <a:cs typeface=""/>
+        <a:font script="Jpan" typeface="ＭＳ Ｐゴシック"/>
+        <a:font script="Hang" typeface="맑은 고딕"/>
+        <a:font script="Hans" typeface="宋体"/>
+        <a:font script="Hant" typeface="新細明體"/>
+        <a:font script="Arab" typeface="Arial"/>
+        <a:font script="Hebr" typeface="Arial"/>
+        <a:font script="Thai" typeface="Cordia New"/>
+        <a:font script="Ethi" typeface="Nyala"/>
+        <a:font script="Beng" typeface="Vrinda"/>
+        <a:font script="Gujr" typeface="Shruti"/>
+        <a:font script="Khmr" typeface="DaunPenh"/>
+        <a:font script="Knda" typeface="Tunga"/>
+        <a:font script="Guru" typeface="Raavi"/>
+        <a:font script="Cans" typeface="Euphemia"/>
+        <a:font script="Cher" typeface="Plantagenet Cherokee"/>
+        <a:font script="Yiii" typeface="Microsoft Yi Baiti"/>
+        <a:font script="Tibt" typeface="Microsoft Himalaya"/>
+        <a:font script="Thaa" typeface="MV Boli"/>
+        <a:font script="Deva" typeface="Mangal"/>
+        <a:font script="Telu" typeface="Gautami"/>
+        <a:font script="Taml" typeface="Latha"/>
+        <a:font script="Syrc" typeface="Estrangelo Edessa"/>
+        <a:font script="Orya" typeface="Kalinga"/>
+        <a:font script="Mlym" typeface="Kartika"/>
+        <a:font script="Laoo" typeface="DokChampa"/>
+        <a:font script="Sinh" typeface="Iskoola Pota"/>
+        <a:font script="Mong" typeface="Mongolian Baiti"/>
+        <a:font script="Viet" typeface="Arial"/>
+        <a:font script="Uigh" typeface="Microsoft Uighur"/>
+        <a:font script="Geor" typeface="Sylfaen"/>
+      </a:minorFont>
+    </a:fontScheme>
+    <a:fmtScheme name="Office">
+      <a:fillStyleLst>
+        <a:solidFill>
+          <a:schemeClr val="phClr"/>
+        </a:solidFill>
+        <a:gradFill rotWithShape="1">
+          <a:gsLst>
+            <a:gs pos="0">
+              <a:schemeClr val="phClr">
+                <a:tint val="50000"/>
+                <a:satMod val="300000"/>
+              </a:schemeClr>
+            </a:gs>
+            <a:gs pos="35000">
+              <a:schemeClr val="phClr">
+                <a:tint val="37000"/>
+                <a:satMod val="300000"/>
+              </a:schemeClr>
+            </a:gs>
+            <a:gs pos="100000">
+              <a:schemeClr val="phClr">
+                <a:tint val="15000"/>
+                <a:satMod val="350000"/>
+              </a:schemeClr>
+            </a:gs>
+          </a:gsLst>
+          <a:lin ang="16200000" scaled="1"/>
+        </a:gradFill>
+        <a:gradFill rotWithShape="1">
+          <a:gsLst>
+            <a:gs pos="0">
+              <a:schemeClr val="phClr">
+                <a:tint val="100000"/>
+                <a:shade val="100000"/>
+                <a:satMod val="130000"/>
+              </a:schemeClr>
+            </a:gs>
+            <a:gs pos="100000">
+              <a:schemeClr val="phClr">
+                <a:tint val="50000"/>
+                <a:shade val="100000"/>
+                <a:satMod val="350000"/>
+              </a:schemeClr>
+            </a:gs>
+          </a:gsLst>
+          <a:lin ang="16200000" scaled="0"/>
+        </a:gradFill>
+      </a:fillStyleLst>
+      <a:lnStyleLst>
+        <a:ln w="9525" cap="flat" cmpd="sng" algn="ctr">
+          <a:solidFill>
+            <a:schemeClr val="phClr">
+              <a:shade val="95000"/>
+              <a:satMod val="105000"/>
+            </a:schemeClr>
+          </a:solidFill>
+          <a:prstDash val="solid"/>
+        </a:ln>
+        <a:ln w="25400" cap="flat" cmpd="sng" algn="ctr">
+          <a:solidFill>
+            <a:schemeClr val="phClr"/>
+          </a:solidFill>
+          <a:prstDash val="solid"/>
+        </a:ln>
+        <a:ln w="38100" cap="flat" cmpd="sng" algn="ctr">
+          <a:solidFill>
+            <a:schemeClr val="phClr"/>
+          </a:solidFill>
+          <a:prstDash val="solid"/>
+        </a:ln>
+      </a:lnStyleLst>
+      <a:effectStyleLst>
+        <a:effectStyle>
+          <a:effectLst>
+            <a:outerShdw blurRad="40000" dist="20000" dir="5400000" rotWithShape="0">
+              <a:srgbClr val="000000">
+                <a:alpha val="38000"/>
+              </a:srgbClr>
+            </a:outerShdw>
+          </a:effectLst>
+        </a:effectStyle>
+        <a:effectStyle>
+          <a:effectLst>
+            <a:outerShdw blurRad="40000" dist="23000" dir="5400000" rotWithShape="0">
+              <a:srgbClr val="000000">
+                <a:alpha val="35000"/>
+              </a:srgbClr>
+            </a:outerShdw>
+          </a:effectLst>
+        </a:effectStyle>
+        <a:effectStyle>
+          <a:effectLst>
+            <a:outerShdw blurRad="40000" dist="23000" dir="5400000" rotWithShape="0">
+              <a:srgbClr val="000000">
+                <a:alpha val="35000"/>
+              </a:srgbClr>
+            </a:outerShdw>
+          </a:effectLst>
+          <a:scene3d>
+            <a:camera prst="orthographicFront">
+              <a:rot lat="0" lon="0" rev="0"/>
+            </a:camera>
+            <a:lightRig rig="threePt" dir="t">
+              <a:rot lat="0" lon="0" rev="1200000"/>
+            </a:lightRig>
+          </a:scene3d>
+          <a:sp3d>
+            <a:bevelT w="63500" h="25400"/>
+          </a:sp3d>
+        </a:effectStyle>
+      </a:effectStyleLst>
+      <a:bgFillStyleLst>
+        <a:solidFill>
+          <a:schemeClr val="phClr"/>
+        </a:solidFill>
+        <a:gradFill rotWithShape="1">
+          <a:gsLst>
+            <a:gs pos="0">
+              <a:schemeClr val="phClr">
+                <a:tint val="40000"/>
+                <a:satMod val="350000"/>
+              </a:schemeClr>
+            </a:gs>
+            <a:gs pos="40000">
+              <a:schemeClr val="phClr">
+                <a:tint val="45000"/>
+                <a:shade val="99000"/>
+                <a:satMod val="350000"/>
+              </a:schemeClr>
+            </a:gs>
+            <a:gs pos="100000">
+              <a:schemeClr val="phClr">
+                <a:shade val="20000"/>
+                <a:satMod val="255000"/>
+              </a:schemeClr>
+            </a:gs>
+          </a:gsLst>
+          <a:path path="circle">
+            <a:fillToRect l="50000" t="-80000" r="50000" b="180000"/>
+          </a:path>
+        </a:gradFill>
+        <a:gradFill rotWithShape="1">
+          <a:gsLst>
+            <a:gs pos="0">
+              <a:schemeClr val="phClr">
+                <a:tint val="80000"/>
+                <a:satMod val="300000"/>
+              </a:schemeClr>
+            </a:gs>
+            <a:gs pos="100000">
+              <a:schemeClr val="phClr">
+                <a:shade val="30000"/>
+                <a:satMod val="200000"/>
+              </a:schemeClr>
+            </a:gs>
+          </a:gsLst>
+          <a:path path="circle">
+            <a:fillToRect l="50000" t="50000" r="50000" b="50000"/>
+          </a:path>
+        </a:gradFill>
+      </a:bgFillStyleLst>
+    </a:fmtScheme>
+  </a:themeElements>
+  <a:objectDefaults/>
+  <a:extraClrSchemeLst/>
+</a:theme>
+</file>
+
+<file path=ppt/theme/theme2.xml><?xml version="1.0" encoding="utf-8"?>
+<a:theme xmlns:a="http://schemas.openxmlformats.org/drawingml/2006/main" name="Office Theme">
   <a:themeElements>
     <a:clrScheme name="Office">
       <a:dk1>
@@ -12721,284 +13277,7 @@
       </a:bgFillStyleLst>
     </a:fmtScheme>
   </a:themeElements>
-</a:theme>
-</file>
-
-<file path=ppt/theme/theme2.xml><?xml version="1.0" encoding="utf-8"?>
-<a:theme xmlns:a="http://schemas.openxmlformats.org/drawingml/2006/main" xmlns:r="http://schemas.openxmlformats.org/officeDocument/2006/relationships" name="Office Theme">
-  <a:themeElements>
-    <a:clrScheme name="Office Theme">
-      <a:dk1>
-        <a:srgbClr val="000000"/>
-      </a:dk1>
-      <a:lt1>
-        <a:srgbClr val="FFFFFF"/>
-      </a:lt1>
-      <a:dk2>
-        <a:srgbClr val="0E2841"/>
-      </a:dk2>
-      <a:lt2>
-        <a:srgbClr val="E8E8E8"/>
-      </a:lt2>
-      <a:accent1>
-        <a:srgbClr val="156082"/>
-      </a:accent1>
-      <a:accent2>
-        <a:srgbClr val="E97132"/>
-      </a:accent2>
-      <a:accent3>
-        <a:srgbClr val="196B24"/>
-      </a:accent3>
-      <a:accent4>
-        <a:srgbClr val="0F9ED5"/>
-      </a:accent4>
-      <a:accent5>
-        <a:srgbClr val="A02B93"/>
-      </a:accent5>
-      <a:accent6>
-        <a:srgbClr val="4EA72E"/>
-      </a:accent6>
-      <a:hlink>
-        <a:srgbClr val="467886"/>
-      </a:hlink>
-      <a:folHlink>
-        <a:srgbClr val="96607D"/>
-      </a:folHlink>
-    </a:clrScheme>
-    <a:fontScheme name="Office">
-      <a:majorFont>
-        <a:latin typeface="Arial"/>
-        <a:ea typeface=""/>
-        <a:cs typeface=""/>
-        <a:font script="Jpan" typeface="ＭＳ Ｐゴシック"/>
-        <a:font script="Hang" typeface="맑은 고딕"/>
-        <a:font script="Hans" typeface="宋体"/>
-        <a:font script="Hant" typeface="新細明體"/>
-        <a:font script="Arab" typeface="Times New Roman"/>
-        <a:font script="Hebr" typeface="Times New Roman"/>
-        <a:font script="Thai" typeface="Angsana New"/>
-        <a:font script="Ethi" typeface="Nyala"/>
-        <a:font script="Beng" typeface="Vrinda"/>
-        <a:font script="Gujr" typeface="Shruti"/>
-        <a:font script="Khmr" typeface="MoolBoran"/>
-        <a:font script="Knda" typeface="Tunga"/>
-        <a:font script="Guru" typeface="Raavi"/>
-        <a:font script="Cans" typeface="Euphemia"/>
-        <a:font script="Cher" typeface="Plantagenet Cherokee"/>
-        <a:font script="Yiii" typeface="Microsoft Yi Baiti"/>
-        <a:font script="Tibt" typeface="Microsoft Himalaya"/>
-        <a:font script="Thaa" typeface="MV Boli"/>
-        <a:font script="Deva" typeface="Mangal"/>
-        <a:font script="Telu" typeface="Gautami"/>
-        <a:font script="Taml" typeface="Latha"/>
-        <a:font script="Syrc" typeface="Estrangelo Edessa"/>
-        <a:font script="Orya" typeface="Kalinga"/>
-        <a:font script="Mlym" typeface="Kartika"/>
-        <a:font script="Laoo" typeface="DokChampa"/>
-        <a:font script="Sinh" typeface="Iskoola Pota"/>
-        <a:font script="Mong" typeface="Mongolian Baiti"/>
-        <a:font script="Viet" typeface="Times New Roman"/>
-        <a:font script="Uigh" typeface="Microsoft Uighur"/>
-        <a:font script="Geor" typeface="Sylfaen"/>
-      </a:majorFont>
-      <a:minorFont>
-        <a:latin typeface="Arial"/>
-        <a:ea typeface=""/>
-        <a:cs typeface=""/>
-        <a:font script="Jpan" typeface="ＭＳ Ｐゴシック"/>
-        <a:font script="Hang" typeface="맑은 고딕"/>
-        <a:font script="Hans" typeface="宋体"/>
-        <a:font script="Hant" typeface="新細明體"/>
-        <a:font script="Arab" typeface="Arial"/>
-        <a:font script="Hebr" typeface="Arial"/>
-        <a:font script="Thai" typeface="Cordia New"/>
-        <a:font script="Ethi" typeface="Nyala"/>
-        <a:font script="Beng" typeface="Vrinda"/>
-        <a:font script="Gujr" typeface="Shruti"/>
-        <a:font script="Khmr" typeface="DaunPenh"/>
-        <a:font script="Knda" typeface="Tunga"/>
-        <a:font script="Guru" typeface="Raavi"/>
-        <a:font script="Cans" typeface="Euphemia"/>
-        <a:font script="Cher" typeface="Plantagenet Cherokee"/>
-        <a:font script="Yiii" typeface="Microsoft Yi Baiti"/>
-        <a:font script="Tibt" typeface="Microsoft Himalaya"/>
-        <a:font script="Thaa" typeface="MV Boli"/>
-        <a:font script="Deva" typeface="Mangal"/>
-        <a:font script="Telu" typeface="Gautami"/>
-        <a:font script="Taml" typeface="Latha"/>
-        <a:font script="Syrc" typeface="Estrangelo Edessa"/>
-        <a:font script="Orya" typeface="Kalinga"/>
-        <a:font script="Mlym" typeface="Kartika"/>
-        <a:font script="Laoo" typeface="DokChampa"/>
-        <a:font script="Sinh" typeface="Iskoola Pota"/>
-        <a:font script="Mong" typeface="Mongolian Baiti"/>
-        <a:font script="Viet" typeface="Arial"/>
-        <a:font script="Uigh" typeface="Microsoft Uighur"/>
-        <a:font script="Geor" typeface="Sylfaen"/>
-      </a:minorFont>
-    </a:fontScheme>
-    <a:fmtScheme name="Office">
-      <a:fillStyleLst>
-        <a:solidFill>
-          <a:schemeClr val="phClr"/>
-        </a:solidFill>
-        <a:gradFill rotWithShape="1">
-          <a:gsLst>
-            <a:gs pos="0">
-              <a:schemeClr val="phClr">
-                <a:tint val="50000"/>
-                <a:satMod val="300000"/>
-              </a:schemeClr>
-            </a:gs>
-            <a:gs pos="35000">
-              <a:schemeClr val="phClr">
-                <a:tint val="37000"/>
-                <a:satMod val="300000"/>
-              </a:schemeClr>
-            </a:gs>
-            <a:gs pos="100000">
-              <a:schemeClr val="phClr">
-                <a:tint val="15000"/>
-                <a:satMod val="350000"/>
-              </a:schemeClr>
-            </a:gs>
-          </a:gsLst>
-          <a:lin ang="16200000" scaled="1"/>
-        </a:gradFill>
-        <a:gradFill rotWithShape="1">
-          <a:gsLst>
-            <a:gs pos="0">
-              <a:schemeClr val="phClr">
-                <a:tint val="100000"/>
-                <a:shade val="100000"/>
-                <a:satMod val="130000"/>
-              </a:schemeClr>
-            </a:gs>
-            <a:gs pos="100000">
-              <a:schemeClr val="phClr">
-                <a:tint val="50000"/>
-                <a:shade val="100000"/>
-                <a:satMod val="350000"/>
-              </a:schemeClr>
-            </a:gs>
-          </a:gsLst>
-          <a:lin ang="16200000" scaled="0"/>
-        </a:gradFill>
-      </a:fillStyleLst>
-      <a:lnStyleLst>
-        <a:ln w="9525" cap="flat" cmpd="sng" algn="ctr">
-          <a:solidFill>
-            <a:schemeClr val="phClr">
-              <a:shade val="95000"/>
-              <a:satMod val="105000"/>
-            </a:schemeClr>
-          </a:solidFill>
-          <a:prstDash val="solid"/>
-        </a:ln>
-        <a:ln w="25400" cap="flat" cmpd="sng" algn="ctr">
-          <a:solidFill>
-            <a:schemeClr val="phClr"/>
-          </a:solidFill>
-          <a:prstDash val="solid"/>
-        </a:ln>
-        <a:ln w="38100" cap="flat" cmpd="sng" algn="ctr">
-          <a:solidFill>
-            <a:schemeClr val="phClr"/>
-          </a:solidFill>
-          <a:prstDash val="solid"/>
-        </a:ln>
-      </a:lnStyleLst>
-      <a:effectStyleLst>
-        <a:effectStyle>
-          <a:effectLst>
-            <a:outerShdw blurRad="40000" dist="20000" dir="5400000" rotWithShape="0">
-              <a:srgbClr val="000000">
-                <a:alpha val="38000"/>
-              </a:srgbClr>
-            </a:outerShdw>
-          </a:effectLst>
-        </a:effectStyle>
-        <a:effectStyle>
-          <a:effectLst>
-            <a:outerShdw blurRad="40000" dist="23000" dir="5400000" rotWithShape="0">
-              <a:srgbClr val="000000">
-                <a:alpha val="35000"/>
-              </a:srgbClr>
-            </a:outerShdw>
-          </a:effectLst>
-        </a:effectStyle>
-        <a:effectStyle>
-          <a:effectLst>
-            <a:outerShdw blurRad="40000" dist="23000" dir="5400000" rotWithShape="0">
-              <a:srgbClr val="000000">
-                <a:alpha val="35000"/>
-              </a:srgbClr>
-            </a:outerShdw>
-          </a:effectLst>
-          <a:scene3d>
-            <a:camera prst="orthographicFront">
-              <a:rot lat="0" lon="0" rev="0"/>
-            </a:camera>
-            <a:lightRig rig="threePt" dir="t">
-              <a:rot lat="0" lon="0" rev="1200000"/>
-            </a:lightRig>
-          </a:scene3d>
-          <a:sp3d>
-            <a:bevelT w="63500" h="25400"/>
-          </a:sp3d>
-        </a:effectStyle>
-      </a:effectStyleLst>
-      <a:bgFillStyleLst>
-        <a:solidFill>
-          <a:schemeClr val="phClr"/>
-        </a:solidFill>
-        <a:gradFill rotWithShape="1">
-          <a:gsLst>
-            <a:gs pos="0">
-              <a:schemeClr val="phClr">
-                <a:tint val="40000"/>
-                <a:satMod val="350000"/>
-              </a:schemeClr>
-            </a:gs>
-            <a:gs pos="40000">
-              <a:schemeClr val="phClr">
-                <a:tint val="45000"/>
-                <a:shade val="99000"/>
-                <a:satMod val="350000"/>
-              </a:schemeClr>
-            </a:gs>
-            <a:gs pos="100000">
-              <a:schemeClr val="phClr">
-                <a:shade val="20000"/>
-                <a:satMod val="255000"/>
-              </a:schemeClr>
-            </a:gs>
-          </a:gsLst>
-          <a:path path="circle">
-            <a:fillToRect l="50000" t="-80000" r="50000" b="180000"/>
-          </a:path>
-        </a:gradFill>
-        <a:gradFill rotWithShape="1">
-          <a:gsLst>
-            <a:gs pos="0">
-              <a:schemeClr val="phClr">
-                <a:tint val="80000"/>
-                <a:satMod val="300000"/>
-              </a:schemeClr>
-            </a:gs>
-            <a:gs pos="100000">
-              <a:schemeClr val="phClr">
-                <a:shade val="30000"/>
-                <a:satMod val="200000"/>
-              </a:schemeClr>
-            </a:gs>
-          </a:gsLst>
-          <a:path path="circle">
-            <a:fillToRect l="50000" t="50000" r="50000" b="50000"/>
-          </a:path>
-        </a:gradFill>
-      </a:bgFillStyleLst>
-    </a:fmtScheme>
-  </a:themeElements>
+  <a:objectDefaults/>
+  <a:extraClrSchemeLst/>
 </a:theme>
 </file>
--- a/figures/Figure4_case3.pptx
+++ b/figures/Figure4_case3.pptx
@@ -1559,18 +1559,6 @@
               <a:buNone/>
             </a:pPr>
             <a:r>
-              <a:rPr lang="en-CA" sz="1200" b="1">
-                <a:solidFill>
-                  <a:schemeClr val="dk1"/>
-                </a:solidFill>
-                <a:latin typeface="Arial"/>
-                <a:ea typeface="Arial"/>
-                <a:cs typeface="Arial"/>
-                <a:sym typeface="Arial"/>
-              </a:rPr>
-              <a:t>Figure 3. </a:t>
-            </a:r>
-            <a:r>
               <a:rPr lang="en-CA" sz="1200" b="1" dirty="0">
                 <a:solidFill>
                   <a:schemeClr val="dk1"/>
@@ -1580,7 +1568,7 @@
                 <a:cs typeface="Arial"/>
                 <a:sym typeface="Arial"/>
               </a:rPr>
-              <a:t>Systematic evaluation of </a:t>
+              <a:t>Figure 3. Systematic evaluation of </a:t>
             </a:r>
             <a:r>
               <a:rPr lang="en-CA" sz="1200" b="1" dirty="0" err="1">

--- a/figures/Figure4_case3.pptx
+++ b/figures/Figure4_case3.pptx
@@ -253,7 +253,7 @@
       <p15:sldGuideLst xmlns:p15="http://schemas.microsoft.com/office/powerpoint/2012/main"/>
     </p:ext>
     <p:ext uri="GoogleSlidesCustomDataVersion2">
-      <go:slidesCustomData xmlns:go="http://customooxmlschemas.google.com/" xmlns:ahyp="http://schemas.microsoft.com/office/drawing/2018/hyperlinkcolor" xmlns:p15="http://schemas.microsoft.com/office/powerpoint/2012/main" xmlns:p14="http://schemas.microsoft.com/office/powerpoint/2010/main" xmlns:com="http://schemas.openxmlformats.org/drawingml/2006/compatibility" xmlns:pvml="urn:schemas-microsoft-com:office:powerpoint" xmlns:v="urn:schemas-microsoft-com:vml" xmlns:o="urn:schemas-microsoft-com:office:office" xmlns:dgm="http://schemas.openxmlformats.org/drawingml/2006/diagram" xmlns:c="http://schemas.openxmlformats.org/drawingml/2006/chart" xmlns:mv="urn:schemas-microsoft-com:mac:vml" xmlns:mc="http://schemas.openxmlformats.org/markup-compatibility/2006" xmlns="" r:id="rId8" roundtripDataSignature="AMtx7mi553m8NdOJu3RJVRvvSDH2Dnf3KQ=="/>
+      <go:slidesCustomData xmlns="" xmlns:mc="http://schemas.openxmlformats.org/markup-compatibility/2006" xmlns:mv="urn:schemas-microsoft-com:mac:vml" xmlns:c="http://schemas.openxmlformats.org/drawingml/2006/chart" xmlns:dgm="http://schemas.openxmlformats.org/drawingml/2006/diagram" xmlns:o="urn:schemas-microsoft-com:office:office" xmlns:v="urn:schemas-microsoft-com:vml" xmlns:pvml="urn:schemas-microsoft-com:office:powerpoint" xmlns:com="http://schemas.openxmlformats.org/drawingml/2006/compatibility" xmlns:p14="http://schemas.microsoft.com/office/powerpoint/2010/main" xmlns:p15="http://schemas.microsoft.com/office/powerpoint/2012/main" xmlns:ahyp="http://schemas.microsoft.com/office/drawing/2018/hyperlinkcolor" xmlns:go="http://customooxmlschemas.google.com/" r:id="rId8" roundtripDataSignature="AMtx7mi553m8NdOJu3RJVRvvSDH2Dnf3KQ=="/>
     </p:ext>
   </p:extLst>
 </p:presentation>
@@ -12136,10 +12136,10 @@
       </p:grpSpPr>
       <p:pic>
         <p:nvPicPr>
-          <p:cNvPr id="27" name="Picture 26">
+          <p:cNvPr id="9" name="Picture 8">
             <a:extLst>
               <a:ext uri="{FF2B5EF4-FFF2-40B4-BE49-F238E27FC236}">
-                <a16:creationId xmlns:a16="http://schemas.microsoft.com/office/drawing/2014/main" id="{A70DF43B-8485-9BC8-4EEE-AF6D5E7BCA18}"/>
+                <a16:creationId xmlns:a16="http://schemas.microsoft.com/office/drawing/2014/main" id="{E5BB2904-B298-43FA-79AC-CB8CF20E311C}"/>
               </a:ext>
             </a:extLst>
           </p:cNvPr>
@@ -12156,38 +12156,8 @@
         </p:blipFill>
         <p:spPr>
           <a:xfrm>
-            <a:off x="12752363" y="3505200"/>
-            <a:ext cx="3806850" cy="2960883"/>
-          </a:xfrm>
-          <a:prstGeom prst="rect">
-            <a:avLst/>
-          </a:prstGeom>
-        </p:spPr>
-      </p:pic>
-      <p:pic>
-        <p:nvPicPr>
-          <p:cNvPr id="23" name="Picture 22">
-            <a:extLst>
-              <a:ext uri="{FF2B5EF4-FFF2-40B4-BE49-F238E27FC236}">
-                <a16:creationId xmlns:a16="http://schemas.microsoft.com/office/drawing/2014/main" id="{1DDD6D5E-32E9-FEF6-50F3-3E84AD0C216D}"/>
-              </a:ext>
-            </a:extLst>
-          </p:cNvPr>
-          <p:cNvPicPr>
-            <a:picLocks noChangeAspect="1"/>
-          </p:cNvPicPr>
-          <p:nvPr/>
-        </p:nvPicPr>
-        <p:blipFill>
-          <a:blip r:embed="rId4"/>
-          <a:stretch>
-            <a:fillRect/>
-          </a:stretch>
-        </p:blipFill>
-        <p:spPr>
-          <a:xfrm>
-            <a:off x="8526167" y="3631667"/>
-            <a:ext cx="3963117" cy="3082424"/>
+            <a:off x="12735500" y="3473860"/>
+            <a:ext cx="3823713" cy="2973999"/>
           </a:xfrm>
           <a:prstGeom prst="rect">
             <a:avLst/>
@@ -12209,14 +12179,14 @@
           <p:nvPr/>
         </p:nvPicPr>
         <p:blipFill>
-          <a:blip r:embed="rId5"/>
+          <a:blip r:embed="rId4"/>
           <a:stretch>
             <a:fillRect/>
           </a:stretch>
         </p:blipFill>
         <p:spPr>
           <a:xfrm>
-            <a:off x="12735500" y="108012"/>
+            <a:off x="4148170" y="54980"/>
             <a:ext cx="3557363" cy="3049168"/>
           </a:xfrm>
           <a:prstGeom prst="rect">
@@ -12239,7 +12209,7 @@
           <p:nvPr/>
         </p:nvPicPr>
         <p:blipFill>
-          <a:blip r:embed="rId6"/>
+          <a:blip r:embed="rId5"/>
           <a:stretch>
             <a:fillRect/>
           </a:stretch>
@@ -12625,14 +12595,14 @@
           <p:nvPr/>
         </p:nvPicPr>
         <p:blipFill>
-          <a:blip r:embed="rId7"/>
+          <a:blip r:embed="rId6"/>
           <a:stretch>
             <a:fillRect/>
           </a:stretch>
         </p:blipFill>
         <p:spPr>
           <a:xfrm>
-            <a:off x="4264154" y="139700"/>
+            <a:off x="8349424" y="54980"/>
             <a:ext cx="3467100" cy="2743200"/>
           </a:xfrm>
           <a:prstGeom prst="rect">
@@ -12655,14 +12625,14 @@
           <p:nvPr/>
         </p:nvPicPr>
         <p:blipFill>
-          <a:blip r:embed="rId8"/>
+          <a:blip r:embed="rId7"/>
           <a:stretch>
             <a:fillRect/>
           </a:stretch>
         </p:blipFill>
         <p:spPr>
           <a:xfrm>
-            <a:off x="8411519" y="105781"/>
+            <a:off x="13050019" y="29581"/>
             <a:ext cx="3657600" cy="2743200"/>
           </a:xfrm>
           <a:prstGeom prst="rect">
@@ -12672,10 +12642,40 @@
       </p:pic>
       <p:pic>
         <p:nvPicPr>
-          <p:cNvPr id="25" name="Picture 24">
+          <p:cNvPr id="4" name="Picture 3">
             <a:extLst>
               <a:ext uri="{FF2B5EF4-FFF2-40B4-BE49-F238E27FC236}">
-                <a16:creationId xmlns:a16="http://schemas.microsoft.com/office/drawing/2014/main" id="{F4DA522B-8BF0-8473-9980-968ECA6323D8}"/>
+                <a16:creationId xmlns:a16="http://schemas.microsoft.com/office/drawing/2014/main" id="{1C363E46-C0C9-F199-34E6-750EE2A578E4}"/>
+              </a:ext>
+            </a:extLst>
+          </p:cNvPr>
+          <p:cNvPicPr>
+            <a:picLocks noChangeAspect="1"/>
+          </p:cNvPicPr>
+          <p:nvPr/>
+        </p:nvPicPr>
+        <p:blipFill>
+          <a:blip r:embed="rId8"/>
+          <a:stretch>
+            <a:fillRect/>
+          </a:stretch>
+        </p:blipFill>
+        <p:spPr>
+          <a:xfrm>
+            <a:off x="4216160" y="3573919"/>
+            <a:ext cx="3657600" cy="2921000"/>
+          </a:xfrm>
+          <a:prstGeom prst="rect">
+            <a:avLst/>
+          </a:prstGeom>
+        </p:spPr>
+      </p:pic>
+      <p:pic>
+        <p:nvPicPr>
+          <p:cNvPr id="12" name="Picture 11">
+            <a:extLst>
+              <a:ext uri="{FF2B5EF4-FFF2-40B4-BE49-F238E27FC236}">
+                <a16:creationId xmlns:a16="http://schemas.microsoft.com/office/drawing/2014/main" id="{D8412016-D8FB-70CD-9725-8C6272ED5B6B}"/>
               </a:ext>
             </a:extLst>
           </p:cNvPr>
@@ -12692,8 +12692,8 @@
         </p:blipFill>
         <p:spPr>
           <a:xfrm>
-            <a:off x="4156204" y="3545083"/>
-            <a:ext cx="3657600" cy="2921000"/>
+            <a:off x="8583301" y="3573919"/>
+            <a:ext cx="3922323" cy="3137859"/>
           </a:xfrm>
           <a:prstGeom prst="rect">
             <a:avLst/>

--- a/figures/Figure4_case3.pptx
+++ b/figures/Figure4_case3.pptx
@@ -10,7 +10,7 @@
   <p:sldIdLst>
     <p:sldId id="256" r:id="rId2"/>
   </p:sldIdLst>
-  <p:sldSz cx="16559213" cy="7019925"/>
+  <p:sldSz cx="6858000" cy="9144000" type="letter"/>
   <p:notesSz cx="6858000" cy="9144000"/>
   <p:embeddedFontLst>
     <p:embeddedFont>
@@ -706,8 +706,8 @@
         </p:nvSpPr>
         <p:spPr>
           <a:xfrm>
-            <a:off x="-209550" y="1143000"/>
-            <a:ext cx="7277100" cy="3086100"/>
+            <a:off x="2271713" y="1143000"/>
+            <a:ext cx="2314575" cy="3086100"/>
           </a:xfrm>
           <a:custGeom>
             <a:avLst/>
@@ -1481,8 +1481,8 @@
         </p:nvSpPr>
         <p:spPr>
           <a:xfrm>
-            <a:off x="-209550" y="1143000"/>
-            <a:ext cx="7277100" cy="3086100"/>
+            <a:off x="2271713" y="1143000"/>
+            <a:ext cx="2314575" cy="3086100"/>
           </a:xfrm>
           <a:custGeom>
             <a:avLst/>
@@ -1921,8 +1921,8 @@
         </p:nvSpPr>
         <p:spPr>
           <a:xfrm>
-            <a:off x="2069902" y="1148863"/>
-            <a:ext cx="12419410" cy="2443974"/>
+            <a:off x="857250" y="1496484"/>
+            <a:ext cx="5143500" cy="3183467"/>
           </a:xfrm>
           <a:prstGeom prst="rect">
             <a:avLst/>
@@ -1953,7 +1953,7 @@
               <a:buSzPts val="6142"/>
               <a:buFont typeface="Play"/>
               <a:buNone/>
-              <a:defRPr sz="6142"/>
+              <a:defRPr sz="2544"/>
             </a:lvl1pPr>
             <a:lvl2pPr lvl="1">
               <a:spcBef>
@@ -2061,8 +2061,8 @@
         </p:nvSpPr>
         <p:spPr>
           <a:xfrm>
-            <a:off x="2069902" y="3687086"/>
-            <a:ext cx="12419410" cy="1694856"/>
+            <a:off x="857250" y="4802717"/>
+            <a:ext cx="5143500" cy="2207682"/>
           </a:xfrm>
           <a:prstGeom prst="rect">
             <a:avLst/>
@@ -2082,7 +2082,7 @@
                 <a:spcPct val="90000"/>
               </a:lnSpc>
               <a:spcBef>
-                <a:spcPts val="1024"/>
+                <a:spcPts val="424"/>
               </a:spcBef>
               <a:spcAft>
                 <a:spcPts val="0"/>
@@ -2092,14 +2092,14 @@
               </a:buClr>
               <a:buSzPts val="2457"/>
               <a:buNone/>
-              <a:defRPr sz="2457"/>
+              <a:defRPr sz="1018"/>
             </a:lvl1pPr>
             <a:lvl2pPr lvl="1" algn="ctr">
               <a:lnSpc>
                 <a:spcPct val="90000"/>
               </a:lnSpc>
               <a:spcBef>
-                <a:spcPts val="512"/>
+                <a:spcPts val="212"/>
               </a:spcBef>
               <a:spcAft>
                 <a:spcPts val="0"/>
@@ -2109,14 +2109,14 @@
               </a:buClr>
               <a:buSzPts val="2047"/>
               <a:buNone/>
-              <a:defRPr sz="2047"/>
+              <a:defRPr sz="848"/>
             </a:lvl2pPr>
             <a:lvl3pPr lvl="2" algn="ctr">
               <a:lnSpc>
                 <a:spcPct val="90000"/>
               </a:lnSpc>
               <a:spcBef>
-                <a:spcPts val="512"/>
+                <a:spcPts val="212"/>
               </a:spcBef>
               <a:spcAft>
                 <a:spcPts val="0"/>
@@ -2126,14 +2126,14 @@
               </a:buClr>
               <a:buSzPts val="1842"/>
               <a:buNone/>
-              <a:defRPr sz="1842"/>
+              <a:defRPr sz="763"/>
             </a:lvl3pPr>
             <a:lvl4pPr lvl="3" algn="ctr">
               <a:lnSpc>
                 <a:spcPct val="90000"/>
               </a:lnSpc>
               <a:spcBef>
-                <a:spcPts val="512"/>
+                <a:spcPts val="212"/>
               </a:spcBef>
               <a:spcAft>
                 <a:spcPts val="0"/>
@@ -2143,14 +2143,14 @@
               </a:buClr>
               <a:buSzPts val="1638"/>
               <a:buNone/>
-              <a:defRPr sz="1638"/>
+              <a:defRPr sz="678"/>
             </a:lvl4pPr>
             <a:lvl5pPr lvl="4" algn="ctr">
               <a:lnSpc>
                 <a:spcPct val="90000"/>
               </a:lnSpc>
               <a:spcBef>
-                <a:spcPts val="512"/>
+                <a:spcPts val="212"/>
               </a:spcBef>
               <a:spcAft>
                 <a:spcPts val="0"/>
@@ -2160,14 +2160,14 @@
               </a:buClr>
               <a:buSzPts val="1638"/>
               <a:buNone/>
-              <a:defRPr sz="1638"/>
+              <a:defRPr sz="678"/>
             </a:lvl5pPr>
             <a:lvl6pPr lvl="5" algn="ctr">
               <a:lnSpc>
                 <a:spcPct val="90000"/>
               </a:lnSpc>
               <a:spcBef>
-                <a:spcPts val="512"/>
+                <a:spcPts val="212"/>
               </a:spcBef>
               <a:spcAft>
                 <a:spcPts val="0"/>
@@ -2177,14 +2177,14 @@
               </a:buClr>
               <a:buSzPts val="1638"/>
               <a:buNone/>
-              <a:defRPr sz="1638"/>
+              <a:defRPr sz="678"/>
             </a:lvl6pPr>
             <a:lvl7pPr lvl="6" algn="ctr">
               <a:lnSpc>
                 <a:spcPct val="90000"/>
               </a:lnSpc>
               <a:spcBef>
-                <a:spcPts val="512"/>
+                <a:spcPts val="212"/>
               </a:spcBef>
               <a:spcAft>
                 <a:spcPts val="0"/>
@@ -2194,14 +2194,14 @@
               </a:buClr>
               <a:buSzPts val="1638"/>
               <a:buNone/>
-              <a:defRPr sz="1638"/>
+              <a:defRPr sz="678"/>
             </a:lvl7pPr>
             <a:lvl8pPr lvl="7" algn="ctr">
               <a:lnSpc>
                 <a:spcPct val="90000"/>
               </a:lnSpc>
               <a:spcBef>
-                <a:spcPts val="512"/>
+                <a:spcPts val="212"/>
               </a:spcBef>
               <a:spcAft>
                 <a:spcPts val="0"/>
@@ -2211,14 +2211,14 @@
               </a:buClr>
               <a:buSzPts val="1638"/>
               <a:buNone/>
-              <a:defRPr sz="1638"/>
+              <a:defRPr sz="678"/>
             </a:lvl8pPr>
             <a:lvl9pPr lvl="8" algn="ctr">
               <a:lnSpc>
                 <a:spcPct val="90000"/>
               </a:lnSpc>
               <a:spcBef>
-                <a:spcPts val="512"/>
+                <a:spcPts val="212"/>
               </a:spcBef>
               <a:spcAft>
                 <a:spcPts val="0"/>
@@ -2228,7 +2228,7 @@
               </a:buClr>
               <a:buSzPts val="1638"/>
               <a:buNone/>
-              <a:defRPr sz="1638"/>
+              <a:defRPr sz="678"/>
             </a:lvl9pPr>
           </a:lstStyle>
           <a:p>
@@ -2248,8 +2248,8 @@
         </p:nvSpPr>
         <p:spPr>
           <a:xfrm>
-            <a:off x="1138446" y="6506431"/>
-            <a:ext cx="3725823" cy="373746"/>
+            <a:off x="471488" y="8475134"/>
+            <a:ext cx="1543050" cy="486833"/>
           </a:xfrm>
           <a:prstGeom prst="rect">
             <a:avLst/>
@@ -2381,8 +2381,8 @@
         </p:nvSpPr>
         <p:spPr>
           <a:xfrm>
-            <a:off x="5485240" y="6506431"/>
-            <a:ext cx="5588734" cy="373746"/>
+            <a:off x="2271713" y="8475134"/>
+            <a:ext cx="2314575" cy="486833"/>
           </a:xfrm>
           <a:prstGeom prst="rect">
             <a:avLst/>
@@ -2514,8 +2514,8 @@
         </p:nvSpPr>
         <p:spPr>
           <a:xfrm>
-            <a:off x="11694944" y="6506431"/>
-            <a:ext cx="3725823" cy="373746"/>
+            <a:off x="4843463" y="8475134"/>
+            <a:ext cx="1543050" cy="486833"/>
           </a:xfrm>
           <a:prstGeom prst="rect">
             <a:avLst/>
@@ -2595,20 +2595,12 @@
             </a:lvl9pPr>
           </a:lstStyle>
           <a:p>
-            <a:pPr marL="0" lvl="0" indent="0" algn="r" rtl="0">
-              <a:spcBef>
-                <a:spcPts val="0"/>
-              </a:spcBef>
-              <a:spcAft>
-                <a:spcPts val="0"/>
-              </a:spcAft>
-              <a:buNone/>
-            </a:pPr>
             <a:fld id="{00000000-1234-1234-1234-123412341234}" type="slidenum">
-              <a:rPr lang="en-CA"/>
+              <a:rPr lang="en-CA" smtClean="0"/>
+              <a:pPr/>
               <a:t>‹#›</a:t>
             </a:fld>
-            <a:endParaRPr/>
+            <a:endParaRPr lang="en-CA"/>
           </a:p>
         </p:txBody>
       </p:sp>
@@ -2649,8 +2641,8 @@
         </p:nvSpPr>
         <p:spPr>
           <a:xfrm>
-            <a:off x="1138446" y="373747"/>
-            <a:ext cx="14282321" cy="1356861"/>
+            <a:off x="471488" y="486835"/>
+            <a:ext cx="5915025" cy="1767417"/>
           </a:xfrm>
           <a:prstGeom prst="rect">
             <a:avLst/>
@@ -2788,8 +2780,8 @@
         </p:nvSpPr>
         <p:spPr>
           <a:xfrm rot="5400000">
-            <a:off x="6052567" y="-3045391"/>
-            <a:ext cx="4454078" cy="14282321"/>
+            <a:off x="528108" y="2377547"/>
+            <a:ext cx="5801784" cy="5915025"/>
           </a:xfrm>
           <a:prstGeom prst="rect">
             <a:avLst/>
@@ -2804,12 +2796,12 @@
             <a:normAutofit/>
           </a:bodyPr>
           <a:lstStyle>
-            <a:lvl1pPr marL="457200" lvl="0" indent="-342900" algn="l">
-              <a:lnSpc>
-                <a:spcPct val="90000"/>
-              </a:lnSpc>
-              <a:spcBef>
-                <a:spcPts val="1024"/>
+            <a:lvl1pPr marL="189372" lvl="0" indent="-142029" algn="l">
+              <a:lnSpc>
+                <a:spcPct val="90000"/>
+              </a:lnSpc>
+              <a:spcBef>
+                <a:spcPts val="424"/>
               </a:spcBef>
               <a:spcAft>
                 <a:spcPts val="0"/>
@@ -2821,12 +2813,12 @@
               <a:buChar char="•"/>
               <a:defRPr/>
             </a:lvl1pPr>
-            <a:lvl2pPr marL="914400" lvl="1" indent="-342900" algn="l">
-              <a:lnSpc>
-                <a:spcPct val="90000"/>
-              </a:lnSpc>
-              <a:spcBef>
-                <a:spcPts val="512"/>
+            <a:lvl2pPr marL="378744" lvl="1" indent="-142029" algn="l">
+              <a:lnSpc>
+                <a:spcPct val="90000"/>
+              </a:lnSpc>
+              <a:spcBef>
+                <a:spcPts val="212"/>
               </a:spcBef>
               <a:spcAft>
                 <a:spcPts val="0"/>
@@ -2838,12 +2830,12 @@
               <a:buChar char="•"/>
               <a:defRPr/>
             </a:lvl2pPr>
-            <a:lvl3pPr marL="1371600" lvl="2" indent="-342900" algn="l">
-              <a:lnSpc>
-                <a:spcPct val="90000"/>
-              </a:lnSpc>
-              <a:spcBef>
-                <a:spcPts val="512"/>
+            <a:lvl3pPr marL="568117" lvl="2" indent="-142029" algn="l">
+              <a:lnSpc>
+                <a:spcPct val="90000"/>
+              </a:lnSpc>
+              <a:spcBef>
+                <a:spcPts val="212"/>
               </a:spcBef>
               <a:spcAft>
                 <a:spcPts val="0"/>
@@ -2855,12 +2847,12 @@
               <a:buChar char="•"/>
               <a:defRPr/>
             </a:lvl3pPr>
-            <a:lvl4pPr marL="1828800" lvl="3" indent="-342900" algn="l">
-              <a:lnSpc>
-                <a:spcPct val="90000"/>
-              </a:lnSpc>
-              <a:spcBef>
-                <a:spcPts val="512"/>
+            <a:lvl4pPr marL="757489" lvl="3" indent="-142029" algn="l">
+              <a:lnSpc>
+                <a:spcPct val="90000"/>
+              </a:lnSpc>
+              <a:spcBef>
+                <a:spcPts val="212"/>
               </a:spcBef>
               <a:spcAft>
                 <a:spcPts val="0"/>
@@ -2872,12 +2864,12 @@
               <a:buChar char="•"/>
               <a:defRPr/>
             </a:lvl4pPr>
-            <a:lvl5pPr marL="2286000" lvl="4" indent="-342900" algn="l">
-              <a:lnSpc>
-                <a:spcPct val="90000"/>
-              </a:lnSpc>
-              <a:spcBef>
-                <a:spcPts val="512"/>
+            <a:lvl5pPr marL="946861" lvl="4" indent="-142029" algn="l">
+              <a:lnSpc>
+                <a:spcPct val="90000"/>
+              </a:lnSpc>
+              <a:spcBef>
+                <a:spcPts val="212"/>
               </a:spcBef>
               <a:spcAft>
                 <a:spcPts val="0"/>
@@ -2889,12 +2881,12 @@
               <a:buChar char="•"/>
               <a:defRPr/>
             </a:lvl5pPr>
-            <a:lvl6pPr marL="2743200" lvl="5" indent="-342900" algn="l">
-              <a:lnSpc>
-                <a:spcPct val="90000"/>
-              </a:lnSpc>
-              <a:spcBef>
-                <a:spcPts val="512"/>
+            <a:lvl6pPr marL="1136233" lvl="5" indent="-142029" algn="l">
+              <a:lnSpc>
+                <a:spcPct val="90000"/>
+              </a:lnSpc>
+              <a:spcBef>
+                <a:spcPts val="212"/>
               </a:spcBef>
               <a:spcAft>
                 <a:spcPts val="0"/>
@@ -2906,12 +2898,12 @@
               <a:buChar char="•"/>
               <a:defRPr/>
             </a:lvl6pPr>
-            <a:lvl7pPr marL="3200400" lvl="6" indent="-342900" algn="l">
-              <a:lnSpc>
-                <a:spcPct val="90000"/>
-              </a:lnSpc>
-              <a:spcBef>
-                <a:spcPts val="512"/>
+            <a:lvl7pPr marL="1325606" lvl="6" indent="-142029" algn="l">
+              <a:lnSpc>
+                <a:spcPct val="90000"/>
+              </a:lnSpc>
+              <a:spcBef>
+                <a:spcPts val="212"/>
               </a:spcBef>
               <a:spcAft>
                 <a:spcPts val="0"/>
@@ -2923,12 +2915,12 @@
               <a:buChar char="•"/>
               <a:defRPr/>
             </a:lvl7pPr>
-            <a:lvl8pPr marL="3657600" lvl="7" indent="-342900" algn="l">
-              <a:lnSpc>
-                <a:spcPct val="90000"/>
-              </a:lnSpc>
-              <a:spcBef>
-                <a:spcPts val="512"/>
+            <a:lvl8pPr marL="1514978" lvl="7" indent="-142029" algn="l">
+              <a:lnSpc>
+                <a:spcPct val="90000"/>
+              </a:lnSpc>
+              <a:spcBef>
+                <a:spcPts val="212"/>
               </a:spcBef>
               <a:spcAft>
                 <a:spcPts val="0"/>
@@ -2940,12 +2932,12 @@
               <a:buChar char="•"/>
               <a:defRPr/>
             </a:lvl8pPr>
-            <a:lvl9pPr marL="4114800" lvl="8" indent="-342900" algn="l">
-              <a:lnSpc>
-                <a:spcPct val="90000"/>
-              </a:lnSpc>
-              <a:spcBef>
-                <a:spcPts val="512"/>
+            <a:lvl9pPr marL="1704350" lvl="8" indent="-142029" algn="l">
+              <a:lnSpc>
+                <a:spcPct val="90000"/>
+              </a:lnSpc>
+              <a:spcBef>
+                <a:spcPts val="212"/>
               </a:spcBef>
               <a:spcAft>
                 <a:spcPts val="0"/>
@@ -2975,8 +2967,8 @@
         </p:nvSpPr>
         <p:spPr>
           <a:xfrm>
-            <a:off x="1138446" y="6506431"/>
-            <a:ext cx="3725823" cy="373746"/>
+            <a:off x="471488" y="8475134"/>
+            <a:ext cx="1543050" cy="486833"/>
           </a:xfrm>
           <a:prstGeom prst="rect">
             <a:avLst/>
@@ -3108,8 +3100,8 @@
         </p:nvSpPr>
         <p:spPr>
           <a:xfrm>
-            <a:off x="5485240" y="6506431"/>
-            <a:ext cx="5588734" cy="373746"/>
+            <a:off x="2271713" y="8475134"/>
+            <a:ext cx="2314575" cy="486833"/>
           </a:xfrm>
           <a:prstGeom prst="rect">
             <a:avLst/>
@@ -3241,8 +3233,8 @@
         </p:nvSpPr>
         <p:spPr>
           <a:xfrm>
-            <a:off x="11694944" y="6506431"/>
-            <a:ext cx="3725823" cy="373746"/>
+            <a:off x="4843463" y="8475134"/>
+            <a:ext cx="1543050" cy="486833"/>
           </a:xfrm>
           <a:prstGeom prst="rect">
             <a:avLst/>
@@ -3322,20 +3314,12 @@
             </a:lvl9pPr>
           </a:lstStyle>
           <a:p>
-            <a:pPr marL="0" lvl="0" indent="0" algn="r" rtl="0">
-              <a:spcBef>
-                <a:spcPts val="0"/>
-              </a:spcBef>
-              <a:spcAft>
-                <a:spcPts val="0"/>
-              </a:spcAft>
-              <a:buNone/>
-            </a:pPr>
             <a:fld id="{00000000-1234-1234-1234-123412341234}" type="slidenum">
-              <a:rPr lang="en-CA"/>
+              <a:rPr lang="en-CA" smtClean="0"/>
+              <a:pPr/>
               <a:t>‹#›</a:t>
             </a:fld>
-            <a:endParaRPr/>
+            <a:endParaRPr lang="en-CA"/>
           </a:p>
         </p:txBody>
       </p:sp>
@@ -3376,8 +3360,8 @@
         </p:nvSpPr>
         <p:spPr>
           <a:xfrm rot="5400000">
-            <a:off x="10660946" y="1562987"/>
-            <a:ext cx="5949062" cy="3570580"/>
+            <a:off x="1772576" y="3622014"/>
+            <a:ext cx="7749117" cy="1478756"/>
           </a:xfrm>
           <a:prstGeom prst="rect">
             <a:avLst/>
@@ -3515,8 +3499,8 @@
         </p:nvSpPr>
         <p:spPr>
           <a:xfrm rot="5400000">
-            <a:off x="3416291" y="-1904098"/>
-            <a:ext cx="5949062" cy="10504751"/>
+            <a:off x="-1227799" y="2186121"/>
+            <a:ext cx="7749117" cy="4350544"/>
           </a:xfrm>
           <a:prstGeom prst="rect">
             <a:avLst/>
@@ -3531,12 +3515,12 @@
             <a:normAutofit/>
           </a:bodyPr>
           <a:lstStyle>
-            <a:lvl1pPr marL="457200" lvl="0" indent="-342900" algn="l">
-              <a:lnSpc>
-                <a:spcPct val="90000"/>
-              </a:lnSpc>
-              <a:spcBef>
-                <a:spcPts val="1024"/>
+            <a:lvl1pPr marL="189372" lvl="0" indent="-142029" algn="l">
+              <a:lnSpc>
+                <a:spcPct val="90000"/>
+              </a:lnSpc>
+              <a:spcBef>
+                <a:spcPts val="424"/>
               </a:spcBef>
               <a:spcAft>
                 <a:spcPts val="0"/>
@@ -3548,12 +3532,12 @@
               <a:buChar char="•"/>
               <a:defRPr/>
             </a:lvl1pPr>
-            <a:lvl2pPr marL="914400" lvl="1" indent="-342900" algn="l">
-              <a:lnSpc>
-                <a:spcPct val="90000"/>
-              </a:lnSpc>
-              <a:spcBef>
-                <a:spcPts val="512"/>
+            <a:lvl2pPr marL="378744" lvl="1" indent="-142029" algn="l">
+              <a:lnSpc>
+                <a:spcPct val="90000"/>
+              </a:lnSpc>
+              <a:spcBef>
+                <a:spcPts val="212"/>
               </a:spcBef>
               <a:spcAft>
                 <a:spcPts val="0"/>
@@ -3565,12 +3549,12 @@
               <a:buChar char="•"/>
               <a:defRPr/>
             </a:lvl2pPr>
-            <a:lvl3pPr marL="1371600" lvl="2" indent="-342900" algn="l">
-              <a:lnSpc>
-                <a:spcPct val="90000"/>
-              </a:lnSpc>
-              <a:spcBef>
-                <a:spcPts val="512"/>
+            <a:lvl3pPr marL="568117" lvl="2" indent="-142029" algn="l">
+              <a:lnSpc>
+                <a:spcPct val="90000"/>
+              </a:lnSpc>
+              <a:spcBef>
+                <a:spcPts val="212"/>
               </a:spcBef>
               <a:spcAft>
                 <a:spcPts val="0"/>
@@ -3582,12 +3566,12 @@
               <a:buChar char="•"/>
               <a:defRPr/>
             </a:lvl3pPr>
-            <a:lvl4pPr marL="1828800" lvl="3" indent="-342900" algn="l">
-              <a:lnSpc>
-                <a:spcPct val="90000"/>
-              </a:lnSpc>
-              <a:spcBef>
-                <a:spcPts val="512"/>
+            <a:lvl4pPr marL="757489" lvl="3" indent="-142029" algn="l">
+              <a:lnSpc>
+                <a:spcPct val="90000"/>
+              </a:lnSpc>
+              <a:spcBef>
+                <a:spcPts val="212"/>
               </a:spcBef>
               <a:spcAft>
                 <a:spcPts val="0"/>
@@ -3599,12 +3583,12 @@
               <a:buChar char="•"/>
               <a:defRPr/>
             </a:lvl4pPr>
-            <a:lvl5pPr marL="2286000" lvl="4" indent="-342900" algn="l">
-              <a:lnSpc>
-                <a:spcPct val="90000"/>
-              </a:lnSpc>
-              <a:spcBef>
-                <a:spcPts val="512"/>
+            <a:lvl5pPr marL="946861" lvl="4" indent="-142029" algn="l">
+              <a:lnSpc>
+                <a:spcPct val="90000"/>
+              </a:lnSpc>
+              <a:spcBef>
+                <a:spcPts val="212"/>
               </a:spcBef>
               <a:spcAft>
                 <a:spcPts val="0"/>
@@ -3616,12 +3600,12 @@
               <a:buChar char="•"/>
               <a:defRPr/>
             </a:lvl5pPr>
-            <a:lvl6pPr marL="2743200" lvl="5" indent="-342900" algn="l">
-              <a:lnSpc>
-                <a:spcPct val="90000"/>
-              </a:lnSpc>
-              <a:spcBef>
-                <a:spcPts val="512"/>
+            <a:lvl6pPr marL="1136233" lvl="5" indent="-142029" algn="l">
+              <a:lnSpc>
+                <a:spcPct val="90000"/>
+              </a:lnSpc>
+              <a:spcBef>
+                <a:spcPts val="212"/>
               </a:spcBef>
               <a:spcAft>
                 <a:spcPts val="0"/>
@@ -3633,12 +3617,12 @@
               <a:buChar char="•"/>
               <a:defRPr/>
             </a:lvl6pPr>
-            <a:lvl7pPr marL="3200400" lvl="6" indent="-342900" algn="l">
-              <a:lnSpc>
-                <a:spcPct val="90000"/>
-              </a:lnSpc>
-              <a:spcBef>
-                <a:spcPts val="512"/>
+            <a:lvl7pPr marL="1325606" lvl="6" indent="-142029" algn="l">
+              <a:lnSpc>
+                <a:spcPct val="90000"/>
+              </a:lnSpc>
+              <a:spcBef>
+                <a:spcPts val="212"/>
               </a:spcBef>
               <a:spcAft>
                 <a:spcPts val="0"/>
@@ -3650,12 +3634,12 @@
               <a:buChar char="•"/>
               <a:defRPr/>
             </a:lvl7pPr>
-            <a:lvl8pPr marL="3657600" lvl="7" indent="-342900" algn="l">
-              <a:lnSpc>
-                <a:spcPct val="90000"/>
-              </a:lnSpc>
-              <a:spcBef>
-                <a:spcPts val="512"/>
+            <a:lvl8pPr marL="1514978" lvl="7" indent="-142029" algn="l">
+              <a:lnSpc>
+                <a:spcPct val="90000"/>
+              </a:lnSpc>
+              <a:spcBef>
+                <a:spcPts val="212"/>
               </a:spcBef>
               <a:spcAft>
                 <a:spcPts val="0"/>
@@ -3667,12 +3651,12 @@
               <a:buChar char="•"/>
               <a:defRPr/>
             </a:lvl8pPr>
-            <a:lvl9pPr marL="4114800" lvl="8" indent="-342900" algn="l">
-              <a:lnSpc>
-                <a:spcPct val="90000"/>
-              </a:lnSpc>
-              <a:spcBef>
-                <a:spcPts val="512"/>
+            <a:lvl9pPr marL="1704350" lvl="8" indent="-142029" algn="l">
+              <a:lnSpc>
+                <a:spcPct val="90000"/>
+              </a:lnSpc>
+              <a:spcBef>
+                <a:spcPts val="212"/>
               </a:spcBef>
               <a:spcAft>
                 <a:spcPts val="0"/>
@@ -3702,8 +3686,8 @@
         </p:nvSpPr>
         <p:spPr>
           <a:xfrm>
-            <a:off x="1138446" y="6506431"/>
-            <a:ext cx="3725823" cy="373746"/>
+            <a:off x="471488" y="8475134"/>
+            <a:ext cx="1543050" cy="486833"/>
           </a:xfrm>
           <a:prstGeom prst="rect">
             <a:avLst/>
@@ -3835,8 +3819,8 @@
         </p:nvSpPr>
         <p:spPr>
           <a:xfrm>
-            <a:off x="5485240" y="6506431"/>
-            <a:ext cx="5588734" cy="373746"/>
+            <a:off x="2271713" y="8475134"/>
+            <a:ext cx="2314575" cy="486833"/>
           </a:xfrm>
           <a:prstGeom prst="rect">
             <a:avLst/>
@@ -3968,8 +3952,8 @@
         </p:nvSpPr>
         <p:spPr>
           <a:xfrm>
-            <a:off x="11694944" y="6506431"/>
-            <a:ext cx="3725823" cy="373746"/>
+            <a:off x="4843463" y="8475134"/>
+            <a:ext cx="1543050" cy="486833"/>
           </a:xfrm>
           <a:prstGeom prst="rect">
             <a:avLst/>
@@ -4049,20 +4033,12 @@
             </a:lvl9pPr>
           </a:lstStyle>
           <a:p>
-            <a:pPr marL="0" lvl="0" indent="0" algn="r" rtl="0">
-              <a:spcBef>
-                <a:spcPts val="0"/>
-              </a:spcBef>
-              <a:spcAft>
-                <a:spcPts val="0"/>
-              </a:spcAft>
-              <a:buNone/>
-            </a:pPr>
             <a:fld id="{00000000-1234-1234-1234-123412341234}" type="slidenum">
-              <a:rPr lang="en-CA"/>
+              <a:rPr lang="en-CA" smtClean="0"/>
+              <a:pPr/>
               <a:t>‹#›</a:t>
             </a:fld>
-            <a:endParaRPr/>
+            <a:endParaRPr lang="en-CA"/>
           </a:p>
         </p:txBody>
       </p:sp>
@@ -4103,8 +4079,8 @@
         </p:nvSpPr>
         <p:spPr>
           <a:xfrm>
-            <a:off x="1138446" y="373747"/>
-            <a:ext cx="14282321" cy="1356861"/>
+            <a:off x="471488" y="486835"/>
+            <a:ext cx="5915025" cy="1767417"/>
           </a:xfrm>
           <a:prstGeom prst="rect">
             <a:avLst/>
@@ -4242,8 +4218,8 @@
         </p:nvSpPr>
         <p:spPr>
           <a:xfrm>
-            <a:off x="1138446" y="1868730"/>
-            <a:ext cx="14282321" cy="4454078"/>
+            <a:off x="471488" y="2434167"/>
+            <a:ext cx="5915025" cy="5801784"/>
           </a:xfrm>
           <a:prstGeom prst="rect">
             <a:avLst/>
@@ -4258,12 +4234,12 @@
             <a:normAutofit/>
           </a:bodyPr>
           <a:lstStyle>
-            <a:lvl1pPr marL="457200" lvl="0" indent="-342900" algn="l">
-              <a:lnSpc>
-                <a:spcPct val="90000"/>
-              </a:lnSpc>
-              <a:spcBef>
-                <a:spcPts val="1024"/>
+            <a:lvl1pPr marL="189372" lvl="0" indent="-142029" algn="l">
+              <a:lnSpc>
+                <a:spcPct val="90000"/>
+              </a:lnSpc>
+              <a:spcBef>
+                <a:spcPts val="424"/>
               </a:spcBef>
               <a:spcAft>
                 <a:spcPts val="0"/>
@@ -4275,12 +4251,12 @@
               <a:buChar char="•"/>
               <a:defRPr/>
             </a:lvl1pPr>
-            <a:lvl2pPr marL="914400" lvl="1" indent="-342900" algn="l">
-              <a:lnSpc>
-                <a:spcPct val="90000"/>
-              </a:lnSpc>
-              <a:spcBef>
-                <a:spcPts val="512"/>
+            <a:lvl2pPr marL="378744" lvl="1" indent="-142029" algn="l">
+              <a:lnSpc>
+                <a:spcPct val="90000"/>
+              </a:lnSpc>
+              <a:spcBef>
+                <a:spcPts val="212"/>
               </a:spcBef>
               <a:spcAft>
                 <a:spcPts val="0"/>
@@ -4292,12 +4268,12 @@
               <a:buChar char="•"/>
               <a:defRPr/>
             </a:lvl2pPr>
-            <a:lvl3pPr marL="1371600" lvl="2" indent="-342900" algn="l">
-              <a:lnSpc>
-                <a:spcPct val="90000"/>
-              </a:lnSpc>
-              <a:spcBef>
-                <a:spcPts val="512"/>
+            <a:lvl3pPr marL="568117" lvl="2" indent="-142029" algn="l">
+              <a:lnSpc>
+                <a:spcPct val="90000"/>
+              </a:lnSpc>
+              <a:spcBef>
+                <a:spcPts val="212"/>
               </a:spcBef>
               <a:spcAft>
                 <a:spcPts val="0"/>
@@ -4309,12 +4285,12 @@
               <a:buChar char="•"/>
               <a:defRPr/>
             </a:lvl3pPr>
-            <a:lvl4pPr marL="1828800" lvl="3" indent="-342900" algn="l">
-              <a:lnSpc>
-                <a:spcPct val="90000"/>
-              </a:lnSpc>
-              <a:spcBef>
-                <a:spcPts val="512"/>
+            <a:lvl4pPr marL="757489" lvl="3" indent="-142029" algn="l">
+              <a:lnSpc>
+                <a:spcPct val="90000"/>
+              </a:lnSpc>
+              <a:spcBef>
+                <a:spcPts val="212"/>
               </a:spcBef>
               <a:spcAft>
                 <a:spcPts val="0"/>
@@ -4326,12 +4302,12 @@
               <a:buChar char="•"/>
               <a:defRPr/>
             </a:lvl4pPr>
-            <a:lvl5pPr marL="2286000" lvl="4" indent="-342900" algn="l">
-              <a:lnSpc>
-                <a:spcPct val="90000"/>
-              </a:lnSpc>
-              <a:spcBef>
-                <a:spcPts val="512"/>
+            <a:lvl5pPr marL="946861" lvl="4" indent="-142029" algn="l">
+              <a:lnSpc>
+                <a:spcPct val="90000"/>
+              </a:lnSpc>
+              <a:spcBef>
+                <a:spcPts val="212"/>
               </a:spcBef>
               <a:spcAft>
                 <a:spcPts val="0"/>
@@ -4343,12 +4319,12 @@
               <a:buChar char="•"/>
               <a:defRPr/>
             </a:lvl5pPr>
-            <a:lvl6pPr marL="2743200" lvl="5" indent="-342900" algn="l">
-              <a:lnSpc>
-                <a:spcPct val="90000"/>
-              </a:lnSpc>
-              <a:spcBef>
-                <a:spcPts val="512"/>
+            <a:lvl6pPr marL="1136233" lvl="5" indent="-142029" algn="l">
+              <a:lnSpc>
+                <a:spcPct val="90000"/>
+              </a:lnSpc>
+              <a:spcBef>
+                <a:spcPts val="212"/>
               </a:spcBef>
               <a:spcAft>
                 <a:spcPts val="0"/>
@@ -4360,12 +4336,12 @@
               <a:buChar char="•"/>
               <a:defRPr/>
             </a:lvl6pPr>
-            <a:lvl7pPr marL="3200400" lvl="6" indent="-342900" algn="l">
-              <a:lnSpc>
-                <a:spcPct val="90000"/>
-              </a:lnSpc>
-              <a:spcBef>
-                <a:spcPts val="512"/>
+            <a:lvl7pPr marL="1325606" lvl="6" indent="-142029" algn="l">
+              <a:lnSpc>
+                <a:spcPct val="90000"/>
+              </a:lnSpc>
+              <a:spcBef>
+                <a:spcPts val="212"/>
               </a:spcBef>
               <a:spcAft>
                 <a:spcPts val="0"/>
@@ -4377,12 +4353,12 @@
               <a:buChar char="•"/>
               <a:defRPr/>
             </a:lvl7pPr>
-            <a:lvl8pPr marL="3657600" lvl="7" indent="-342900" algn="l">
-              <a:lnSpc>
-                <a:spcPct val="90000"/>
-              </a:lnSpc>
-              <a:spcBef>
-                <a:spcPts val="512"/>
+            <a:lvl8pPr marL="1514978" lvl="7" indent="-142029" algn="l">
+              <a:lnSpc>
+                <a:spcPct val="90000"/>
+              </a:lnSpc>
+              <a:spcBef>
+                <a:spcPts val="212"/>
               </a:spcBef>
               <a:spcAft>
                 <a:spcPts val="0"/>
@@ -4394,12 +4370,12 @@
               <a:buChar char="•"/>
               <a:defRPr/>
             </a:lvl8pPr>
-            <a:lvl9pPr marL="4114800" lvl="8" indent="-342900" algn="l">
-              <a:lnSpc>
-                <a:spcPct val="90000"/>
-              </a:lnSpc>
-              <a:spcBef>
-                <a:spcPts val="512"/>
+            <a:lvl9pPr marL="1704350" lvl="8" indent="-142029" algn="l">
+              <a:lnSpc>
+                <a:spcPct val="90000"/>
+              </a:lnSpc>
+              <a:spcBef>
+                <a:spcPts val="212"/>
               </a:spcBef>
               <a:spcAft>
                 <a:spcPts val="0"/>
@@ -4429,8 +4405,8 @@
         </p:nvSpPr>
         <p:spPr>
           <a:xfrm>
-            <a:off x="1138446" y="6506431"/>
-            <a:ext cx="3725823" cy="373746"/>
+            <a:off x="471488" y="8475134"/>
+            <a:ext cx="1543050" cy="486833"/>
           </a:xfrm>
           <a:prstGeom prst="rect">
             <a:avLst/>
@@ -4562,8 +4538,8 @@
         </p:nvSpPr>
         <p:spPr>
           <a:xfrm>
-            <a:off x="5485240" y="6506431"/>
-            <a:ext cx="5588734" cy="373746"/>
+            <a:off x="2271713" y="8475134"/>
+            <a:ext cx="2314575" cy="486833"/>
           </a:xfrm>
           <a:prstGeom prst="rect">
             <a:avLst/>
@@ -4695,8 +4671,8 @@
         </p:nvSpPr>
         <p:spPr>
           <a:xfrm>
-            <a:off x="11694944" y="6506431"/>
-            <a:ext cx="3725823" cy="373746"/>
+            <a:off x="4843463" y="8475134"/>
+            <a:ext cx="1543050" cy="486833"/>
           </a:xfrm>
           <a:prstGeom prst="rect">
             <a:avLst/>
@@ -4776,20 +4752,12 @@
             </a:lvl9pPr>
           </a:lstStyle>
           <a:p>
-            <a:pPr marL="0" lvl="0" indent="0" algn="r" rtl="0">
-              <a:spcBef>
-                <a:spcPts val="0"/>
-              </a:spcBef>
-              <a:spcAft>
-                <a:spcPts val="0"/>
-              </a:spcAft>
-              <a:buNone/>
-            </a:pPr>
             <a:fld id="{00000000-1234-1234-1234-123412341234}" type="slidenum">
-              <a:rPr lang="en-CA"/>
+              <a:rPr lang="en-CA" smtClean="0"/>
+              <a:pPr/>
               <a:t>‹#›</a:t>
             </a:fld>
-            <a:endParaRPr/>
+            <a:endParaRPr lang="en-CA"/>
           </a:p>
         </p:txBody>
       </p:sp>
@@ -4830,8 +4798,8 @@
         </p:nvSpPr>
         <p:spPr>
           <a:xfrm>
-            <a:off x="1129821" y="1750107"/>
-            <a:ext cx="14282321" cy="2920093"/>
+            <a:off x="467916" y="2279652"/>
+            <a:ext cx="5915025" cy="3803649"/>
           </a:xfrm>
           <a:prstGeom prst="rect">
             <a:avLst/>
@@ -4862,7 +4830,7 @@
               <a:buSzPts val="6142"/>
               <a:buFont typeface="Play"/>
               <a:buNone/>
-              <a:defRPr sz="6142"/>
+              <a:defRPr sz="2544"/>
             </a:lvl1pPr>
             <a:lvl2pPr lvl="1">
               <a:spcBef>
@@ -4970,8 +4938,8 @@
         </p:nvSpPr>
         <p:spPr>
           <a:xfrm>
-            <a:off x="1129821" y="4697826"/>
-            <a:ext cx="14282321" cy="1535608"/>
+            <a:off x="467916" y="6119285"/>
+            <a:ext cx="5915025" cy="2000249"/>
           </a:xfrm>
           <a:prstGeom prst="rect">
             <a:avLst/>
@@ -4986,12 +4954,12 @@
             <a:normAutofit/>
           </a:bodyPr>
           <a:lstStyle>
-            <a:lvl1pPr marL="457200" lvl="0" indent="-228600" algn="l">
-              <a:lnSpc>
-                <a:spcPct val="90000"/>
-              </a:lnSpc>
-              <a:spcBef>
-                <a:spcPts val="1024"/>
+            <a:lvl1pPr marL="189372" lvl="0" indent="-94686" algn="l">
+              <a:lnSpc>
+                <a:spcPct val="90000"/>
+              </a:lnSpc>
+              <a:spcBef>
+                <a:spcPts val="424"/>
               </a:spcBef>
               <a:spcAft>
                 <a:spcPts val="0"/>
@@ -5001,18 +4969,18 @@
               </a:buClr>
               <a:buSzPts val="2457"/>
               <a:buNone/>
-              <a:defRPr sz="2457">
+              <a:defRPr sz="1018">
                 <a:solidFill>
                   <a:srgbClr val="757575"/>
                 </a:solidFill>
               </a:defRPr>
             </a:lvl1pPr>
-            <a:lvl2pPr marL="914400" lvl="1" indent="-228600" algn="l">
-              <a:lnSpc>
-                <a:spcPct val="90000"/>
-              </a:lnSpc>
-              <a:spcBef>
-                <a:spcPts val="512"/>
+            <a:lvl2pPr marL="378744" lvl="1" indent="-94686" algn="l">
+              <a:lnSpc>
+                <a:spcPct val="90000"/>
+              </a:lnSpc>
+              <a:spcBef>
+                <a:spcPts val="212"/>
               </a:spcBef>
               <a:spcAft>
                 <a:spcPts val="0"/>
@@ -5022,18 +4990,18 @@
               </a:buClr>
               <a:buSzPts val="2047"/>
               <a:buNone/>
-              <a:defRPr sz="2047">
+              <a:defRPr sz="848">
                 <a:solidFill>
                   <a:srgbClr val="757575"/>
                 </a:solidFill>
               </a:defRPr>
             </a:lvl2pPr>
-            <a:lvl3pPr marL="1371600" lvl="2" indent="-228600" algn="l">
-              <a:lnSpc>
-                <a:spcPct val="90000"/>
-              </a:lnSpc>
-              <a:spcBef>
-                <a:spcPts val="512"/>
+            <a:lvl3pPr marL="568117" lvl="2" indent="-94686" algn="l">
+              <a:lnSpc>
+                <a:spcPct val="90000"/>
+              </a:lnSpc>
+              <a:spcBef>
+                <a:spcPts val="212"/>
               </a:spcBef>
               <a:spcAft>
                 <a:spcPts val="0"/>
@@ -5043,18 +5011,18 @@
               </a:buClr>
               <a:buSzPts val="1842"/>
               <a:buNone/>
-              <a:defRPr sz="1842">
+              <a:defRPr sz="763">
                 <a:solidFill>
                   <a:srgbClr val="757575"/>
                 </a:solidFill>
               </a:defRPr>
             </a:lvl3pPr>
-            <a:lvl4pPr marL="1828800" lvl="3" indent="-228600" algn="l">
-              <a:lnSpc>
-                <a:spcPct val="90000"/>
-              </a:lnSpc>
-              <a:spcBef>
-                <a:spcPts val="512"/>
+            <a:lvl4pPr marL="757489" lvl="3" indent="-94686" algn="l">
+              <a:lnSpc>
+                <a:spcPct val="90000"/>
+              </a:lnSpc>
+              <a:spcBef>
+                <a:spcPts val="212"/>
               </a:spcBef>
               <a:spcAft>
                 <a:spcPts val="0"/>
@@ -5064,18 +5032,18 @@
               </a:buClr>
               <a:buSzPts val="1638"/>
               <a:buNone/>
-              <a:defRPr sz="1638">
+              <a:defRPr sz="678">
                 <a:solidFill>
                   <a:srgbClr val="757575"/>
                 </a:solidFill>
               </a:defRPr>
             </a:lvl4pPr>
-            <a:lvl5pPr marL="2286000" lvl="4" indent="-228600" algn="l">
-              <a:lnSpc>
-                <a:spcPct val="90000"/>
-              </a:lnSpc>
-              <a:spcBef>
-                <a:spcPts val="512"/>
+            <a:lvl5pPr marL="946861" lvl="4" indent="-94686" algn="l">
+              <a:lnSpc>
+                <a:spcPct val="90000"/>
+              </a:lnSpc>
+              <a:spcBef>
+                <a:spcPts val="212"/>
               </a:spcBef>
               <a:spcAft>
                 <a:spcPts val="0"/>
@@ -5085,18 +5053,18 @@
               </a:buClr>
               <a:buSzPts val="1638"/>
               <a:buNone/>
-              <a:defRPr sz="1638">
+              <a:defRPr sz="678">
                 <a:solidFill>
                   <a:srgbClr val="757575"/>
                 </a:solidFill>
               </a:defRPr>
             </a:lvl5pPr>
-            <a:lvl6pPr marL="2743200" lvl="5" indent="-228600" algn="l">
-              <a:lnSpc>
-                <a:spcPct val="90000"/>
-              </a:lnSpc>
-              <a:spcBef>
-                <a:spcPts val="512"/>
+            <a:lvl6pPr marL="1136233" lvl="5" indent="-94686" algn="l">
+              <a:lnSpc>
+                <a:spcPct val="90000"/>
+              </a:lnSpc>
+              <a:spcBef>
+                <a:spcPts val="212"/>
               </a:spcBef>
               <a:spcAft>
                 <a:spcPts val="0"/>
@@ -5106,18 +5074,18 @@
               </a:buClr>
               <a:buSzPts val="1638"/>
               <a:buNone/>
-              <a:defRPr sz="1638">
+              <a:defRPr sz="678">
                 <a:solidFill>
                   <a:srgbClr val="757575"/>
                 </a:solidFill>
               </a:defRPr>
             </a:lvl6pPr>
-            <a:lvl7pPr marL="3200400" lvl="6" indent="-228600" algn="l">
-              <a:lnSpc>
-                <a:spcPct val="90000"/>
-              </a:lnSpc>
-              <a:spcBef>
-                <a:spcPts val="512"/>
+            <a:lvl7pPr marL="1325606" lvl="6" indent="-94686" algn="l">
+              <a:lnSpc>
+                <a:spcPct val="90000"/>
+              </a:lnSpc>
+              <a:spcBef>
+                <a:spcPts val="212"/>
               </a:spcBef>
               <a:spcAft>
                 <a:spcPts val="0"/>
@@ -5127,18 +5095,18 @@
               </a:buClr>
               <a:buSzPts val="1638"/>
               <a:buNone/>
-              <a:defRPr sz="1638">
+              <a:defRPr sz="678">
                 <a:solidFill>
                   <a:srgbClr val="757575"/>
                 </a:solidFill>
               </a:defRPr>
             </a:lvl7pPr>
-            <a:lvl8pPr marL="3657600" lvl="7" indent="-228600" algn="l">
-              <a:lnSpc>
-                <a:spcPct val="90000"/>
-              </a:lnSpc>
-              <a:spcBef>
-                <a:spcPts val="512"/>
+            <a:lvl8pPr marL="1514978" lvl="7" indent="-94686" algn="l">
+              <a:lnSpc>
+                <a:spcPct val="90000"/>
+              </a:lnSpc>
+              <a:spcBef>
+                <a:spcPts val="212"/>
               </a:spcBef>
               <a:spcAft>
                 <a:spcPts val="0"/>
@@ -5148,18 +5116,18 @@
               </a:buClr>
               <a:buSzPts val="1638"/>
               <a:buNone/>
-              <a:defRPr sz="1638">
+              <a:defRPr sz="678">
                 <a:solidFill>
                   <a:srgbClr val="757575"/>
                 </a:solidFill>
               </a:defRPr>
             </a:lvl8pPr>
-            <a:lvl9pPr marL="4114800" lvl="8" indent="-228600" algn="l">
-              <a:lnSpc>
-                <a:spcPct val="90000"/>
-              </a:lnSpc>
-              <a:spcBef>
-                <a:spcPts val="512"/>
+            <a:lvl9pPr marL="1704350" lvl="8" indent="-94686" algn="l">
+              <a:lnSpc>
+                <a:spcPct val="90000"/>
+              </a:lnSpc>
+              <a:spcBef>
+                <a:spcPts val="212"/>
               </a:spcBef>
               <a:spcAft>
                 <a:spcPts val="0"/>
@@ -5169,7 +5137,7 @@
               </a:buClr>
               <a:buSzPts val="1638"/>
               <a:buNone/>
-              <a:defRPr sz="1638">
+              <a:defRPr sz="678">
                 <a:solidFill>
                   <a:srgbClr val="757575"/>
                 </a:solidFill>
@@ -5193,8 +5161,8 @@
         </p:nvSpPr>
         <p:spPr>
           <a:xfrm>
-            <a:off x="1138446" y="6506431"/>
-            <a:ext cx="3725823" cy="373746"/>
+            <a:off x="471488" y="8475134"/>
+            <a:ext cx="1543050" cy="486833"/>
           </a:xfrm>
           <a:prstGeom prst="rect">
             <a:avLst/>
@@ -5326,8 +5294,8 @@
         </p:nvSpPr>
         <p:spPr>
           <a:xfrm>
-            <a:off x="5485240" y="6506431"/>
-            <a:ext cx="5588734" cy="373746"/>
+            <a:off x="2271713" y="8475134"/>
+            <a:ext cx="2314575" cy="486833"/>
           </a:xfrm>
           <a:prstGeom prst="rect">
             <a:avLst/>
@@ -5459,8 +5427,8 @@
         </p:nvSpPr>
         <p:spPr>
           <a:xfrm>
-            <a:off x="11694944" y="6506431"/>
-            <a:ext cx="3725823" cy="373746"/>
+            <a:off x="4843463" y="8475134"/>
+            <a:ext cx="1543050" cy="486833"/>
           </a:xfrm>
           <a:prstGeom prst="rect">
             <a:avLst/>
@@ -5540,20 +5508,12 @@
             </a:lvl9pPr>
           </a:lstStyle>
           <a:p>
-            <a:pPr marL="0" lvl="0" indent="0" algn="r" rtl="0">
-              <a:spcBef>
-                <a:spcPts val="0"/>
-              </a:spcBef>
-              <a:spcAft>
-                <a:spcPts val="0"/>
-              </a:spcAft>
-              <a:buNone/>
-            </a:pPr>
             <a:fld id="{00000000-1234-1234-1234-123412341234}" type="slidenum">
-              <a:rPr lang="en-CA"/>
+              <a:rPr lang="en-CA" smtClean="0"/>
+              <a:pPr/>
               <a:t>‹#›</a:t>
             </a:fld>
-            <a:endParaRPr/>
+            <a:endParaRPr lang="en-CA"/>
           </a:p>
         </p:txBody>
       </p:sp>
@@ -5594,8 +5554,8 @@
         </p:nvSpPr>
         <p:spPr>
           <a:xfrm>
-            <a:off x="1138446" y="373747"/>
-            <a:ext cx="14282321" cy="1356861"/>
+            <a:off x="471488" y="486835"/>
+            <a:ext cx="5915025" cy="1767417"/>
           </a:xfrm>
           <a:prstGeom prst="rect">
             <a:avLst/>
@@ -5733,8 +5693,8 @@
         </p:nvSpPr>
         <p:spPr>
           <a:xfrm>
-            <a:off x="1138446" y="1868730"/>
-            <a:ext cx="7037666" cy="4454078"/>
+            <a:off x="471488" y="2434167"/>
+            <a:ext cx="2914650" cy="5801784"/>
           </a:xfrm>
           <a:prstGeom prst="rect">
             <a:avLst/>
@@ -5749,12 +5709,12 @@
             <a:normAutofit/>
           </a:bodyPr>
           <a:lstStyle>
-            <a:lvl1pPr marL="457200" lvl="0" indent="-342900" algn="l">
-              <a:lnSpc>
-                <a:spcPct val="90000"/>
-              </a:lnSpc>
-              <a:spcBef>
-                <a:spcPts val="1024"/>
+            <a:lvl1pPr marL="189372" lvl="0" indent="-142029" algn="l">
+              <a:lnSpc>
+                <a:spcPct val="90000"/>
+              </a:lnSpc>
+              <a:spcBef>
+                <a:spcPts val="424"/>
               </a:spcBef>
               <a:spcAft>
                 <a:spcPts val="0"/>
@@ -5766,12 +5726,12 @@
               <a:buChar char="•"/>
               <a:defRPr/>
             </a:lvl1pPr>
-            <a:lvl2pPr marL="914400" lvl="1" indent="-342900" algn="l">
-              <a:lnSpc>
-                <a:spcPct val="90000"/>
-              </a:lnSpc>
-              <a:spcBef>
-                <a:spcPts val="512"/>
+            <a:lvl2pPr marL="378744" lvl="1" indent="-142029" algn="l">
+              <a:lnSpc>
+                <a:spcPct val="90000"/>
+              </a:lnSpc>
+              <a:spcBef>
+                <a:spcPts val="212"/>
               </a:spcBef>
               <a:spcAft>
                 <a:spcPts val="0"/>
@@ -5783,12 +5743,12 @@
               <a:buChar char="•"/>
               <a:defRPr/>
             </a:lvl2pPr>
-            <a:lvl3pPr marL="1371600" lvl="2" indent="-342900" algn="l">
-              <a:lnSpc>
-                <a:spcPct val="90000"/>
-              </a:lnSpc>
-              <a:spcBef>
-                <a:spcPts val="512"/>
+            <a:lvl3pPr marL="568117" lvl="2" indent="-142029" algn="l">
+              <a:lnSpc>
+                <a:spcPct val="90000"/>
+              </a:lnSpc>
+              <a:spcBef>
+                <a:spcPts val="212"/>
               </a:spcBef>
               <a:spcAft>
                 <a:spcPts val="0"/>
@@ -5800,12 +5760,12 @@
               <a:buChar char="•"/>
               <a:defRPr/>
             </a:lvl3pPr>
-            <a:lvl4pPr marL="1828800" lvl="3" indent="-342900" algn="l">
-              <a:lnSpc>
-                <a:spcPct val="90000"/>
-              </a:lnSpc>
-              <a:spcBef>
-                <a:spcPts val="512"/>
+            <a:lvl4pPr marL="757489" lvl="3" indent="-142029" algn="l">
+              <a:lnSpc>
+                <a:spcPct val="90000"/>
+              </a:lnSpc>
+              <a:spcBef>
+                <a:spcPts val="212"/>
               </a:spcBef>
               <a:spcAft>
                 <a:spcPts val="0"/>
@@ -5817,12 +5777,12 @@
               <a:buChar char="•"/>
               <a:defRPr/>
             </a:lvl4pPr>
-            <a:lvl5pPr marL="2286000" lvl="4" indent="-342900" algn="l">
-              <a:lnSpc>
-                <a:spcPct val="90000"/>
-              </a:lnSpc>
-              <a:spcBef>
-                <a:spcPts val="512"/>
+            <a:lvl5pPr marL="946861" lvl="4" indent="-142029" algn="l">
+              <a:lnSpc>
+                <a:spcPct val="90000"/>
+              </a:lnSpc>
+              <a:spcBef>
+                <a:spcPts val="212"/>
               </a:spcBef>
               <a:spcAft>
                 <a:spcPts val="0"/>
@@ -5834,12 +5794,12 @@
               <a:buChar char="•"/>
               <a:defRPr/>
             </a:lvl5pPr>
-            <a:lvl6pPr marL="2743200" lvl="5" indent="-342900" algn="l">
-              <a:lnSpc>
-                <a:spcPct val="90000"/>
-              </a:lnSpc>
-              <a:spcBef>
-                <a:spcPts val="512"/>
+            <a:lvl6pPr marL="1136233" lvl="5" indent="-142029" algn="l">
+              <a:lnSpc>
+                <a:spcPct val="90000"/>
+              </a:lnSpc>
+              <a:spcBef>
+                <a:spcPts val="212"/>
               </a:spcBef>
               <a:spcAft>
                 <a:spcPts val="0"/>
@@ -5851,12 +5811,12 @@
               <a:buChar char="•"/>
               <a:defRPr/>
             </a:lvl6pPr>
-            <a:lvl7pPr marL="3200400" lvl="6" indent="-342900" algn="l">
-              <a:lnSpc>
-                <a:spcPct val="90000"/>
-              </a:lnSpc>
-              <a:spcBef>
-                <a:spcPts val="512"/>
+            <a:lvl7pPr marL="1325606" lvl="6" indent="-142029" algn="l">
+              <a:lnSpc>
+                <a:spcPct val="90000"/>
+              </a:lnSpc>
+              <a:spcBef>
+                <a:spcPts val="212"/>
               </a:spcBef>
               <a:spcAft>
                 <a:spcPts val="0"/>
@@ -5868,12 +5828,12 @@
               <a:buChar char="•"/>
               <a:defRPr/>
             </a:lvl7pPr>
-            <a:lvl8pPr marL="3657600" lvl="7" indent="-342900" algn="l">
-              <a:lnSpc>
-                <a:spcPct val="90000"/>
-              </a:lnSpc>
-              <a:spcBef>
-                <a:spcPts val="512"/>
+            <a:lvl8pPr marL="1514978" lvl="7" indent="-142029" algn="l">
+              <a:lnSpc>
+                <a:spcPct val="90000"/>
+              </a:lnSpc>
+              <a:spcBef>
+                <a:spcPts val="212"/>
               </a:spcBef>
               <a:spcAft>
                 <a:spcPts val="0"/>
@@ -5885,12 +5845,12 @@
               <a:buChar char="•"/>
               <a:defRPr/>
             </a:lvl8pPr>
-            <a:lvl9pPr marL="4114800" lvl="8" indent="-342900" algn="l">
-              <a:lnSpc>
-                <a:spcPct val="90000"/>
-              </a:lnSpc>
-              <a:spcBef>
-                <a:spcPts val="512"/>
+            <a:lvl9pPr marL="1704350" lvl="8" indent="-142029" algn="l">
+              <a:lnSpc>
+                <a:spcPct val="90000"/>
+              </a:lnSpc>
+              <a:spcBef>
+                <a:spcPts val="212"/>
               </a:spcBef>
               <a:spcAft>
                 <a:spcPts val="0"/>
@@ -5920,8 +5880,8 @@
         </p:nvSpPr>
         <p:spPr>
           <a:xfrm>
-            <a:off x="8383101" y="1868730"/>
-            <a:ext cx="7037666" cy="4454078"/>
+            <a:off x="3471862" y="2434167"/>
+            <a:ext cx="2914650" cy="5801784"/>
           </a:xfrm>
           <a:prstGeom prst="rect">
             <a:avLst/>
@@ -5936,12 +5896,12 @@
             <a:normAutofit/>
           </a:bodyPr>
           <a:lstStyle>
-            <a:lvl1pPr marL="457200" lvl="0" indent="-342900" algn="l">
-              <a:lnSpc>
-                <a:spcPct val="90000"/>
-              </a:lnSpc>
-              <a:spcBef>
-                <a:spcPts val="1024"/>
+            <a:lvl1pPr marL="189372" lvl="0" indent="-142029" algn="l">
+              <a:lnSpc>
+                <a:spcPct val="90000"/>
+              </a:lnSpc>
+              <a:spcBef>
+                <a:spcPts val="424"/>
               </a:spcBef>
               <a:spcAft>
                 <a:spcPts val="0"/>
@@ -5953,12 +5913,12 @@
               <a:buChar char="•"/>
               <a:defRPr/>
             </a:lvl1pPr>
-            <a:lvl2pPr marL="914400" lvl="1" indent="-342900" algn="l">
-              <a:lnSpc>
-                <a:spcPct val="90000"/>
-              </a:lnSpc>
-              <a:spcBef>
-                <a:spcPts val="512"/>
+            <a:lvl2pPr marL="378744" lvl="1" indent="-142029" algn="l">
+              <a:lnSpc>
+                <a:spcPct val="90000"/>
+              </a:lnSpc>
+              <a:spcBef>
+                <a:spcPts val="212"/>
               </a:spcBef>
               <a:spcAft>
                 <a:spcPts val="0"/>
@@ -5970,12 +5930,12 @@
               <a:buChar char="•"/>
               <a:defRPr/>
             </a:lvl2pPr>
-            <a:lvl3pPr marL="1371600" lvl="2" indent="-342900" algn="l">
-              <a:lnSpc>
-                <a:spcPct val="90000"/>
-              </a:lnSpc>
-              <a:spcBef>
-                <a:spcPts val="512"/>
+            <a:lvl3pPr marL="568117" lvl="2" indent="-142029" algn="l">
+              <a:lnSpc>
+                <a:spcPct val="90000"/>
+              </a:lnSpc>
+              <a:spcBef>
+                <a:spcPts val="212"/>
               </a:spcBef>
               <a:spcAft>
                 <a:spcPts val="0"/>
@@ -5987,12 +5947,12 @@
               <a:buChar char="•"/>
               <a:defRPr/>
             </a:lvl3pPr>
-            <a:lvl4pPr marL="1828800" lvl="3" indent="-342900" algn="l">
-              <a:lnSpc>
-                <a:spcPct val="90000"/>
-              </a:lnSpc>
-              <a:spcBef>
-                <a:spcPts val="512"/>
+            <a:lvl4pPr marL="757489" lvl="3" indent="-142029" algn="l">
+              <a:lnSpc>
+                <a:spcPct val="90000"/>
+              </a:lnSpc>
+              <a:spcBef>
+                <a:spcPts val="212"/>
               </a:spcBef>
               <a:spcAft>
                 <a:spcPts val="0"/>
@@ -6004,12 +5964,12 @@
               <a:buChar char="•"/>
               <a:defRPr/>
             </a:lvl4pPr>
-            <a:lvl5pPr marL="2286000" lvl="4" indent="-342900" algn="l">
-              <a:lnSpc>
-                <a:spcPct val="90000"/>
-              </a:lnSpc>
-              <a:spcBef>
-                <a:spcPts val="512"/>
+            <a:lvl5pPr marL="946861" lvl="4" indent="-142029" algn="l">
+              <a:lnSpc>
+                <a:spcPct val="90000"/>
+              </a:lnSpc>
+              <a:spcBef>
+                <a:spcPts val="212"/>
               </a:spcBef>
               <a:spcAft>
                 <a:spcPts val="0"/>
@@ -6021,12 +5981,12 @@
               <a:buChar char="•"/>
               <a:defRPr/>
             </a:lvl5pPr>
-            <a:lvl6pPr marL="2743200" lvl="5" indent="-342900" algn="l">
-              <a:lnSpc>
-                <a:spcPct val="90000"/>
-              </a:lnSpc>
-              <a:spcBef>
-                <a:spcPts val="512"/>
+            <a:lvl6pPr marL="1136233" lvl="5" indent="-142029" algn="l">
+              <a:lnSpc>
+                <a:spcPct val="90000"/>
+              </a:lnSpc>
+              <a:spcBef>
+                <a:spcPts val="212"/>
               </a:spcBef>
               <a:spcAft>
                 <a:spcPts val="0"/>
@@ -6038,12 +5998,12 @@
               <a:buChar char="•"/>
               <a:defRPr/>
             </a:lvl6pPr>
-            <a:lvl7pPr marL="3200400" lvl="6" indent="-342900" algn="l">
-              <a:lnSpc>
-                <a:spcPct val="90000"/>
-              </a:lnSpc>
-              <a:spcBef>
-                <a:spcPts val="512"/>
+            <a:lvl7pPr marL="1325606" lvl="6" indent="-142029" algn="l">
+              <a:lnSpc>
+                <a:spcPct val="90000"/>
+              </a:lnSpc>
+              <a:spcBef>
+                <a:spcPts val="212"/>
               </a:spcBef>
               <a:spcAft>
                 <a:spcPts val="0"/>
@@ -6055,12 +6015,12 @@
               <a:buChar char="•"/>
               <a:defRPr/>
             </a:lvl7pPr>
-            <a:lvl8pPr marL="3657600" lvl="7" indent="-342900" algn="l">
-              <a:lnSpc>
-                <a:spcPct val="90000"/>
-              </a:lnSpc>
-              <a:spcBef>
-                <a:spcPts val="512"/>
+            <a:lvl8pPr marL="1514978" lvl="7" indent="-142029" algn="l">
+              <a:lnSpc>
+                <a:spcPct val="90000"/>
+              </a:lnSpc>
+              <a:spcBef>
+                <a:spcPts val="212"/>
               </a:spcBef>
               <a:spcAft>
                 <a:spcPts val="0"/>
@@ -6072,12 +6032,12 @@
               <a:buChar char="•"/>
               <a:defRPr/>
             </a:lvl8pPr>
-            <a:lvl9pPr marL="4114800" lvl="8" indent="-342900" algn="l">
-              <a:lnSpc>
-                <a:spcPct val="90000"/>
-              </a:lnSpc>
-              <a:spcBef>
-                <a:spcPts val="512"/>
+            <a:lvl9pPr marL="1704350" lvl="8" indent="-142029" algn="l">
+              <a:lnSpc>
+                <a:spcPct val="90000"/>
+              </a:lnSpc>
+              <a:spcBef>
+                <a:spcPts val="212"/>
               </a:spcBef>
               <a:spcAft>
                 <a:spcPts val="0"/>
@@ -6107,8 +6067,8 @@
         </p:nvSpPr>
         <p:spPr>
           <a:xfrm>
-            <a:off x="1138446" y="6506431"/>
-            <a:ext cx="3725823" cy="373746"/>
+            <a:off x="471488" y="8475134"/>
+            <a:ext cx="1543050" cy="486833"/>
           </a:xfrm>
           <a:prstGeom prst="rect">
             <a:avLst/>
@@ -6240,8 +6200,8 @@
         </p:nvSpPr>
         <p:spPr>
           <a:xfrm>
-            <a:off x="5485240" y="6506431"/>
-            <a:ext cx="5588734" cy="373746"/>
+            <a:off x="2271713" y="8475134"/>
+            <a:ext cx="2314575" cy="486833"/>
           </a:xfrm>
           <a:prstGeom prst="rect">
             <a:avLst/>
@@ -6373,8 +6333,8 @@
         </p:nvSpPr>
         <p:spPr>
           <a:xfrm>
-            <a:off x="11694944" y="6506431"/>
-            <a:ext cx="3725823" cy="373746"/>
+            <a:off x="4843463" y="8475134"/>
+            <a:ext cx="1543050" cy="486833"/>
           </a:xfrm>
           <a:prstGeom prst="rect">
             <a:avLst/>
@@ -6454,20 +6414,12 @@
             </a:lvl9pPr>
           </a:lstStyle>
           <a:p>
-            <a:pPr marL="0" lvl="0" indent="0" algn="r" rtl="0">
-              <a:spcBef>
-                <a:spcPts val="0"/>
-              </a:spcBef>
-              <a:spcAft>
-                <a:spcPts val="0"/>
-              </a:spcAft>
-              <a:buNone/>
-            </a:pPr>
             <a:fld id="{00000000-1234-1234-1234-123412341234}" type="slidenum">
-              <a:rPr lang="en-CA"/>
+              <a:rPr lang="en-CA" smtClean="0"/>
+              <a:pPr/>
               <a:t>‹#›</a:t>
             </a:fld>
-            <a:endParaRPr/>
+            <a:endParaRPr lang="en-CA"/>
           </a:p>
         </p:txBody>
       </p:sp>
@@ -6508,8 +6460,8 @@
         </p:nvSpPr>
         <p:spPr>
           <a:xfrm>
-            <a:off x="1140603" y="373747"/>
-            <a:ext cx="14282321" cy="1356861"/>
+            <a:off x="472381" y="486835"/>
+            <a:ext cx="5915025" cy="1767417"/>
           </a:xfrm>
           <a:prstGeom prst="rect">
             <a:avLst/>
@@ -6647,8 +6599,8 @@
         </p:nvSpPr>
         <p:spPr>
           <a:xfrm>
-            <a:off x="1140603" y="1720857"/>
-            <a:ext cx="7005323" cy="843365"/>
+            <a:off x="472381" y="2241551"/>
+            <a:ext cx="2901255" cy="1098549"/>
           </a:xfrm>
           <a:prstGeom prst="rect">
             <a:avLst/>
@@ -6663,12 +6615,12 @@
             <a:normAutofit/>
           </a:bodyPr>
           <a:lstStyle>
-            <a:lvl1pPr marL="457200" lvl="0" indent="-228600" algn="l">
-              <a:lnSpc>
-                <a:spcPct val="90000"/>
-              </a:lnSpc>
-              <a:spcBef>
-                <a:spcPts val="1024"/>
+            <a:lvl1pPr marL="189372" lvl="0" indent="-94686" algn="l">
+              <a:lnSpc>
+                <a:spcPct val="90000"/>
+              </a:lnSpc>
+              <a:spcBef>
+                <a:spcPts val="424"/>
               </a:spcBef>
               <a:spcAft>
                 <a:spcPts val="0"/>
@@ -6678,14 +6630,14 @@
               </a:buClr>
               <a:buSzPts val="2457"/>
               <a:buNone/>
-              <a:defRPr sz="2457" b="1"/>
+              <a:defRPr sz="1018" b="1"/>
             </a:lvl1pPr>
-            <a:lvl2pPr marL="914400" lvl="1" indent="-228600" algn="l">
-              <a:lnSpc>
-                <a:spcPct val="90000"/>
-              </a:lnSpc>
-              <a:spcBef>
-                <a:spcPts val="512"/>
+            <a:lvl2pPr marL="378744" lvl="1" indent="-94686" algn="l">
+              <a:lnSpc>
+                <a:spcPct val="90000"/>
+              </a:lnSpc>
+              <a:spcBef>
+                <a:spcPts val="212"/>
               </a:spcBef>
               <a:spcAft>
                 <a:spcPts val="0"/>
@@ -6695,14 +6647,14 @@
               </a:buClr>
               <a:buSzPts val="2047"/>
               <a:buNone/>
-              <a:defRPr sz="2047" b="1"/>
+              <a:defRPr sz="848" b="1"/>
             </a:lvl2pPr>
-            <a:lvl3pPr marL="1371600" lvl="2" indent="-228600" algn="l">
-              <a:lnSpc>
-                <a:spcPct val="90000"/>
-              </a:lnSpc>
-              <a:spcBef>
-                <a:spcPts val="512"/>
+            <a:lvl3pPr marL="568117" lvl="2" indent="-94686" algn="l">
+              <a:lnSpc>
+                <a:spcPct val="90000"/>
+              </a:lnSpc>
+              <a:spcBef>
+                <a:spcPts val="212"/>
               </a:spcBef>
               <a:spcAft>
                 <a:spcPts val="0"/>
@@ -6712,14 +6664,14 @@
               </a:buClr>
               <a:buSzPts val="1842"/>
               <a:buNone/>
-              <a:defRPr sz="1842" b="1"/>
+              <a:defRPr sz="763" b="1"/>
             </a:lvl3pPr>
-            <a:lvl4pPr marL="1828800" lvl="3" indent="-228600" algn="l">
-              <a:lnSpc>
-                <a:spcPct val="90000"/>
-              </a:lnSpc>
-              <a:spcBef>
-                <a:spcPts val="512"/>
+            <a:lvl4pPr marL="757489" lvl="3" indent="-94686" algn="l">
+              <a:lnSpc>
+                <a:spcPct val="90000"/>
+              </a:lnSpc>
+              <a:spcBef>
+                <a:spcPts val="212"/>
               </a:spcBef>
               <a:spcAft>
                 <a:spcPts val="0"/>
@@ -6729,14 +6681,14 @@
               </a:buClr>
               <a:buSzPts val="1638"/>
               <a:buNone/>
-              <a:defRPr sz="1638" b="1"/>
+              <a:defRPr sz="678" b="1"/>
             </a:lvl4pPr>
-            <a:lvl5pPr marL="2286000" lvl="4" indent="-228600" algn="l">
-              <a:lnSpc>
-                <a:spcPct val="90000"/>
-              </a:lnSpc>
-              <a:spcBef>
-                <a:spcPts val="512"/>
+            <a:lvl5pPr marL="946861" lvl="4" indent="-94686" algn="l">
+              <a:lnSpc>
+                <a:spcPct val="90000"/>
+              </a:lnSpc>
+              <a:spcBef>
+                <a:spcPts val="212"/>
               </a:spcBef>
               <a:spcAft>
                 <a:spcPts val="0"/>
@@ -6746,14 +6698,14 @@
               </a:buClr>
               <a:buSzPts val="1638"/>
               <a:buNone/>
-              <a:defRPr sz="1638" b="1"/>
+              <a:defRPr sz="678" b="1"/>
             </a:lvl5pPr>
-            <a:lvl6pPr marL="2743200" lvl="5" indent="-228600" algn="l">
-              <a:lnSpc>
-                <a:spcPct val="90000"/>
-              </a:lnSpc>
-              <a:spcBef>
-                <a:spcPts val="512"/>
+            <a:lvl6pPr marL="1136233" lvl="5" indent="-94686" algn="l">
+              <a:lnSpc>
+                <a:spcPct val="90000"/>
+              </a:lnSpc>
+              <a:spcBef>
+                <a:spcPts val="212"/>
               </a:spcBef>
               <a:spcAft>
                 <a:spcPts val="0"/>
@@ -6763,14 +6715,14 @@
               </a:buClr>
               <a:buSzPts val="1638"/>
               <a:buNone/>
-              <a:defRPr sz="1638" b="1"/>
+              <a:defRPr sz="678" b="1"/>
             </a:lvl6pPr>
-            <a:lvl7pPr marL="3200400" lvl="6" indent="-228600" algn="l">
-              <a:lnSpc>
-                <a:spcPct val="90000"/>
-              </a:lnSpc>
-              <a:spcBef>
-                <a:spcPts val="512"/>
+            <a:lvl7pPr marL="1325606" lvl="6" indent="-94686" algn="l">
+              <a:lnSpc>
+                <a:spcPct val="90000"/>
+              </a:lnSpc>
+              <a:spcBef>
+                <a:spcPts val="212"/>
               </a:spcBef>
               <a:spcAft>
                 <a:spcPts val="0"/>
@@ -6780,14 +6732,14 @@
               </a:buClr>
               <a:buSzPts val="1638"/>
               <a:buNone/>
-              <a:defRPr sz="1638" b="1"/>
+              <a:defRPr sz="678" b="1"/>
             </a:lvl7pPr>
-            <a:lvl8pPr marL="3657600" lvl="7" indent="-228600" algn="l">
-              <a:lnSpc>
-                <a:spcPct val="90000"/>
-              </a:lnSpc>
-              <a:spcBef>
-                <a:spcPts val="512"/>
+            <a:lvl8pPr marL="1514978" lvl="7" indent="-94686" algn="l">
+              <a:lnSpc>
+                <a:spcPct val="90000"/>
+              </a:lnSpc>
+              <a:spcBef>
+                <a:spcPts val="212"/>
               </a:spcBef>
               <a:spcAft>
                 <a:spcPts val="0"/>
@@ -6797,14 +6749,14 @@
               </a:buClr>
               <a:buSzPts val="1638"/>
               <a:buNone/>
-              <a:defRPr sz="1638" b="1"/>
+              <a:defRPr sz="678" b="1"/>
             </a:lvl8pPr>
-            <a:lvl9pPr marL="4114800" lvl="8" indent="-228600" algn="l">
-              <a:lnSpc>
-                <a:spcPct val="90000"/>
-              </a:lnSpc>
-              <a:spcBef>
-                <a:spcPts val="512"/>
+            <a:lvl9pPr marL="1704350" lvl="8" indent="-94686" algn="l">
+              <a:lnSpc>
+                <a:spcPct val="90000"/>
+              </a:lnSpc>
+              <a:spcBef>
+                <a:spcPts val="212"/>
               </a:spcBef>
               <a:spcAft>
                 <a:spcPts val="0"/>
@@ -6814,7 +6766,7 @@
               </a:buClr>
               <a:buSzPts val="1638"/>
               <a:buNone/>
-              <a:defRPr sz="1638" b="1"/>
+              <a:defRPr sz="678" b="1"/>
             </a:lvl9pPr>
           </a:lstStyle>
           <a:p>
@@ -6834,8 +6786,8 @@
         </p:nvSpPr>
         <p:spPr>
           <a:xfrm>
-            <a:off x="1140603" y="2564223"/>
-            <a:ext cx="7005323" cy="3771585"/>
+            <a:off x="472381" y="3340101"/>
+            <a:ext cx="2901255" cy="4912784"/>
           </a:xfrm>
           <a:prstGeom prst="rect">
             <a:avLst/>
@@ -6850,12 +6802,12 @@
             <a:normAutofit/>
           </a:bodyPr>
           <a:lstStyle>
-            <a:lvl1pPr marL="457200" lvl="0" indent="-342900" algn="l">
-              <a:lnSpc>
-                <a:spcPct val="90000"/>
-              </a:lnSpc>
-              <a:spcBef>
-                <a:spcPts val="1024"/>
+            <a:lvl1pPr marL="189372" lvl="0" indent="-142029" algn="l">
+              <a:lnSpc>
+                <a:spcPct val="90000"/>
+              </a:lnSpc>
+              <a:spcBef>
+                <a:spcPts val="424"/>
               </a:spcBef>
               <a:spcAft>
                 <a:spcPts val="0"/>
@@ -6867,12 +6819,12 @@
               <a:buChar char="•"/>
               <a:defRPr/>
             </a:lvl1pPr>
-            <a:lvl2pPr marL="914400" lvl="1" indent="-342900" algn="l">
-              <a:lnSpc>
-                <a:spcPct val="90000"/>
-              </a:lnSpc>
-              <a:spcBef>
-                <a:spcPts val="512"/>
+            <a:lvl2pPr marL="378744" lvl="1" indent="-142029" algn="l">
+              <a:lnSpc>
+                <a:spcPct val="90000"/>
+              </a:lnSpc>
+              <a:spcBef>
+                <a:spcPts val="212"/>
               </a:spcBef>
               <a:spcAft>
                 <a:spcPts val="0"/>
@@ -6884,12 +6836,12 @@
               <a:buChar char="•"/>
               <a:defRPr/>
             </a:lvl2pPr>
-            <a:lvl3pPr marL="1371600" lvl="2" indent="-342900" algn="l">
-              <a:lnSpc>
-                <a:spcPct val="90000"/>
-              </a:lnSpc>
-              <a:spcBef>
-                <a:spcPts val="512"/>
+            <a:lvl3pPr marL="568117" lvl="2" indent="-142029" algn="l">
+              <a:lnSpc>
+                <a:spcPct val="90000"/>
+              </a:lnSpc>
+              <a:spcBef>
+                <a:spcPts val="212"/>
               </a:spcBef>
               <a:spcAft>
                 <a:spcPts val="0"/>
@@ -6901,12 +6853,12 @@
               <a:buChar char="•"/>
               <a:defRPr/>
             </a:lvl3pPr>
-            <a:lvl4pPr marL="1828800" lvl="3" indent="-342900" algn="l">
-              <a:lnSpc>
-                <a:spcPct val="90000"/>
-              </a:lnSpc>
-              <a:spcBef>
-                <a:spcPts val="512"/>
+            <a:lvl4pPr marL="757489" lvl="3" indent="-142029" algn="l">
+              <a:lnSpc>
+                <a:spcPct val="90000"/>
+              </a:lnSpc>
+              <a:spcBef>
+                <a:spcPts val="212"/>
               </a:spcBef>
               <a:spcAft>
                 <a:spcPts val="0"/>
@@ -6918,12 +6870,12 @@
               <a:buChar char="•"/>
               <a:defRPr/>
             </a:lvl4pPr>
-            <a:lvl5pPr marL="2286000" lvl="4" indent="-342900" algn="l">
-              <a:lnSpc>
-                <a:spcPct val="90000"/>
-              </a:lnSpc>
-              <a:spcBef>
-                <a:spcPts val="512"/>
+            <a:lvl5pPr marL="946861" lvl="4" indent="-142029" algn="l">
+              <a:lnSpc>
+                <a:spcPct val="90000"/>
+              </a:lnSpc>
+              <a:spcBef>
+                <a:spcPts val="212"/>
               </a:spcBef>
               <a:spcAft>
                 <a:spcPts val="0"/>
@@ -6935,12 +6887,12 @@
               <a:buChar char="•"/>
               <a:defRPr/>
             </a:lvl5pPr>
-            <a:lvl6pPr marL="2743200" lvl="5" indent="-342900" algn="l">
-              <a:lnSpc>
-                <a:spcPct val="90000"/>
-              </a:lnSpc>
-              <a:spcBef>
-                <a:spcPts val="512"/>
+            <a:lvl6pPr marL="1136233" lvl="5" indent="-142029" algn="l">
+              <a:lnSpc>
+                <a:spcPct val="90000"/>
+              </a:lnSpc>
+              <a:spcBef>
+                <a:spcPts val="212"/>
               </a:spcBef>
               <a:spcAft>
                 <a:spcPts val="0"/>
@@ -6952,12 +6904,12 @@
               <a:buChar char="•"/>
               <a:defRPr/>
             </a:lvl6pPr>
-            <a:lvl7pPr marL="3200400" lvl="6" indent="-342900" algn="l">
-              <a:lnSpc>
-                <a:spcPct val="90000"/>
-              </a:lnSpc>
-              <a:spcBef>
-                <a:spcPts val="512"/>
+            <a:lvl7pPr marL="1325606" lvl="6" indent="-142029" algn="l">
+              <a:lnSpc>
+                <a:spcPct val="90000"/>
+              </a:lnSpc>
+              <a:spcBef>
+                <a:spcPts val="212"/>
               </a:spcBef>
               <a:spcAft>
                 <a:spcPts val="0"/>
@@ -6969,12 +6921,12 @@
               <a:buChar char="•"/>
               <a:defRPr/>
             </a:lvl7pPr>
-            <a:lvl8pPr marL="3657600" lvl="7" indent="-342900" algn="l">
-              <a:lnSpc>
-                <a:spcPct val="90000"/>
-              </a:lnSpc>
-              <a:spcBef>
-                <a:spcPts val="512"/>
+            <a:lvl8pPr marL="1514978" lvl="7" indent="-142029" algn="l">
+              <a:lnSpc>
+                <a:spcPct val="90000"/>
+              </a:lnSpc>
+              <a:spcBef>
+                <a:spcPts val="212"/>
               </a:spcBef>
               <a:spcAft>
                 <a:spcPts val="0"/>
@@ -6986,12 +6938,12 @@
               <a:buChar char="•"/>
               <a:defRPr/>
             </a:lvl8pPr>
-            <a:lvl9pPr marL="4114800" lvl="8" indent="-342900" algn="l">
-              <a:lnSpc>
-                <a:spcPct val="90000"/>
-              </a:lnSpc>
-              <a:spcBef>
-                <a:spcPts val="512"/>
+            <a:lvl9pPr marL="1704350" lvl="8" indent="-142029" algn="l">
+              <a:lnSpc>
+                <a:spcPct val="90000"/>
+              </a:lnSpc>
+              <a:spcBef>
+                <a:spcPts val="212"/>
               </a:spcBef>
               <a:spcAft>
                 <a:spcPts val="0"/>
@@ -7021,8 +6973,8 @@
         </p:nvSpPr>
         <p:spPr>
           <a:xfrm>
-            <a:off x="8383102" y="1720857"/>
-            <a:ext cx="7039822" cy="843365"/>
+            <a:off x="3471863" y="2241551"/>
+            <a:ext cx="2915543" cy="1098549"/>
           </a:xfrm>
           <a:prstGeom prst="rect">
             <a:avLst/>
@@ -7037,12 +6989,12 @@
             <a:normAutofit/>
           </a:bodyPr>
           <a:lstStyle>
-            <a:lvl1pPr marL="457200" lvl="0" indent="-228600" algn="l">
-              <a:lnSpc>
-                <a:spcPct val="90000"/>
-              </a:lnSpc>
-              <a:spcBef>
-                <a:spcPts val="1024"/>
+            <a:lvl1pPr marL="189372" lvl="0" indent="-94686" algn="l">
+              <a:lnSpc>
+                <a:spcPct val="90000"/>
+              </a:lnSpc>
+              <a:spcBef>
+                <a:spcPts val="424"/>
               </a:spcBef>
               <a:spcAft>
                 <a:spcPts val="0"/>
@@ -7052,14 +7004,14 @@
               </a:buClr>
               <a:buSzPts val="2457"/>
               <a:buNone/>
-              <a:defRPr sz="2457" b="1"/>
+              <a:defRPr sz="1018" b="1"/>
             </a:lvl1pPr>
-            <a:lvl2pPr marL="914400" lvl="1" indent="-228600" algn="l">
-              <a:lnSpc>
-                <a:spcPct val="90000"/>
-              </a:lnSpc>
-              <a:spcBef>
-                <a:spcPts val="512"/>
+            <a:lvl2pPr marL="378744" lvl="1" indent="-94686" algn="l">
+              <a:lnSpc>
+                <a:spcPct val="90000"/>
+              </a:lnSpc>
+              <a:spcBef>
+                <a:spcPts val="212"/>
               </a:spcBef>
               <a:spcAft>
                 <a:spcPts val="0"/>
@@ -7069,14 +7021,14 @@
               </a:buClr>
               <a:buSzPts val="2047"/>
               <a:buNone/>
-              <a:defRPr sz="2047" b="1"/>
+              <a:defRPr sz="848" b="1"/>
             </a:lvl2pPr>
-            <a:lvl3pPr marL="1371600" lvl="2" indent="-228600" algn="l">
-              <a:lnSpc>
-                <a:spcPct val="90000"/>
-              </a:lnSpc>
-              <a:spcBef>
-                <a:spcPts val="512"/>
+            <a:lvl3pPr marL="568117" lvl="2" indent="-94686" algn="l">
+              <a:lnSpc>
+                <a:spcPct val="90000"/>
+              </a:lnSpc>
+              <a:spcBef>
+                <a:spcPts val="212"/>
               </a:spcBef>
               <a:spcAft>
                 <a:spcPts val="0"/>
@@ -7086,14 +7038,14 @@
               </a:buClr>
               <a:buSzPts val="1842"/>
               <a:buNone/>
-              <a:defRPr sz="1842" b="1"/>
+              <a:defRPr sz="763" b="1"/>
             </a:lvl3pPr>
-            <a:lvl4pPr marL="1828800" lvl="3" indent="-228600" algn="l">
-              <a:lnSpc>
-                <a:spcPct val="90000"/>
-              </a:lnSpc>
-              <a:spcBef>
-                <a:spcPts val="512"/>
+            <a:lvl4pPr marL="757489" lvl="3" indent="-94686" algn="l">
+              <a:lnSpc>
+                <a:spcPct val="90000"/>
+              </a:lnSpc>
+              <a:spcBef>
+                <a:spcPts val="212"/>
               </a:spcBef>
               <a:spcAft>
                 <a:spcPts val="0"/>
@@ -7103,14 +7055,14 @@
               </a:buClr>
               <a:buSzPts val="1638"/>
               <a:buNone/>
-              <a:defRPr sz="1638" b="1"/>
+              <a:defRPr sz="678" b="1"/>
             </a:lvl4pPr>
-            <a:lvl5pPr marL="2286000" lvl="4" indent="-228600" algn="l">
-              <a:lnSpc>
-                <a:spcPct val="90000"/>
-              </a:lnSpc>
-              <a:spcBef>
-                <a:spcPts val="512"/>
+            <a:lvl5pPr marL="946861" lvl="4" indent="-94686" algn="l">
+              <a:lnSpc>
+                <a:spcPct val="90000"/>
+              </a:lnSpc>
+              <a:spcBef>
+                <a:spcPts val="212"/>
               </a:spcBef>
               <a:spcAft>
                 <a:spcPts val="0"/>
@@ -7120,14 +7072,14 @@
               </a:buClr>
               <a:buSzPts val="1638"/>
               <a:buNone/>
-              <a:defRPr sz="1638" b="1"/>
+              <a:defRPr sz="678" b="1"/>
             </a:lvl5pPr>
-            <a:lvl6pPr marL="2743200" lvl="5" indent="-228600" algn="l">
-              <a:lnSpc>
-                <a:spcPct val="90000"/>
-              </a:lnSpc>
-              <a:spcBef>
-                <a:spcPts val="512"/>
+            <a:lvl6pPr marL="1136233" lvl="5" indent="-94686" algn="l">
+              <a:lnSpc>
+                <a:spcPct val="90000"/>
+              </a:lnSpc>
+              <a:spcBef>
+                <a:spcPts val="212"/>
               </a:spcBef>
               <a:spcAft>
                 <a:spcPts val="0"/>
@@ -7137,14 +7089,14 @@
               </a:buClr>
               <a:buSzPts val="1638"/>
               <a:buNone/>
-              <a:defRPr sz="1638" b="1"/>
+              <a:defRPr sz="678" b="1"/>
             </a:lvl6pPr>
-            <a:lvl7pPr marL="3200400" lvl="6" indent="-228600" algn="l">
-              <a:lnSpc>
-                <a:spcPct val="90000"/>
-              </a:lnSpc>
-              <a:spcBef>
-                <a:spcPts val="512"/>
+            <a:lvl7pPr marL="1325606" lvl="6" indent="-94686" algn="l">
+              <a:lnSpc>
+                <a:spcPct val="90000"/>
+              </a:lnSpc>
+              <a:spcBef>
+                <a:spcPts val="212"/>
               </a:spcBef>
               <a:spcAft>
                 <a:spcPts val="0"/>
@@ -7154,14 +7106,14 @@
               </a:buClr>
               <a:buSzPts val="1638"/>
               <a:buNone/>
-              <a:defRPr sz="1638" b="1"/>
+              <a:defRPr sz="678" b="1"/>
             </a:lvl7pPr>
-            <a:lvl8pPr marL="3657600" lvl="7" indent="-228600" algn="l">
-              <a:lnSpc>
-                <a:spcPct val="90000"/>
-              </a:lnSpc>
-              <a:spcBef>
-                <a:spcPts val="512"/>
+            <a:lvl8pPr marL="1514978" lvl="7" indent="-94686" algn="l">
+              <a:lnSpc>
+                <a:spcPct val="90000"/>
+              </a:lnSpc>
+              <a:spcBef>
+                <a:spcPts val="212"/>
               </a:spcBef>
               <a:spcAft>
                 <a:spcPts val="0"/>
@@ -7171,14 +7123,14 @@
               </a:buClr>
               <a:buSzPts val="1638"/>
               <a:buNone/>
-              <a:defRPr sz="1638" b="1"/>
+              <a:defRPr sz="678" b="1"/>
             </a:lvl8pPr>
-            <a:lvl9pPr marL="4114800" lvl="8" indent="-228600" algn="l">
-              <a:lnSpc>
-                <a:spcPct val="90000"/>
-              </a:lnSpc>
-              <a:spcBef>
-                <a:spcPts val="512"/>
+            <a:lvl9pPr marL="1704350" lvl="8" indent="-94686" algn="l">
+              <a:lnSpc>
+                <a:spcPct val="90000"/>
+              </a:lnSpc>
+              <a:spcBef>
+                <a:spcPts val="212"/>
               </a:spcBef>
               <a:spcAft>
                 <a:spcPts val="0"/>
@@ -7188,7 +7140,7 @@
               </a:buClr>
               <a:buSzPts val="1638"/>
               <a:buNone/>
-              <a:defRPr sz="1638" b="1"/>
+              <a:defRPr sz="678" b="1"/>
             </a:lvl9pPr>
           </a:lstStyle>
           <a:p>
@@ -7208,8 +7160,8 @@
         </p:nvSpPr>
         <p:spPr>
           <a:xfrm>
-            <a:off x="8383102" y="2564223"/>
-            <a:ext cx="7039822" cy="3771585"/>
+            <a:off x="3471863" y="3340101"/>
+            <a:ext cx="2915543" cy="4912784"/>
           </a:xfrm>
           <a:prstGeom prst="rect">
             <a:avLst/>
@@ -7224,12 +7176,12 @@
             <a:normAutofit/>
           </a:bodyPr>
           <a:lstStyle>
-            <a:lvl1pPr marL="457200" lvl="0" indent="-342900" algn="l">
-              <a:lnSpc>
-                <a:spcPct val="90000"/>
-              </a:lnSpc>
-              <a:spcBef>
-                <a:spcPts val="1024"/>
+            <a:lvl1pPr marL="189372" lvl="0" indent="-142029" algn="l">
+              <a:lnSpc>
+                <a:spcPct val="90000"/>
+              </a:lnSpc>
+              <a:spcBef>
+                <a:spcPts val="424"/>
               </a:spcBef>
               <a:spcAft>
                 <a:spcPts val="0"/>
@@ -7241,12 +7193,12 @@
               <a:buChar char="•"/>
               <a:defRPr/>
             </a:lvl1pPr>
-            <a:lvl2pPr marL="914400" lvl="1" indent="-342900" algn="l">
-              <a:lnSpc>
-                <a:spcPct val="90000"/>
-              </a:lnSpc>
-              <a:spcBef>
-                <a:spcPts val="512"/>
+            <a:lvl2pPr marL="378744" lvl="1" indent="-142029" algn="l">
+              <a:lnSpc>
+                <a:spcPct val="90000"/>
+              </a:lnSpc>
+              <a:spcBef>
+                <a:spcPts val="212"/>
               </a:spcBef>
               <a:spcAft>
                 <a:spcPts val="0"/>
@@ -7258,12 +7210,12 @@
               <a:buChar char="•"/>
               <a:defRPr/>
             </a:lvl2pPr>
-            <a:lvl3pPr marL="1371600" lvl="2" indent="-342900" algn="l">
-              <a:lnSpc>
-                <a:spcPct val="90000"/>
-              </a:lnSpc>
-              <a:spcBef>
-                <a:spcPts val="512"/>
+            <a:lvl3pPr marL="568117" lvl="2" indent="-142029" algn="l">
+              <a:lnSpc>
+                <a:spcPct val="90000"/>
+              </a:lnSpc>
+              <a:spcBef>
+                <a:spcPts val="212"/>
               </a:spcBef>
               <a:spcAft>
                 <a:spcPts val="0"/>
@@ -7275,12 +7227,12 @@
               <a:buChar char="•"/>
               <a:defRPr/>
             </a:lvl3pPr>
-            <a:lvl4pPr marL="1828800" lvl="3" indent="-342900" algn="l">
-              <a:lnSpc>
-                <a:spcPct val="90000"/>
-              </a:lnSpc>
-              <a:spcBef>
-                <a:spcPts val="512"/>
+            <a:lvl4pPr marL="757489" lvl="3" indent="-142029" algn="l">
+              <a:lnSpc>
+                <a:spcPct val="90000"/>
+              </a:lnSpc>
+              <a:spcBef>
+                <a:spcPts val="212"/>
               </a:spcBef>
               <a:spcAft>
                 <a:spcPts val="0"/>
@@ -7292,12 +7244,12 @@
               <a:buChar char="•"/>
               <a:defRPr/>
             </a:lvl4pPr>
-            <a:lvl5pPr marL="2286000" lvl="4" indent="-342900" algn="l">
-              <a:lnSpc>
-                <a:spcPct val="90000"/>
-              </a:lnSpc>
-              <a:spcBef>
-                <a:spcPts val="512"/>
+            <a:lvl5pPr marL="946861" lvl="4" indent="-142029" algn="l">
+              <a:lnSpc>
+                <a:spcPct val="90000"/>
+              </a:lnSpc>
+              <a:spcBef>
+                <a:spcPts val="212"/>
               </a:spcBef>
               <a:spcAft>
                 <a:spcPts val="0"/>
@@ -7309,12 +7261,12 @@
               <a:buChar char="•"/>
               <a:defRPr/>
             </a:lvl5pPr>
-            <a:lvl6pPr marL="2743200" lvl="5" indent="-342900" algn="l">
-              <a:lnSpc>
-                <a:spcPct val="90000"/>
-              </a:lnSpc>
-              <a:spcBef>
-                <a:spcPts val="512"/>
+            <a:lvl6pPr marL="1136233" lvl="5" indent="-142029" algn="l">
+              <a:lnSpc>
+                <a:spcPct val="90000"/>
+              </a:lnSpc>
+              <a:spcBef>
+                <a:spcPts val="212"/>
               </a:spcBef>
               <a:spcAft>
                 <a:spcPts val="0"/>
@@ -7326,12 +7278,12 @@
               <a:buChar char="•"/>
               <a:defRPr/>
             </a:lvl6pPr>
-            <a:lvl7pPr marL="3200400" lvl="6" indent="-342900" algn="l">
-              <a:lnSpc>
-                <a:spcPct val="90000"/>
-              </a:lnSpc>
-              <a:spcBef>
-                <a:spcPts val="512"/>
+            <a:lvl7pPr marL="1325606" lvl="6" indent="-142029" algn="l">
+              <a:lnSpc>
+                <a:spcPct val="90000"/>
+              </a:lnSpc>
+              <a:spcBef>
+                <a:spcPts val="212"/>
               </a:spcBef>
               <a:spcAft>
                 <a:spcPts val="0"/>
@@ -7343,12 +7295,12 @@
               <a:buChar char="•"/>
               <a:defRPr/>
             </a:lvl7pPr>
-            <a:lvl8pPr marL="3657600" lvl="7" indent="-342900" algn="l">
-              <a:lnSpc>
-                <a:spcPct val="90000"/>
-              </a:lnSpc>
-              <a:spcBef>
-                <a:spcPts val="512"/>
+            <a:lvl8pPr marL="1514978" lvl="7" indent="-142029" algn="l">
+              <a:lnSpc>
+                <a:spcPct val="90000"/>
+              </a:lnSpc>
+              <a:spcBef>
+                <a:spcPts val="212"/>
               </a:spcBef>
               <a:spcAft>
                 <a:spcPts val="0"/>
@@ -7360,12 +7312,12 @@
               <a:buChar char="•"/>
               <a:defRPr/>
             </a:lvl8pPr>
-            <a:lvl9pPr marL="4114800" lvl="8" indent="-342900" algn="l">
-              <a:lnSpc>
-                <a:spcPct val="90000"/>
-              </a:lnSpc>
-              <a:spcBef>
-                <a:spcPts val="512"/>
+            <a:lvl9pPr marL="1704350" lvl="8" indent="-142029" algn="l">
+              <a:lnSpc>
+                <a:spcPct val="90000"/>
+              </a:lnSpc>
+              <a:spcBef>
+                <a:spcPts val="212"/>
               </a:spcBef>
               <a:spcAft>
                 <a:spcPts val="0"/>
@@ -7395,8 +7347,8 @@
         </p:nvSpPr>
         <p:spPr>
           <a:xfrm>
-            <a:off x="1138446" y="6506431"/>
-            <a:ext cx="3725823" cy="373746"/>
+            <a:off x="471488" y="8475134"/>
+            <a:ext cx="1543050" cy="486833"/>
           </a:xfrm>
           <a:prstGeom prst="rect">
             <a:avLst/>
@@ -7528,8 +7480,8 @@
         </p:nvSpPr>
         <p:spPr>
           <a:xfrm>
-            <a:off x="5485240" y="6506431"/>
-            <a:ext cx="5588734" cy="373746"/>
+            <a:off x="2271713" y="8475134"/>
+            <a:ext cx="2314575" cy="486833"/>
           </a:xfrm>
           <a:prstGeom prst="rect">
             <a:avLst/>
@@ -7661,8 +7613,8 @@
         </p:nvSpPr>
         <p:spPr>
           <a:xfrm>
-            <a:off x="11694944" y="6506431"/>
-            <a:ext cx="3725823" cy="373746"/>
+            <a:off x="4843463" y="8475134"/>
+            <a:ext cx="1543050" cy="486833"/>
           </a:xfrm>
           <a:prstGeom prst="rect">
             <a:avLst/>
@@ -7742,20 +7694,12 @@
             </a:lvl9pPr>
           </a:lstStyle>
           <a:p>
-            <a:pPr marL="0" lvl="0" indent="0" algn="r" rtl="0">
-              <a:spcBef>
-                <a:spcPts val="0"/>
-              </a:spcBef>
-              <a:spcAft>
-                <a:spcPts val="0"/>
-              </a:spcAft>
-              <a:buNone/>
-            </a:pPr>
             <a:fld id="{00000000-1234-1234-1234-123412341234}" type="slidenum">
-              <a:rPr lang="en-CA"/>
+              <a:rPr lang="en-CA" smtClean="0"/>
+              <a:pPr/>
               <a:t>‹#›</a:t>
             </a:fld>
-            <a:endParaRPr/>
+            <a:endParaRPr lang="en-CA"/>
           </a:p>
         </p:txBody>
       </p:sp>
@@ -7796,8 +7740,8 @@
         </p:nvSpPr>
         <p:spPr>
           <a:xfrm>
-            <a:off x="1138446" y="373747"/>
-            <a:ext cx="14282321" cy="1356861"/>
+            <a:off x="471488" y="486835"/>
+            <a:ext cx="5915025" cy="1767417"/>
           </a:xfrm>
           <a:prstGeom prst="rect">
             <a:avLst/>
@@ -7935,8 +7879,8 @@
         </p:nvSpPr>
         <p:spPr>
           <a:xfrm>
-            <a:off x="1138446" y="6506431"/>
-            <a:ext cx="3725823" cy="373746"/>
+            <a:off x="471488" y="8475134"/>
+            <a:ext cx="1543050" cy="486833"/>
           </a:xfrm>
           <a:prstGeom prst="rect">
             <a:avLst/>
@@ -8068,8 +8012,8 @@
         </p:nvSpPr>
         <p:spPr>
           <a:xfrm>
-            <a:off x="5485240" y="6506431"/>
-            <a:ext cx="5588734" cy="373746"/>
+            <a:off x="2271713" y="8475134"/>
+            <a:ext cx="2314575" cy="486833"/>
           </a:xfrm>
           <a:prstGeom prst="rect">
             <a:avLst/>
@@ -8201,8 +8145,8 @@
         </p:nvSpPr>
         <p:spPr>
           <a:xfrm>
-            <a:off x="11694944" y="6506431"/>
-            <a:ext cx="3725823" cy="373746"/>
+            <a:off x="4843463" y="8475134"/>
+            <a:ext cx="1543050" cy="486833"/>
           </a:xfrm>
           <a:prstGeom prst="rect">
             <a:avLst/>
@@ -8282,20 +8226,12 @@
             </a:lvl9pPr>
           </a:lstStyle>
           <a:p>
-            <a:pPr marL="0" lvl="0" indent="0" algn="r" rtl="0">
-              <a:spcBef>
-                <a:spcPts val="0"/>
-              </a:spcBef>
-              <a:spcAft>
-                <a:spcPts val="0"/>
-              </a:spcAft>
-              <a:buNone/>
-            </a:pPr>
             <a:fld id="{00000000-1234-1234-1234-123412341234}" type="slidenum">
-              <a:rPr lang="en-CA"/>
+              <a:rPr lang="en-CA" smtClean="0"/>
+              <a:pPr/>
               <a:t>‹#›</a:t>
             </a:fld>
-            <a:endParaRPr/>
+            <a:endParaRPr lang="en-CA"/>
           </a:p>
         </p:txBody>
       </p:sp>
@@ -8336,8 +8272,8 @@
         </p:nvSpPr>
         <p:spPr>
           <a:xfrm>
-            <a:off x="1138446" y="6506431"/>
-            <a:ext cx="3725823" cy="373746"/>
+            <a:off x="471488" y="8475134"/>
+            <a:ext cx="1543050" cy="486833"/>
           </a:xfrm>
           <a:prstGeom prst="rect">
             <a:avLst/>
@@ -8469,8 +8405,8 @@
         </p:nvSpPr>
         <p:spPr>
           <a:xfrm>
-            <a:off x="5485240" y="6506431"/>
-            <a:ext cx="5588734" cy="373746"/>
+            <a:off x="2271713" y="8475134"/>
+            <a:ext cx="2314575" cy="486833"/>
           </a:xfrm>
           <a:prstGeom prst="rect">
             <a:avLst/>
@@ -8602,8 +8538,8 @@
         </p:nvSpPr>
         <p:spPr>
           <a:xfrm>
-            <a:off x="11694944" y="6506431"/>
-            <a:ext cx="3725823" cy="373746"/>
+            <a:off x="4843463" y="8475134"/>
+            <a:ext cx="1543050" cy="486833"/>
           </a:xfrm>
           <a:prstGeom prst="rect">
             <a:avLst/>
@@ -8683,20 +8619,12 @@
             </a:lvl9pPr>
           </a:lstStyle>
           <a:p>
-            <a:pPr marL="0" lvl="0" indent="0" algn="r" rtl="0">
-              <a:spcBef>
-                <a:spcPts val="0"/>
-              </a:spcBef>
-              <a:spcAft>
-                <a:spcPts val="0"/>
-              </a:spcAft>
-              <a:buNone/>
-            </a:pPr>
             <a:fld id="{00000000-1234-1234-1234-123412341234}" type="slidenum">
-              <a:rPr lang="en-CA"/>
+              <a:rPr lang="en-CA" smtClean="0"/>
+              <a:pPr/>
               <a:t>‹#›</a:t>
             </a:fld>
-            <a:endParaRPr/>
+            <a:endParaRPr lang="en-CA"/>
           </a:p>
         </p:txBody>
       </p:sp>
@@ -8737,8 +8665,8 @@
         </p:nvSpPr>
         <p:spPr>
           <a:xfrm>
-            <a:off x="1140603" y="467995"/>
-            <a:ext cx="5340777" cy="1637983"/>
+            <a:off x="472381" y="609600"/>
+            <a:ext cx="2211883" cy="2133601"/>
           </a:xfrm>
           <a:prstGeom prst="rect">
             <a:avLst/>
@@ -8769,7 +8697,7 @@
               <a:buSzPts val="3276"/>
               <a:buFont typeface="Play"/>
               <a:buNone/>
-              <a:defRPr sz="3276"/>
+              <a:defRPr sz="1357"/>
             </a:lvl1pPr>
             <a:lvl2pPr lvl="1">
               <a:spcBef>
@@ -8877,8 +8805,8 @@
         </p:nvSpPr>
         <p:spPr>
           <a:xfrm>
-            <a:off x="7039822" y="1010740"/>
-            <a:ext cx="8383102" cy="4988697"/>
+            <a:off x="2915543" y="1316568"/>
+            <a:ext cx="3471863" cy="6498167"/>
           </a:xfrm>
           <a:prstGeom prst="rect">
             <a:avLst/>
@@ -8893,12 +8821,12 @@
             <a:normAutofit/>
           </a:bodyPr>
           <a:lstStyle>
-            <a:lvl1pPr marL="457200" lvl="0" indent="-436626" algn="l">
-              <a:lnSpc>
-                <a:spcPct val="90000"/>
-              </a:lnSpc>
-              <a:spcBef>
-                <a:spcPts val="1024"/>
+            <a:lvl1pPr marL="189372" lvl="0" indent="-180850" algn="l">
+              <a:lnSpc>
+                <a:spcPct val="90000"/>
+              </a:lnSpc>
+              <a:spcBef>
+                <a:spcPts val="424"/>
               </a:spcBef>
               <a:spcAft>
                 <a:spcPts val="0"/>
@@ -8908,14 +8836,14 @@
               </a:buClr>
               <a:buSzPts val="3276"/>
               <a:buChar char="•"/>
-              <a:defRPr sz="3276"/>
+              <a:defRPr sz="1357"/>
             </a:lvl1pPr>
-            <a:lvl2pPr marL="914400" lvl="1" indent="-410591" algn="l">
-              <a:lnSpc>
-                <a:spcPct val="90000"/>
-              </a:lnSpc>
-              <a:spcBef>
-                <a:spcPts val="512"/>
+            <a:lvl2pPr marL="378744" lvl="1" indent="-170067" algn="l">
+              <a:lnSpc>
+                <a:spcPct val="90000"/>
+              </a:lnSpc>
+              <a:spcBef>
+                <a:spcPts val="212"/>
               </a:spcBef>
               <a:spcAft>
                 <a:spcPts val="0"/>
@@ -8925,14 +8853,14 @@
               </a:buClr>
               <a:buSzPts val="2866"/>
               <a:buChar char="•"/>
-              <a:defRPr sz="2866"/>
+              <a:defRPr sz="1187"/>
             </a:lvl2pPr>
-            <a:lvl3pPr marL="1371600" lvl="2" indent="-384620" algn="l">
-              <a:lnSpc>
-                <a:spcPct val="90000"/>
-              </a:lnSpc>
-              <a:spcBef>
-                <a:spcPts val="512"/>
+            <a:lvl3pPr marL="568117" lvl="2" indent="-159310" algn="l">
+              <a:lnSpc>
+                <a:spcPct val="90000"/>
+              </a:lnSpc>
+              <a:spcBef>
+                <a:spcPts val="212"/>
               </a:spcBef>
               <a:spcAft>
                 <a:spcPts val="0"/>
@@ -8942,14 +8870,14 @@
               </a:buClr>
               <a:buSzPts val="2457"/>
               <a:buChar char="•"/>
-              <a:defRPr sz="2457"/>
+              <a:defRPr sz="1018"/>
             </a:lvl3pPr>
-            <a:lvl4pPr marL="1828800" lvl="3" indent="-358585" algn="l">
-              <a:lnSpc>
-                <a:spcPct val="90000"/>
-              </a:lnSpc>
-              <a:spcBef>
-                <a:spcPts val="512"/>
+            <a:lvl4pPr marL="757489" lvl="3" indent="-148526" algn="l">
+              <a:lnSpc>
+                <a:spcPct val="90000"/>
+              </a:lnSpc>
+              <a:spcBef>
+                <a:spcPts val="212"/>
               </a:spcBef>
               <a:spcAft>
                 <a:spcPts val="0"/>
@@ -8959,14 +8887,14 @@
               </a:buClr>
               <a:buSzPts val="2047"/>
               <a:buChar char="•"/>
-              <a:defRPr sz="2047"/>
+              <a:defRPr sz="848"/>
             </a:lvl4pPr>
-            <a:lvl5pPr marL="2286000" lvl="4" indent="-358585" algn="l">
-              <a:lnSpc>
-                <a:spcPct val="90000"/>
-              </a:lnSpc>
-              <a:spcBef>
-                <a:spcPts val="512"/>
+            <a:lvl5pPr marL="946861" lvl="4" indent="-148526" algn="l">
+              <a:lnSpc>
+                <a:spcPct val="90000"/>
+              </a:lnSpc>
+              <a:spcBef>
+                <a:spcPts val="212"/>
               </a:spcBef>
               <a:spcAft>
                 <a:spcPts val="0"/>
@@ -8976,14 +8904,14 @@
               </a:buClr>
               <a:buSzPts val="2047"/>
               <a:buChar char="•"/>
-              <a:defRPr sz="2047"/>
+              <a:defRPr sz="848"/>
             </a:lvl5pPr>
-            <a:lvl6pPr marL="2743200" lvl="5" indent="-358585" algn="l">
-              <a:lnSpc>
-                <a:spcPct val="90000"/>
-              </a:lnSpc>
-              <a:spcBef>
-                <a:spcPts val="512"/>
+            <a:lvl6pPr marL="1136233" lvl="5" indent="-148526" algn="l">
+              <a:lnSpc>
+                <a:spcPct val="90000"/>
+              </a:lnSpc>
+              <a:spcBef>
+                <a:spcPts val="212"/>
               </a:spcBef>
               <a:spcAft>
                 <a:spcPts val="0"/>
@@ -8993,14 +8921,14 @@
               </a:buClr>
               <a:buSzPts val="2047"/>
               <a:buChar char="•"/>
-              <a:defRPr sz="2047"/>
+              <a:defRPr sz="848"/>
             </a:lvl6pPr>
-            <a:lvl7pPr marL="3200400" lvl="6" indent="-358585" algn="l">
-              <a:lnSpc>
-                <a:spcPct val="90000"/>
-              </a:lnSpc>
-              <a:spcBef>
-                <a:spcPts val="512"/>
+            <a:lvl7pPr marL="1325606" lvl="6" indent="-148526" algn="l">
+              <a:lnSpc>
+                <a:spcPct val="90000"/>
+              </a:lnSpc>
+              <a:spcBef>
+                <a:spcPts val="212"/>
               </a:spcBef>
               <a:spcAft>
                 <a:spcPts val="0"/>
@@ -9010,14 +8938,14 @@
               </a:buClr>
               <a:buSzPts val="2047"/>
               <a:buChar char="•"/>
-              <a:defRPr sz="2047"/>
+              <a:defRPr sz="848"/>
             </a:lvl7pPr>
-            <a:lvl8pPr marL="3657600" lvl="7" indent="-358584" algn="l">
-              <a:lnSpc>
-                <a:spcPct val="90000"/>
-              </a:lnSpc>
-              <a:spcBef>
-                <a:spcPts val="512"/>
+            <a:lvl8pPr marL="1514978" lvl="7" indent="-148525" algn="l">
+              <a:lnSpc>
+                <a:spcPct val="90000"/>
+              </a:lnSpc>
+              <a:spcBef>
+                <a:spcPts val="212"/>
               </a:spcBef>
               <a:spcAft>
                 <a:spcPts val="0"/>
@@ -9027,14 +8955,14 @@
               </a:buClr>
               <a:buSzPts val="2047"/>
               <a:buChar char="•"/>
-              <a:defRPr sz="2047"/>
+              <a:defRPr sz="848"/>
             </a:lvl8pPr>
-            <a:lvl9pPr marL="4114800" lvl="8" indent="-358584" algn="l">
-              <a:lnSpc>
-                <a:spcPct val="90000"/>
-              </a:lnSpc>
-              <a:spcBef>
-                <a:spcPts val="512"/>
+            <a:lvl9pPr marL="1704350" lvl="8" indent="-148525" algn="l">
+              <a:lnSpc>
+                <a:spcPct val="90000"/>
+              </a:lnSpc>
+              <a:spcBef>
+                <a:spcPts val="212"/>
               </a:spcBef>
               <a:spcAft>
                 <a:spcPts val="0"/>
@@ -9044,7 +8972,7 @@
               </a:buClr>
               <a:buSzPts val="2047"/>
               <a:buChar char="•"/>
-              <a:defRPr sz="2047"/>
+              <a:defRPr sz="848"/>
             </a:lvl9pPr>
           </a:lstStyle>
           <a:p>
@@ -9064,8 +8992,8 @@
         </p:nvSpPr>
         <p:spPr>
           <a:xfrm>
-            <a:off x="1140603" y="2105977"/>
-            <a:ext cx="5340777" cy="3901584"/>
+            <a:off x="472381" y="2743199"/>
+            <a:ext cx="2211883" cy="5082118"/>
           </a:xfrm>
           <a:prstGeom prst="rect">
             <a:avLst/>
@@ -9080,12 +9008,12 @@
             <a:normAutofit/>
           </a:bodyPr>
           <a:lstStyle>
-            <a:lvl1pPr marL="457200" lvl="0" indent="-228600" algn="l">
-              <a:lnSpc>
-                <a:spcPct val="90000"/>
-              </a:lnSpc>
-              <a:spcBef>
-                <a:spcPts val="1024"/>
+            <a:lvl1pPr marL="189372" lvl="0" indent="-94686" algn="l">
+              <a:lnSpc>
+                <a:spcPct val="90000"/>
+              </a:lnSpc>
+              <a:spcBef>
+                <a:spcPts val="424"/>
               </a:spcBef>
               <a:spcAft>
                 <a:spcPts val="0"/>
@@ -9095,14 +9023,14 @@
               </a:buClr>
               <a:buSzPts val="1638"/>
               <a:buNone/>
-              <a:defRPr sz="1638"/>
+              <a:defRPr sz="678"/>
             </a:lvl1pPr>
-            <a:lvl2pPr marL="914400" lvl="1" indent="-228600" algn="l">
-              <a:lnSpc>
-                <a:spcPct val="90000"/>
-              </a:lnSpc>
-              <a:spcBef>
-                <a:spcPts val="512"/>
+            <a:lvl2pPr marL="378744" lvl="1" indent="-94686" algn="l">
+              <a:lnSpc>
+                <a:spcPct val="90000"/>
+              </a:lnSpc>
+              <a:spcBef>
+                <a:spcPts val="212"/>
               </a:spcBef>
               <a:spcAft>
                 <a:spcPts val="0"/>
@@ -9112,14 +9040,14 @@
               </a:buClr>
               <a:buSzPts val="1433"/>
               <a:buNone/>
-              <a:defRPr sz="1433"/>
+              <a:defRPr sz="594"/>
             </a:lvl2pPr>
-            <a:lvl3pPr marL="1371600" lvl="2" indent="-228600" algn="l">
-              <a:lnSpc>
-                <a:spcPct val="90000"/>
-              </a:lnSpc>
-              <a:spcBef>
-                <a:spcPts val="512"/>
+            <a:lvl3pPr marL="568117" lvl="2" indent="-94686" algn="l">
+              <a:lnSpc>
+                <a:spcPct val="90000"/>
+              </a:lnSpc>
+              <a:spcBef>
+                <a:spcPts val="212"/>
               </a:spcBef>
               <a:spcAft>
                 <a:spcPts val="0"/>
@@ -9129,14 +9057,14 @@
               </a:buClr>
               <a:buSzPts val="1228"/>
               <a:buNone/>
-              <a:defRPr sz="1228"/>
+              <a:defRPr sz="509"/>
             </a:lvl3pPr>
-            <a:lvl4pPr marL="1828800" lvl="3" indent="-228600" algn="l">
-              <a:lnSpc>
-                <a:spcPct val="90000"/>
-              </a:lnSpc>
-              <a:spcBef>
-                <a:spcPts val="512"/>
+            <a:lvl4pPr marL="757489" lvl="3" indent="-94686" algn="l">
+              <a:lnSpc>
+                <a:spcPct val="90000"/>
+              </a:lnSpc>
+              <a:spcBef>
+                <a:spcPts val="212"/>
               </a:spcBef>
               <a:spcAft>
                 <a:spcPts val="0"/>
@@ -9146,14 +9074,14 @@
               </a:buClr>
               <a:buSzPts val="1024"/>
               <a:buNone/>
-              <a:defRPr sz="1024"/>
+              <a:defRPr sz="424"/>
             </a:lvl4pPr>
-            <a:lvl5pPr marL="2286000" lvl="4" indent="-228600" algn="l">
-              <a:lnSpc>
-                <a:spcPct val="90000"/>
-              </a:lnSpc>
-              <a:spcBef>
-                <a:spcPts val="512"/>
+            <a:lvl5pPr marL="946861" lvl="4" indent="-94686" algn="l">
+              <a:lnSpc>
+                <a:spcPct val="90000"/>
+              </a:lnSpc>
+              <a:spcBef>
+                <a:spcPts val="212"/>
               </a:spcBef>
               <a:spcAft>
                 <a:spcPts val="0"/>
@@ -9163,14 +9091,14 @@
               </a:buClr>
               <a:buSzPts val="1024"/>
               <a:buNone/>
-              <a:defRPr sz="1024"/>
+              <a:defRPr sz="424"/>
             </a:lvl5pPr>
-            <a:lvl6pPr marL="2743200" lvl="5" indent="-228600" algn="l">
-              <a:lnSpc>
-                <a:spcPct val="90000"/>
-              </a:lnSpc>
-              <a:spcBef>
-                <a:spcPts val="512"/>
+            <a:lvl6pPr marL="1136233" lvl="5" indent="-94686" algn="l">
+              <a:lnSpc>
+                <a:spcPct val="90000"/>
+              </a:lnSpc>
+              <a:spcBef>
+                <a:spcPts val="212"/>
               </a:spcBef>
               <a:spcAft>
                 <a:spcPts val="0"/>
@@ -9180,14 +9108,14 @@
               </a:buClr>
               <a:buSzPts val="1024"/>
               <a:buNone/>
-              <a:defRPr sz="1024"/>
+              <a:defRPr sz="424"/>
             </a:lvl6pPr>
-            <a:lvl7pPr marL="3200400" lvl="6" indent="-228600" algn="l">
-              <a:lnSpc>
-                <a:spcPct val="90000"/>
-              </a:lnSpc>
-              <a:spcBef>
-                <a:spcPts val="512"/>
+            <a:lvl7pPr marL="1325606" lvl="6" indent="-94686" algn="l">
+              <a:lnSpc>
+                <a:spcPct val="90000"/>
+              </a:lnSpc>
+              <a:spcBef>
+                <a:spcPts val="212"/>
               </a:spcBef>
               <a:spcAft>
                 <a:spcPts val="0"/>
@@ -9197,14 +9125,14 @@
               </a:buClr>
               <a:buSzPts val="1024"/>
               <a:buNone/>
-              <a:defRPr sz="1024"/>
+              <a:defRPr sz="424"/>
             </a:lvl7pPr>
-            <a:lvl8pPr marL="3657600" lvl="7" indent="-228600" algn="l">
-              <a:lnSpc>
-                <a:spcPct val="90000"/>
-              </a:lnSpc>
-              <a:spcBef>
-                <a:spcPts val="512"/>
+            <a:lvl8pPr marL="1514978" lvl="7" indent="-94686" algn="l">
+              <a:lnSpc>
+                <a:spcPct val="90000"/>
+              </a:lnSpc>
+              <a:spcBef>
+                <a:spcPts val="212"/>
               </a:spcBef>
               <a:spcAft>
                 <a:spcPts val="0"/>
@@ -9214,14 +9142,14 @@
               </a:buClr>
               <a:buSzPts val="1024"/>
               <a:buNone/>
-              <a:defRPr sz="1024"/>
+              <a:defRPr sz="424"/>
             </a:lvl8pPr>
-            <a:lvl9pPr marL="4114800" lvl="8" indent="-228600" algn="l">
-              <a:lnSpc>
-                <a:spcPct val="90000"/>
-              </a:lnSpc>
-              <a:spcBef>
-                <a:spcPts val="512"/>
+            <a:lvl9pPr marL="1704350" lvl="8" indent="-94686" algn="l">
+              <a:lnSpc>
+                <a:spcPct val="90000"/>
+              </a:lnSpc>
+              <a:spcBef>
+                <a:spcPts val="212"/>
               </a:spcBef>
               <a:spcAft>
                 <a:spcPts val="0"/>
@@ -9231,7 +9159,7 @@
               </a:buClr>
               <a:buSzPts val="1024"/>
               <a:buNone/>
-              <a:defRPr sz="1024"/>
+              <a:defRPr sz="424"/>
             </a:lvl9pPr>
           </a:lstStyle>
           <a:p>
@@ -9251,8 +9179,8 @@
         </p:nvSpPr>
         <p:spPr>
           <a:xfrm>
-            <a:off x="1138446" y="6506431"/>
-            <a:ext cx="3725823" cy="373746"/>
+            <a:off x="471488" y="8475134"/>
+            <a:ext cx="1543050" cy="486833"/>
           </a:xfrm>
           <a:prstGeom prst="rect">
             <a:avLst/>
@@ -9384,8 +9312,8 @@
         </p:nvSpPr>
         <p:spPr>
           <a:xfrm>
-            <a:off x="5485240" y="6506431"/>
-            <a:ext cx="5588734" cy="373746"/>
+            <a:off x="2271713" y="8475134"/>
+            <a:ext cx="2314575" cy="486833"/>
           </a:xfrm>
           <a:prstGeom prst="rect">
             <a:avLst/>
@@ -9517,8 +9445,8 @@
         </p:nvSpPr>
         <p:spPr>
           <a:xfrm>
-            <a:off x="11694944" y="6506431"/>
-            <a:ext cx="3725823" cy="373746"/>
+            <a:off x="4843463" y="8475134"/>
+            <a:ext cx="1543050" cy="486833"/>
           </a:xfrm>
           <a:prstGeom prst="rect">
             <a:avLst/>
@@ -9598,20 +9526,12 @@
             </a:lvl9pPr>
           </a:lstStyle>
           <a:p>
-            <a:pPr marL="0" lvl="0" indent="0" algn="r" rtl="0">
-              <a:spcBef>
-                <a:spcPts val="0"/>
-              </a:spcBef>
-              <a:spcAft>
-                <a:spcPts val="0"/>
-              </a:spcAft>
-              <a:buNone/>
-            </a:pPr>
             <a:fld id="{00000000-1234-1234-1234-123412341234}" type="slidenum">
-              <a:rPr lang="en-CA"/>
+              <a:rPr lang="en-CA" smtClean="0"/>
+              <a:pPr/>
               <a:t>‹#›</a:t>
             </a:fld>
-            <a:endParaRPr/>
+            <a:endParaRPr lang="en-CA"/>
           </a:p>
         </p:txBody>
       </p:sp>
@@ -9652,8 +9572,8 @@
         </p:nvSpPr>
         <p:spPr>
           <a:xfrm>
-            <a:off x="1140603" y="467995"/>
-            <a:ext cx="5340777" cy="1637983"/>
+            <a:off x="472381" y="609600"/>
+            <a:ext cx="2211883" cy="2133601"/>
           </a:xfrm>
           <a:prstGeom prst="rect">
             <a:avLst/>
@@ -9684,7 +9604,7 @@
               <a:buSzPts val="3276"/>
               <a:buFont typeface="Play"/>
               <a:buNone/>
-              <a:defRPr sz="3276"/>
+              <a:defRPr sz="1357"/>
             </a:lvl1pPr>
             <a:lvl2pPr lvl="1">
               <a:spcBef>
@@ -9792,8 +9712,8 @@
         </p:nvSpPr>
         <p:spPr>
           <a:xfrm>
-            <a:off x="7039822" y="1010740"/>
-            <a:ext cx="8383102" cy="4988697"/>
+            <a:off x="2915543" y="1316568"/>
+            <a:ext cx="3471863" cy="6498167"/>
           </a:xfrm>
           <a:prstGeom prst="rect">
             <a:avLst/>
@@ -9816,8 +9736,8 @@
         </p:nvSpPr>
         <p:spPr>
           <a:xfrm>
-            <a:off x="1140603" y="2105977"/>
-            <a:ext cx="5340777" cy="3901584"/>
+            <a:off x="472381" y="2743199"/>
+            <a:ext cx="2211883" cy="5082118"/>
           </a:xfrm>
           <a:prstGeom prst="rect">
             <a:avLst/>
@@ -9832,12 +9752,12 @@
             <a:normAutofit/>
           </a:bodyPr>
           <a:lstStyle>
-            <a:lvl1pPr marL="457200" lvl="0" indent="-228600" algn="l">
-              <a:lnSpc>
-                <a:spcPct val="90000"/>
-              </a:lnSpc>
-              <a:spcBef>
-                <a:spcPts val="1024"/>
+            <a:lvl1pPr marL="189372" lvl="0" indent="-94686" algn="l">
+              <a:lnSpc>
+                <a:spcPct val="90000"/>
+              </a:lnSpc>
+              <a:spcBef>
+                <a:spcPts val="424"/>
               </a:spcBef>
               <a:spcAft>
                 <a:spcPts val="0"/>
@@ -9847,14 +9767,14 @@
               </a:buClr>
               <a:buSzPts val="1638"/>
               <a:buNone/>
-              <a:defRPr sz="1638"/>
+              <a:defRPr sz="678"/>
             </a:lvl1pPr>
-            <a:lvl2pPr marL="914400" lvl="1" indent="-228600" algn="l">
-              <a:lnSpc>
-                <a:spcPct val="90000"/>
-              </a:lnSpc>
-              <a:spcBef>
-                <a:spcPts val="512"/>
+            <a:lvl2pPr marL="378744" lvl="1" indent="-94686" algn="l">
+              <a:lnSpc>
+                <a:spcPct val="90000"/>
+              </a:lnSpc>
+              <a:spcBef>
+                <a:spcPts val="212"/>
               </a:spcBef>
               <a:spcAft>
                 <a:spcPts val="0"/>
@@ -9864,14 +9784,14 @@
               </a:buClr>
               <a:buSzPts val="1433"/>
               <a:buNone/>
-              <a:defRPr sz="1433"/>
+              <a:defRPr sz="594"/>
             </a:lvl2pPr>
-            <a:lvl3pPr marL="1371600" lvl="2" indent="-228600" algn="l">
-              <a:lnSpc>
-                <a:spcPct val="90000"/>
-              </a:lnSpc>
-              <a:spcBef>
-                <a:spcPts val="512"/>
+            <a:lvl3pPr marL="568117" lvl="2" indent="-94686" algn="l">
+              <a:lnSpc>
+                <a:spcPct val="90000"/>
+              </a:lnSpc>
+              <a:spcBef>
+                <a:spcPts val="212"/>
               </a:spcBef>
               <a:spcAft>
                 <a:spcPts val="0"/>
@@ -9881,14 +9801,14 @@
               </a:buClr>
               <a:buSzPts val="1228"/>
               <a:buNone/>
-              <a:defRPr sz="1228"/>
+              <a:defRPr sz="509"/>
             </a:lvl3pPr>
-            <a:lvl4pPr marL="1828800" lvl="3" indent="-228600" algn="l">
-              <a:lnSpc>
-                <a:spcPct val="90000"/>
-              </a:lnSpc>
-              <a:spcBef>
-                <a:spcPts val="512"/>
+            <a:lvl4pPr marL="757489" lvl="3" indent="-94686" algn="l">
+              <a:lnSpc>
+                <a:spcPct val="90000"/>
+              </a:lnSpc>
+              <a:spcBef>
+                <a:spcPts val="212"/>
               </a:spcBef>
               <a:spcAft>
                 <a:spcPts val="0"/>
@@ -9898,14 +9818,14 @@
               </a:buClr>
               <a:buSzPts val="1024"/>
               <a:buNone/>
-              <a:defRPr sz="1024"/>
+              <a:defRPr sz="424"/>
             </a:lvl4pPr>
-            <a:lvl5pPr marL="2286000" lvl="4" indent="-228600" algn="l">
-              <a:lnSpc>
-                <a:spcPct val="90000"/>
-              </a:lnSpc>
-              <a:spcBef>
-                <a:spcPts val="512"/>
+            <a:lvl5pPr marL="946861" lvl="4" indent="-94686" algn="l">
+              <a:lnSpc>
+                <a:spcPct val="90000"/>
+              </a:lnSpc>
+              <a:spcBef>
+                <a:spcPts val="212"/>
               </a:spcBef>
               <a:spcAft>
                 <a:spcPts val="0"/>
@@ -9915,14 +9835,14 @@
               </a:buClr>
               <a:buSzPts val="1024"/>
               <a:buNone/>
-              <a:defRPr sz="1024"/>
+              <a:defRPr sz="424"/>
             </a:lvl5pPr>
-            <a:lvl6pPr marL="2743200" lvl="5" indent="-228600" algn="l">
-              <a:lnSpc>
-                <a:spcPct val="90000"/>
-              </a:lnSpc>
-              <a:spcBef>
-                <a:spcPts val="512"/>
+            <a:lvl6pPr marL="1136233" lvl="5" indent="-94686" algn="l">
+              <a:lnSpc>
+                <a:spcPct val="90000"/>
+              </a:lnSpc>
+              <a:spcBef>
+                <a:spcPts val="212"/>
               </a:spcBef>
               <a:spcAft>
                 <a:spcPts val="0"/>
@@ -9932,14 +9852,14 @@
               </a:buClr>
               <a:buSzPts val="1024"/>
               <a:buNone/>
-              <a:defRPr sz="1024"/>
+              <a:defRPr sz="424"/>
             </a:lvl6pPr>
-            <a:lvl7pPr marL="3200400" lvl="6" indent="-228600" algn="l">
-              <a:lnSpc>
-                <a:spcPct val="90000"/>
-              </a:lnSpc>
-              <a:spcBef>
-                <a:spcPts val="512"/>
+            <a:lvl7pPr marL="1325606" lvl="6" indent="-94686" algn="l">
+              <a:lnSpc>
+                <a:spcPct val="90000"/>
+              </a:lnSpc>
+              <a:spcBef>
+                <a:spcPts val="212"/>
               </a:spcBef>
               <a:spcAft>
                 <a:spcPts val="0"/>
@@ -9949,14 +9869,14 @@
               </a:buClr>
               <a:buSzPts val="1024"/>
               <a:buNone/>
-              <a:defRPr sz="1024"/>
+              <a:defRPr sz="424"/>
             </a:lvl7pPr>
-            <a:lvl8pPr marL="3657600" lvl="7" indent="-228600" algn="l">
-              <a:lnSpc>
-                <a:spcPct val="90000"/>
-              </a:lnSpc>
-              <a:spcBef>
-                <a:spcPts val="512"/>
+            <a:lvl8pPr marL="1514978" lvl="7" indent="-94686" algn="l">
+              <a:lnSpc>
+                <a:spcPct val="90000"/>
+              </a:lnSpc>
+              <a:spcBef>
+                <a:spcPts val="212"/>
               </a:spcBef>
               <a:spcAft>
                 <a:spcPts val="0"/>
@@ -9966,14 +9886,14 @@
               </a:buClr>
               <a:buSzPts val="1024"/>
               <a:buNone/>
-              <a:defRPr sz="1024"/>
+              <a:defRPr sz="424"/>
             </a:lvl8pPr>
-            <a:lvl9pPr marL="4114800" lvl="8" indent="-228600" algn="l">
-              <a:lnSpc>
-                <a:spcPct val="90000"/>
-              </a:lnSpc>
-              <a:spcBef>
-                <a:spcPts val="512"/>
+            <a:lvl9pPr marL="1704350" lvl="8" indent="-94686" algn="l">
+              <a:lnSpc>
+                <a:spcPct val="90000"/>
+              </a:lnSpc>
+              <a:spcBef>
+                <a:spcPts val="212"/>
               </a:spcBef>
               <a:spcAft>
                 <a:spcPts val="0"/>
@@ -9983,7 +9903,7 @@
               </a:buClr>
               <a:buSzPts val="1024"/>
               <a:buNone/>
-              <a:defRPr sz="1024"/>
+              <a:defRPr sz="424"/>
             </a:lvl9pPr>
           </a:lstStyle>
           <a:p>
@@ -10003,8 +9923,8 @@
         </p:nvSpPr>
         <p:spPr>
           <a:xfrm>
-            <a:off x="1138446" y="6506431"/>
-            <a:ext cx="3725823" cy="373746"/>
+            <a:off x="471488" y="8475134"/>
+            <a:ext cx="1543050" cy="486833"/>
           </a:xfrm>
           <a:prstGeom prst="rect">
             <a:avLst/>
@@ -10136,8 +10056,8 @@
         </p:nvSpPr>
         <p:spPr>
           <a:xfrm>
-            <a:off x="5485240" y="6506431"/>
-            <a:ext cx="5588734" cy="373746"/>
+            <a:off x="2271713" y="8475134"/>
+            <a:ext cx="2314575" cy="486833"/>
           </a:xfrm>
           <a:prstGeom prst="rect">
             <a:avLst/>
@@ -10269,8 +10189,8 @@
         </p:nvSpPr>
         <p:spPr>
           <a:xfrm>
-            <a:off x="11694944" y="6506431"/>
-            <a:ext cx="3725823" cy="373746"/>
+            <a:off x="4843463" y="8475134"/>
+            <a:ext cx="1543050" cy="486833"/>
           </a:xfrm>
           <a:prstGeom prst="rect">
             <a:avLst/>
@@ -10350,20 +10270,12 @@
             </a:lvl9pPr>
           </a:lstStyle>
           <a:p>
-            <a:pPr marL="0" lvl="0" indent="0" algn="r" rtl="0">
-              <a:spcBef>
-                <a:spcPts val="0"/>
-              </a:spcBef>
-              <a:spcAft>
-                <a:spcPts val="0"/>
-              </a:spcAft>
-              <a:buNone/>
-            </a:pPr>
             <a:fld id="{00000000-1234-1234-1234-123412341234}" type="slidenum">
-              <a:rPr lang="en-CA"/>
+              <a:rPr lang="en-CA" smtClean="0"/>
+              <a:pPr/>
               <a:t>‹#›</a:t>
             </a:fld>
-            <a:endParaRPr/>
+            <a:endParaRPr lang="en-CA"/>
           </a:p>
         </p:txBody>
       </p:sp>
@@ -10412,8 +10324,8 @@
         </p:nvSpPr>
         <p:spPr>
           <a:xfrm>
-            <a:off x="1138446" y="373747"/>
-            <a:ext cx="14282321" cy="1356861"/>
+            <a:off x="471488" y="486835"/>
+            <a:ext cx="5915025" cy="1767417"/>
           </a:xfrm>
           <a:prstGeom prst="rect">
             <a:avLst/>
@@ -10560,8 +10472,8 @@
         </p:nvSpPr>
         <p:spPr>
           <a:xfrm>
-            <a:off x="1138446" y="1868730"/>
-            <a:ext cx="14282321" cy="4454078"/>
+            <a:off x="471488" y="2434167"/>
+            <a:ext cx="5915025" cy="5801784"/>
           </a:xfrm>
           <a:prstGeom prst="rect">
             <a:avLst/>
@@ -10828,8 +10740,8 @@
         </p:nvSpPr>
         <p:spPr>
           <a:xfrm>
-            <a:off x="1138446" y="6506431"/>
-            <a:ext cx="3725823" cy="373746"/>
+            <a:off x="471488" y="8475134"/>
+            <a:ext cx="1543050" cy="486833"/>
           </a:xfrm>
           <a:prstGeom prst="rect">
             <a:avLst/>
@@ -10853,7 +10765,7 @@
               </a:spcAft>
               <a:buSzPts val="1400"/>
               <a:buNone/>
-              <a:defRPr sz="1228" b="0" i="0" u="none" strike="noStrike" cap="none">
+              <a:defRPr sz="509" b="0" i="0" u="none" strike="noStrike" cap="none">
                 <a:solidFill>
                   <a:srgbClr val="757575"/>
                 </a:solidFill>
@@ -10872,7 +10784,7 @@
               </a:spcAft>
               <a:buSzPts val="1400"/>
               <a:buNone/>
-              <a:defRPr sz="1800" b="0" i="0" u="none" strike="noStrike" cap="none">
+              <a:defRPr sz="746" b="0" i="0" u="none" strike="noStrike" cap="none">
                 <a:solidFill>
                   <a:schemeClr val="dk1"/>
                 </a:solidFill>
@@ -10891,7 +10803,7 @@
               </a:spcAft>
               <a:buSzPts val="1400"/>
               <a:buNone/>
-              <a:defRPr sz="1800" b="0" i="0" u="none" strike="noStrike" cap="none">
+              <a:defRPr sz="746" b="0" i="0" u="none" strike="noStrike" cap="none">
                 <a:solidFill>
                   <a:schemeClr val="dk1"/>
                 </a:solidFill>
@@ -10910,7 +10822,7 @@
               </a:spcAft>
               <a:buSzPts val="1400"/>
               <a:buNone/>
-              <a:defRPr sz="1800" b="0" i="0" u="none" strike="noStrike" cap="none">
+              <a:defRPr sz="746" b="0" i="0" u="none" strike="noStrike" cap="none">
                 <a:solidFill>
                   <a:schemeClr val="dk1"/>
                 </a:solidFill>
@@ -10929,7 +10841,7 @@
               </a:spcAft>
               <a:buSzPts val="1400"/>
               <a:buNone/>
-              <a:defRPr sz="1800" b="0" i="0" u="none" strike="noStrike" cap="none">
+              <a:defRPr sz="746" b="0" i="0" u="none" strike="noStrike" cap="none">
                 <a:solidFill>
                   <a:schemeClr val="dk1"/>
                 </a:solidFill>
@@ -10948,7 +10860,7 @@
               </a:spcAft>
               <a:buSzPts val="1400"/>
               <a:buNone/>
-              <a:defRPr sz="1800" b="0" i="0" u="none" strike="noStrike" cap="none">
+              <a:defRPr sz="746" b="0" i="0" u="none" strike="noStrike" cap="none">
                 <a:solidFill>
                   <a:schemeClr val="dk1"/>
                 </a:solidFill>
@@ -10967,7 +10879,7 @@
               </a:spcAft>
               <a:buSzPts val="1400"/>
               <a:buNone/>
-              <a:defRPr sz="1800" b="0" i="0" u="none" strike="noStrike" cap="none">
+              <a:defRPr sz="746" b="0" i="0" u="none" strike="noStrike" cap="none">
                 <a:solidFill>
                   <a:schemeClr val="dk1"/>
                 </a:solidFill>
@@ -10986,7 +10898,7 @@
               </a:spcAft>
               <a:buSzPts val="1400"/>
               <a:buNone/>
-              <a:defRPr sz="1800" b="0" i="0" u="none" strike="noStrike" cap="none">
+              <a:defRPr sz="746" b="0" i="0" u="none" strike="noStrike" cap="none">
                 <a:solidFill>
                   <a:schemeClr val="dk1"/>
                 </a:solidFill>
@@ -11005,7 +10917,7 @@
               </a:spcAft>
               <a:buSzPts val="1400"/>
               <a:buNone/>
-              <a:defRPr sz="1800" b="0" i="0" u="none" strike="noStrike" cap="none">
+              <a:defRPr sz="746" b="0" i="0" u="none" strike="noStrike" cap="none">
                 <a:solidFill>
                   <a:schemeClr val="dk1"/>
                 </a:solidFill>
@@ -11033,8 +10945,8 @@
         </p:nvSpPr>
         <p:spPr>
           <a:xfrm>
-            <a:off x="5485240" y="6506431"/>
-            <a:ext cx="5588734" cy="373746"/>
+            <a:off x="2271713" y="8475134"/>
+            <a:ext cx="2314575" cy="486833"/>
           </a:xfrm>
           <a:prstGeom prst="rect">
             <a:avLst/>
@@ -11058,7 +10970,7 @@
               </a:spcAft>
               <a:buSzPts val="1400"/>
               <a:buNone/>
-              <a:defRPr sz="1228" b="0" i="0" u="none" strike="noStrike" cap="none">
+              <a:defRPr sz="509" b="0" i="0" u="none" strike="noStrike" cap="none">
                 <a:solidFill>
                   <a:srgbClr val="757575"/>
                 </a:solidFill>
@@ -11077,7 +10989,7 @@
               </a:spcAft>
               <a:buSzPts val="1400"/>
               <a:buNone/>
-              <a:defRPr sz="1800" b="0" i="0" u="none" strike="noStrike" cap="none">
+              <a:defRPr sz="746" b="0" i="0" u="none" strike="noStrike" cap="none">
                 <a:solidFill>
                   <a:schemeClr val="dk1"/>
                 </a:solidFill>
@@ -11096,7 +11008,7 @@
               </a:spcAft>
               <a:buSzPts val="1400"/>
               <a:buNone/>
-              <a:defRPr sz="1800" b="0" i="0" u="none" strike="noStrike" cap="none">
+              <a:defRPr sz="746" b="0" i="0" u="none" strike="noStrike" cap="none">
                 <a:solidFill>
                   <a:schemeClr val="dk1"/>
                 </a:solidFill>
@@ -11115,7 +11027,7 @@
               </a:spcAft>
               <a:buSzPts val="1400"/>
               <a:buNone/>
-              <a:defRPr sz="1800" b="0" i="0" u="none" strike="noStrike" cap="none">
+              <a:defRPr sz="746" b="0" i="0" u="none" strike="noStrike" cap="none">
                 <a:solidFill>
                   <a:schemeClr val="dk1"/>
                 </a:solidFill>
@@ -11134,7 +11046,7 @@
               </a:spcAft>
               <a:buSzPts val="1400"/>
               <a:buNone/>
-              <a:defRPr sz="1800" b="0" i="0" u="none" strike="noStrike" cap="none">
+              <a:defRPr sz="746" b="0" i="0" u="none" strike="noStrike" cap="none">
                 <a:solidFill>
                   <a:schemeClr val="dk1"/>
                 </a:solidFill>
@@ -11153,7 +11065,7 @@
               </a:spcAft>
               <a:buSzPts val="1400"/>
               <a:buNone/>
-              <a:defRPr sz="1800" b="0" i="0" u="none" strike="noStrike" cap="none">
+              <a:defRPr sz="746" b="0" i="0" u="none" strike="noStrike" cap="none">
                 <a:solidFill>
                   <a:schemeClr val="dk1"/>
                 </a:solidFill>
@@ -11172,7 +11084,7 @@
               </a:spcAft>
               <a:buSzPts val="1400"/>
               <a:buNone/>
-              <a:defRPr sz="1800" b="0" i="0" u="none" strike="noStrike" cap="none">
+              <a:defRPr sz="746" b="0" i="0" u="none" strike="noStrike" cap="none">
                 <a:solidFill>
                   <a:schemeClr val="dk1"/>
                 </a:solidFill>
@@ -11191,7 +11103,7 @@
               </a:spcAft>
               <a:buSzPts val="1400"/>
               <a:buNone/>
-              <a:defRPr sz="1800" b="0" i="0" u="none" strike="noStrike" cap="none">
+              <a:defRPr sz="746" b="0" i="0" u="none" strike="noStrike" cap="none">
                 <a:solidFill>
                   <a:schemeClr val="dk1"/>
                 </a:solidFill>
@@ -11210,7 +11122,7 @@
               </a:spcAft>
               <a:buSzPts val="1400"/>
               <a:buNone/>
-              <a:defRPr sz="1800" b="0" i="0" u="none" strike="noStrike" cap="none">
+              <a:defRPr sz="746" b="0" i="0" u="none" strike="noStrike" cap="none">
                 <a:solidFill>
                   <a:schemeClr val="dk1"/>
                 </a:solidFill>
@@ -11238,8 +11150,8 @@
         </p:nvSpPr>
         <p:spPr>
           <a:xfrm>
-            <a:off x="11694944" y="6506431"/>
-            <a:ext cx="3725823" cy="373746"/>
+            <a:off x="4843463" y="8475134"/>
+            <a:ext cx="1543050" cy="486833"/>
           </a:xfrm>
           <a:prstGeom prst="rect">
             <a:avLst/>
@@ -11259,7 +11171,7 @@
                 <a:spcPts val="0"/>
               </a:spcBef>
               <a:buNone/>
-              <a:defRPr sz="1228" b="0" i="0" u="none" strike="noStrike" cap="none">
+              <a:defRPr sz="509" b="0" i="0" u="none" strike="noStrike" cap="none">
                 <a:solidFill>
                   <a:srgbClr val="757575"/>
                 </a:solidFill>
@@ -11274,7 +11186,7 @@
                 <a:spcPts val="0"/>
               </a:spcBef>
               <a:buNone/>
-              <a:defRPr sz="1228" b="0" i="0" u="none" strike="noStrike" cap="none">
+              <a:defRPr sz="509" b="0" i="0" u="none" strike="noStrike" cap="none">
                 <a:solidFill>
                   <a:srgbClr val="757575"/>
                 </a:solidFill>
@@ -11289,7 +11201,7 @@
                 <a:spcPts val="0"/>
               </a:spcBef>
               <a:buNone/>
-              <a:defRPr sz="1228" b="0" i="0" u="none" strike="noStrike" cap="none">
+              <a:defRPr sz="509" b="0" i="0" u="none" strike="noStrike" cap="none">
                 <a:solidFill>
                   <a:srgbClr val="757575"/>
                 </a:solidFill>
@@ -11304,7 +11216,7 @@
                 <a:spcPts val="0"/>
               </a:spcBef>
               <a:buNone/>
-              <a:defRPr sz="1228" b="0" i="0" u="none" strike="noStrike" cap="none">
+              <a:defRPr sz="509" b="0" i="0" u="none" strike="noStrike" cap="none">
                 <a:solidFill>
                   <a:srgbClr val="757575"/>
                 </a:solidFill>
@@ -11319,7 +11231,7 @@
                 <a:spcPts val="0"/>
               </a:spcBef>
               <a:buNone/>
-              <a:defRPr sz="1228" b="0" i="0" u="none" strike="noStrike" cap="none">
+              <a:defRPr sz="509" b="0" i="0" u="none" strike="noStrike" cap="none">
                 <a:solidFill>
                   <a:srgbClr val="757575"/>
                 </a:solidFill>
@@ -11334,7 +11246,7 @@
                 <a:spcPts val="0"/>
               </a:spcBef>
               <a:buNone/>
-              <a:defRPr sz="1228" b="0" i="0" u="none" strike="noStrike" cap="none">
+              <a:defRPr sz="509" b="0" i="0" u="none" strike="noStrike" cap="none">
                 <a:solidFill>
                   <a:srgbClr val="757575"/>
                 </a:solidFill>
@@ -11349,7 +11261,7 @@
                 <a:spcPts val="0"/>
               </a:spcBef>
               <a:buNone/>
-              <a:defRPr sz="1228" b="0" i="0" u="none" strike="noStrike" cap="none">
+              <a:defRPr sz="509" b="0" i="0" u="none" strike="noStrike" cap="none">
                 <a:solidFill>
                   <a:srgbClr val="757575"/>
                 </a:solidFill>
@@ -11364,7 +11276,7 @@
                 <a:spcPts val="0"/>
               </a:spcBef>
               <a:buNone/>
-              <a:defRPr sz="1228" b="0" i="0" u="none" strike="noStrike" cap="none">
+              <a:defRPr sz="509" b="0" i="0" u="none" strike="noStrike" cap="none">
                 <a:solidFill>
                   <a:srgbClr val="757575"/>
                 </a:solidFill>
@@ -11379,7 +11291,7 @@
                 <a:spcPts val="0"/>
               </a:spcBef>
               <a:buNone/>
-              <a:defRPr sz="1228" b="0" i="0" u="none" strike="noStrike" cap="none">
+              <a:defRPr sz="509" b="0" i="0" u="none" strike="noStrike" cap="none">
                 <a:solidFill>
                   <a:srgbClr val="757575"/>
                 </a:solidFill>
@@ -11391,20 +11303,12 @@
             </a:lvl9pPr>
           </a:lstStyle>
           <a:p>
-            <a:pPr marL="0" lvl="0" indent="0" algn="r" rtl="0">
-              <a:spcBef>
-                <a:spcPts val="0"/>
-              </a:spcBef>
-              <a:spcAft>
-                <a:spcPts val="0"/>
-              </a:spcAft>
-              <a:buNone/>
-            </a:pPr>
             <a:fld id="{00000000-1234-1234-1234-123412341234}" type="slidenum">
-              <a:rPr lang="en-CA"/>
+              <a:rPr lang="en-CA" smtClean="0"/>
+              <a:pPr/>
               <a:t>‹#›</a:t>
             </a:fld>
-            <a:endParaRPr/>
+            <a:endParaRPr lang="en-CA"/>
           </a:p>
         </p:txBody>
       </p:sp>
@@ -11452,7 +11356,7 @@
           <a:srgbClr val="000000"/>
         </a:buClr>
         <a:buFont typeface="Arial"/>
-        <a:defRPr sz="1400" b="0" i="0" u="none" strike="noStrike" cap="none">
+        <a:defRPr sz="580" b="0" i="0" u="none" strike="noStrike" cap="none">
           <a:solidFill>
             <a:srgbClr val="000000"/>
           </a:solidFill>
@@ -11476,7 +11380,7 @@
           <a:srgbClr val="000000"/>
         </a:buClr>
         <a:buFont typeface="Arial"/>
-        <a:defRPr sz="1400" b="0" i="0" u="none" strike="noStrike" cap="none">
+        <a:defRPr sz="580" b="0" i="0" u="none" strike="noStrike" cap="none">
           <a:solidFill>
             <a:srgbClr val="000000"/>
           </a:solidFill>
@@ -11500,7 +11404,7 @@
           <a:srgbClr val="000000"/>
         </a:buClr>
         <a:buFont typeface="Arial"/>
-        <a:defRPr sz="1400" b="0" i="0" u="none" strike="noStrike" cap="none">
+        <a:defRPr sz="580" b="0" i="0" u="none" strike="noStrike" cap="none">
           <a:solidFill>
             <a:srgbClr val="000000"/>
           </a:solidFill>
@@ -11524,7 +11428,7 @@
           <a:srgbClr val="000000"/>
         </a:buClr>
         <a:buFont typeface="Arial"/>
-        <a:defRPr sz="1400" b="0" i="0" u="none" strike="noStrike" cap="none">
+        <a:defRPr sz="580" b="0" i="0" u="none" strike="noStrike" cap="none">
           <a:solidFill>
             <a:srgbClr val="000000"/>
           </a:solidFill>
@@ -11548,7 +11452,7 @@
           <a:srgbClr val="000000"/>
         </a:buClr>
         <a:buFont typeface="Arial"/>
-        <a:defRPr sz="1400" b="0" i="0" u="none" strike="noStrike" cap="none">
+        <a:defRPr sz="580" b="0" i="0" u="none" strike="noStrike" cap="none">
           <a:solidFill>
             <a:srgbClr val="000000"/>
           </a:solidFill>
@@ -11572,7 +11476,7 @@
           <a:srgbClr val="000000"/>
         </a:buClr>
         <a:buFont typeface="Arial"/>
-        <a:defRPr sz="1400" b="0" i="0" u="none" strike="noStrike" cap="none">
+        <a:defRPr sz="580" b="0" i="0" u="none" strike="noStrike" cap="none">
           <a:solidFill>
             <a:srgbClr val="000000"/>
           </a:solidFill>
@@ -11596,7 +11500,7 @@
           <a:srgbClr val="000000"/>
         </a:buClr>
         <a:buFont typeface="Arial"/>
-        <a:defRPr sz="1400" b="0" i="0" u="none" strike="noStrike" cap="none">
+        <a:defRPr sz="580" b="0" i="0" u="none" strike="noStrike" cap="none">
           <a:solidFill>
             <a:srgbClr val="000000"/>
           </a:solidFill>
@@ -11620,7 +11524,7 @@
           <a:srgbClr val="000000"/>
         </a:buClr>
         <a:buFont typeface="Arial"/>
-        <a:defRPr sz="1400" b="0" i="0" u="none" strike="noStrike" cap="none">
+        <a:defRPr sz="580" b="0" i="0" u="none" strike="noStrike" cap="none">
           <a:solidFill>
             <a:srgbClr val="000000"/>
           </a:solidFill>
@@ -11644,7 +11548,7 @@
           <a:srgbClr val="000000"/>
         </a:buClr>
         <a:buFont typeface="Arial"/>
-        <a:defRPr sz="1400" b="0" i="0" u="none" strike="noStrike" cap="none">
+        <a:defRPr sz="580" b="0" i="0" u="none" strike="noStrike" cap="none">
           <a:solidFill>
             <a:srgbClr val="000000"/>
           </a:solidFill>
@@ -11681,7 +11585,7 @@
           <a:srgbClr val="000000"/>
         </a:buClr>
         <a:buFont typeface="Arial"/>
-        <a:defRPr sz="1400" b="0" i="0" u="none" strike="noStrike" cap="none">
+        <a:defRPr sz="580" b="0" i="0" u="none" strike="noStrike" cap="none">
           <a:solidFill>
             <a:srgbClr val="000000"/>
           </a:solidFill>
@@ -11705,7 +11609,7 @@
           <a:srgbClr val="000000"/>
         </a:buClr>
         <a:buFont typeface="Arial"/>
-        <a:defRPr sz="1400" b="0" i="0" u="none" strike="noStrike" cap="none">
+        <a:defRPr sz="580" b="0" i="0" u="none" strike="noStrike" cap="none">
           <a:solidFill>
             <a:srgbClr val="000000"/>
           </a:solidFill>
@@ -11729,7 +11633,7 @@
           <a:srgbClr val="000000"/>
         </a:buClr>
         <a:buFont typeface="Arial"/>
-        <a:defRPr sz="1400" b="0" i="0" u="none" strike="noStrike" cap="none">
+        <a:defRPr sz="580" b="0" i="0" u="none" strike="noStrike" cap="none">
           <a:solidFill>
             <a:srgbClr val="000000"/>
           </a:solidFill>
@@ -11753,7 +11657,7 @@
           <a:srgbClr val="000000"/>
         </a:buClr>
         <a:buFont typeface="Arial"/>
-        <a:defRPr sz="1400" b="0" i="0" u="none" strike="noStrike" cap="none">
+        <a:defRPr sz="580" b="0" i="0" u="none" strike="noStrike" cap="none">
           <a:solidFill>
             <a:srgbClr val="000000"/>
           </a:solidFill>
@@ -11777,7 +11681,7 @@
           <a:srgbClr val="000000"/>
         </a:buClr>
         <a:buFont typeface="Arial"/>
-        <a:defRPr sz="1400" b="0" i="0" u="none" strike="noStrike" cap="none">
+        <a:defRPr sz="580" b="0" i="0" u="none" strike="noStrike" cap="none">
           <a:solidFill>
             <a:srgbClr val="000000"/>
           </a:solidFill>
@@ -11801,7 +11705,7 @@
           <a:srgbClr val="000000"/>
         </a:buClr>
         <a:buFont typeface="Arial"/>
-        <a:defRPr sz="1400" b="0" i="0" u="none" strike="noStrike" cap="none">
+        <a:defRPr sz="580" b="0" i="0" u="none" strike="noStrike" cap="none">
           <a:solidFill>
             <a:srgbClr val="000000"/>
           </a:solidFill>
@@ -11825,7 +11729,7 @@
           <a:srgbClr val="000000"/>
         </a:buClr>
         <a:buFont typeface="Arial"/>
-        <a:defRPr sz="1400" b="0" i="0" u="none" strike="noStrike" cap="none">
+        <a:defRPr sz="580" b="0" i="0" u="none" strike="noStrike" cap="none">
           <a:solidFill>
             <a:srgbClr val="000000"/>
           </a:solidFill>
@@ -11849,7 +11753,7 @@
           <a:srgbClr val="000000"/>
         </a:buClr>
         <a:buFont typeface="Arial"/>
-        <a:defRPr sz="1400" b="0" i="0" u="none" strike="noStrike" cap="none">
+        <a:defRPr sz="580" b="0" i="0" u="none" strike="noStrike" cap="none">
           <a:solidFill>
             <a:srgbClr val="000000"/>
           </a:solidFill>
@@ -11873,7 +11777,7 @@
           <a:srgbClr val="000000"/>
         </a:buClr>
         <a:buFont typeface="Arial"/>
-        <a:defRPr sz="1400" b="0" i="0" u="none" strike="noStrike" cap="none">
+        <a:defRPr sz="580" b="0" i="0" u="none" strike="noStrike" cap="none">
           <a:solidFill>
             <a:srgbClr val="000000"/>
           </a:solidFill>
@@ -11910,7 +11814,7 @@
           <a:srgbClr val="000000"/>
         </a:buClr>
         <a:buFont typeface="Arial"/>
-        <a:defRPr sz="1400" b="0" i="0" u="none" strike="noStrike" cap="none">
+        <a:defRPr sz="580" b="0" i="0" u="none" strike="noStrike" cap="none">
           <a:solidFill>
             <a:srgbClr val="000000"/>
           </a:solidFill>
@@ -11934,7 +11838,7 @@
           <a:srgbClr val="000000"/>
         </a:buClr>
         <a:buFont typeface="Arial"/>
-        <a:defRPr sz="1400" b="0" i="0" u="none" strike="noStrike" cap="none">
+        <a:defRPr sz="580" b="0" i="0" u="none" strike="noStrike" cap="none">
           <a:solidFill>
             <a:srgbClr val="000000"/>
           </a:solidFill>
@@ -11958,7 +11862,7 @@
           <a:srgbClr val="000000"/>
         </a:buClr>
         <a:buFont typeface="Arial"/>
-        <a:defRPr sz="1400" b="0" i="0" u="none" strike="noStrike" cap="none">
+        <a:defRPr sz="580" b="0" i="0" u="none" strike="noStrike" cap="none">
           <a:solidFill>
             <a:srgbClr val="000000"/>
           </a:solidFill>
@@ -11982,7 +11886,7 @@
           <a:srgbClr val="000000"/>
         </a:buClr>
         <a:buFont typeface="Arial"/>
-        <a:defRPr sz="1400" b="0" i="0" u="none" strike="noStrike" cap="none">
+        <a:defRPr sz="580" b="0" i="0" u="none" strike="noStrike" cap="none">
           <a:solidFill>
             <a:srgbClr val="000000"/>
           </a:solidFill>
@@ -12006,7 +11910,7 @@
           <a:srgbClr val="000000"/>
         </a:buClr>
         <a:buFont typeface="Arial"/>
-        <a:defRPr sz="1400" b="0" i="0" u="none" strike="noStrike" cap="none">
+        <a:defRPr sz="580" b="0" i="0" u="none" strike="noStrike" cap="none">
           <a:solidFill>
             <a:srgbClr val="000000"/>
           </a:solidFill>
@@ -12030,7 +11934,7 @@
           <a:srgbClr val="000000"/>
         </a:buClr>
         <a:buFont typeface="Arial"/>
-        <a:defRPr sz="1400" b="0" i="0" u="none" strike="noStrike" cap="none">
+        <a:defRPr sz="580" b="0" i="0" u="none" strike="noStrike" cap="none">
           <a:solidFill>
             <a:srgbClr val="000000"/>
           </a:solidFill>
@@ -12054,7 +11958,7 @@
           <a:srgbClr val="000000"/>
         </a:buClr>
         <a:buFont typeface="Arial"/>
-        <a:defRPr sz="1400" b="0" i="0" u="none" strike="noStrike" cap="none">
+        <a:defRPr sz="580" b="0" i="0" u="none" strike="noStrike" cap="none">
           <a:solidFill>
             <a:srgbClr val="000000"/>
           </a:solidFill>
@@ -12078,7 +11982,7 @@
           <a:srgbClr val="000000"/>
         </a:buClr>
         <a:buFont typeface="Arial"/>
-        <a:defRPr sz="1400" b="0" i="0" u="none" strike="noStrike" cap="none">
+        <a:defRPr sz="580" b="0" i="0" u="none" strike="noStrike" cap="none">
           <a:solidFill>
             <a:srgbClr val="000000"/>
           </a:solidFill>
@@ -12102,7 +12006,7 @@
           <a:srgbClr val="000000"/>
         </a:buClr>
         <a:buFont typeface="Arial"/>
-        <a:defRPr sz="1400" b="0" i="0" u="none" strike="noStrike" cap="none">
+        <a:defRPr sz="580" b="0" i="0" u="none" strike="noStrike" cap="none">
           <a:solidFill>
             <a:srgbClr val="000000"/>
           </a:solidFill>
@@ -12136,10 +12040,10 @@
       </p:grpSpPr>
       <p:pic>
         <p:nvPicPr>
-          <p:cNvPr id="9" name="Picture 8">
+          <p:cNvPr id="5" name="Picture 4">
             <a:extLst>
               <a:ext uri="{FF2B5EF4-FFF2-40B4-BE49-F238E27FC236}">
-                <a16:creationId xmlns:a16="http://schemas.microsoft.com/office/drawing/2014/main" id="{E5BB2904-B298-43FA-79AC-CB8CF20E311C}"/>
+                <a16:creationId xmlns:a16="http://schemas.microsoft.com/office/drawing/2014/main" id="{FC383F4E-82EE-4026-4581-BB6D78E049DA}"/>
               </a:ext>
             </a:extLst>
           </p:cNvPr>
@@ -12156,8 +12060,8 @@
         </p:blipFill>
         <p:spPr>
           <a:xfrm>
-            <a:off x="12735500" y="3473860"/>
-            <a:ext cx="3823713" cy="2973999"/>
+            <a:off x="2374972" y="208343"/>
+            <a:ext cx="1823388" cy="1562903"/>
           </a:xfrm>
           <a:prstGeom prst="rect">
             <a:avLst/>
@@ -12166,10 +12070,10 @@
       </p:pic>
       <p:pic>
         <p:nvPicPr>
-          <p:cNvPr id="6" name="Picture 5">
+          <p:cNvPr id="7" name="Picture 6">
             <a:extLst>
               <a:ext uri="{FF2B5EF4-FFF2-40B4-BE49-F238E27FC236}">
-                <a16:creationId xmlns:a16="http://schemas.microsoft.com/office/drawing/2014/main" id="{2C8A954B-5EF9-3F63-9A81-9D62FCF20AAA}"/>
+                <a16:creationId xmlns:a16="http://schemas.microsoft.com/office/drawing/2014/main" id="{03504FB4-106E-BC82-E040-2FAC001593B8}"/>
               </a:ext>
             </a:extLst>
           </p:cNvPr>
@@ -12186,20 +12090,236 @@
         </p:blipFill>
         <p:spPr>
           <a:xfrm>
-            <a:off x="4148170" y="54980"/>
-            <a:ext cx="3557363" cy="3049168"/>
+            <a:off x="183578" y="43241"/>
+            <a:ext cx="2024944" cy="3370936"/>
           </a:xfrm>
           <a:prstGeom prst="rect">
             <a:avLst/>
           </a:prstGeom>
         </p:spPr>
       </p:pic>
+      <p:sp>
+        <p:nvSpPr>
+          <p:cNvPr id="8" name="Google Shape;90;p1">
+            <a:extLst>
+              <a:ext uri="{FF2B5EF4-FFF2-40B4-BE49-F238E27FC236}">
+                <a16:creationId xmlns:a16="http://schemas.microsoft.com/office/drawing/2014/main" id="{51B8AC2F-3FD5-4E93-941C-FBD70EB6B55F}"/>
+              </a:ext>
+            </a:extLst>
+          </p:cNvPr>
+          <p:cNvSpPr txBox="1"/>
+          <p:nvPr/>
+        </p:nvSpPr>
+        <p:spPr>
+          <a:xfrm>
+            <a:off x="2225009" y="2201"/>
+            <a:ext cx="815546" cy="276959"/>
+          </a:xfrm>
+          <a:prstGeom prst="rect">
+            <a:avLst/>
+          </a:prstGeom>
+          <a:noFill/>
+          <a:ln>
+            <a:noFill/>
+          </a:ln>
+        </p:spPr>
+        <p:txBody>
+          <a:bodyPr spcFirstLastPara="1" wrap="square" lIns="91425" tIns="45700" rIns="91425" bIns="45700" anchor="t" anchorCtr="0">
+            <a:spAutoFit/>
+          </a:bodyPr>
+          <a:lstStyle/>
+          <a:p>
+            <a:pPr marL="0" marR="0" lvl="0" indent="0" algn="l" rtl="0">
+              <a:spcBef>
+                <a:spcPts val="0"/>
+              </a:spcBef>
+              <a:spcAft>
+                <a:spcPts val="0"/>
+              </a:spcAft>
+              <a:buNone/>
+            </a:pPr>
+            <a:r>
+              <a:rPr lang="en-CA" sz="1200" b="1" i="0" u="none" strike="noStrike" cap="none" dirty="0">
+                <a:solidFill>
+                  <a:schemeClr val="dk1"/>
+                </a:solidFill>
+                <a:latin typeface="Arial"/>
+                <a:ea typeface="Arial"/>
+                <a:cs typeface="Arial"/>
+                <a:sym typeface="Arial"/>
+              </a:rPr>
+              <a:t>b</a:t>
+            </a:r>
+            <a:endParaRPr sz="1200" b="1" dirty="0"/>
+          </a:p>
+        </p:txBody>
+      </p:sp>
+      <p:sp>
+        <p:nvSpPr>
+          <p:cNvPr id="10" name="Google Shape;91;p1">
+            <a:extLst>
+              <a:ext uri="{FF2B5EF4-FFF2-40B4-BE49-F238E27FC236}">
+                <a16:creationId xmlns:a16="http://schemas.microsoft.com/office/drawing/2014/main" id="{61B01E8B-4C87-B8A7-227C-36E2D2D97A5A}"/>
+              </a:ext>
+            </a:extLst>
+          </p:cNvPr>
+          <p:cNvSpPr txBox="1"/>
+          <p:nvPr/>
+        </p:nvSpPr>
+        <p:spPr>
+          <a:xfrm>
+            <a:off x="4198360" y="-16171"/>
+            <a:ext cx="815546" cy="276959"/>
+          </a:xfrm>
+          <a:prstGeom prst="rect">
+            <a:avLst/>
+          </a:prstGeom>
+          <a:noFill/>
+          <a:ln>
+            <a:noFill/>
+          </a:ln>
+        </p:spPr>
+        <p:txBody>
+          <a:bodyPr spcFirstLastPara="1" wrap="square" lIns="91425" tIns="45700" rIns="91425" bIns="45700" anchor="t" anchorCtr="0">
+            <a:spAutoFit/>
+          </a:bodyPr>
+          <a:lstStyle/>
+          <a:p>
+            <a:pPr marL="0" marR="0" lvl="0" indent="0" algn="l" rtl="0">
+              <a:spcBef>
+                <a:spcPts val="0"/>
+              </a:spcBef>
+              <a:spcAft>
+                <a:spcPts val="0"/>
+              </a:spcAft>
+              <a:buNone/>
+            </a:pPr>
+            <a:r>
+              <a:rPr lang="en-CA" sz="1200" b="1" dirty="0">
+                <a:solidFill>
+                  <a:schemeClr val="dk1"/>
+                </a:solidFill>
+              </a:rPr>
+              <a:t>c</a:t>
+            </a:r>
+            <a:endParaRPr sz="1200" b="1" dirty="0"/>
+          </a:p>
+        </p:txBody>
+      </p:sp>
+      <p:sp>
+        <p:nvSpPr>
+          <p:cNvPr id="14" name="Google Shape;92;p1">
+            <a:extLst>
+              <a:ext uri="{FF2B5EF4-FFF2-40B4-BE49-F238E27FC236}">
+                <a16:creationId xmlns:a16="http://schemas.microsoft.com/office/drawing/2014/main" id="{92B8B93A-6656-8E21-3F20-7053E5EDCD7F}"/>
+              </a:ext>
+            </a:extLst>
+          </p:cNvPr>
+          <p:cNvSpPr txBox="1"/>
+          <p:nvPr/>
+        </p:nvSpPr>
+        <p:spPr>
+          <a:xfrm>
+            <a:off x="30996" y="2201"/>
+            <a:ext cx="815546" cy="276959"/>
+          </a:xfrm>
+          <a:prstGeom prst="rect">
+            <a:avLst/>
+          </a:prstGeom>
+          <a:noFill/>
+          <a:ln>
+            <a:noFill/>
+          </a:ln>
+        </p:spPr>
+        <p:txBody>
+          <a:bodyPr spcFirstLastPara="1" wrap="square" lIns="91425" tIns="45700" rIns="91425" bIns="45700" anchor="t" anchorCtr="0">
+            <a:spAutoFit/>
+          </a:bodyPr>
+          <a:lstStyle/>
+          <a:p>
+            <a:pPr marL="0" marR="0" lvl="0" indent="0" algn="l" rtl="0">
+              <a:spcBef>
+                <a:spcPts val="0"/>
+              </a:spcBef>
+              <a:spcAft>
+                <a:spcPts val="0"/>
+              </a:spcAft>
+              <a:buNone/>
+            </a:pPr>
+            <a:r>
+              <a:rPr lang="en-CA" sz="1200" b="1" dirty="0">
+                <a:solidFill>
+                  <a:schemeClr val="dk1"/>
+                </a:solidFill>
+                <a:latin typeface="Arial"/>
+                <a:ea typeface="Arial"/>
+                <a:cs typeface="Arial"/>
+                <a:sym typeface="Arial"/>
+              </a:rPr>
+              <a:t>a</a:t>
+            </a:r>
+            <a:endParaRPr sz="1200" b="1" dirty="0"/>
+          </a:p>
+        </p:txBody>
+      </p:sp>
+      <p:sp>
+        <p:nvSpPr>
+          <p:cNvPr id="15" name="Google Shape;103;p1">
+            <a:extLst>
+              <a:ext uri="{FF2B5EF4-FFF2-40B4-BE49-F238E27FC236}">
+                <a16:creationId xmlns:a16="http://schemas.microsoft.com/office/drawing/2014/main" id="{4A86B9F1-B0DE-C267-FEC6-76C0AE25A302}"/>
+              </a:ext>
+            </a:extLst>
+          </p:cNvPr>
+          <p:cNvSpPr txBox="1"/>
+          <p:nvPr/>
+        </p:nvSpPr>
+        <p:spPr>
+          <a:xfrm>
+            <a:off x="4262755" y="1741755"/>
+            <a:ext cx="815546" cy="276959"/>
+          </a:xfrm>
+          <a:prstGeom prst="rect">
+            <a:avLst/>
+          </a:prstGeom>
+          <a:noFill/>
+          <a:ln>
+            <a:noFill/>
+          </a:ln>
+        </p:spPr>
+        <p:txBody>
+          <a:bodyPr spcFirstLastPara="1" wrap="square" lIns="91425" tIns="45700" rIns="91425" bIns="45700" anchor="t" anchorCtr="0">
+            <a:spAutoFit/>
+          </a:bodyPr>
+          <a:lstStyle/>
+          <a:p>
+            <a:pPr marL="0" marR="0" lvl="0" indent="0" algn="l" rtl="0">
+              <a:spcBef>
+                <a:spcPts val="0"/>
+              </a:spcBef>
+              <a:spcAft>
+                <a:spcPts val="0"/>
+              </a:spcAft>
+              <a:buNone/>
+            </a:pPr>
+            <a:r>
+              <a:rPr lang="en-CA" sz="1200" b="1" dirty="0">
+                <a:solidFill>
+                  <a:schemeClr val="dk1"/>
+                </a:solidFill>
+              </a:rPr>
+              <a:t>e</a:t>
+            </a:r>
+            <a:endParaRPr sz="1200" b="1" dirty="0"/>
+          </a:p>
+        </p:txBody>
+      </p:sp>
       <p:pic>
         <p:nvPicPr>
-          <p:cNvPr id="3" name="Picture 2">
+          <p:cNvPr id="20" name="Picture 19">
             <a:extLst>
               <a:ext uri="{FF2B5EF4-FFF2-40B4-BE49-F238E27FC236}">
-                <a16:creationId xmlns:a16="http://schemas.microsoft.com/office/drawing/2014/main" id="{271AFA61-7F07-6EB6-B118-17D3B1E1D37C}"/>
+                <a16:creationId xmlns:a16="http://schemas.microsoft.com/office/drawing/2014/main" id="{90282F68-1768-1088-EF23-8AC94EC9CFD6}"/>
               </a:ext>
             </a:extLst>
           </p:cNvPr>
@@ -12216,8 +12336,38 @@
         </p:blipFill>
         <p:spPr>
           <a:xfrm>
-            <a:off x="202849" y="105780"/>
-            <a:ext cx="3822420" cy="6363205"/>
+            <a:off x="4410088" y="24259"/>
+            <a:ext cx="1975338" cy="1562904"/>
+          </a:xfrm>
+          <a:prstGeom prst="rect">
+            <a:avLst/>
+          </a:prstGeom>
+        </p:spPr>
+      </p:pic>
+      <p:pic>
+        <p:nvPicPr>
+          <p:cNvPr id="23" name="Picture 22">
+            <a:extLst>
+              <a:ext uri="{FF2B5EF4-FFF2-40B4-BE49-F238E27FC236}">
+                <a16:creationId xmlns:a16="http://schemas.microsoft.com/office/drawing/2014/main" id="{34C6A910-5E28-C73D-011D-B7DD46620195}"/>
+              </a:ext>
+            </a:extLst>
+          </p:cNvPr>
+          <p:cNvPicPr>
+            <a:picLocks noChangeAspect="1"/>
+          </p:cNvPicPr>
+          <p:nvPr/>
+        </p:nvPicPr>
+        <p:blipFill>
+          <a:blip r:embed="rId6"/>
+          <a:stretch>
+            <a:fillRect/>
+          </a:stretch>
+        </p:blipFill>
+        <p:spPr>
+          <a:xfrm>
+            <a:off x="2434749" y="2018714"/>
+            <a:ext cx="1975339" cy="1580272"/>
           </a:xfrm>
           <a:prstGeom prst="rect">
             <a:avLst/>
@@ -12226,14 +12376,20 @@
       </p:pic>
       <p:sp>
         <p:nvSpPr>
-          <p:cNvPr id="90" name="Google Shape;90;p1"/>
+          <p:cNvPr id="16" name="Google Shape;103;p1">
+            <a:extLst>
+              <a:ext uri="{FF2B5EF4-FFF2-40B4-BE49-F238E27FC236}">
+                <a16:creationId xmlns:a16="http://schemas.microsoft.com/office/drawing/2014/main" id="{DD32B8EE-40E7-7449-E188-E5CDB0209A42}"/>
+              </a:ext>
+            </a:extLst>
+          </p:cNvPr>
           <p:cNvSpPr txBox="1"/>
           <p:nvPr/>
         </p:nvSpPr>
         <p:spPr>
           <a:xfrm>
-            <a:off x="3881125" y="-23199"/>
-            <a:ext cx="815546" cy="369332"/>
+            <a:off x="2208522" y="1745712"/>
+            <a:ext cx="815546" cy="276959"/>
           </a:xfrm>
           <a:prstGeom prst="rect">
             <a:avLst/>
@@ -12259,209 +12415,7 @@
               <a:buNone/>
             </a:pPr>
             <a:r>
-              <a:rPr lang="en-CA" sz="1800" b="0" i="0" u="none" strike="noStrike" cap="none" dirty="0">
-                <a:solidFill>
-                  <a:schemeClr val="dk1"/>
-                </a:solidFill>
-                <a:latin typeface="Arial"/>
-                <a:ea typeface="Arial"/>
-                <a:cs typeface="Arial"/>
-                <a:sym typeface="Arial"/>
-              </a:rPr>
-              <a:t>b</a:t>
-            </a:r>
-            <a:endParaRPr dirty="0"/>
-          </a:p>
-        </p:txBody>
-      </p:sp>
-      <p:sp>
-        <p:nvSpPr>
-          <p:cNvPr id="91" name="Google Shape;91;p1"/>
-          <p:cNvSpPr txBox="1"/>
-          <p:nvPr/>
-        </p:nvSpPr>
-        <p:spPr>
-          <a:xfrm>
-            <a:off x="8118394" y="-25400"/>
-            <a:ext cx="815546" cy="369332"/>
-          </a:xfrm>
-          <a:prstGeom prst="rect">
-            <a:avLst/>
-          </a:prstGeom>
-          <a:noFill/>
-          <a:ln>
-            <a:noFill/>
-          </a:ln>
-        </p:spPr>
-        <p:txBody>
-          <a:bodyPr spcFirstLastPara="1" wrap="square" lIns="91425" tIns="45700" rIns="91425" bIns="45700" anchor="t" anchorCtr="0">
-            <a:spAutoFit/>
-          </a:bodyPr>
-          <a:lstStyle/>
-          <a:p>
-            <a:pPr marL="0" marR="0" lvl="0" indent="0" algn="l" rtl="0">
-              <a:spcBef>
-                <a:spcPts val="0"/>
-              </a:spcBef>
-              <a:spcAft>
-                <a:spcPts val="0"/>
-              </a:spcAft>
-              <a:buNone/>
-            </a:pPr>
-            <a:r>
-              <a:rPr lang="en-CA" sz="1800" dirty="0">
-                <a:solidFill>
-                  <a:schemeClr val="dk1"/>
-                </a:solidFill>
-                <a:latin typeface="Arial"/>
-                <a:ea typeface="Arial"/>
-                <a:cs typeface="Arial"/>
-                <a:sym typeface="Arial"/>
-              </a:rPr>
-              <a:t>c</a:t>
-            </a:r>
-            <a:endParaRPr dirty="0"/>
-          </a:p>
-        </p:txBody>
-      </p:sp>
-      <p:sp>
-        <p:nvSpPr>
-          <p:cNvPr id="92" name="Google Shape;92;p1"/>
-          <p:cNvSpPr txBox="1"/>
-          <p:nvPr/>
-        </p:nvSpPr>
-        <p:spPr>
-          <a:xfrm>
-            <a:off x="30996" y="2201"/>
-            <a:ext cx="815546" cy="369332"/>
-          </a:xfrm>
-          <a:prstGeom prst="rect">
-            <a:avLst/>
-          </a:prstGeom>
-          <a:noFill/>
-          <a:ln>
-            <a:noFill/>
-          </a:ln>
-        </p:spPr>
-        <p:txBody>
-          <a:bodyPr spcFirstLastPara="1" wrap="square" lIns="91425" tIns="45700" rIns="91425" bIns="45700" anchor="t" anchorCtr="0">
-            <a:spAutoFit/>
-          </a:bodyPr>
-          <a:lstStyle/>
-          <a:p>
-            <a:pPr marL="0" marR="0" lvl="0" indent="0" algn="l" rtl="0">
-              <a:spcBef>
-                <a:spcPts val="0"/>
-              </a:spcBef>
-              <a:spcAft>
-                <a:spcPts val="0"/>
-              </a:spcAft>
-              <a:buNone/>
-            </a:pPr>
-            <a:r>
-              <a:rPr lang="en-CA" sz="1800" dirty="0">
-                <a:solidFill>
-                  <a:schemeClr val="dk1"/>
-                </a:solidFill>
-                <a:latin typeface="Arial"/>
-                <a:ea typeface="Arial"/>
-                <a:cs typeface="Arial"/>
-                <a:sym typeface="Arial"/>
-              </a:rPr>
-              <a:t>a</a:t>
-            </a:r>
-            <a:endParaRPr dirty="0"/>
-          </a:p>
-        </p:txBody>
-      </p:sp>
-      <p:sp>
-        <p:nvSpPr>
-          <p:cNvPr id="103" name="Google Shape;103;p1"/>
-          <p:cNvSpPr txBox="1"/>
-          <p:nvPr/>
-        </p:nvSpPr>
-        <p:spPr>
-          <a:xfrm>
-            <a:off x="3881125" y="3306762"/>
-            <a:ext cx="815546" cy="369291"/>
-          </a:xfrm>
-          <a:prstGeom prst="rect">
-            <a:avLst/>
-          </a:prstGeom>
-          <a:noFill/>
-          <a:ln>
-            <a:noFill/>
-          </a:ln>
-        </p:spPr>
-        <p:txBody>
-          <a:bodyPr spcFirstLastPara="1" wrap="square" lIns="91425" tIns="45700" rIns="91425" bIns="45700" anchor="t" anchorCtr="0">
-            <a:spAutoFit/>
-          </a:bodyPr>
-          <a:lstStyle/>
-          <a:p>
-            <a:pPr marL="0" marR="0" lvl="0" indent="0" algn="l" rtl="0">
-              <a:spcBef>
-                <a:spcPts val="0"/>
-              </a:spcBef>
-              <a:spcAft>
-                <a:spcPts val="0"/>
-              </a:spcAft>
-              <a:buNone/>
-            </a:pPr>
-            <a:r>
-              <a:rPr lang="en-CA" sz="1800" dirty="0">
-                <a:solidFill>
-                  <a:schemeClr val="dk1"/>
-                </a:solidFill>
-              </a:rPr>
-              <a:t>e</a:t>
-            </a:r>
-            <a:endParaRPr dirty="0"/>
-          </a:p>
-        </p:txBody>
-      </p:sp>
-      <p:sp>
-        <p:nvSpPr>
-          <p:cNvPr id="18" name="Google Shape;103;p1">
-            <a:extLst>
-              <a:ext uri="{FF2B5EF4-FFF2-40B4-BE49-F238E27FC236}">
-                <a16:creationId xmlns:a16="http://schemas.microsoft.com/office/drawing/2014/main" id="{FB105252-947D-8561-6BE8-C96BDE2C57C4}"/>
-              </a:ext>
-            </a:extLst>
-          </p:cNvPr>
-          <p:cNvSpPr txBox="1"/>
-          <p:nvPr/>
-        </p:nvSpPr>
-        <p:spPr>
-          <a:xfrm>
-            <a:off x="12642246" y="-25400"/>
-            <a:ext cx="815546" cy="369332"/>
-          </a:xfrm>
-          <a:prstGeom prst="rect">
-            <a:avLst/>
-          </a:prstGeom>
-          <a:noFill/>
-          <a:ln>
-            <a:noFill/>
-          </a:ln>
-        </p:spPr>
-        <p:txBody>
-          <a:bodyPr spcFirstLastPara="1" wrap="square" lIns="91425" tIns="45700" rIns="91425" bIns="45700" anchor="t" anchorCtr="0">
-            <a:spAutoFit/>
-          </a:bodyPr>
-          <a:lstStyle/>
-          <a:p>
-            <a:pPr marL="0" marR="0" lvl="0" indent="0" algn="l" rtl="0">
-              <a:spcBef>
-                <a:spcPts val="0"/>
-              </a:spcBef>
-              <a:spcAft>
-                <a:spcPts val="0"/>
-              </a:spcAft>
-              <a:buNone/>
-            </a:pPr>
-            <a:r>
-              <a:rPr lang="en-CA" sz="1800" dirty="0">
+              <a:rPr lang="en-CA" sz="1200" b="1" dirty="0">
                 <a:solidFill>
                   <a:schemeClr val="dk1"/>
                 </a:solidFill>
@@ -12472,150 +12426,16 @@
               </a:rPr>
               <a:t>d</a:t>
             </a:r>
-            <a:endParaRPr dirty="0"/>
-          </a:p>
-        </p:txBody>
-      </p:sp>
-      <p:sp>
-        <p:nvSpPr>
-          <p:cNvPr id="29" name="Google Shape;103;p1">
-            <a:extLst>
-              <a:ext uri="{FF2B5EF4-FFF2-40B4-BE49-F238E27FC236}">
-                <a16:creationId xmlns:a16="http://schemas.microsoft.com/office/drawing/2014/main" id="{3D7BE95F-26AD-45B7-BD14-4380DC64BAE6}"/>
-              </a:ext>
-            </a:extLst>
-          </p:cNvPr>
-          <p:cNvSpPr txBox="1"/>
-          <p:nvPr/>
-        </p:nvSpPr>
-        <p:spPr>
-          <a:xfrm>
-            <a:off x="8334294" y="3325316"/>
-            <a:ext cx="815546" cy="369291"/>
-          </a:xfrm>
-          <a:prstGeom prst="rect">
-            <a:avLst/>
-          </a:prstGeom>
-          <a:noFill/>
-          <a:ln>
-            <a:noFill/>
-          </a:ln>
-        </p:spPr>
-        <p:txBody>
-          <a:bodyPr spcFirstLastPara="1" wrap="square" lIns="91425" tIns="45700" rIns="91425" bIns="45700" anchor="t" anchorCtr="0">
-            <a:spAutoFit/>
-          </a:bodyPr>
-          <a:lstStyle/>
-          <a:p>
-            <a:pPr marL="0" marR="0" lvl="0" indent="0" algn="l" rtl="0">
-              <a:spcBef>
-                <a:spcPts val="0"/>
-              </a:spcBef>
-              <a:spcAft>
-                <a:spcPts val="0"/>
-              </a:spcAft>
-              <a:buNone/>
-            </a:pPr>
-            <a:r>
-              <a:rPr lang="en-CA" sz="1800" dirty="0">
-                <a:solidFill>
-                  <a:schemeClr val="dk1"/>
-                </a:solidFill>
-              </a:rPr>
-              <a:t>f</a:t>
-            </a:r>
-            <a:endParaRPr dirty="0"/>
-          </a:p>
-        </p:txBody>
-      </p:sp>
-      <p:sp>
-        <p:nvSpPr>
-          <p:cNvPr id="30" name="Google Shape;103;p1">
-            <a:extLst>
-              <a:ext uri="{FF2B5EF4-FFF2-40B4-BE49-F238E27FC236}">
-                <a16:creationId xmlns:a16="http://schemas.microsoft.com/office/drawing/2014/main" id="{B92F98CF-3790-39D2-D70C-11CB21C5FDE8}"/>
-              </a:ext>
-            </a:extLst>
-          </p:cNvPr>
-          <p:cNvSpPr txBox="1"/>
-          <p:nvPr/>
-        </p:nvSpPr>
-        <p:spPr>
-          <a:xfrm>
-            <a:off x="12558167" y="3325316"/>
-            <a:ext cx="815546" cy="369291"/>
-          </a:xfrm>
-          <a:prstGeom prst="rect">
-            <a:avLst/>
-          </a:prstGeom>
-          <a:noFill/>
-          <a:ln>
-            <a:noFill/>
-          </a:ln>
-        </p:spPr>
-        <p:txBody>
-          <a:bodyPr spcFirstLastPara="1" wrap="square" lIns="91425" tIns="45700" rIns="91425" bIns="45700" anchor="t" anchorCtr="0">
-            <a:spAutoFit/>
-          </a:bodyPr>
-          <a:lstStyle/>
-          <a:p>
-            <a:pPr marL="0" marR="0" lvl="0" indent="0" algn="l" rtl="0">
-              <a:spcBef>
-                <a:spcPts val="0"/>
-              </a:spcBef>
-              <a:spcAft>
-                <a:spcPts val="0"/>
-              </a:spcAft>
-              <a:buNone/>
-            </a:pPr>
-            <a:r>
-              <a:rPr lang="en-CA" sz="1800" dirty="0">
-                <a:solidFill>
-                  <a:schemeClr val="dk1"/>
-                </a:solidFill>
-              </a:rPr>
-              <a:t>g</a:t>
-            </a:r>
-            <a:endParaRPr dirty="0"/>
+            <a:endParaRPr sz="1200" b="1" dirty="0"/>
           </a:p>
         </p:txBody>
       </p:sp>
       <p:pic>
         <p:nvPicPr>
-          <p:cNvPr id="11" name="Picture 10">
+          <p:cNvPr id="27" name="Picture 26">
             <a:extLst>
               <a:ext uri="{FF2B5EF4-FFF2-40B4-BE49-F238E27FC236}">
-                <a16:creationId xmlns:a16="http://schemas.microsoft.com/office/drawing/2014/main" id="{2E531359-6F0C-F387-C9DB-C9B5860BE8A6}"/>
-              </a:ext>
-            </a:extLst>
-          </p:cNvPr>
-          <p:cNvPicPr>
-            <a:picLocks noChangeAspect="1"/>
-          </p:cNvPicPr>
-          <p:nvPr/>
-        </p:nvPicPr>
-        <p:blipFill>
-          <a:blip r:embed="rId6"/>
-          <a:stretch>
-            <a:fillRect/>
-          </a:stretch>
-        </p:blipFill>
-        <p:spPr>
-          <a:xfrm>
-            <a:off x="8349424" y="54980"/>
-            <a:ext cx="3467100" cy="2743200"/>
-          </a:xfrm>
-          <a:prstGeom prst="rect">
-            <a:avLst/>
-          </a:prstGeom>
-        </p:spPr>
-      </p:pic>
-      <p:pic>
-        <p:nvPicPr>
-          <p:cNvPr id="13" name="Picture 12">
-            <a:extLst>
-              <a:ext uri="{FF2B5EF4-FFF2-40B4-BE49-F238E27FC236}">
-                <a16:creationId xmlns:a16="http://schemas.microsoft.com/office/drawing/2014/main" id="{B061F756-AA85-3BD8-9789-F60BB8A6D7D7}"/>
+                <a16:creationId xmlns:a16="http://schemas.microsoft.com/office/drawing/2014/main" id="{3A182DFD-3C09-F84C-6454-878DCA8F5E80}"/>
               </a:ext>
             </a:extLst>
           </p:cNvPr>
@@ -12632,74 +12452,103 @@
         </p:blipFill>
         <p:spPr>
           <a:xfrm>
-            <a:off x="13050019" y="29581"/>
-            <a:ext cx="3657600" cy="2743200"/>
+            <a:off x="4520747" y="1842523"/>
+            <a:ext cx="2243178" cy="1631402"/>
           </a:xfrm>
           <a:prstGeom prst="rect">
             <a:avLst/>
           </a:prstGeom>
         </p:spPr>
       </p:pic>
-      <p:pic>
-        <p:nvPicPr>
-          <p:cNvPr id="4" name="Picture 3">
+      <p:sp>
+        <p:nvSpPr>
+          <p:cNvPr id="2" name="TextBox 1">
             <a:extLst>
               <a:ext uri="{FF2B5EF4-FFF2-40B4-BE49-F238E27FC236}">
-                <a16:creationId xmlns:a16="http://schemas.microsoft.com/office/drawing/2014/main" id="{1C363E46-C0C9-F199-34E6-750EE2A578E4}"/>
+                <a16:creationId xmlns:a16="http://schemas.microsoft.com/office/drawing/2014/main" id="{EDE53C61-A5CB-8D45-98D9-473226B45D20}"/>
               </a:ext>
             </a:extLst>
           </p:cNvPr>
-          <p:cNvPicPr>
-            <a:picLocks noChangeAspect="1"/>
-          </p:cNvPicPr>
+          <p:cNvSpPr txBox="1"/>
           <p:nvPr/>
-        </p:nvPicPr>
-        <p:blipFill>
-          <a:blip r:embed="rId8"/>
-          <a:stretch>
-            <a:fillRect/>
-          </a:stretch>
-        </p:blipFill>
+        </p:nvSpPr>
         <p:spPr>
           <a:xfrm>
-            <a:off x="4216160" y="3573919"/>
-            <a:ext cx="3657600" cy="2921000"/>
+            <a:off x="30996" y="4057650"/>
+            <a:ext cx="6827004" cy="2354491"/>
           </a:xfrm>
           <a:prstGeom prst="rect">
             <a:avLst/>
           </a:prstGeom>
+          <a:noFill/>
         </p:spPr>
-      </p:pic>
-      <p:pic>
-        <p:nvPicPr>
-          <p:cNvPr id="12" name="Picture 11">
-            <a:extLst>
-              <a:ext uri="{FF2B5EF4-FFF2-40B4-BE49-F238E27FC236}">
-                <a16:creationId xmlns:a16="http://schemas.microsoft.com/office/drawing/2014/main" id="{D8412016-D8FB-70CD-9725-8C6272ED5B6B}"/>
-              </a:ext>
-            </a:extLst>
-          </p:cNvPr>
-          <p:cNvPicPr>
-            <a:picLocks noChangeAspect="1"/>
-          </p:cNvPicPr>
-          <p:nvPr/>
-        </p:nvPicPr>
-        <p:blipFill>
-          <a:blip r:embed="rId9"/>
-          <a:stretch>
-            <a:fillRect/>
-          </a:stretch>
-        </p:blipFill>
-        <p:spPr>
-          <a:xfrm>
-            <a:off x="8583301" y="3573919"/>
-            <a:ext cx="3922323" cy="3137859"/>
-          </a:xfrm>
-          <a:prstGeom prst="rect">
-            <a:avLst/>
-          </a:prstGeom>
-        </p:spPr>
-      </p:pic>
+        <p:txBody>
+          <a:bodyPr wrap="square" rtlCol="0">
+            <a:spAutoFit/>
+          </a:bodyPr>
+          <a:lstStyle/>
+          <a:p>
+            <a:r>
+              <a:rPr lang="en-CA" sz="1050" b="1" dirty="0"/>
+              <a:t>Figure 4</a:t>
+            </a:r>
+            <a:r>
+              <a:rPr lang="en-CA" sz="1050" dirty="0"/>
+              <a:t>. Cross-platform validation of </a:t>
+            </a:r>
+            <a:r>
+              <a:rPr lang="en-CA" sz="1050" dirty="0" err="1"/>
+              <a:t>NeST</a:t>
+            </a:r>
+            <a:r>
+              <a:rPr lang="en-CA" sz="1050" dirty="0"/>
+              <a:t>-VNN on independent PDX cohorts.</a:t>
+            </a:r>
+          </a:p>
+          <a:p>
+            <a:r>
+              <a:rPr lang="en-CA" sz="1050" dirty="0"/>
+              <a:t>(a) Case study three workflow: drug-response, mutation, and copy-number data from the McGill (cisplatin, n = 29) and UHN (carboplatin; complete cohort n = 68, replicate-supported "strict" cohort n = 36) breast PDX cohorts are used as external input to a cell-line-pretrained </a:t>
+            </a:r>
+            <a:r>
+              <a:rPr lang="en-CA" sz="1050" dirty="0" err="1"/>
+              <a:t>NeST</a:t>
+            </a:r>
+            <a:r>
+              <a:rPr lang="en-CA" sz="1050" dirty="0"/>
+              <a:t>-VNN ensemble, validated against a growth-curve response label. (b) Number of models with exactly one versus two or more treatment-arm replicate mice, for each cohort/cohort definition. (c) Fraction of the 718-gene </a:t>
+            </a:r>
+            <a:r>
+              <a:rPr lang="en-CA" sz="1050" dirty="0" err="1"/>
+              <a:t>NeST</a:t>
+            </a:r>
+            <a:r>
+              <a:rPr lang="en-CA" sz="1050" dirty="0"/>
+              <a:t>-VNN input panel with recorded mutation and copy-number (CNV) calls in each cohort's raw molecular profiles. (d) Bootstrap 95% confidence intervals for </a:t>
+            </a:r>
+            <a:r>
+              <a:rPr lang="en-CA" sz="1050" dirty="0" err="1"/>
+              <a:t>NeST</a:t>
+            </a:r>
+            <a:r>
+              <a:rPr lang="en-CA" sz="1050" dirty="0"/>
+              <a:t>-VNN's AUROC under the capped (28 day window, primary) and uncapped (full observed duration) response-label definitions, for each of the three cohort definitions; dashed line, chance performance. (e) </a:t>
+            </a:r>
+            <a:r>
+              <a:rPr lang="en-CA" sz="1050" dirty="0" err="1"/>
+              <a:t>NeST</a:t>
+            </a:r>
+            <a:r>
+              <a:rPr lang="en-CA" sz="1050" dirty="0"/>
+              <a:t>-VNN performance across alternative response definitions. AUROC was evaluated across cohort-specific treatment-arm slope percentile cutoffs, with models below each cutoff classified as sensitive. Lines represent the McGill cisplatin, UHN carboplatin complete and UHN carboplatin strict cohorts, shaded regions indicate bootstrap 95% confidence intervals, and the dotted line indicates chance performance (AUROC = 0.5).</a:t>
+            </a:r>
+            <a:br>
+              <a:rPr lang="en-CA" sz="1050" dirty="0"/>
+            </a:br>
+            <a:endParaRPr lang="en-US" sz="1050" dirty="0"/>
+          </a:p>
+        </p:txBody>
+      </p:sp>
     </p:spTree>
   </p:cSld>
   <p:clrMapOvr>
